--- a/포트폴리오/진성준/진성준_기획_포트폴리오.pptx
+++ b/포트폴리오/진성준/진성준_기획_포트폴리오.pptx
@@ -1,32 +1,32 @@
 
 <file path=ppt/presentation.xml><?xml version="1.0" encoding="utf-8"?>
-<p:presentation xmlns:r="http://schemas.openxmlformats.org/officeDocument/2006/relationships" xmlns:c="http://schemas.openxmlformats.org/drawingml/2006/chart" xmlns:a="http://schemas.openxmlformats.org/drawingml/2006/main" xmlns:dgm="http://schemas.openxmlformats.org/drawingml/2006/diagram" xmlns:dsp="http://schemas.microsoft.com/office/drawing/2008/diagram" xmlns:p="http://schemas.openxmlformats.org/presentationml/2006/main" autoCompressPictures="0">
+<p:presentation xmlns:a="http://schemas.openxmlformats.org/drawingml/2006/main" xmlns:r="http://schemas.openxmlformats.org/officeDocument/2006/relationships" xmlns:p="http://schemas.openxmlformats.org/presentationml/2006/main" autoCompressPictures="0">
   <p:sldMasterIdLst>
     <p:sldMasterId id="2147483654" r:id="rId1"/>
   </p:sldMasterIdLst>
   <p:notesMasterIdLst>
-    <p:notesMasterId r:id="rId2"/>
+    <p:notesMasterId r:id="rId18"/>
   </p:notesMasterIdLst>
   <p:sldIdLst>
-    <p:sldId id="256" r:id="rId3"/>
-    <p:sldId id="257" r:id="rId4"/>
-    <p:sldId id="258" r:id="rId5"/>
-    <p:sldId id="259" r:id="rId6"/>
-    <p:sldId id="260" r:id="rId7"/>
-    <p:sldId id="261" r:id="rId8"/>
-    <p:sldId id="262" r:id="rId9"/>
-    <p:sldId id="263" r:id="rId10"/>
-    <p:sldId id="264" r:id="rId11"/>
-    <p:sldId id="265" r:id="rId12"/>
-    <p:sldId id="266" r:id="rId13"/>
-    <p:sldId id="267" r:id="rId14"/>
-    <p:sldId id="268" r:id="rId15"/>
-    <p:sldId id="269" r:id="rId16"/>
-    <p:sldId id="270" r:id="rId17"/>
-    <p:sldId id="271" r:id="rId18"/>
+    <p:sldId id="256" r:id="rId2"/>
+    <p:sldId id="257" r:id="rId3"/>
+    <p:sldId id="258" r:id="rId4"/>
+    <p:sldId id="259" r:id="rId5"/>
+    <p:sldId id="260" r:id="rId6"/>
+    <p:sldId id="261" r:id="rId7"/>
+    <p:sldId id="262" r:id="rId8"/>
+    <p:sldId id="263" r:id="rId9"/>
+    <p:sldId id="264" r:id="rId10"/>
+    <p:sldId id="265" r:id="rId11"/>
+    <p:sldId id="266" r:id="rId12"/>
+    <p:sldId id="267" r:id="rId13"/>
+    <p:sldId id="268" r:id="rId14"/>
+    <p:sldId id="269" r:id="rId15"/>
+    <p:sldId id="270" r:id="rId16"/>
+    <p:sldId id="271" r:id="rId17"/>
   </p:sldIdLst>
-  <p:sldSz cx="12191695" cy="6858000"/>
-  <p:notesSz cx="6858000" cy="12191695"/>
+  <p:sldSz cx="12192000" cy="6858000"/>
+  <p:notesSz cx="6858000" cy="12192000"/>
   <p:defaultTextStyle>
     <a:lvl1pPr marL="0" algn="l" defTabSz="914400" rtl="0" eaLnBrk="1" latinLnBrk="0" hangingPunct="1">
       <a:defRPr sz="1800" kern="1200">
@@ -119,11 +119,16 @@
       </a:defRPr>
     </a:lvl9pPr>
   </p:defaultTextStyle>
+  <p:extLst>
+    <p:ext uri="{EFAFB233-063F-42B5-8137-9DF3F51BA10A}">
+      <p15:sldGuideLst xmlns:p15="http://schemas.microsoft.com/office/powerpoint/2012/main"/>
+    </p:ext>
+  </p:extLst>
 </p:presentation>
 </file>
 
 <file path=ppt/notesMasters/notesMaster1.xml><?xml version="1.0" encoding="utf-8"?>
-<p:notesMaster xmlns:r="http://schemas.openxmlformats.org/officeDocument/2006/relationships" xmlns:c="http://schemas.openxmlformats.org/drawingml/2006/chart" xmlns:a="http://schemas.openxmlformats.org/drawingml/2006/main" xmlns:dgm="http://schemas.openxmlformats.org/drawingml/2006/diagram" xmlns:dsp="http://schemas.microsoft.com/office/drawing/2008/diagram" xmlns:p="http://schemas.openxmlformats.org/presentationml/2006/main">
+<p:notesMaster xmlns:a="http://schemas.openxmlformats.org/drawingml/2006/main" xmlns:r="http://schemas.openxmlformats.org/officeDocument/2006/relationships" xmlns:p="http://schemas.openxmlformats.org/presentationml/2006/main">
   <p:cSld>
     <p:bg>
       <p:bgRef idx="1001">
@@ -151,7 +156,7 @@
             <a:spLocks noGrp="1"/>
           </p:cNvSpPr>
           <p:nvPr>
-            <p:ph type="hdr" sz="quarter" idx="0"/>
+            <p:ph type="hdr" sz="quarter"/>
           </p:nvPr>
         </p:nvSpPr>
         <p:spPr>
@@ -174,10 +179,6 @@
             <a:pPr lvl="0">
               <a:defRPr/>
             </a:pPr>
-            <a:r>
-              <a:rPr lang="ko-KR" altLang="en-US"/>
-              <a:t/>
-            </a:r>
             <a:endParaRPr lang="ko-KR" altLang="en-US"/>
           </a:p>
         </p:txBody>
@@ -289,7 +290,6 @@
               <a:rPr lang="en-US"/>
               <a:t>Click to edit Master text styles</a:t>
             </a:r>
-            <a:endParaRPr lang="en-US"/>
           </a:p>
           <a:p>
             <a:pPr lvl="1">
@@ -299,7 +299,6 @@
               <a:rPr lang="en-US"/>
               <a:t>Second level</a:t>
             </a:r>
-            <a:endParaRPr lang="en-US"/>
           </a:p>
           <a:p>
             <a:pPr lvl="2">
@@ -309,7 +308,6 @@
               <a:rPr lang="en-US"/>
               <a:t>Third level</a:t>
             </a:r>
-            <a:endParaRPr lang="en-US"/>
           </a:p>
           <a:p>
             <a:pPr lvl="3">
@@ -319,7 +317,6 @@
               <a:rPr lang="en-US"/>
               <a:t>Fourth level</a:t>
             </a:r>
-            <a:endParaRPr lang="en-US"/>
           </a:p>
           <a:p>
             <a:pPr lvl="4">
@@ -329,7 +326,6 @@
               <a:rPr lang="en-US"/>
               <a:t>Fifth level</a:t>
             </a:r>
-            <a:endParaRPr lang="en-US"/>
           </a:p>
         </p:txBody>
       </p:sp>
@@ -363,10 +359,6 @@
             <a:pPr lvl="0">
               <a:defRPr/>
             </a:pPr>
-            <a:r>
-              <a:rPr lang="ko-KR" altLang="en-US"/>
-              <a:t/>
-            </a:r>
             <a:endParaRPr lang="ko-KR" altLang="en-US"/>
           </a:p>
         </p:txBody>
@@ -512,7 +504,7 @@
 </file>
 
 <file path=ppt/notesSlides/notesSlide1.xml><?xml version="1.0" encoding="utf-8"?>
-<p:notes xmlns:r="http://schemas.openxmlformats.org/officeDocument/2006/relationships" xmlns:c="http://schemas.openxmlformats.org/drawingml/2006/chart" xmlns:a="http://schemas.openxmlformats.org/drawingml/2006/main" xmlns:dgm="http://schemas.openxmlformats.org/drawingml/2006/diagram" xmlns:dsp="http://schemas.microsoft.com/office/drawing/2008/diagram" xmlns:p="http://schemas.openxmlformats.org/presentationml/2006/main">
+<p:notes xmlns:a="http://schemas.openxmlformats.org/drawingml/2006/main" xmlns:r="http://schemas.openxmlformats.org/officeDocument/2006/relationships" xmlns:p="http://schemas.openxmlformats.org/presentationml/2006/main">
   <p:cSld>
     <p:spTree>
       <p:nvGrpSpPr>
@@ -535,7 +527,7 @@
             <a:spLocks noGrp="1" noRot="1" noChangeAspect="1" noTextEdit="1"/>
           </p:cNvSpPr>
           <p:nvPr>
-            <p:ph type="sldImg" idx="0"/>
+            <p:ph type="sldImg"/>
           </p:nvPr>
         </p:nvSpPr>
         <p:spPr/>
@@ -558,10 +550,6 @@
             <a:pPr lvl="0">
               <a:defRPr/>
             </a:pPr>
-            <a:r>
-              <a:rPr lang="ko-KR" altLang="en-US"/>
-              <a:t/>
-            </a:r>
             <a:endParaRPr lang="ko-KR" altLang="en-US"/>
           </a:p>
         </p:txBody>
@@ -604,7 +592,7 @@
 </file>
 
 <file path=ppt/notesSlides/notesSlide10.xml><?xml version="1.0" encoding="utf-8"?>
-<p:notes xmlns:r="http://schemas.openxmlformats.org/officeDocument/2006/relationships" xmlns:c="http://schemas.openxmlformats.org/drawingml/2006/chart" xmlns:a="http://schemas.openxmlformats.org/drawingml/2006/main" xmlns:dgm="http://schemas.openxmlformats.org/drawingml/2006/diagram" xmlns:dsp="http://schemas.microsoft.com/office/drawing/2008/diagram" xmlns:p="http://schemas.openxmlformats.org/presentationml/2006/main">
+<p:notes xmlns:a="http://schemas.openxmlformats.org/drawingml/2006/main" xmlns:r="http://schemas.openxmlformats.org/officeDocument/2006/relationships" xmlns:p="http://schemas.openxmlformats.org/presentationml/2006/main">
   <p:cSld>
     <p:spTree>
       <p:nvGrpSpPr>
@@ -627,7 +615,7 @@
             <a:spLocks noGrp="1" noRot="1" noChangeAspect="1" noTextEdit="1"/>
           </p:cNvSpPr>
           <p:nvPr>
-            <p:ph type="sldImg" idx="0"/>
+            <p:ph type="sldImg"/>
           </p:nvPr>
         </p:nvSpPr>
         <p:spPr/>
@@ -650,10 +638,6 @@
             <a:pPr lvl="0">
               <a:defRPr/>
             </a:pPr>
-            <a:r>
-              <a:rPr lang="ko-KR" altLang="en-US"/>
-              <a:t/>
-            </a:r>
             <a:endParaRPr lang="ko-KR" altLang="en-US"/>
           </a:p>
         </p:txBody>
@@ -696,7 +680,7 @@
 </file>
 
 <file path=ppt/notesSlides/notesSlide11.xml><?xml version="1.0" encoding="utf-8"?>
-<p:notes xmlns:r="http://schemas.openxmlformats.org/officeDocument/2006/relationships" xmlns:c="http://schemas.openxmlformats.org/drawingml/2006/chart" xmlns:a="http://schemas.openxmlformats.org/drawingml/2006/main" xmlns:dgm="http://schemas.openxmlformats.org/drawingml/2006/diagram" xmlns:dsp="http://schemas.microsoft.com/office/drawing/2008/diagram" xmlns:p="http://schemas.openxmlformats.org/presentationml/2006/main">
+<p:notes xmlns:a="http://schemas.openxmlformats.org/drawingml/2006/main" xmlns:r="http://schemas.openxmlformats.org/officeDocument/2006/relationships" xmlns:p="http://schemas.openxmlformats.org/presentationml/2006/main">
   <p:cSld>
     <p:spTree>
       <p:nvGrpSpPr>
@@ -719,7 +703,7 @@
             <a:spLocks noGrp="1" noRot="1" noChangeAspect="1" noTextEdit="1"/>
           </p:cNvSpPr>
           <p:nvPr>
-            <p:ph type="sldImg" idx="0"/>
+            <p:ph type="sldImg"/>
           </p:nvPr>
         </p:nvSpPr>
         <p:spPr/>
@@ -742,10 +726,6 @@
             <a:pPr lvl="0">
               <a:defRPr/>
             </a:pPr>
-            <a:r>
-              <a:rPr lang="ko-KR" altLang="en-US"/>
-              <a:t/>
-            </a:r>
             <a:endParaRPr lang="ko-KR" altLang="en-US"/>
           </a:p>
         </p:txBody>
@@ -788,7 +768,7 @@
 </file>
 
 <file path=ppt/notesSlides/notesSlide12.xml><?xml version="1.0" encoding="utf-8"?>
-<p:notes xmlns:r="http://schemas.openxmlformats.org/officeDocument/2006/relationships" xmlns:c="http://schemas.openxmlformats.org/drawingml/2006/chart" xmlns:a="http://schemas.openxmlformats.org/drawingml/2006/main" xmlns:dgm="http://schemas.openxmlformats.org/drawingml/2006/diagram" xmlns:dsp="http://schemas.microsoft.com/office/drawing/2008/diagram" xmlns:p="http://schemas.openxmlformats.org/presentationml/2006/main">
+<p:notes xmlns:a="http://schemas.openxmlformats.org/drawingml/2006/main" xmlns:r="http://schemas.openxmlformats.org/officeDocument/2006/relationships" xmlns:p="http://schemas.openxmlformats.org/presentationml/2006/main">
   <p:cSld>
     <p:spTree>
       <p:nvGrpSpPr>
@@ -811,7 +791,7 @@
             <a:spLocks noGrp="1" noRot="1" noChangeAspect="1" noTextEdit="1"/>
           </p:cNvSpPr>
           <p:nvPr>
-            <p:ph type="sldImg" idx="0"/>
+            <p:ph type="sldImg"/>
           </p:nvPr>
         </p:nvSpPr>
         <p:spPr/>
@@ -834,10 +814,6 @@
             <a:pPr lvl="0">
               <a:defRPr/>
             </a:pPr>
-            <a:r>
-              <a:rPr lang="ko-KR" altLang="en-US"/>
-              <a:t/>
-            </a:r>
             <a:endParaRPr lang="ko-KR" altLang="en-US"/>
           </a:p>
         </p:txBody>
@@ -880,7 +856,7 @@
 </file>
 
 <file path=ppt/notesSlides/notesSlide13.xml><?xml version="1.0" encoding="utf-8"?>
-<p:notes xmlns:r="http://schemas.openxmlformats.org/officeDocument/2006/relationships" xmlns:c="http://schemas.openxmlformats.org/drawingml/2006/chart" xmlns:a="http://schemas.openxmlformats.org/drawingml/2006/main" xmlns:dgm="http://schemas.openxmlformats.org/drawingml/2006/diagram" xmlns:dsp="http://schemas.microsoft.com/office/drawing/2008/diagram" xmlns:p="http://schemas.openxmlformats.org/presentationml/2006/main">
+<p:notes xmlns:a="http://schemas.openxmlformats.org/drawingml/2006/main" xmlns:r="http://schemas.openxmlformats.org/officeDocument/2006/relationships" xmlns:p="http://schemas.openxmlformats.org/presentationml/2006/main">
   <p:cSld>
     <p:spTree>
       <p:nvGrpSpPr>
@@ -903,7 +879,7 @@
             <a:spLocks noGrp="1" noRot="1" noChangeAspect="1" noTextEdit="1"/>
           </p:cNvSpPr>
           <p:nvPr>
-            <p:ph type="sldImg" idx="0"/>
+            <p:ph type="sldImg"/>
           </p:nvPr>
         </p:nvSpPr>
         <p:spPr/>
@@ -926,10 +902,6 @@
             <a:pPr lvl="0">
               <a:defRPr/>
             </a:pPr>
-            <a:r>
-              <a:rPr lang="ko-KR" altLang="en-US"/>
-              <a:t/>
-            </a:r>
             <a:endParaRPr lang="ko-KR" altLang="en-US"/>
           </a:p>
         </p:txBody>
@@ -972,7 +944,7 @@
 </file>
 
 <file path=ppt/notesSlides/notesSlide14.xml><?xml version="1.0" encoding="utf-8"?>
-<p:notes xmlns:r="http://schemas.openxmlformats.org/officeDocument/2006/relationships" xmlns:c="http://schemas.openxmlformats.org/drawingml/2006/chart" xmlns:a="http://schemas.openxmlformats.org/drawingml/2006/main" xmlns:dgm="http://schemas.openxmlformats.org/drawingml/2006/diagram" xmlns:dsp="http://schemas.microsoft.com/office/drawing/2008/diagram" xmlns:p="http://schemas.openxmlformats.org/presentationml/2006/main">
+<p:notes xmlns:a="http://schemas.openxmlformats.org/drawingml/2006/main" xmlns:r="http://schemas.openxmlformats.org/officeDocument/2006/relationships" xmlns:p="http://schemas.openxmlformats.org/presentationml/2006/main">
   <p:cSld>
     <p:spTree>
       <p:nvGrpSpPr>
@@ -995,7 +967,7 @@
             <a:spLocks noGrp="1" noRot="1" noChangeAspect="1" noTextEdit="1"/>
           </p:cNvSpPr>
           <p:nvPr>
-            <p:ph type="sldImg" idx="0"/>
+            <p:ph type="sldImg"/>
           </p:nvPr>
         </p:nvSpPr>
         <p:spPr/>
@@ -1018,10 +990,6 @@
             <a:pPr lvl="0">
               <a:defRPr/>
             </a:pPr>
-            <a:r>
-              <a:rPr lang="ko-KR" altLang="en-US"/>
-              <a:t/>
-            </a:r>
             <a:endParaRPr lang="ko-KR" altLang="en-US"/>
           </a:p>
         </p:txBody>
@@ -1064,7 +1032,7 @@
 </file>
 
 <file path=ppt/notesSlides/notesSlide15.xml><?xml version="1.0" encoding="utf-8"?>
-<p:notes xmlns:r="http://schemas.openxmlformats.org/officeDocument/2006/relationships" xmlns:c="http://schemas.openxmlformats.org/drawingml/2006/chart" xmlns:a="http://schemas.openxmlformats.org/drawingml/2006/main" xmlns:dgm="http://schemas.openxmlformats.org/drawingml/2006/diagram" xmlns:dsp="http://schemas.microsoft.com/office/drawing/2008/diagram" xmlns:p="http://schemas.openxmlformats.org/presentationml/2006/main">
+<p:notes xmlns:a="http://schemas.openxmlformats.org/drawingml/2006/main" xmlns:r="http://schemas.openxmlformats.org/officeDocument/2006/relationships" xmlns:p="http://schemas.openxmlformats.org/presentationml/2006/main">
   <p:cSld>
     <p:spTree>
       <p:nvGrpSpPr>
@@ -1087,7 +1055,7 @@
             <a:spLocks noGrp="1" noRot="1" noChangeAspect="1" noTextEdit="1"/>
           </p:cNvSpPr>
           <p:nvPr>
-            <p:ph type="sldImg" idx="0"/>
+            <p:ph type="sldImg"/>
           </p:nvPr>
         </p:nvSpPr>
         <p:spPr/>
@@ -1110,10 +1078,6 @@
             <a:pPr lvl="0">
               <a:defRPr/>
             </a:pPr>
-            <a:r>
-              <a:rPr lang="ko-KR" altLang="en-US"/>
-              <a:t/>
-            </a:r>
             <a:endParaRPr lang="ko-KR" altLang="en-US"/>
           </a:p>
         </p:txBody>
@@ -1156,7 +1120,7 @@
 </file>
 
 <file path=ppt/notesSlides/notesSlide16.xml><?xml version="1.0" encoding="utf-8"?>
-<p:notes xmlns:r="http://schemas.openxmlformats.org/officeDocument/2006/relationships" xmlns:c="http://schemas.openxmlformats.org/drawingml/2006/chart" xmlns:a="http://schemas.openxmlformats.org/drawingml/2006/main" xmlns:dgm="http://schemas.openxmlformats.org/drawingml/2006/diagram" xmlns:dsp="http://schemas.microsoft.com/office/drawing/2008/diagram" xmlns:p="http://schemas.openxmlformats.org/presentationml/2006/main">
+<p:notes xmlns:a="http://schemas.openxmlformats.org/drawingml/2006/main" xmlns:r="http://schemas.openxmlformats.org/officeDocument/2006/relationships" xmlns:p="http://schemas.openxmlformats.org/presentationml/2006/main">
   <p:cSld>
     <p:spTree>
       <p:nvGrpSpPr>
@@ -1179,7 +1143,7 @@
             <a:spLocks noGrp="1" noRot="1" noChangeAspect="1" noTextEdit="1"/>
           </p:cNvSpPr>
           <p:nvPr>
-            <p:ph type="sldImg" idx="0"/>
+            <p:ph type="sldImg"/>
           </p:nvPr>
         </p:nvSpPr>
         <p:spPr/>
@@ -1202,10 +1166,6 @@
             <a:pPr lvl="0">
               <a:defRPr/>
             </a:pPr>
-            <a:r>
-              <a:rPr lang="ko-KR" altLang="en-US"/>
-              <a:t/>
-            </a:r>
             <a:endParaRPr lang="ko-KR" altLang="en-US"/>
           </a:p>
         </p:txBody>
@@ -1248,7 +1208,7 @@
 </file>
 
 <file path=ppt/notesSlides/notesSlide2.xml><?xml version="1.0" encoding="utf-8"?>
-<p:notes xmlns:r="http://schemas.openxmlformats.org/officeDocument/2006/relationships" xmlns:c="http://schemas.openxmlformats.org/drawingml/2006/chart" xmlns:a="http://schemas.openxmlformats.org/drawingml/2006/main" xmlns:dgm="http://schemas.openxmlformats.org/drawingml/2006/diagram" xmlns:dsp="http://schemas.microsoft.com/office/drawing/2008/diagram" xmlns:p="http://schemas.openxmlformats.org/presentationml/2006/main">
+<p:notes xmlns:a="http://schemas.openxmlformats.org/drawingml/2006/main" xmlns:r="http://schemas.openxmlformats.org/officeDocument/2006/relationships" xmlns:p="http://schemas.openxmlformats.org/presentationml/2006/main">
   <p:cSld>
     <p:spTree>
       <p:nvGrpSpPr>
@@ -1271,7 +1231,7 @@
             <a:spLocks noGrp="1" noRot="1" noChangeAspect="1" noTextEdit="1"/>
           </p:cNvSpPr>
           <p:nvPr>
-            <p:ph type="sldImg" idx="0"/>
+            <p:ph type="sldImg"/>
           </p:nvPr>
         </p:nvSpPr>
         <p:spPr/>
@@ -1294,10 +1254,6 @@
             <a:pPr lvl="0">
               <a:defRPr/>
             </a:pPr>
-            <a:r>
-              <a:rPr lang="ko-KR" altLang="en-US"/>
-              <a:t/>
-            </a:r>
             <a:endParaRPr lang="ko-KR" altLang="en-US"/>
           </a:p>
         </p:txBody>
@@ -1340,7 +1296,7 @@
 </file>
 
 <file path=ppt/notesSlides/notesSlide3.xml><?xml version="1.0" encoding="utf-8"?>
-<p:notes xmlns:r="http://schemas.openxmlformats.org/officeDocument/2006/relationships" xmlns:c="http://schemas.openxmlformats.org/drawingml/2006/chart" xmlns:a="http://schemas.openxmlformats.org/drawingml/2006/main" xmlns:dgm="http://schemas.openxmlformats.org/drawingml/2006/diagram" xmlns:dsp="http://schemas.microsoft.com/office/drawing/2008/diagram" xmlns:p="http://schemas.openxmlformats.org/presentationml/2006/main">
+<p:notes xmlns:a="http://schemas.openxmlformats.org/drawingml/2006/main" xmlns:r="http://schemas.openxmlformats.org/officeDocument/2006/relationships" xmlns:p="http://schemas.openxmlformats.org/presentationml/2006/main">
   <p:cSld>
     <p:spTree>
       <p:nvGrpSpPr>
@@ -1363,7 +1319,7 @@
             <a:spLocks noGrp="1" noRot="1" noChangeAspect="1" noTextEdit="1"/>
           </p:cNvSpPr>
           <p:nvPr>
-            <p:ph type="sldImg" idx="0"/>
+            <p:ph type="sldImg"/>
           </p:nvPr>
         </p:nvSpPr>
         <p:spPr/>
@@ -1386,10 +1342,6 @@
             <a:pPr lvl="0">
               <a:defRPr/>
             </a:pPr>
-            <a:r>
-              <a:rPr lang="ko-KR" altLang="en-US"/>
-              <a:t/>
-            </a:r>
             <a:endParaRPr lang="ko-KR" altLang="en-US"/>
           </a:p>
         </p:txBody>
@@ -1432,7 +1384,7 @@
 </file>
 
 <file path=ppt/notesSlides/notesSlide4.xml><?xml version="1.0" encoding="utf-8"?>
-<p:notes xmlns:r="http://schemas.openxmlformats.org/officeDocument/2006/relationships" xmlns:c="http://schemas.openxmlformats.org/drawingml/2006/chart" xmlns:a="http://schemas.openxmlformats.org/drawingml/2006/main" xmlns:dgm="http://schemas.openxmlformats.org/drawingml/2006/diagram" xmlns:dsp="http://schemas.microsoft.com/office/drawing/2008/diagram" xmlns:p="http://schemas.openxmlformats.org/presentationml/2006/main">
+<p:notes xmlns:a="http://schemas.openxmlformats.org/drawingml/2006/main" xmlns:r="http://schemas.openxmlformats.org/officeDocument/2006/relationships" xmlns:p="http://schemas.openxmlformats.org/presentationml/2006/main">
   <p:cSld>
     <p:spTree>
       <p:nvGrpSpPr>
@@ -1455,7 +1407,7 @@
             <a:spLocks noGrp="1" noRot="1" noChangeAspect="1" noTextEdit="1"/>
           </p:cNvSpPr>
           <p:nvPr>
-            <p:ph type="sldImg" idx="0"/>
+            <p:ph type="sldImg"/>
           </p:nvPr>
         </p:nvSpPr>
         <p:spPr/>
@@ -1478,10 +1430,6 @@
             <a:pPr lvl="0">
               <a:defRPr/>
             </a:pPr>
-            <a:r>
-              <a:rPr lang="ko-KR" altLang="en-US"/>
-              <a:t/>
-            </a:r>
             <a:endParaRPr lang="ko-KR" altLang="en-US"/>
           </a:p>
         </p:txBody>
@@ -1524,7 +1472,7 @@
 </file>
 
 <file path=ppt/notesSlides/notesSlide5.xml><?xml version="1.0" encoding="utf-8"?>
-<p:notes xmlns:r="http://schemas.openxmlformats.org/officeDocument/2006/relationships" xmlns:c="http://schemas.openxmlformats.org/drawingml/2006/chart" xmlns:a="http://schemas.openxmlformats.org/drawingml/2006/main" xmlns:dgm="http://schemas.openxmlformats.org/drawingml/2006/diagram" xmlns:dsp="http://schemas.microsoft.com/office/drawing/2008/diagram" xmlns:p="http://schemas.openxmlformats.org/presentationml/2006/main">
+<p:notes xmlns:a="http://schemas.openxmlformats.org/drawingml/2006/main" xmlns:r="http://schemas.openxmlformats.org/officeDocument/2006/relationships" xmlns:p="http://schemas.openxmlformats.org/presentationml/2006/main">
   <p:cSld>
     <p:spTree>
       <p:nvGrpSpPr>
@@ -1547,7 +1495,7 @@
             <a:spLocks noGrp="1" noRot="1" noChangeAspect="1" noTextEdit="1"/>
           </p:cNvSpPr>
           <p:nvPr>
-            <p:ph type="sldImg" idx="0"/>
+            <p:ph type="sldImg"/>
           </p:nvPr>
         </p:nvSpPr>
         <p:spPr/>
@@ -1570,10 +1518,6 @@
             <a:pPr lvl="0">
               <a:defRPr/>
             </a:pPr>
-            <a:r>
-              <a:rPr lang="ko-KR" altLang="en-US"/>
-              <a:t/>
-            </a:r>
             <a:endParaRPr lang="ko-KR" altLang="en-US"/>
           </a:p>
         </p:txBody>
@@ -1616,7 +1560,7 @@
 </file>
 
 <file path=ppt/notesSlides/notesSlide6.xml><?xml version="1.0" encoding="utf-8"?>
-<p:notes xmlns:r="http://schemas.openxmlformats.org/officeDocument/2006/relationships" xmlns:c="http://schemas.openxmlformats.org/drawingml/2006/chart" xmlns:a="http://schemas.openxmlformats.org/drawingml/2006/main" xmlns:dgm="http://schemas.openxmlformats.org/drawingml/2006/diagram" xmlns:dsp="http://schemas.microsoft.com/office/drawing/2008/diagram" xmlns:p="http://schemas.openxmlformats.org/presentationml/2006/main">
+<p:notes xmlns:a="http://schemas.openxmlformats.org/drawingml/2006/main" xmlns:r="http://schemas.openxmlformats.org/officeDocument/2006/relationships" xmlns:p="http://schemas.openxmlformats.org/presentationml/2006/main">
   <p:cSld>
     <p:spTree>
       <p:nvGrpSpPr>
@@ -1639,7 +1583,7 @@
             <a:spLocks noGrp="1" noRot="1" noChangeAspect="1" noTextEdit="1"/>
           </p:cNvSpPr>
           <p:nvPr>
-            <p:ph type="sldImg" idx="0"/>
+            <p:ph type="sldImg"/>
           </p:nvPr>
         </p:nvSpPr>
         <p:spPr/>
@@ -1662,10 +1606,6 @@
             <a:pPr lvl="0">
               <a:defRPr/>
             </a:pPr>
-            <a:r>
-              <a:rPr lang="ko-KR" altLang="en-US"/>
-              <a:t/>
-            </a:r>
             <a:endParaRPr lang="ko-KR" altLang="en-US"/>
           </a:p>
         </p:txBody>
@@ -1708,7 +1648,7 @@
 </file>
 
 <file path=ppt/notesSlides/notesSlide7.xml><?xml version="1.0" encoding="utf-8"?>
-<p:notes xmlns:r="http://schemas.openxmlformats.org/officeDocument/2006/relationships" xmlns:c="http://schemas.openxmlformats.org/drawingml/2006/chart" xmlns:a="http://schemas.openxmlformats.org/drawingml/2006/main" xmlns:dgm="http://schemas.openxmlformats.org/drawingml/2006/diagram" xmlns:dsp="http://schemas.microsoft.com/office/drawing/2008/diagram" xmlns:p="http://schemas.openxmlformats.org/presentationml/2006/main">
+<p:notes xmlns:a="http://schemas.openxmlformats.org/drawingml/2006/main" xmlns:r="http://schemas.openxmlformats.org/officeDocument/2006/relationships" xmlns:p="http://schemas.openxmlformats.org/presentationml/2006/main">
   <p:cSld>
     <p:spTree>
       <p:nvGrpSpPr>
@@ -1731,7 +1671,7 @@
             <a:spLocks noGrp="1" noRot="1" noChangeAspect="1" noTextEdit="1"/>
           </p:cNvSpPr>
           <p:nvPr>
-            <p:ph type="sldImg" idx="0"/>
+            <p:ph type="sldImg"/>
           </p:nvPr>
         </p:nvSpPr>
         <p:spPr/>
@@ -1754,10 +1694,6 @@
             <a:pPr lvl="0">
               <a:defRPr/>
             </a:pPr>
-            <a:r>
-              <a:rPr lang="ko-KR" altLang="en-US"/>
-              <a:t/>
-            </a:r>
             <a:endParaRPr lang="ko-KR" altLang="en-US"/>
           </a:p>
         </p:txBody>
@@ -1800,7 +1736,7 @@
 </file>
 
 <file path=ppt/notesSlides/notesSlide8.xml><?xml version="1.0" encoding="utf-8"?>
-<p:notes xmlns:r="http://schemas.openxmlformats.org/officeDocument/2006/relationships" xmlns:c="http://schemas.openxmlformats.org/drawingml/2006/chart" xmlns:a="http://schemas.openxmlformats.org/drawingml/2006/main" xmlns:dgm="http://schemas.openxmlformats.org/drawingml/2006/diagram" xmlns:dsp="http://schemas.microsoft.com/office/drawing/2008/diagram" xmlns:p="http://schemas.openxmlformats.org/presentationml/2006/main">
+<p:notes xmlns:a="http://schemas.openxmlformats.org/drawingml/2006/main" xmlns:r="http://schemas.openxmlformats.org/officeDocument/2006/relationships" xmlns:p="http://schemas.openxmlformats.org/presentationml/2006/main">
   <p:cSld>
     <p:spTree>
       <p:nvGrpSpPr>
@@ -1823,7 +1759,7 @@
             <a:spLocks noGrp="1" noRot="1" noChangeAspect="1" noTextEdit="1"/>
           </p:cNvSpPr>
           <p:nvPr>
-            <p:ph type="sldImg" idx="0"/>
+            <p:ph type="sldImg"/>
           </p:nvPr>
         </p:nvSpPr>
         <p:spPr/>
@@ -1846,10 +1782,6 @@
             <a:pPr lvl="0">
               <a:defRPr/>
             </a:pPr>
-            <a:r>
-              <a:rPr lang="ko-KR" altLang="en-US"/>
-              <a:t/>
-            </a:r>
             <a:endParaRPr lang="ko-KR" altLang="en-US"/>
           </a:p>
         </p:txBody>
@@ -1892,7 +1824,7 @@
 </file>
 
 <file path=ppt/notesSlides/notesSlide9.xml><?xml version="1.0" encoding="utf-8"?>
-<p:notes xmlns:r="http://schemas.openxmlformats.org/officeDocument/2006/relationships" xmlns:c="http://schemas.openxmlformats.org/drawingml/2006/chart" xmlns:a="http://schemas.openxmlformats.org/drawingml/2006/main" xmlns:dgm="http://schemas.openxmlformats.org/drawingml/2006/diagram" xmlns:dsp="http://schemas.microsoft.com/office/drawing/2008/diagram" xmlns:p="http://schemas.openxmlformats.org/presentationml/2006/main">
+<p:notes xmlns:a="http://schemas.openxmlformats.org/drawingml/2006/main" xmlns:r="http://schemas.openxmlformats.org/officeDocument/2006/relationships" xmlns:p="http://schemas.openxmlformats.org/presentationml/2006/main">
   <p:cSld>
     <p:spTree>
       <p:nvGrpSpPr>
@@ -1915,7 +1847,7 @@
             <a:spLocks noGrp="1" noRot="1" noChangeAspect="1" noTextEdit="1"/>
           </p:cNvSpPr>
           <p:nvPr>
-            <p:ph type="sldImg" idx="0"/>
+            <p:ph type="sldImg"/>
           </p:nvPr>
         </p:nvSpPr>
         <p:spPr/>
@@ -1938,10 +1870,6 @@
             <a:pPr lvl="0">
               <a:defRPr/>
             </a:pPr>
-            <a:r>
-              <a:rPr lang="ko-KR" altLang="en-US"/>
-              <a:t/>
-            </a:r>
             <a:endParaRPr lang="ko-KR" altLang="en-US"/>
           </a:p>
         </p:txBody>
@@ -2016,6 +1944,11 @@
 <file path=ppt/slideMasters/slideMaster1.xml><?xml version="1.0" encoding="utf-8"?>
 <p:sldMaster xmlns:a="http://schemas.openxmlformats.org/drawingml/2006/main" xmlns:r="http://schemas.openxmlformats.org/officeDocument/2006/relationships" xmlns:p="http://schemas.openxmlformats.org/presentationml/2006/main">
   <p:cSld>
+    <p:bg>
+      <p:bgRef idx="1001">
+        <a:schemeClr val="bg1"/>
+      </p:bgRef>
+    </p:bg>
     <p:spTree>
       <p:nvGrpSpPr>
         <p:cNvPr id="1" name=""/>
@@ -2291,13 +2224,14 @@
 </file>
 
 <file path=ppt/slides/slide1.xml><?xml version="1.0" encoding="utf-8"?>
-<p:sld xmlns:r="http://schemas.openxmlformats.org/officeDocument/2006/relationships" xmlns:c="http://schemas.openxmlformats.org/drawingml/2006/chart" xmlns:a="http://schemas.openxmlformats.org/drawingml/2006/main" xmlns:dgm="http://schemas.openxmlformats.org/drawingml/2006/diagram" xmlns:dsp="http://schemas.microsoft.com/office/drawing/2008/diagram" xmlns:p="http://schemas.openxmlformats.org/presentationml/2006/main">
+<p:sld xmlns:a="http://schemas.openxmlformats.org/drawingml/2006/main" xmlns:r="http://schemas.openxmlformats.org/officeDocument/2006/relationships" xmlns:p="http://schemas.openxmlformats.org/presentationml/2006/main">
   <p:cSld name="Slide 1">
     <p:bg>
-      <p:bgPr shadeToTitle="0">
+      <p:bgPr>
         <a:solidFill>
-          <a:srgbClr val="16223b"/>
+          <a:srgbClr val="16223B"/>
         </a:solidFill>
+        <a:effectLst/>
       </p:bgPr>
     </p:bg>
     <p:spTree>
@@ -2329,12 +2263,13 @@
             <a:avLst/>
           </a:prstGeom>
           <a:solidFill>
-            <a:srgbClr val="16223b"/>
+            <a:srgbClr val="16223B"/>
           </a:solidFill>
           <a:ln/>
         </p:spPr>
         <p:txBody>
           <a:bodyPr anchor="ctr"/>
+          <a:lstStyle/>
           <a:p>
             <a:pPr algn="ctr">
               <a:defRPr/>
@@ -2371,7 +2306,7 @@
             <a:r>
               <a:rPr lang="en-US" sz="1600" b="1" kern="0" spc="800">
                 <a:solidFill>
-                  <a:srgbClr val="e0a15a"/>
+                  <a:srgbClr val="E0A15A"/>
                 </a:solidFill>
                 <a:latin typeface="Arial"/>
                 <a:ea typeface="Arial"/>
@@ -2411,7 +2346,7 @@
             <a:r>
               <a:rPr lang="en-US" sz="5200" b="1">
                 <a:solidFill>
-                  <a:srgbClr val="ffffff"/>
+                  <a:srgbClr val="FFFFFF"/>
                 </a:solidFill>
                 <a:latin typeface="맑은 고딕"/>
                 <a:ea typeface="맑은 고딕"/>
@@ -2422,7 +2357,7 @@
             <a:r>
               <a:rPr lang="ko-KR" altLang="en-US" sz="5200" b="1">
                 <a:solidFill>
-                  <a:srgbClr val="ffffff"/>
+                  <a:srgbClr val="FFFFFF"/>
                 </a:solidFill>
                 <a:latin typeface="맑은 고딕"/>
                 <a:ea typeface="맑은 고딕"/>
@@ -2430,14 +2365,6 @@
               </a:rPr>
               <a:t> 포트폴리오</a:t>
             </a:r>
-            <a:endParaRPr lang="ko-KR" altLang="en-US" sz="5200" b="1">
-              <a:solidFill>
-                <a:srgbClr val="ffffff"/>
-              </a:solidFill>
-              <a:latin typeface="맑은 고딕"/>
-              <a:ea typeface="맑은 고딕"/>
-              <a:cs typeface="맑은 고딕"/>
-            </a:endParaRPr>
           </a:p>
         </p:txBody>
       </p:sp>
@@ -2458,13 +2385,14 @@
           <a:noFill/>
           <a:ln w="25400">
             <a:solidFill>
-              <a:srgbClr val="c8622e"/>
+              <a:srgbClr val="C8622E"/>
             </a:solidFill>
             <a:prstDash val="solid"/>
           </a:ln>
         </p:spPr>
         <p:txBody>
           <a:bodyPr wrap="square" anchor="ctr"/>
+          <a:lstStyle/>
           <a:p>
             <a:pPr algn="ctr">
               <a:defRPr/>
@@ -2504,7 +2432,7 @@
             <a:r>
               <a:rPr lang="en-US" sz="2000" b="1">
                 <a:solidFill>
-                  <a:srgbClr val="ffffff"/>
+                  <a:srgbClr val="FFFFFF"/>
                 </a:solidFill>
                 <a:latin typeface="맑은 고딕"/>
                 <a:ea typeface="맑은 고딕"/>
@@ -2512,14 +2440,6 @@
               </a:rPr>
               <a:t>진성준</a:t>
             </a:r>
-            <a:endParaRPr lang="en-US" sz="2000" b="1">
-              <a:solidFill>
-                <a:srgbClr val="ffffff"/>
-              </a:solidFill>
-              <a:latin typeface="맑은 고딕"/>
-              <a:ea typeface="맑은 고딕"/>
-              <a:cs typeface="맑은 고딕"/>
-            </a:endParaRPr>
           </a:p>
           <a:p>
             <a:pPr marL="0" indent="0">
@@ -2532,7 +2452,7 @@
             <a:r>
               <a:rPr lang="en-US" sz="1200">
                 <a:solidFill>
-                  <a:srgbClr val="eaf0fa"/>
+                  <a:srgbClr val="EAF0FA"/>
                 </a:solidFill>
                 <a:latin typeface="맑은 고딕"/>
                 <a:ea typeface="맑은 고딕"/>
@@ -2540,14 +2460,6 @@
               </a:rPr>
               <a:t>한국공학대학교 게임공학과  ·  4학년</a:t>
             </a:r>
-            <a:endParaRPr lang="en-US" sz="1200">
-              <a:solidFill>
-                <a:srgbClr val="eaf0fa"/>
-              </a:solidFill>
-              <a:latin typeface="맑은 고딕"/>
-              <a:ea typeface="맑은 고딕"/>
-              <a:cs typeface="맑은 고딕"/>
-            </a:endParaRPr>
           </a:p>
           <a:p>
             <a:pPr marL="0" indent="0">
@@ -2560,7 +2472,7 @@
             <a:r>
               <a:rPr lang="en-US" sz="1200">
                 <a:solidFill>
-                  <a:srgbClr val="eaf0fa"/>
+                  <a:srgbClr val="EAF0FA"/>
                 </a:solidFill>
                 <a:latin typeface="맑은 고딕"/>
                 <a:ea typeface="맑은 고딕"/>
@@ -2571,7 +2483,7 @@
             <a:r>
               <a:rPr lang="en-US" altLang="ko-KR" sz="1200">
                 <a:solidFill>
-                  <a:srgbClr val="eaf0fa"/>
+                  <a:srgbClr val="EAF0FA"/>
                 </a:solidFill>
                 <a:latin typeface="맑은 고딕"/>
                 <a:ea typeface="맑은 고딕"/>
@@ -2582,7 +2494,7 @@
             <a:r>
               <a:rPr lang="en-US" sz="1200">
                 <a:solidFill>
-                  <a:srgbClr val="eaf0fa"/>
+                  <a:srgbClr val="EAF0FA"/>
                 </a:solidFill>
                 <a:latin typeface="맑은 고딕"/>
                 <a:ea typeface="맑은 고딕"/>
@@ -2590,14 +2502,6 @@
               </a:rPr>
               <a:t>@naver.com</a:t>
             </a:r>
-            <a:endParaRPr lang="en-US" sz="1200">
-              <a:solidFill>
-                <a:srgbClr val="eaf0fa"/>
-              </a:solidFill>
-              <a:latin typeface="맑은 고딕"/>
-              <a:ea typeface="맑은 고딕"/>
-              <a:cs typeface="맑은 고딕"/>
-            </a:endParaRPr>
           </a:p>
         </p:txBody>
       </p:sp>
@@ -2606,11 +2510,11 @@
   <p:clrMapOvr>
     <a:masterClrMapping/>
   </p:clrMapOvr>
-  <mc:AlternateContent xmlns:mc="http://schemas.openxmlformats.org/markup-compatibility/2006">
-    <mc:Choice xmlns:p14="http://schemas.microsoft.com/office/powerpoint/2010/main" Requires="p14">
-      <p:transition xmlns:mc="http://schemas.openxmlformats.org/markup-compatibility/2006" xmlns:p14="http://schemas.microsoft.com/office/powerpoint/2010/main" mc:Ignorable="p14" p14:dur="500"/>
+  <mc:AlternateContent xmlns:mc="http://schemas.openxmlformats.org/markup-compatibility/2006" xmlns:p14="http://schemas.microsoft.com/office/powerpoint/2010/main">
+    <mc:Choice Requires="p14">
+      <p:transition/>
     </mc:Choice>
-    <mc:Fallback>
+    <mc:Fallback xmlns:dsp="http://schemas.microsoft.com/office/drawing/2008/diagram" xmlns:dgm="http://schemas.openxmlformats.org/drawingml/2006/diagram" xmlns:c="http://schemas.openxmlformats.org/drawingml/2006/chart" xmlns="">
       <p:transition/>
     </mc:Fallback>
   </mc:AlternateContent>
@@ -2625,6 +2529,7 @@
         <a:solidFill>
           <a:srgbClr val="FFFFFF"/>
         </a:solidFill>
+        <a:effectLst/>
       </p:bgPr>
     </p:bg>
     <p:spTree>
@@ -2662,11 +2567,11 @@
           <a:bodyPr wrap="square" lIns="0" tIns="0" rIns="0" bIns="0" rtlCol="0" anchor="ctr"/>
           <a:lstStyle/>
           <a:p>
-            <a:pPr indent="0" marL="0">
-              <a:buNone/>
-            </a:pPr>
-            <a:r>
-              <a:rPr lang="en-US" sz="1200" b="1" spc="200" kern="0" dirty="0">
+            <a:pPr marL="0" indent="0">
+              <a:buNone/>
+            </a:pPr>
+            <a:r>
+              <a:rPr lang="en-US" sz="1200" b="1" kern="0" spc="200" dirty="0">
                 <a:solidFill>
                   <a:srgbClr val="C8622E"/>
                 </a:solidFill>
@@ -2701,7 +2606,7 @@
           <a:bodyPr wrap="square" lIns="0" tIns="0" rIns="0" bIns="0" rtlCol="0" anchor="ctr"/>
           <a:lstStyle/>
           <a:p>
-            <a:pPr indent="0" marL="0">
+            <a:pPr marL="0" indent="0">
               <a:buNone/>
             </a:pPr>
             <a:r>
@@ -2740,7 +2645,7 @@
           <a:bodyPr wrap="square" lIns="0" tIns="0" rIns="0" bIns="0" rtlCol="0" anchor="ctr"/>
           <a:lstStyle/>
           <a:p>
-            <a:pPr indent="0" marL="0">
+            <a:pPr marL="0" indent="0">
               <a:buNone/>
             </a:pPr>
             <a:r>
@@ -2774,15 +2679,27 @@
         </p:nvGraphicFramePr>
         <p:xfrm>
           <a:off x="566928" y="2103120"/>
-          <a:ext cx="5943600" cy="914400"/>
+          <a:ext cx="5943600" cy="2304288"/>
         </p:xfrm>
         <a:graphic>
           <a:graphicData uri="http://schemas.openxmlformats.org/drawingml/2006/table">
             <a:tbl>
               <a:tblPr/>
               <a:tblGrid>
-                <a:gridCol w="1554480"/>
-                <a:gridCol w="4389120"/>
+                <a:gridCol w="1554480">
+                  <a:extLst>
+                    <a:ext uri="{9D8B030D-6E8A-4147-A177-3AD203B41FA5}">
+                      <a16:colId xmlns:a16="http://schemas.microsoft.com/office/drawing/2014/main" val="20000"/>
+                    </a:ext>
+                  </a:extLst>
+                </a:gridCol>
+                <a:gridCol w="4389120">
+                  <a:extLst>
+                    <a:ext uri="{9D8B030D-6E8A-4147-A177-3AD203B41FA5}">
+                      <a16:colId xmlns:a16="http://schemas.microsoft.com/office/drawing/2014/main" val="20001"/>
+                    </a:ext>
+                  </a:extLst>
+                </a:gridCol>
               </a:tblGrid>
               <a:tr h="384048">
                 <a:tc>
@@ -2790,7 +2707,7 @@
                     <a:bodyPr/>
                     <a:lstStyle/>
                     <a:p>
-                      <a:pPr algn="l" indent="0" marL="0">
+                      <a:pPr marL="0" indent="0" algn="l">
                         <a:buNone/>
                       </a:pPr>
                       <a:r>
@@ -2858,7 +2775,7 @@
                     <a:bodyPr/>
                     <a:lstStyle/>
                     <a:p>
-                      <a:pPr algn="l" indent="0" marL="0">
+                      <a:pPr marL="0" indent="0" algn="l">
                         <a:buNone/>
                       </a:pPr>
                       <a:r>
@@ -2921,6 +2838,11 @@
                     </a:solidFill>
                   </a:tcPr>
                 </a:tc>
+                <a:extLst>
+                  <a:ext uri="{0D108BD9-81ED-4DB2-BD59-A6C34878D82A}">
+                    <a16:rowId xmlns:a16="http://schemas.microsoft.com/office/drawing/2014/main" val="10000"/>
+                  </a:ext>
+                </a:extLst>
               </a:tr>
               <a:tr h="384048">
                 <a:tc>
@@ -2928,7 +2850,7 @@
                     <a:bodyPr/>
                     <a:lstStyle/>
                     <a:p>
-                      <a:pPr algn="l" indent="0" marL="0">
+                      <a:pPr marL="0" indent="0" algn="l">
                         <a:buNone/>
                       </a:pPr>
                       <a:r>
@@ -2996,7 +2918,7 @@
                     <a:bodyPr/>
                     <a:lstStyle/>
                     <a:p>
-                      <a:pPr algn="l" indent="0" marL="0">
+                      <a:pPr marL="0" indent="0" algn="l">
                         <a:buNone/>
                       </a:pPr>
                       <a:r>
@@ -3059,6 +2981,11 @@
                     </a:solidFill>
                   </a:tcPr>
                 </a:tc>
+                <a:extLst>
+                  <a:ext uri="{0D108BD9-81ED-4DB2-BD59-A6C34878D82A}">
+                    <a16:rowId xmlns:a16="http://schemas.microsoft.com/office/drawing/2014/main" val="10001"/>
+                  </a:ext>
+                </a:extLst>
               </a:tr>
               <a:tr h="384048">
                 <a:tc>
@@ -3066,7 +2993,7 @@
                     <a:bodyPr/>
                     <a:lstStyle/>
                     <a:p>
-                      <a:pPr algn="l" indent="0" marL="0">
+                      <a:pPr marL="0" indent="0" algn="l">
                         <a:buNone/>
                       </a:pPr>
                       <a:r>
@@ -3134,7 +3061,7 @@
                     <a:bodyPr/>
                     <a:lstStyle/>
                     <a:p>
-                      <a:pPr algn="l" indent="0" marL="0">
+                      <a:pPr marL="0" indent="0" algn="l">
                         <a:buNone/>
                       </a:pPr>
                       <a:r>
@@ -3197,6 +3124,11 @@
                     </a:solidFill>
                   </a:tcPr>
                 </a:tc>
+                <a:extLst>
+                  <a:ext uri="{0D108BD9-81ED-4DB2-BD59-A6C34878D82A}">
+                    <a16:rowId xmlns:a16="http://schemas.microsoft.com/office/drawing/2014/main" val="10002"/>
+                  </a:ext>
+                </a:extLst>
               </a:tr>
               <a:tr h="384048">
                 <a:tc>
@@ -3204,7 +3136,7 @@
                     <a:bodyPr/>
                     <a:lstStyle/>
                     <a:p>
-                      <a:pPr algn="l" indent="0" marL="0">
+                      <a:pPr marL="0" indent="0" algn="l">
                         <a:buNone/>
                       </a:pPr>
                       <a:r>
@@ -3272,7 +3204,7 @@
                     <a:bodyPr/>
                     <a:lstStyle/>
                     <a:p>
-                      <a:pPr algn="l" indent="0" marL="0">
+                      <a:pPr marL="0" indent="0" algn="l">
                         <a:buNone/>
                       </a:pPr>
                       <a:r>
@@ -3335,6 +3267,11 @@
                     </a:solidFill>
                   </a:tcPr>
                 </a:tc>
+                <a:extLst>
+                  <a:ext uri="{0D108BD9-81ED-4DB2-BD59-A6C34878D82A}">
+                    <a16:rowId xmlns:a16="http://schemas.microsoft.com/office/drawing/2014/main" val="10003"/>
+                  </a:ext>
+                </a:extLst>
               </a:tr>
               <a:tr h="384048">
                 <a:tc>
@@ -3342,7 +3279,7 @@
                     <a:bodyPr/>
                     <a:lstStyle/>
                     <a:p>
-                      <a:pPr algn="l" indent="0" marL="0">
+                      <a:pPr marL="0" indent="0" algn="l">
                         <a:buNone/>
                       </a:pPr>
                       <a:r>
@@ -3410,7 +3347,7 @@
                     <a:bodyPr/>
                     <a:lstStyle/>
                     <a:p>
-                      <a:pPr algn="l" indent="0" marL="0">
+                      <a:pPr marL="0" indent="0" algn="l">
                         <a:buNone/>
                       </a:pPr>
                       <a:r>
@@ -3473,6 +3410,11 @@
                     </a:solidFill>
                   </a:tcPr>
                 </a:tc>
+                <a:extLst>
+                  <a:ext uri="{0D108BD9-81ED-4DB2-BD59-A6C34878D82A}">
+                    <a16:rowId xmlns:a16="http://schemas.microsoft.com/office/drawing/2014/main" val="10004"/>
+                  </a:ext>
+                </a:extLst>
               </a:tr>
               <a:tr h="384048">
                 <a:tc>
@@ -3480,7 +3422,7 @@
                     <a:bodyPr/>
                     <a:lstStyle/>
                     <a:p>
-                      <a:pPr algn="l" indent="0" marL="0">
+                      <a:pPr marL="0" indent="0" algn="l">
                         <a:buNone/>
                       </a:pPr>
                       <a:r>
@@ -3548,7 +3490,7 @@
                     <a:bodyPr/>
                     <a:lstStyle/>
                     <a:p>
-                      <a:pPr algn="l" indent="0" marL="0">
+                      <a:pPr marL="0" indent="0" algn="l">
                         <a:buNone/>
                       </a:pPr>
                       <a:r>
@@ -3611,6 +3553,11 @@
                     </a:solidFill>
                   </a:tcPr>
                 </a:tc>
+                <a:extLst>
+                  <a:ext uri="{0D108BD9-81ED-4DB2-BD59-A6C34878D82A}">
+                    <a16:rowId xmlns:a16="http://schemas.microsoft.com/office/drawing/2014/main" val="10005"/>
+                  </a:ext>
+                </a:extLst>
               </a:tr>
             </a:tbl>
           </a:graphicData>
@@ -3642,24 +3589,31 @@
             <a:prstDash val="solid"/>
           </a:ln>
           <a:effectLst>
-            <a:outerShdw sx="100000" sy="100000" kx="0" ky="0" algn="bl" rotWithShape="0" blurRad="88900" dist="25400" dir="5400000">
+            <a:outerShdw blurRad="88900" dist="25400" dir="5400000" algn="bl" rotWithShape="0">
               <a:srgbClr val="000000">
                 <a:alpha val="12000"/>
               </a:srgbClr>
             </a:outerShdw>
           </a:effectLst>
         </p:spPr>
+        <p:txBody>
+          <a:bodyPr/>
+          <a:lstStyle/>
+          <a:p>
+            <a:endParaRPr lang="ko-KR" altLang="en-US"/>
+          </a:p>
+        </p:txBody>
       </p:sp>
       <p:pic>
         <p:nvPicPr>
-          <p:cNvPr id="7" name="Image 0" descr="img/es_command.png">    </p:cNvPr>
+          <p:cNvPr id="7" name="Image 0" descr="img/es_command.png"/>
           <p:cNvPicPr>
             <a:picLocks noChangeAspect="1"/>
           </p:cNvPicPr>
           <p:nvPr/>
         </p:nvPicPr>
         <p:blipFill>
-          <a:blip r:embed="rId1"/>
+          <a:blip r:embed="rId3"/>
           <a:stretch>
             <a:fillRect/>
           </a:stretch>
@@ -3695,7 +3649,7 @@
           <a:bodyPr wrap="square" lIns="0" tIns="0" rIns="0" bIns="0" rtlCol="0" anchor="ctr"/>
           <a:lstStyle/>
           <a:p>
-            <a:pPr algn="ctr" indent="0" marL="0">
+            <a:pPr marL="0" indent="0" algn="ctr">
               <a:buNone/>
             </a:pPr>
             <a:r>
@@ -3734,7 +3688,7 @@
           <a:bodyPr wrap="square" rtlCol="0" anchor="ctr"/>
           <a:lstStyle/>
           <a:p>
-            <a:pPr algn="l" indent="0" marL="0">
+            <a:pPr marL="0" indent="0" algn="l">
               <a:buNone/>
             </a:pPr>
             <a:r>
@@ -3773,7 +3727,7 @@
           <a:bodyPr wrap="square" rtlCol="0" anchor="ctr"/>
           <a:lstStyle/>
           <a:p>
-            <a:pPr algn="r" indent="0" marL="0">
+            <a:pPr marL="0" indent="0" algn="r">
               <a:buNone/>
             </a:pPr>
             <a:r>
@@ -3800,13 +3754,14 @@
 </file>
 
 <file path=ppt/slides/slide11.xml><?xml version="1.0" encoding="utf-8"?>
-<p:sld xmlns:r="http://schemas.openxmlformats.org/officeDocument/2006/relationships" xmlns:c="http://schemas.openxmlformats.org/drawingml/2006/chart" xmlns:a="http://schemas.openxmlformats.org/drawingml/2006/main" xmlns:dgm="http://schemas.openxmlformats.org/drawingml/2006/diagram" xmlns:dsp="http://schemas.microsoft.com/office/drawing/2008/diagram" xmlns:p="http://schemas.openxmlformats.org/presentationml/2006/main">
+<p:sld xmlns:a="http://schemas.openxmlformats.org/drawingml/2006/main" xmlns:r="http://schemas.openxmlformats.org/officeDocument/2006/relationships" xmlns:p="http://schemas.openxmlformats.org/presentationml/2006/main">
   <p:cSld name="Slide 12">
     <p:bg>
-      <p:bgPr shadeToTitle="0">
+      <p:bgPr>
         <a:solidFill>
-          <a:srgbClr val="ffffff"/>
+          <a:srgbClr val="FFFFFF"/>
         </a:solidFill>
+        <a:effectLst/>
       </p:bgPr>
     </p:bg>
     <p:spTree>
@@ -3851,7 +3806,7 @@
             <a:r>
               <a:rPr lang="en-US" sz="1200" b="1" kern="0" spc="200">
                 <a:solidFill>
-                  <a:srgbClr val="c8622e"/>
+                  <a:srgbClr val="C8622E"/>
                 </a:solidFill>
                 <a:latin typeface="맑은 고딕"/>
                 <a:ea typeface="맑은 고딕"/>
@@ -3891,7 +3846,7 @@
             <a:r>
               <a:rPr lang="en-US" sz="2900" b="1">
                 <a:solidFill>
-                  <a:srgbClr val="1f2637"/>
+                  <a:srgbClr val="1F2637"/>
                 </a:solidFill>
                 <a:latin typeface="맑은 고딕"/>
                 <a:ea typeface="맑은 고딕"/>
@@ -3931,7 +3886,7 @@
             <a:r>
               <a:rPr lang="en-US" sz="1300">
                 <a:solidFill>
-                  <a:srgbClr val="24324f"/>
+                  <a:srgbClr val="24324F"/>
                 </a:solidFill>
                 <a:latin typeface="맑은 고딕"/>
                 <a:ea typeface="맑은 고딕"/>
@@ -3960,11 +3915,11 @@
             </a:avLst>
           </a:prstGeom>
           <a:solidFill>
-            <a:srgbClr val="16223b"/>
+            <a:srgbClr val="16223B"/>
           </a:solidFill>
           <a:ln w="12700">
             <a:solidFill>
-              <a:srgbClr val="d9dee6"/>
+              <a:srgbClr val="D9DEE6"/>
             </a:solidFill>
             <a:prstDash val="solid"/>
           </a:ln>
@@ -3978,6 +3933,7 @@
         </p:spPr>
         <p:txBody>
           <a:bodyPr anchor="ctr"/>
+          <a:lstStyle/>
           <a:p>
             <a:pPr algn="ctr">
               <a:defRPr/>
@@ -4014,7 +3970,7 @@
             <a:r>
               <a:rPr lang="en-US" sz="1500" b="1">
                 <a:solidFill>
-                  <a:srgbClr val="e0a15a"/>
+                  <a:srgbClr val="E0A15A"/>
                 </a:solidFill>
                 <a:latin typeface="맑은 고딕"/>
                 <a:ea typeface="맑은 고딕"/>
@@ -4057,7 +4013,7 @@
             <a:r>
               <a:rPr lang="en-US" sz="1250">
                 <a:solidFill>
-                  <a:srgbClr val="eaf0fa"/>
+                  <a:srgbClr val="EAF0FA"/>
                 </a:solidFill>
                 <a:latin typeface="맑은 고딕"/>
                 <a:ea typeface="맑은 고딕"/>
@@ -4068,7 +4024,7 @@
             <a:r>
               <a:rPr lang="en-US" sz="1250" b="1">
                 <a:solidFill>
-                  <a:srgbClr val="ffffff"/>
+                  <a:srgbClr val="FFFFFF"/>
                 </a:solidFill>
                 <a:latin typeface="맑은 고딕"/>
                 <a:ea typeface="맑은 고딕"/>
@@ -4076,14 +4032,6 @@
               </a:rPr>
               <a:t>콤보 사이의 '연계'를 유도.</a:t>
             </a:r>
-            <a:endParaRPr lang="en-US" sz="1250" b="1">
-              <a:solidFill>
-                <a:srgbClr val="ffffff"/>
-              </a:solidFill>
-              <a:latin typeface="맑은 고딕"/>
-              <a:ea typeface="맑은 고딕"/>
-              <a:cs typeface="맑은 고딕"/>
-            </a:endParaRPr>
           </a:p>
           <a:p>
             <a:pPr marL="0" indent="0">
@@ -4096,7 +4044,7 @@
             <a:r>
               <a:rPr lang="en-US" sz="1250">
                 <a:solidFill>
-                  <a:srgbClr val="eaf0fa"/>
+                  <a:srgbClr val="EAF0FA"/>
                 </a:solidFill>
                 <a:latin typeface="맑은 고딕"/>
                 <a:ea typeface="맑은 고딕"/>
@@ -4125,11 +4073,11 @@
             </a:avLst>
           </a:prstGeom>
           <a:solidFill>
-            <a:srgbClr val="f4f6fa"/>
+            <a:srgbClr val="F4F6FA"/>
           </a:solidFill>
           <a:ln w="12700">
             <a:solidFill>
-              <a:srgbClr val="d9dee6"/>
+              <a:srgbClr val="D9DEE6"/>
             </a:solidFill>
             <a:prstDash val="solid"/>
           </a:ln>
@@ -4143,6 +4091,7 @@
         </p:spPr>
         <p:txBody>
           <a:bodyPr anchor="ctr"/>
+          <a:lstStyle/>
           <a:p>
             <a:pPr algn="ctr">
               <a:defRPr/>
@@ -4192,11 +4141,11 @@
             </a:avLst>
           </a:prstGeom>
           <a:solidFill>
-            <a:srgbClr val="f4f6fa"/>
+            <a:srgbClr val="F4F6FA"/>
           </a:solidFill>
           <a:ln w="12700">
             <a:solidFill>
-              <a:srgbClr val="d9dee6"/>
+              <a:srgbClr val="D9DEE6"/>
             </a:solidFill>
             <a:prstDash val="solid"/>
           </a:ln>
@@ -4210,6 +4159,7 @@
         </p:spPr>
         <p:txBody>
           <a:bodyPr anchor="ctr"/>
+          <a:lstStyle/>
           <a:p>
             <a:pPr algn="ctr">
               <a:defRPr/>
@@ -4246,7 +4196,7 @@
             <a:r>
               <a:rPr lang="en-US" sz="1450" b="1">
                 <a:solidFill>
-                  <a:srgbClr val="c8622e"/>
+                  <a:srgbClr val="C8622E"/>
                 </a:solidFill>
                 <a:latin typeface="맑은 고딕"/>
                 <a:ea typeface="맑은 고딕"/>
@@ -4289,7 +4239,7 @@
             <a:r>
               <a:rPr lang="en-US" sz="1200">
                 <a:solidFill>
-                  <a:srgbClr val="1f2637"/>
+                  <a:srgbClr val="1F2637"/>
                 </a:solidFill>
                 <a:latin typeface="맑은 고딕"/>
                 <a:ea typeface="맑은 고딕"/>
@@ -4318,11 +4268,11 @@
             </a:avLst>
           </a:prstGeom>
           <a:solidFill>
-            <a:srgbClr val="f4f6fa"/>
+            <a:srgbClr val="F4F6FA"/>
           </a:solidFill>
           <a:ln w="12700">
             <a:solidFill>
-              <a:srgbClr val="d9dee6"/>
+              <a:srgbClr val="D9DEE6"/>
             </a:solidFill>
             <a:prstDash val="solid"/>
           </a:ln>
@@ -4336,6 +4286,7 @@
         </p:spPr>
         <p:txBody>
           <a:bodyPr anchor="ctr"/>
+          <a:lstStyle/>
           <a:p>
             <a:pPr algn="ctr">
               <a:defRPr/>
@@ -4372,7 +4323,7 @@
             <a:r>
               <a:rPr lang="en-US" sz="1450" b="1">
                 <a:solidFill>
-                  <a:srgbClr val="c8622e"/>
+                  <a:srgbClr val="C8622E"/>
                 </a:solidFill>
                 <a:latin typeface="맑은 고딕"/>
                 <a:ea typeface="맑은 고딕"/>
@@ -4415,7 +4366,7 @@
             <a:r>
               <a:rPr lang="en-US" sz="1200">
                 <a:solidFill>
-                  <a:srgbClr val="1f2637"/>
+                  <a:srgbClr val="1F2637"/>
                 </a:solidFill>
                 <a:latin typeface="맑은 고딕"/>
                 <a:ea typeface="맑은 고딕"/>
@@ -4444,11 +4395,11 @@
             </a:avLst>
           </a:prstGeom>
           <a:solidFill>
-            <a:srgbClr val="f4f6fa"/>
+            <a:srgbClr val="F4F6FA"/>
           </a:solidFill>
           <a:ln w="12700">
             <a:solidFill>
-              <a:srgbClr val="d9dee6"/>
+              <a:srgbClr val="D9DEE6"/>
             </a:solidFill>
             <a:prstDash val="solid"/>
           </a:ln>
@@ -4462,6 +4413,7 @@
         </p:spPr>
         <p:txBody>
           <a:bodyPr anchor="ctr"/>
+          <a:lstStyle/>
           <a:p>
             <a:pPr algn="ctr">
               <a:defRPr/>
@@ -4498,7 +4450,7 @@
             <a:r>
               <a:rPr lang="en-US" sz="1450" b="1">
                 <a:solidFill>
-                  <a:srgbClr val="c8622e"/>
+                  <a:srgbClr val="C8622E"/>
                 </a:solidFill>
                 <a:latin typeface="맑은 고딕"/>
                 <a:ea typeface="맑은 고딕"/>
@@ -4541,7 +4493,7 @@
             <a:r>
               <a:rPr lang="en-US" sz="1200">
                 <a:solidFill>
-                  <a:srgbClr val="1f2637"/>
+                  <a:srgbClr val="1F2637"/>
                 </a:solidFill>
                 <a:latin typeface="맑은 고딕"/>
                 <a:ea typeface="맑은 고딕"/>
@@ -4581,7 +4533,7 @@
             <a:r>
               <a:rPr lang="en-US" sz="900">
                 <a:solidFill>
-                  <a:srgbClr val="6c7686"/>
+                  <a:srgbClr val="6C7686"/>
                 </a:solidFill>
                 <a:latin typeface="맑은 고딕"/>
                 <a:ea typeface="맑은 고딕"/>
@@ -4621,7 +4573,7 @@
             <a:r>
               <a:rPr lang="en-US" sz="900">
                 <a:solidFill>
-                  <a:srgbClr val="6c7686"/>
+                  <a:srgbClr val="6C7686"/>
                 </a:solidFill>
                 <a:latin typeface="맑은 고딕"/>
                 <a:ea typeface="맑은 고딕"/>
@@ -4638,11 +4590,11 @@
   <p:clrMapOvr>
     <a:masterClrMapping/>
   </p:clrMapOvr>
-  <mc:AlternateContent xmlns:mc="http://schemas.openxmlformats.org/markup-compatibility/2006">
-    <mc:Choice xmlns:p14="http://schemas.microsoft.com/office/powerpoint/2010/main" Requires="p14">
-      <p:transition xmlns:mc="http://schemas.openxmlformats.org/markup-compatibility/2006" xmlns:p14="http://schemas.microsoft.com/office/powerpoint/2010/main" mc:Ignorable="p14" p14:dur="500"/>
+  <mc:AlternateContent xmlns:mc="http://schemas.openxmlformats.org/markup-compatibility/2006" xmlns:p14="http://schemas.microsoft.com/office/powerpoint/2010/main">
+    <mc:Choice Requires="p14">
+      <p:transition/>
     </mc:Choice>
-    <mc:Fallback>
+    <mc:Fallback xmlns:dsp="http://schemas.microsoft.com/office/drawing/2008/diagram" xmlns:dgm="http://schemas.openxmlformats.org/drawingml/2006/diagram" xmlns:c="http://schemas.openxmlformats.org/drawingml/2006/chart" xmlns="">
       <p:transition/>
     </mc:Fallback>
   </mc:AlternateContent>
@@ -4657,6 +4609,7 @@
         <a:solidFill>
           <a:srgbClr val="FFFFFF"/>
         </a:solidFill>
+        <a:effectLst/>
       </p:bgPr>
     </p:bg>
     <p:spTree>
@@ -4694,11 +4647,11 @@
           <a:bodyPr wrap="square" lIns="0" tIns="0" rIns="0" bIns="0" rtlCol="0" anchor="ctr"/>
           <a:lstStyle/>
           <a:p>
-            <a:pPr indent="0" marL="0">
-              <a:buNone/>
-            </a:pPr>
-            <a:r>
-              <a:rPr lang="en-US" sz="1200" b="1" spc="200" kern="0" dirty="0">
+            <a:pPr marL="0" indent="0">
+              <a:buNone/>
+            </a:pPr>
+            <a:r>
+              <a:rPr lang="en-US" sz="1200" b="1" kern="0" spc="200" dirty="0">
                 <a:solidFill>
                   <a:srgbClr val="C8622E"/>
                 </a:solidFill>
@@ -4733,7 +4686,7 @@
           <a:bodyPr wrap="square" lIns="0" tIns="0" rIns="0" bIns="0" rtlCol="0" anchor="ctr"/>
           <a:lstStyle/>
           <a:p>
-            <a:pPr indent="0" marL="0">
+            <a:pPr marL="0" indent="0">
               <a:buNone/>
             </a:pPr>
             <a:r>
@@ -4777,13 +4730,20 @@
             <a:prstDash val="solid"/>
           </a:ln>
           <a:effectLst>
-            <a:outerShdw sx="100000" sy="100000" kx="0" ky="0" algn="bl" rotWithShape="0" blurRad="88900" dist="25400" dir="5400000">
+            <a:outerShdw blurRad="88900" dist="25400" dir="5400000" algn="bl" rotWithShape="0">
               <a:srgbClr val="000000">
                 <a:alpha val="12000"/>
               </a:srgbClr>
             </a:outerShdw>
           </a:effectLst>
         </p:spPr>
+        <p:txBody>
+          <a:bodyPr/>
+          <a:lstStyle/>
+          <a:p>
+            <a:endParaRPr lang="ko-KR" altLang="en-US"/>
+          </a:p>
+        </p:txBody>
       </p:sp>
       <p:sp>
         <p:nvSpPr>
@@ -4806,7 +4766,7 @@
           <a:bodyPr wrap="square" lIns="0" tIns="0" rIns="0" bIns="0" rtlCol="0" anchor="ctr"/>
           <a:lstStyle/>
           <a:p>
-            <a:pPr indent="0" marL="0">
+            <a:pPr marL="0" indent="0">
               <a:buNone/>
             </a:pPr>
             <a:r>
@@ -4826,14 +4786,14 @@
       </p:sp>
       <p:pic>
         <p:nvPicPr>
-          <p:cNvPr id="6" name="Image 0" descr="img/es_augment.png">    </p:cNvPr>
+          <p:cNvPr id="6" name="Image 0" descr="img/es_augment.png"/>
           <p:cNvPicPr>
             <a:picLocks noChangeAspect="1"/>
           </p:cNvPicPr>
           <p:nvPr/>
         </p:nvPicPr>
         <p:blipFill>
-          <a:blip r:embed="rId1"/>
+          <a:blip r:embed="rId3"/>
           <a:stretch>
             <a:fillRect/>
           </a:stretch>
@@ -4959,13 +4919,20 @@
             <a:prstDash val="solid"/>
           </a:ln>
           <a:effectLst>
-            <a:outerShdw sx="100000" sy="100000" kx="0" ky="0" algn="bl" rotWithShape="0" blurRad="88900" dist="25400" dir="5400000">
+            <a:outerShdw blurRad="88900" dist="25400" dir="5400000" algn="bl" rotWithShape="0">
               <a:srgbClr val="000000">
                 <a:alpha val="12000"/>
               </a:srgbClr>
             </a:outerShdw>
           </a:effectLst>
         </p:spPr>
+        <p:txBody>
+          <a:bodyPr/>
+          <a:lstStyle/>
+          <a:p>
+            <a:endParaRPr lang="ko-KR" altLang="en-US"/>
+          </a:p>
+        </p:txBody>
       </p:sp>
       <p:sp>
         <p:nvSpPr>
@@ -4988,7 +4955,7 @@
           <a:bodyPr wrap="square" lIns="0" tIns="0" rIns="0" bIns="0" rtlCol="0" anchor="ctr"/>
           <a:lstStyle/>
           <a:p>
-            <a:pPr indent="0" marL="0">
+            <a:pPr marL="0" indent="0">
               <a:buNone/>
             </a:pPr>
             <a:r>
@@ -5008,14 +4975,14 @@
       </p:sp>
       <p:pic>
         <p:nvPicPr>
-          <p:cNvPr id="10" name="Image 1" descr="img/es_combo.png">    </p:cNvPr>
+          <p:cNvPr id="10" name="Image 1" descr="img/es_combo.png"/>
           <p:cNvPicPr>
             <a:picLocks noChangeAspect="1"/>
           </p:cNvPicPr>
           <p:nvPr/>
         </p:nvPicPr>
         <p:blipFill>
-          <a:blip r:embed="rId2"/>
+          <a:blip r:embed="rId4"/>
           <a:stretch>
             <a:fillRect/>
           </a:stretch>
@@ -5136,7 +5103,7 @@
           <a:bodyPr wrap="square" rtlCol="0" anchor="ctr"/>
           <a:lstStyle/>
           <a:p>
-            <a:pPr algn="l" indent="0" marL="0">
+            <a:pPr marL="0" indent="0" algn="l">
               <a:buNone/>
             </a:pPr>
             <a:r>
@@ -5175,7 +5142,7 @@
           <a:bodyPr wrap="square" rtlCol="0" anchor="ctr"/>
           <a:lstStyle/>
           <a:p>
-            <a:pPr algn="r" indent="0" marL="0">
+            <a:pPr marL="0" indent="0" algn="r">
               <a:buNone/>
             </a:pPr>
             <a:r>
@@ -5202,13 +5169,14 @@
 </file>
 
 <file path=ppt/slides/slide13.xml><?xml version="1.0" encoding="utf-8"?>
-<p:sld xmlns:r="http://schemas.openxmlformats.org/officeDocument/2006/relationships" xmlns:c="http://schemas.openxmlformats.org/drawingml/2006/chart" xmlns:a="http://schemas.openxmlformats.org/drawingml/2006/main" xmlns:dgm="http://schemas.openxmlformats.org/drawingml/2006/diagram" xmlns:dsp="http://schemas.microsoft.com/office/drawing/2008/diagram" xmlns:p="http://schemas.openxmlformats.org/presentationml/2006/main">
+<p:sld xmlns:a="http://schemas.openxmlformats.org/drawingml/2006/main" xmlns:r="http://schemas.openxmlformats.org/officeDocument/2006/relationships" xmlns:p="http://schemas.openxmlformats.org/presentationml/2006/main">
   <p:cSld name="Slide 14">
     <p:bg>
-      <p:bgPr shadeToTitle="0">
+      <p:bgPr>
         <a:solidFill>
-          <a:srgbClr val="ffffff"/>
+          <a:srgbClr val="FFFFFF"/>
         </a:solidFill>
+        <a:effectLst/>
       </p:bgPr>
     </p:bg>
     <p:spTree>
@@ -5253,7 +5221,7 @@
             <a:r>
               <a:rPr lang="en-US" sz="1200" b="1" kern="0" spc="200">
                 <a:solidFill>
-                  <a:srgbClr val="c8622e"/>
+                  <a:srgbClr val="C8622E"/>
                 </a:solidFill>
                 <a:latin typeface="맑은 고딕"/>
                 <a:ea typeface="맑은 고딕"/>
@@ -5293,7 +5261,7 @@
             <a:r>
               <a:rPr lang="en-US" sz="2900" b="1">
                 <a:solidFill>
-                  <a:srgbClr val="1f2637"/>
+                  <a:srgbClr val="1F2637"/>
                 </a:solidFill>
                 <a:latin typeface="맑은 고딕"/>
                 <a:ea typeface="맑은 고딕"/>
@@ -5304,7 +5272,7 @@
             <a:r>
               <a:rPr lang="ko-KR" altLang="en-US" sz="2900" b="1">
                 <a:solidFill>
-                  <a:srgbClr val="1f2637"/>
+                  <a:srgbClr val="1F2637"/>
                 </a:solidFill>
                 <a:latin typeface="맑은 고딕"/>
                 <a:ea typeface="맑은 고딕"/>
@@ -5315,7 +5283,7 @@
             <a:r>
               <a:rPr lang="en-US" sz="2900" b="1">
                 <a:solidFill>
-                  <a:srgbClr val="1f2637"/>
+                  <a:srgbClr val="1F2637"/>
                 </a:solidFill>
                 <a:latin typeface="맑은 고딕"/>
                 <a:ea typeface="맑은 고딕"/>
@@ -5326,7 +5294,7 @@
             <a:r>
               <a:rPr lang="ko-KR" altLang="en-US" sz="2900" b="1">
                 <a:solidFill>
-                  <a:srgbClr val="1f2637"/>
+                  <a:srgbClr val="1F2637"/>
                 </a:solidFill>
                 <a:latin typeface="맑은 고딕"/>
                 <a:ea typeface="맑은 고딕"/>
@@ -5337,7 +5305,7 @@
             <a:r>
               <a:rPr lang="en-US" altLang="ko-KR" sz="2900" b="1">
                 <a:solidFill>
-                  <a:srgbClr val="1f2637"/>
+                  <a:srgbClr val="1F2637"/>
                 </a:solidFill>
                 <a:latin typeface="맑은 고딕"/>
                 <a:ea typeface="맑은 고딕"/>
@@ -5348,7 +5316,7 @@
             <a:r>
               <a:rPr lang="ko-KR" altLang="en-US" sz="2900" b="1">
                 <a:solidFill>
-                  <a:srgbClr val="1f2637"/>
+                  <a:srgbClr val="1F2637"/>
                 </a:solidFill>
                 <a:latin typeface="맑은 고딕"/>
                 <a:ea typeface="맑은 고딕"/>
@@ -5356,14 +5324,6 @@
               </a:rPr>
               <a:t> 하이 리스크</a:t>
             </a:r>
-            <a:endParaRPr lang="ko-KR" altLang="en-US" sz="2900" b="1">
-              <a:solidFill>
-                <a:srgbClr val="1f2637"/>
-              </a:solidFill>
-              <a:latin typeface="맑은 고딕"/>
-              <a:ea typeface="맑은 고딕"/>
-              <a:cs typeface="맑은 고딕"/>
-            </a:endParaRPr>
           </a:p>
         </p:txBody>
       </p:sp>
@@ -5395,7 +5355,7 @@
             <a:r>
               <a:rPr lang="en-US" sz="1300">
                 <a:solidFill>
-                  <a:srgbClr val="24324f"/>
+                  <a:srgbClr val="24324F"/>
                 </a:solidFill>
                 <a:latin typeface="맑은 고딕"/>
                 <a:ea typeface="맑은 고딕"/>
@@ -5403,14 +5363,6 @@
               </a:rPr>
               <a:t>마나를 없앤 대신, 커맨드·피격이 스트레스를 쌓는다. 강함을 난사하지 못하게 하는 자원 관리 축이다.</a:t>
             </a:r>
-            <a:endParaRPr lang="en-US" sz="1300">
-              <a:solidFill>
-                <a:srgbClr val="24324f"/>
-              </a:solidFill>
-              <a:latin typeface="맑은 고딕"/>
-              <a:ea typeface="맑은 고딕"/>
-              <a:cs typeface="맑은 고딕"/>
-            </a:endParaRPr>
           </a:p>
         </p:txBody>
       </p:sp>
@@ -5431,11 +5383,11 @@
             </a:avLst>
           </a:prstGeom>
           <a:solidFill>
-            <a:srgbClr val="f4f6fa"/>
+            <a:srgbClr val="F4F6FA"/>
           </a:solidFill>
           <a:ln w="12700">
             <a:solidFill>
-              <a:srgbClr val="d9dee6"/>
+              <a:srgbClr val="D9DEE6"/>
             </a:solidFill>
             <a:prstDash val="solid"/>
           </a:ln>
@@ -5449,6 +5401,7 @@
         </p:spPr>
         <p:txBody>
           <a:bodyPr anchor="ctr"/>
+          <a:lstStyle/>
           <a:p>
             <a:pPr algn="ctr">
               <a:defRPr/>
@@ -5485,7 +5438,7 @@
             <a:r>
               <a:rPr lang="en-US" sz="1500" b="1">
                 <a:solidFill>
-                  <a:srgbClr val="c8622e"/>
+                  <a:srgbClr val="C8622E"/>
                 </a:solidFill>
                 <a:latin typeface="맑은 고딕"/>
                 <a:ea typeface="맑은 고딕"/>
@@ -5529,7 +5482,7 @@
             <a:r>
               <a:rPr lang="en-US" sz="1200">
                 <a:solidFill>
-                  <a:srgbClr val="1f2637"/>
+                  <a:srgbClr val="1F2637"/>
                 </a:solidFill>
                 <a:latin typeface="맑은 고딕"/>
                 <a:ea typeface="맑은 고딕"/>
@@ -5537,14 +5490,6 @@
               </a:rPr>
               <a:t>공격·피격으로 스트레스 누적, 100이 되면 '붕괴' 상태.</a:t>
             </a:r>
-            <a:endParaRPr lang="en-US" sz="1200">
-              <a:solidFill>
-                <a:srgbClr val="1f2637"/>
-              </a:solidFill>
-              <a:latin typeface="맑은 고딕"/>
-              <a:ea typeface="맑은 고딕"/>
-              <a:cs typeface="맑은 고딕"/>
-            </a:endParaRPr>
           </a:p>
           <a:p>
             <a:pPr marL="342900" indent="-342900">
@@ -5558,7 +5503,7 @@
             <a:r>
               <a:rPr lang="en-US" sz="1200">
                 <a:solidFill>
-                  <a:srgbClr val="1f2637"/>
+                  <a:srgbClr val="1F2637"/>
                 </a:solidFill>
                 <a:latin typeface="맑은 고딕"/>
                 <a:ea typeface="맑은 고딕"/>
@@ -5566,14 +5511,6 @@
               </a:rPr>
               <a:t>붕괴 유형 5종 — 충동 / 공포 / 불안 / 기억왜곡 / 우울. 각기 다른 패널티(연계 불가, 콤보 망각, 명중률 하락 등).</a:t>
             </a:r>
-            <a:endParaRPr lang="en-US" sz="1200">
-              <a:solidFill>
-                <a:srgbClr val="1f2637"/>
-              </a:solidFill>
-              <a:latin typeface="맑은 고딕"/>
-              <a:ea typeface="맑은 고딕"/>
-              <a:cs typeface="맑은 고딕"/>
-            </a:endParaRPr>
           </a:p>
           <a:p>
             <a:pPr marL="342900" indent="-342900">
@@ -5587,7 +5524,7 @@
             <a:r>
               <a:rPr lang="en-US" sz="1200">
                 <a:solidFill>
-                  <a:srgbClr val="1f2637"/>
+                  <a:srgbClr val="1F2637"/>
                 </a:solidFill>
                 <a:latin typeface="맑은 고딕"/>
                 <a:ea typeface="맑은 고딕"/>
@@ -5595,14 +5532,6 @@
               </a:rPr>
               <a:t>핵심 원칙: 스트레스 획득량 &gt; 감소량. </a:t>
             </a:r>
-            <a:endParaRPr lang="en-US" sz="1200">
-              <a:solidFill>
-                <a:srgbClr val="1f2637"/>
-              </a:solidFill>
-              <a:latin typeface="맑은 고딕"/>
-              <a:ea typeface="맑은 고딕"/>
-              <a:cs typeface="맑은 고딕"/>
-            </a:endParaRPr>
           </a:p>
           <a:p>
             <a:pPr marL="342900" indent="-342900">
@@ -5616,7 +5545,7 @@
             <a:r>
               <a:rPr lang="ko-KR" altLang="en-US" sz="1200" b="1">
                 <a:solidFill>
-                  <a:srgbClr val="1f2637"/>
+                  <a:srgbClr val="1F2637"/>
                 </a:solidFill>
                 <a:latin typeface="맑은 고딕"/>
                 <a:ea typeface="맑은 고딕"/>
@@ -5627,7 +5556,7 @@
             <a:r>
               <a:rPr lang="en-US" sz="1200" b="1">
                 <a:solidFill>
-                  <a:srgbClr val="1f2637"/>
+                  <a:srgbClr val="1F2637"/>
                 </a:solidFill>
                 <a:latin typeface="맑은 고딕"/>
                 <a:ea typeface="맑은 고딕"/>
@@ -5635,14 +5564,6 @@
               </a:rPr>
               <a:t>감소(힐·치명타·회피·격파)는 '행운'이어야 한다.</a:t>
             </a:r>
-            <a:endParaRPr lang="en-US" sz="1200" b="1">
-              <a:solidFill>
-                <a:srgbClr val="1f2637"/>
-              </a:solidFill>
-              <a:latin typeface="맑은 고딕"/>
-              <a:ea typeface="맑은 고딕"/>
-              <a:cs typeface="맑은 고딕"/>
-            </a:endParaRPr>
           </a:p>
         </p:txBody>
       </p:sp>
@@ -5663,11 +5584,11 @@
             </a:avLst>
           </a:prstGeom>
           <a:solidFill>
-            <a:srgbClr val="16223b"/>
+            <a:srgbClr val="16223B"/>
           </a:solidFill>
           <a:ln w="12700">
             <a:solidFill>
-              <a:srgbClr val="d9dee6"/>
+              <a:srgbClr val="D9DEE6"/>
             </a:solidFill>
             <a:prstDash val="solid"/>
           </a:ln>
@@ -5681,6 +5602,7 @@
         </p:spPr>
         <p:txBody>
           <a:bodyPr anchor="ctr"/>
+          <a:lstStyle/>
           <a:p>
             <a:pPr algn="ctr">
               <a:defRPr/>
@@ -5717,7 +5639,7 @@
             <a:r>
               <a:rPr lang="en-US" sz="1500" b="1">
                 <a:solidFill>
-                  <a:srgbClr val="e0a15a"/>
+                  <a:srgbClr val="E0A15A"/>
                 </a:solidFill>
                 <a:latin typeface="맑은 고딕"/>
                 <a:ea typeface="맑은 고딕"/>
@@ -5761,7 +5683,7 @@
             <a:r>
               <a:rPr lang="en-US" sz="1200">
                 <a:solidFill>
-                  <a:srgbClr val="eaf0fa"/>
+                  <a:srgbClr val="EAF0FA"/>
                 </a:solidFill>
                 <a:latin typeface="맑은 고딕"/>
                 <a:ea typeface="맑은 고딕"/>
@@ -5769,14 +5691,6 @@
               </a:rPr>
               <a:t>심호흡 — 턴을 스킵하고 리듬에 맞춰 방향키 입력, 정확할수록 스트레스 감소↑. 안정적 탈출.</a:t>
             </a:r>
-            <a:endParaRPr lang="en-US" sz="1200">
-              <a:solidFill>
-                <a:srgbClr val="eaf0fa"/>
-              </a:solidFill>
-              <a:latin typeface="맑은 고딕"/>
-              <a:ea typeface="맑은 고딕"/>
-              <a:cs typeface="맑은 고딕"/>
-            </a:endParaRPr>
           </a:p>
           <a:p>
             <a:pPr marL="342900" indent="-342900">
@@ -5790,7 +5704,7 @@
             <a:r>
               <a:rPr lang="en-US" sz="1200">
                 <a:solidFill>
-                  <a:srgbClr val="eaf0fa"/>
+                  <a:srgbClr val="EAF0FA"/>
                 </a:solidFill>
                 <a:latin typeface="맑은 고딕"/>
                 <a:ea typeface="맑은 고딕"/>
@@ -5798,14 +5712,6 @@
               </a:rPr>
               <a:t>극복 — 붕괴 중 공격 시 확률적으로 즉시 탈출 + 스트레스 0 + 위력↑ + 추가 턴. 한 방 역전. (다키스트던전 '기적' 영감)</a:t>
             </a:r>
-            <a:endParaRPr lang="en-US" sz="1200">
-              <a:solidFill>
-                <a:srgbClr val="eaf0fa"/>
-              </a:solidFill>
-              <a:latin typeface="맑은 고딕"/>
-              <a:ea typeface="맑은 고딕"/>
-              <a:cs typeface="맑은 고딕"/>
-            </a:endParaRPr>
           </a:p>
           <a:p>
             <a:pPr marL="342900" indent="-342900">
@@ -5819,7 +5725,7 @@
             <a:r>
               <a:rPr lang="en-US" sz="1200" b="1">
                 <a:solidFill>
-                  <a:srgbClr val="ffffff"/>
+                  <a:srgbClr val="FFFFFF"/>
                 </a:solidFill>
                 <a:latin typeface="맑은 고딕"/>
                 <a:ea typeface="맑은 고딕"/>
@@ -5830,7 +5736,7 @@
             <a:r>
               <a:rPr lang="ko-KR" altLang="en-US" sz="1200" b="1">
                 <a:solidFill>
-                  <a:srgbClr val="ffffff"/>
+                  <a:srgbClr val="FFFFFF"/>
                 </a:solidFill>
                 <a:latin typeface="맑은 고딕"/>
                 <a:ea typeface="맑은 고딕"/>
@@ -5841,7 +5747,7 @@
             <a:r>
               <a:rPr lang="en-US" sz="1200" b="1">
                 <a:solidFill>
-                  <a:srgbClr val="ffffff"/>
+                  <a:srgbClr val="FFFFFF"/>
                 </a:solidFill>
                 <a:latin typeface="맑은 고딕"/>
                 <a:ea typeface="맑은 고딕"/>
@@ -5852,7 +5758,7 @@
             <a:r>
               <a:rPr lang="ko-KR" altLang="en-US" sz="1200" b="1">
                 <a:solidFill>
-                  <a:srgbClr val="ffffff"/>
+                  <a:srgbClr val="FFFFFF"/>
                 </a:solidFill>
                 <a:latin typeface="맑은 고딕"/>
                 <a:ea typeface="맑은 고딕"/>
@@ -5863,7 +5769,7 @@
             <a:r>
               <a:rPr lang="en-US" sz="1200" b="1">
                 <a:solidFill>
-                  <a:srgbClr val="ffffff"/>
+                  <a:srgbClr val="FFFFFF"/>
                 </a:solidFill>
                 <a:latin typeface="맑은 고딕"/>
                 <a:ea typeface="맑은 고딕"/>
@@ -5874,7 +5780,7 @@
             <a:r>
               <a:rPr lang="ko-KR" altLang="en-US" sz="1200" b="1">
                 <a:solidFill>
-                  <a:srgbClr val="ffffff"/>
+                  <a:srgbClr val="FFFFFF"/>
                 </a:solidFill>
                 <a:latin typeface="맑은 고딕"/>
                 <a:ea typeface="맑은 고딕"/>
@@ -5885,7 +5791,7 @@
             <a:r>
               <a:rPr lang="en-US" sz="1200" b="1">
                 <a:solidFill>
-                  <a:srgbClr val="ffffff"/>
+                  <a:srgbClr val="FFFFFF"/>
                 </a:solidFill>
                 <a:latin typeface="맑은 고딕"/>
                 <a:ea typeface="맑은 고딕"/>
@@ -5893,14 +5799,6 @@
               </a:rPr>
               <a:t> 긴장을 만든다.</a:t>
             </a:r>
-            <a:endParaRPr lang="en-US" sz="1200" b="1">
-              <a:solidFill>
-                <a:srgbClr val="ffffff"/>
-              </a:solidFill>
-              <a:latin typeface="맑은 고딕"/>
-              <a:ea typeface="맑은 고딕"/>
-              <a:cs typeface="맑은 고딕"/>
-            </a:endParaRPr>
           </a:p>
         </p:txBody>
       </p:sp>
@@ -5932,7 +5830,7 @@
             <a:r>
               <a:rPr lang="en-US" sz="900">
                 <a:solidFill>
-                  <a:srgbClr val="6c7686"/>
+                  <a:srgbClr val="6C7686"/>
                 </a:solidFill>
                 <a:latin typeface="맑은 고딕"/>
                 <a:ea typeface="맑은 고딕"/>
@@ -5972,7 +5870,7 @@
             <a:r>
               <a:rPr lang="en-US" sz="900">
                 <a:solidFill>
-                  <a:srgbClr val="6c7686"/>
+                  <a:srgbClr val="6C7686"/>
                 </a:solidFill>
                 <a:latin typeface="맑은 고딕"/>
                 <a:ea typeface="맑은 고딕"/>
@@ -5989,11 +5887,11 @@
   <p:clrMapOvr>
     <a:masterClrMapping/>
   </p:clrMapOvr>
-  <mc:AlternateContent xmlns:mc="http://schemas.openxmlformats.org/markup-compatibility/2006">
-    <mc:Choice xmlns:p14="http://schemas.microsoft.com/office/powerpoint/2010/main" Requires="p14">
-      <p:transition xmlns:mc="http://schemas.openxmlformats.org/markup-compatibility/2006" xmlns:p14="http://schemas.microsoft.com/office/powerpoint/2010/main" mc:Ignorable="p14" p14:dur="500"/>
+  <mc:AlternateContent xmlns:mc="http://schemas.openxmlformats.org/markup-compatibility/2006" xmlns:p14="http://schemas.microsoft.com/office/powerpoint/2010/main">
+    <mc:Choice Requires="p14">
+      <p:transition/>
     </mc:Choice>
-    <mc:Fallback>
+    <mc:Fallback xmlns:dsp="http://schemas.microsoft.com/office/drawing/2008/diagram" xmlns:dgm="http://schemas.openxmlformats.org/drawingml/2006/diagram" xmlns:c="http://schemas.openxmlformats.org/drawingml/2006/chart" xmlns="">
       <p:transition/>
     </mc:Fallback>
   </mc:AlternateContent>
@@ -6001,13 +5899,14 @@
 </file>
 
 <file path=ppt/slides/slide14.xml><?xml version="1.0" encoding="utf-8"?>
-<p:sld xmlns:r="http://schemas.openxmlformats.org/officeDocument/2006/relationships" xmlns:c="http://schemas.openxmlformats.org/drawingml/2006/chart" xmlns:a="http://schemas.openxmlformats.org/drawingml/2006/main" xmlns:dgm="http://schemas.openxmlformats.org/drawingml/2006/diagram" xmlns:dsp="http://schemas.microsoft.com/office/drawing/2008/diagram" xmlns:p="http://schemas.openxmlformats.org/presentationml/2006/main">
+<p:sld xmlns:a="http://schemas.openxmlformats.org/drawingml/2006/main" xmlns:r="http://schemas.openxmlformats.org/officeDocument/2006/relationships" xmlns:p="http://schemas.openxmlformats.org/presentationml/2006/main">
   <p:cSld name="Slide 15">
     <p:bg>
-      <p:bgPr shadeToTitle="0">
+      <p:bgPr>
         <a:solidFill>
-          <a:srgbClr val="ffffff"/>
+          <a:srgbClr val="FFFFFF"/>
         </a:solidFill>
+        <a:effectLst/>
       </p:bgPr>
     </p:bg>
     <p:spTree>
@@ -6052,7 +5951,7 @@
             <a:r>
               <a:rPr lang="en-US" sz="1200" b="1" kern="0" spc="200">
                 <a:solidFill>
-                  <a:srgbClr val="c8622e"/>
+                  <a:srgbClr val="C8622E"/>
                 </a:solidFill>
                 <a:latin typeface="맑은 고딕"/>
                 <a:ea typeface="맑은 고딕"/>
@@ -6092,7 +5991,7 @@
             <a:r>
               <a:rPr lang="en-US" sz="2900" b="1">
                 <a:solidFill>
-                  <a:srgbClr val="1f2637"/>
+                  <a:srgbClr val="1F2637"/>
                 </a:solidFill>
                 <a:latin typeface="맑은 고딕"/>
                 <a:ea typeface="맑은 고딕"/>
@@ -6121,11 +6020,11 @@
             </a:avLst>
           </a:prstGeom>
           <a:solidFill>
-            <a:srgbClr val="f4f6fa"/>
+            <a:srgbClr val="F4F6FA"/>
           </a:solidFill>
           <a:ln w="12700">
             <a:solidFill>
-              <a:srgbClr val="d9dee6"/>
+              <a:srgbClr val="D9DEE6"/>
             </a:solidFill>
             <a:prstDash val="solid"/>
           </a:ln>
@@ -6139,6 +6038,7 @@
         </p:spPr>
         <p:txBody>
           <a:bodyPr anchor="ctr"/>
+          <a:lstStyle/>
           <a:p>
             <a:pPr algn="ctr">
               <a:defRPr/>
@@ -6175,7 +6075,7 @@
             <a:r>
               <a:rPr lang="en-US" sz="1400" b="1">
                 <a:solidFill>
-                  <a:srgbClr val="c8622e"/>
+                  <a:srgbClr val="C8622E"/>
                 </a:solidFill>
                 <a:latin typeface="맑은 고딕"/>
                 <a:ea typeface="맑은 고딕"/>
@@ -6218,7 +6118,7 @@
             <a:r>
               <a:rPr lang="en-US" sz="1150">
                 <a:solidFill>
-                  <a:srgbClr val="1f2637"/>
+                  <a:srgbClr val="1F2637"/>
                 </a:solidFill>
                 <a:latin typeface="맑은 고딕"/>
                 <a:ea typeface="맑은 고딕"/>
@@ -6226,14 +6126,6 @@
               </a:rPr>
               <a:t>맵에 따라 약/중/강 공격 콤보의 위력과 스트레스 증감이 달라진다</a:t>
             </a:r>
-            <a:endParaRPr lang="en-US" sz="1150">
-              <a:solidFill>
-                <a:srgbClr val="1f2637"/>
-              </a:solidFill>
-              <a:latin typeface="맑은 고딕"/>
-              <a:ea typeface="맑은 고딕"/>
-              <a:cs typeface="맑은 고딕"/>
-            </a:endParaRPr>
           </a:p>
           <a:p>
             <a:pPr marL="0" indent="0">
@@ -6246,7 +6138,7 @@
             <a:r>
               <a:rPr lang="en-US" sz="1150">
                 <a:solidFill>
-                  <a:srgbClr val="1f2637"/>
+                  <a:srgbClr val="1F2637"/>
                 </a:solidFill>
                 <a:latin typeface="맑은 고딕"/>
                 <a:ea typeface="맑은 고딕"/>
@@ -6334,7 +6226,7 @@
             <a:r>
               <a:rPr lang="en-US" sz="950" i="1">
                 <a:solidFill>
-                  <a:srgbClr val="6c7686"/>
+                  <a:srgbClr val="6C7686"/>
                 </a:solidFill>
                 <a:latin typeface="맑은 고딕"/>
                 <a:ea typeface="맑은 고딕"/>
@@ -6374,7 +6266,7 @@
             <a:r>
               <a:rPr lang="en-US" sz="950" i="1">
                 <a:solidFill>
-                  <a:srgbClr val="6c7686"/>
+                  <a:srgbClr val="6C7686"/>
                 </a:solidFill>
                 <a:latin typeface="맑은 고딕"/>
                 <a:ea typeface="맑은 고딕"/>
@@ -6403,11 +6295,11 @@
             </a:avLst>
           </a:prstGeom>
           <a:solidFill>
-            <a:srgbClr val="16223b"/>
+            <a:srgbClr val="16223B"/>
           </a:solidFill>
           <a:ln w="12700">
             <a:solidFill>
-              <a:srgbClr val="d9dee6"/>
+              <a:srgbClr val="D9DEE6"/>
             </a:solidFill>
             <a:prstDash val="solid"/>
           </a:ln>
@@ -6421,6 +6313,7 @@
         </p:spPr>
         <p:txBody>
           <a:bodyPr anchor="ctr"/>
+          <a:lstStyle/>
           <a:p>
             <a:pPr algn="ctr">
               <a:defRPr/>
@@ -6457,7 +6350,7 @@
             <a:r>
               <a:rPr lang="en-US" sz="1400" b="1">
                 <a:solidFill>
-                  <a:srgbClr val="e0a15a"/>
+                  <a:srgbClr val="E0A15A"/>
                 </a:solidFill>
                 <a:latin typeface="맑은 고딕"/>
                 <a:ea typeface="맑은 고딕"/>
@@ -6500,7 +6393,7 @@
             <a:r>
               <a:rPr lang="en-US" sz="1200">
                 <a:solidFill>
-                  <a:srgbClr val="eaf0fa"/>
+                  <a:srgbClr val="EAF0FA"/>
                 </a:solidFill>
                 <a:latin typeface="맑은 고딕"/>
                 <a:ea typeface="맑은 고딕"/>
@@ -6508,14 +6401,6 @@
               </a:rPr>
               <a:t>꿈 속 세계라 던전마다 세계관·기믹·적이 전혀 다르다.</a:t>
             </a:r>
-            <a:endParaRPr lang="en-US" sz="1200">
-              <a:solidFill>
-                <a:srgbClr val="eaf0fa"/>
-              </a:solidFill>
-              <a:latin typeface="맑은 고딕"/>
-              <a:ea typeface="맑은 고딕"/>
-              <a:cs typeface="맑은 고딕"/>
-            </a:endParaRPr>
           </a:p>
           <a:p>
             <a:pPr marL="0" indent="0">
@@ -6528,7 +6413,7 @@
             <a:r>
               <a:rPr lang="en-US" sz="1200">
                 <a:solidFill>
-                  <a:srgbClr val="eaf0fa"/>
+                  <a:srgbClr val="EAF0FA"/>
                 </a:solidFill>
                 <a:latin typeface="맑은 고딕"/>
                 <a:ea typeface="맑은 고딕"/>
@@ -6539,7 +6424,7 @@
             <a:r>
               <a:rPr lang="ko-KR" altLang="en-US" sz="1200">
                 <a:solidFill>
-                  <a:srgbClr val="eaf0fa"/>
+                  <a:srgbClr val="EAF0FA"/>
                 </a:solidFill>
                 <a:latin typeface="맑은 고딕"/>
                 <a:ea typeface="맑은 고딕"/>
@@ -6550,7 +6435,7 @@
             <a:r>
               <a:rPr lang="en-US" sz="1200">
                 <a:solidFill>
-                  <a:srgbClr val="eaf0fa"/>
+                  <a:srgbClr val="EAF0FA"/>
                 </a:solidFill>
                 <a:latin typeface="맑은 고딕"/>
                 <a:ea typeface="맑은 고딕"/>
@@ -6561,7 +6446,7 @@
             <a:r>
               <a:rPr lang="ko-KR" altLang="en-US" sz="1200">
                 <a:solidFill>
-                  <a:srgbClr val="eaf0fa"/>
+                  <a:srgbClr val="EAF0FA"/>
                 </a:solidFill>
                 <a:latin typeface="맑은 고딕"/>
                 <a:ea typeface="맑은 고딕"/>
@@ -6572,7 +6457,7 @@
             <a:r>
               <a:rPr lang="en-US" sz="1200">
                 <a:solidFill>
-                  <a:srgbClr val="eaf0fa"/>
+                  <a:srgbClr val="EAF0FA"/>
                 </a:solidFill>
                 <a:latin typeface="맑은 고딕"/>
                 <a:ea typeface="맑은 고딕"/>
@@ -6580,14 +6465,6 @@
               </a:rPr>
               <a:t>.</a:t>
             </a:r>
-            <a:endParaRPr lang="en-US" sz="1200">
-              <a:solidFill>
-                <a:srgbClr val="eaf0fa"/>
-              </a:solidFill>
-              <a:latin typeface="맑은 고딕"/>
-              <a:ea typeface="맑은 고딕"/>
-              <a:cs typeface="맑은 고딕"/>
-            </a:endParaRPr>
           </a:p>
         </p:txBody>
       </p:sp>
@@ -6608,11 +6485,11 @@
             </a:avLst>
           </a:prstGeom>
           <a:solidFill>
-            <a:srgbClr val="f4f6fa"/>
+            <a:srgbClr val="F4F6FA"/>
           </a:solidFill>
           <a:ln w="12700">
             <a:solidFill>
-              <a:srgbClr val="d9dee6"/>
+              <a:srgbClr val="D9DEE6"/>
             </a:solidFill>
             <a:prstDash val="solid"/>
           </a:ln>
@@ -6626,6 +6503,7 @@
         </p:spPr>
         <p:txBody>
           <a:bodyPr anchor="ctr"/>
+          <a:lstStyle/>
           <a:p>
             <a:pPr algn="ctr">
               <a:defRPr/>
@@ -6662,7 +6540,7 @@
             <a:r>
               <a:rPr lang="en-US" sz="1250" b="1">
                 <a:solidFill>
-                  <a:srgbClr val="1f2637"/>
+                  <a:srgbClr val="1F2637"/>
                 </a:solidFill>
                 <a:latin typeface="맑은 고딕"/>
                 <a:ea typeface="맑은 고딕"/>
@@ -6691,17 +6569,18 @@
             </a:avLst>
           </a:prstGeom>
           <a:solidFill>
-            <a:srgbClr val="ffffff"/>
+            <a:srgbClr val="FFFFFF"/>
           </a:solidFill>
           <a:ln w="12700">
             <a:solidFill>
-              <a:srgbClr val="d9dee6"/>
+              <a:srgbClr val="D9DEE6"/>
             </a:solidFill>
             <a:prstDash val="solid"/>
           </a:ln>
         </p:spPr>
         <p:txBody>
           <a:bodyPr anchor="ctr"/>
+          <a:lstStyle/>
           <a:p>
             <a:pPr algn="ctr">
               <a:defRPr/>
@@ -6738,7 +6617,7 @@
             <a:r>
               <a:rPr lang="en-US" sz="1300" b="1">
                 <a:solidFill>
-                  <a:srgbClr val="c8622e"/>
+                  <a:srgbClr val="C8622E"/>
                 </a:solidFill>
                 <a:latin typeface="맑은 고딕"/>
                 <a:ea typeface="맑은 고딕"/>
@@ -6778,7 +6657,7 @@
             <a:r>
               <a:rPr lang="en-US" sz="1050">
                 <a:solidFill>
-                  <a:srgbClr val="6c7686"/>
+                  <a:srgbClr val="6C7686"/>
                 </a:solidFill>
                 <a:latin typeface="맑은 고딕"/>
                 <a:ea typeface="맑은 고딕"/>
@@ -6818,7 +6697,7 @@
             <a:r>
               <a:rPr lang="en-US" sz="1800">
                 <a:solidFill>
-                  <a:srgbClr val="c8622e"/>
+                  <a:srgbClr val="C8622E"/>
                 </a:solidFill>
                 <a:latin typeface="Arial"/>
                 <a:ea typeface="Arial"/>
@@ -6847,17 +6726,18 @@
             </a:avLst>
           </a:prstGeom>
           <a:solidFill>
-            <a:srgbClr val="ffffff"/>
+            <a:srgbClr val="FFFFFF"/>
           </a:solidFill>
           <a:ln w="12700">
             <a:solidFill>
-              <a:srgbClr val="d9dee6"/>
+              <a:srgbClr val="D9DEE6"/>
             </a:solidFill>
             <a:prstDash val="solid"/>
           </a:ln>
         </p:spPr>
         <p:txBody>
           <a:bodyPr anchor="ctr"/>
+          <a:lstStyle/>
           <a:p>
             <a:pPr algn="ctr">
               <a:defRPr/>
@@ -6894,7 +6774,7 @@
             <a:r>
               <a:rPr lang="en-US" sz="1300" b="1">
                 <a:solidFill>
-                  <a:srgbClr val="c8622e"/>
+                  <a:srgbClr val="C8622E"/>
                 </a:solidFill>
                 <a:latin typeface="맑은 고딕"/>
                 <a:ea typeface="맑은 고딕"/>
@@ -6934,7 +6814,7 @@
             <a:r>
               <a:rPr lang="en-US" sz="1050">
                 <a:solidFill>
-                  <a:srgbClr val="6c7686"/>
+                  <a:srgbClr val="6C7686"/>
                 </a:solidFill>
                 <a:latin typeface="맑은 고딕"/>
                 <a:ea typeface="맑은 고딕"/>
@@ -6974,7 +6854,7 @@
             <a:r>
               <a:rPr lang="en-US" sz="1800">
                 <a:solidFill>
-                  <a:srgbClr val="c8622e"/>
+                  <a:srgbClr val="C8622E"/>
                 </a:solidFill>
                 <a:latin typeface="Arial"/>
                 <a:ea typeface="Arial"/>
@@ -7003,17 +6883,18 @@
             </a:avLst>
           </a:prstGeom>
           <a:solidFill>
-            <a:srgbClr val="ffffff"/>
+            <a:srgbClr val="FFFFFF"/>
           </a:solidFill>
           <a:ln w="12700">
             <a:solidFill>
-              <a:srgbClr val="d9dee6"/>
+              <a:srgbClr val="D9DEE6"/>
             </a:solidFill>
             <a:prstDash val="solid"/>
           </a:ln>
         </p:spPr>
         <p:txBody>
           <a:bodyPr anchor="ctr"/>
+          <a:lstStyle/>
           <a:p>
             <a:pPr algn="ctr">
               <a:defRPr/>
@@ -7050,7 +6931,7 @@
             <a:r>
               <a:rPr lang="en-US" sz="1300" b="1">
                 <a:solidFill>
-                  <a:srgbClr val="c8622e"/>
+                  <a:srgbClr val="C8622E"/>
                 </a:solidFill>
                 <a:latin typeface="맑은 고딕"/>
                 <a:ea typeface="맑은 고딕"/>
@@ -7090,7 +6971,7 @@
             <a:r>
               <a:rPr lang="en-US" sz="1050">
                 <a:solidFill>
-                  <a:srgbClr val="6c7686"/>
+                  <a:srgbClr val="6C7686"/>
                 </a:solidFill>
                 <a:latin typeface="맑은 고딕"/>
                 <a:ea typeface="맑은 고딕"/>
@@ -7130,7 +7011,7 @@
             <a:r>
               <a:rPr lang="en-US" sz="900">
                 <a:solidFill>
-                  <a:srgbClr val="6c7686"/>
+                  <a:srgbClr val="6C7686"/>
                 </a:solidFill>
                 <a:latin typeface="맑은 고딕"/>
                 <a:ea typeface="맑은 고딕"/>
@@ -7170,7 +7051,7 @@
             <a:r>
               <a:rPr lang="en-US" sz="900">
                 <a:solidFill>
-                  <a:srgbClr val="6c7686"/>
+                  <a:srgbClr val="6C7686"/>
                 </a:solidFill>
                 <a:latin typeface="맑은 고딕"/>
                 <a:ea typeface="맑은 고딕"/>
@@ -7187,11 +7068,11 @@
   <p:clrMapOvr>
     <a:masterClrMapping/>
   </p:clrMapOvr>
-  <mc:AlternateContent xmlns:mc="http://schemas.openxmlformats.org/markup-compatibility/2006">
-    <mc:Choice xmlns:p14="http://schemas.microsoft.com/office/powerpoint/2010/main" Requires="p14">
-      <p:transition xmlns:mc="http://schemas.openxmlformats.org/markup-compatibility/2006" xmlns:p14="http://schemas.microsoft.com/office/powerpoint/2010/main" mc:Ignorable="p14" p14:dur="500"/>
+  <mc:AlternateContent xmlns:mc="http://schemas.openxmlformats.org/markup-compatibility/2006" xmlns:p14="http://schemas.microsoft.com/office/powerpoint/2010/main">
+    <mc:Choice Requires="p14">
+      <p:transition/>
     </mc:Choice>
-    <mc:Fallback>
+    <mc:Fallback xmlns:dsp="http://schemas.microsoft.com/office/drawing/2008/diagram" xmlns:dgm="http://schemas.openxmlformats.org/drawingml/2006/diagram" xmlns:c="http://schemas.openxmlformats.org/drawingml/2006/chart" xmlns="">
       <p:transition/>
     </mc:Fallback>
   </mc:AlternateContent>
@@ -7199,13 +7080,14 @@
 </file>
 
 <file path=ppt/slides/slide15.xml><?xml version="1.0" encoding="utf-8"?>
-<p:sld xmlns:r="http://schemas.openxmlformats.org/officeDocument/2006/relationships" xmlns:c="http://schemas.openxmlformats.org/drawingml/2006/chart" xmlns:a="http://schemas.openxmlformats.org/drawingml/2006/main" xmlns:dgm="http://schemas.openxmlformats.org/drawingml/2006/diagram" xmlns:dsp="http://schemas.microsoft.com/office/drawing/2008/diagram" xmlns:p="http://schemas.openxmlformats.org/presentationml/2006/main">
+<p:sld xmlns:a="http://schemas.openxmlformats.org/drawingml/2006/main" xmlns:r="http://schemas.openxmlformats.org/officeDocument/2006/relationships" xmlns:p="http://schemas.openxmlformats.org/presentationml/2006/main">
   <p:cSld name="Slide 18">
     <p:bg>
-      <p:bgPr shadeToTitle="0">
+      <p:bgPr>
         <a:solidFill>
-          <a:srgbClr val="16223b"/>
+          <a:srgbClr val="16223B"/>
         </a:solidFill>
+        <a:effectLst/>
       </p:bgPr>
     </p:bg>
     <p:spTree>
@@ -7250,7 +7132,7 @@
             <a:r>
               <a:rPr lang="en-US" sz="1200" b="1" kern="0" spc="200">
                 <a:solidFill>
-                  <a:srgbClr val="e0a15a"/>
+                  <a:srgbClr val="E0A15A"/>
                 </a:solidFill>
                 <a:latin typeface="맑은 고딕"/>
                 <a:ea typeface="맑은 고딕"/>
@@ -7293,7 +7175,7 @@
             <a:r>
               <a:rPr lang="en-US" sz="2400" b="1">
                 <a:solidFill>
-                  <a:srgbClr val="ffffff"/>
+                  <a:srgbClr val="FFFFFF"/>
                 </a:solidFill>
                 <a:latin typeface="맑은 고딕"/>
                 <a:ea typeface="맑은 고딕"/>
@@ -7304,7 +7186,7 @@
             <a:r>
               <a:rPr lang="ko-KR" altLang="en-US" sz="2400" b="1">
                 <a:solidFill>
-                  <a:srgbClr val="ffffff"/>
+                  <a:srgbClr val="FFFFFF"/>
                 </a:solidFill>
                 <a:latin typeface="맑은 고딕"/>
                 <a:ea typeface="맑은 고딕"/>
@@ -7315,7 +7197,7 @@
             <a:r>
               <a:rPr lang="en-US" sz="2400" b="1">
                 <a:solidFill>
-                  <a:srgbClr val="ffffff"/>
+                  <a:srgbClr val="FFFFFF"/>
                 </a:solidFill>
                 <a:latin typeface="맑은 고딕"/>
                 <a:ea typeface="맑은 고딕"/>
@@ -7323,14 +7205,6 @@
               </a:rPr>
               <a:t>에서 시작한다</a:t>
             </a:r>
-            <a:endParaRPr lang="en-US" sz="2400" b="1">
-              <a:solidFill>
-                <a:srgbClr val="ffffff"/>
-              </a:solidFill>
-              <a:latin typeface="맑은 고딕"/>
-              <a:ea typeface="맑은 고딕"/>
-              <a:cs typeface="맑은 고딕"/>
-            </a:endParaRPr>
           </a:p>
         </p:txBody>
       </p:sp>
@@ -7351,11 +7225,11 @@
             </a:avLst>
           </a:prstGeom>
           <a:solidFill>
-            <a:srgbClr val="24324f"/>
+            <a:srgbClr val="24324F"/>
           </a:solidFill>
           <a:ln w="12700">
             <a:solidFill>
-              <a:srgbClr val="d9dee6"/>
+              <a:srgbClr val="D9DEE6"/>
             </a:solidFill>
             <a:prstDash val="solid"/>
           </a:ln>
@@ -7369,6 +7243,7 @@
         </p:spPr>
         <p:txBody>
           <a:bodyPr anchor="ctr"/>
+          <a:lstStyle/>
           <a:p>
             <a:pPr algn="ctr">
               <a:defRPr/>
@@ -7405,7 +7280,7 @@
             <a:r>
               <a:rPr lang="en-US" sz="4000" b="1">
                 <a:solidFill>
-                  <a:srgbClr val="c8622e"/>
+                  <a:srgbClr val="C8622E"/>
                 </a:solidFill>
                 <a:latin typeface="Arial"/>
                 <a:ea typeface="Arial"/>
@@ -7445,7 +7320,7 @@
             <a:r>
               <a:rPr lang="ko-KR" altLang="en-US" sz="1700" b="1">
                 <a:solidFill>
-                  <a:srgbClr val="ffffff"/>
+                  <a:srgbClr val="FFFFFF"/>
                 </a:solidFill>
                 <a:latin typeface="맑은 고딕"/>
                 <a:ea typeface="맑은 고딕"/>
@@ -7453,14 +7328,6 @@
               </a:rPr>
               <a:t>유저의 플레이 예상</a:t>
             </a:r>
-            <a:endParaRPr lang="ko-KR" altLang="en-US" sz="1700" b="1">
-              <a:solidFill>
-                <a:srgbClr val="ffffff"/>
-              </a:solidFill>
-              <a:latin typeface="맑은 고딕"/>
-              <a:ea typeface="맑은 고딕"/>
-              <a:cs typeface="맑은 고딕"/>
-            </a:endParaRPr>
           </a:p>
         </p:txBody>
       </p:sp>
@@ -7495,7 +7362,7 @@
             <a:r>
               <a:rPr lang="en-US" sz="1300">
                 <a:solidFill>
-                  <a:srgbClr val="eaf0fa"/>
+                  <a:srgbClr val="EAF0FA"/>
                 </a:solidFill>
                 <a:latin typeface="맑은 고딕"/>
                 <a:ea typeface="맑은 고딕"/>
@@ -7524,11 +7391,11 @@
             </a:avLst>
           </a:prstGeom>
           <a:solidFill>
-            <a:srgbClr val="24324f"/>
+            <a:srgbClr val="24324F"/>
           </a:solidFill>
           <a:ln w="12700">
             <a:solidFill>
-              <a:srgbClr val="d9dee6"/>
+              <a:srgbClr val="D9DEE6"/>
             </a:solidFill>
             <a:prstDash val="solid"/>
           </a:ln>
@@ -7542,6 +7409,7 @@
         </p:spPr>
         <p:txBody>
           <a:bodyPr anchor="ctr"/>
+          <a:lstStyle/>
           <a:p>
             <a:pPr algn="ctr">
               <a:defRPr/>
@@ -7578,7 +7446,7 @@
             <a:r>
               <a:rPr lang="en-US" sz="4000" b="1">
                 <a:solidFill>
-                  <a:srgbClr val="c8622e"/>
+                  <a:srgbClr val="C8622E"/>
                 </a:solidFill>
                 <a:latin typeface="Arial"/>
                 <a:ea typeface="Arial"/>
@@ -7618,7 +7486,7 @@
             <a:r>
               <a:rPr lang="en-US" sz="1700" b="1">
                 <a:solidFill>
-                  <a:srgbClr val="ffffff"/>
+                  <a:srgbClr val="FFFFFF"/>
                 </a:solidFill>
                 <a:latin typeface="맑은 고딕"/>
                 <a:ea typeface="맑은 고딕"/>
@@ -7661,7 +7529,7 @@
             <a:r>
               <a:rPr lang="en-US" sz="1300">
                 <a:solidFill>
-                  <a:srgbClr val="eaf0fa"/>
+                  <a:srgbClr val="EAF0FA"/>
                 </a:solidFill>
                 <a:latin typeface="맑은 고딕"/>
                 <a:ea typeface="맑은 고딕"/>
@@ -7669,14 +7537,6 @@
               </a:rPr>
               <a:t>무엇을 가르치고 어디서 검증할지 — </a:t>
             </a:r>
-            <a:endParaRPr lang="en-US" sz="1300">
-              <a:solidFill>
-                <a:srgbClr val="eaf0fa"/>
-              </a:solidFill>
-              <a:latin typeface="맑은 고딕"/>
-              <a:ea typeface="맑은 고딕"/>
-              <a:cs typeface="맑은 고딕"/>
-            </a:endParaRPr>
           </a:p>
           <a:p>
             <a:pPr marL="0" indent="0">
@@ -7689,7 +7549,7 @@
             <a:r>
               <a:rPr lang="en-US" sz="1300">
                 <a:solidFill>
-                  <a:srgbClr val="eaf0fa"/>
+                  <a:srgbClr val="EAF0FA"/>
                 </a:solidFill>
                 <a:latin typeface="맑은 고딕"/>
                 <a:ea typeface="맑은 고딕"/>
@@ -7718,11 +7578,11 @@
             </a:avLst>
           </a:prstGeom>
           <a:solidFill>
-            <a:srgbClr val="24324f"/>
+            <a:srgbClr val="24324F"/>
           </a:solidFill>
           <a:ln w="12700">
             <a:solidFill>
-              <a:srgbClr val="d9dee6"/>
+              <a:srgbClr val="D9DEE6"/>
             </a:solidFill>
             <a:prstDash val="solid"/>
           </a:ln>
@@ -7736,6 +7596,7 @@
         </p:spPr>
         <p:txBody>
           <a:bodyPr anchor="ctr"/>
+          <a:lstStyle/>
           <a:p>
             <a:pPr algn="ctr">
               <a:defRPr/>
@@ -7772,7 +7633,7 @@
             <a:r>
               <a:rPr lang="en-US" sz="4000" b="1">
                 <a:solidFill>
-                  <a:srgbClr val="c8622e"/>
+                  <a:srgbClr val="C8622E"/>
                 </a:solidFill>
                 <a:latin typeface="Arial"/>
                 <a:ea typeface="Arial"/>
@@ -7812,7 +7673,7 @@
             <a:r>
               <a:rPr lang="en-US" sz="1700" b="1">
                 <a:solidFill>
-                  <a:srgbClr val="ffffff"/>
+                  <a:srgbClr val="FFFFFF"/>
                 </a:solidFill>
                 <a:latin typeface="맑은 고딕"/>
                 <a:ea typeface="맑은 고딕"/>
@@ -7855,7 +7716,7 @@
             <a:r>
               <a:rPr lang="en-US" sz="1300">
                 <a:solidFill>
-                  <a:srgbClr val="eaf0fa"/>
+                  <a:srgbClr val="EAF0FA"/>
                 </a:solidFill>
                 <a:latin typeface="맑은 고딕"/>
                 <a:ea typeface="맑은 고딕"/>
@@ -7863,14 +7724,6 @@
               </a:rPr>
               <a:t>서버를 직접 다뤄본 감각으로 </a:t>
             </a:r>
-            <a:endParaRPr lang="en-US" sz="1300">
-              <a:solidFill>
-                <a:srgbClr val="eaf0fa"/>
-              </a:solidFill>
-              <a:latin typeface="맑은 고딕"/>
-              <a:ea typeface="맑은 고딕"/>
-              <a:cs typeface="맑은 고딕"/>
-            </a:endParaRPr>
           </a:p>
           <a:p>
             <a:pPr marL="0" indent="0">
@@ -7883,7 +7736,7 @@
             <a:r>
               <a:rPr lang="en-US" sz="1300">
                 <a:solidFill>
-                  <a:srgbClr val="eaf0fa"/>
+                  <a:srgbClr val="EAF0FA"/>
                 </a:solidFill>
                 <a:latin typeface="맑은 고딕"/>
                 <a:ea typeface="맑은 고딕"/>
@@ -7923,7 +7776,7 @@
             <a:r>
               <a:rPr lang="en-US" sz="900">
                 <a:solidFill>
-                  <a:srgbClr val="6c7686"/>
+                  <a:srgbClr val="6C7686"/>
                 </a:solidFill>
                 <a:latin typeface="맑은 고딕"/>
                 <a:ea typeface="맑은 고딕"/>
@@ -7963,7 +7816,7 @@
             <a:r>
               <a:rPr lang="en-US" sz="900">
                 <a:solidFill>
-                  <a:srgbClr val="6c7686"/>
+                  <a:srgbClr val="6C7686"/>
                 </a:solidFill>
                 <a:latin typeface="맑은 고딕"/>
                 <a:ea typeface="맑은 고딕"/>
@@ -7980,11 +7833,11 @@
   <p:clrMapOvr>
     <a:masterClrMapping/>
   </p:clrMapOvr>
-  <mc:AlternateContent xmlns:mc="http://schemas.openxmlformats.org/markup-compatibility/2006">
-    <mc:Choice xmlns:p14="http://schemas.microsoft.com/office/powerpoint/2010/main" Requires="p14">
-      <p:transition xmlns:mc="http://schemas.openxmlformats.org/markup-compatibility/2006" xmlns:p14="http://schemas.microsoft.com/office/powerpoint/2010/main" mc:Ignorable="p14" p14:dur="500"/>
+  <mc:AlternateContent xmlns:mc="http://schemas.openxmlformats.org/markup-compatibility/2006" xmlns:p14="http://schemas.microsoft.com/office/powerpoint/2010/main">
+    <mc:Choice Requires="p14">
+      <p:transition/>
     </mc:Choice>
-    <mc:Fallback>
+    <mc:Fallback xmlns:dsp="http://schemas.microsoft.com/office/drawing/2008/diagram" xmlns:dgm="http://schemas.openxmlformats.org/drawingml/2006/diagram" xmlns:c="http://schemas.openxmlformats.org/drawingml/2006/chart" xmlns="">
       <p:transition/>
     </mc:Fallback>
   </mc:AlternateContent>
@@ -7992,13 +7845,14 @@
 </file>
 
 <file path=ppt/slides/slide16.xml><?xml version="1.0" encoding="utf-8"?>
-<p:sld xmlns:r="http://schemas.openxmlformats.org/officeDocument/2006/relationships" xmlns:c="http://schemas.openxmlformats.org/drawingml/2006/chart" xmlns:a="http://schemas.openxmlformats.org/drawingml/2006/main" xmlns:dgm="http://schemas.openxmlformats.org/drawingml/2006/diagram" xmlns:dsp="http://schemas.microsoft.com/office/drawing/2008/diagram" xmlns:p="http://schemas.openxmlformats.org/presentationml/2006/main">
+<p:sld xmlns:a="http://schemas.openxmlformats.org/drawingml/2006/main" xmlns:r="http://schemas.openxmlformats.org/officeDocument/2006/relationships" xmlns:p="http://schemas.openxmlformats.org/presentationml/2006/main">
   <p:cSld name="Slide 20">
     <p:bg>
-      <p:bgPr shadeToTitle="0">
+      <p:bgPr>
         <a:solidFill>
-          <a:srgbClr val="16223b"/>
+          <a:srgbClr val="16223B"/>
         </a:solidFill>
+        <a:effectLst/>
       </p:bgPr>
     </p:bg>
     <p:spTree>
@@ -8043,7 +7897,7 @@
             <a:r>
               <a:rPr lang="en-US" sz="4400" b="1">
                 <a:solidFill>
-                  <a:srgbClr val="ffffff"/>
+                  <a:srgbClr val="FFFFFF"/>
                 </a:solidFill>
                 <a:latin typeface="맑은 고딕"/>
                 <a:ea typeface="맑은 고딕"/>
@@ -8083,7 +7937,7 @@
             <a:r>
               <a:rPr lang="en-US" sz="1800">
                 <a:solidFill>
-                  <a:srgbClr val="e0a15a"/>
+                  <a:srgbClr val="E0A15A"/>
                 </a:solidFill>
                 <a:latin typeface="맑은 고딕"/>
                 <a:ea typeface="맑은 고딕"/>
@@ -8112,13 +7966,14 @@
           <a:noFill/>
           <a:ln w="25400">
             <a:solidFill>
-              <a:srgbClr val="c8622e"/>
+              <a:srgbClr val="C8622E"/>
             </a:solidFill>
             <a:prstDash val="solid"/>
           </a:ln>
         </p:spPr>
         <p:txBody>
           <a:bodyPr wrap="square" anchor="ctr"/>
+          <a:lstStyle/>
           <a:p>
             <a:pPr algn="ctr">
               <a:defRPr/>
@@ -8155,7 +8010,7 @@
             <a:r>
               <a:rPr lang="en-US" sz="1400">
                 <a:solidFill>
-                  <a:srgbClr val="eaf0fa"/>
+                  <a:srgbClr val="EAF0FA"/>
                 </a:solidFill>
                 <a:latin typeface="맑은 고딕"/>
                 <a:ea typeface="맑은 고딕"/>
@@ -8166,7 +8021,7 @@
             <a:r>
               <a:rPr lang="en-US" altLang="ko-KR" sz="1400">
                 <a:solidFill>
-                  <a:srgbClr val="eaf0fa"/>
+                  <a:srgbClr val="EAF0FA"/>
                 </a:solidFill>
                 <a:latin typeface="맑은 고딕"/>
                 <a:ea typeface="맑은 고딕"/>
@@ -8177,7 +8032,7 @@
             <a:r>
               <a:rPr lang="en-US" sz="1400">
                 <a:solidFill>
-                  <a:srgbClr val="eaf0fa"/>
+                  <a:srgbClr val="EAF0FA"/>
                 </a:solidFill>
                 <a:latin typeface="맑은 고딕"/>
                 <a:ea typeface="맑은 고딕"/>
@@ -8185,14 +8040,6 @@
               </a:rPr>
               <a:t>@naver.com</a:t>
             </a:r>
-            <a:endParaRPr lang="en-US" sz="1400">
-              <a:solidFill>
-                <a:srgbClr val="eaf0fa"/>
-              </a:solidFill>
-              <a:latin typeface="맑은 고딕"/>
-              <a:ea typeface="맑은 고딕"/>
-              <a:cs typeface="맑은 고딕"/>
-            </a:endParaRPr>
           </a:p>
         </p:txBody>
       </p:sp>
@@ -8201,11 +8048,11 @@
   <p:clrMapOvr>
     <a:masterClrMapping/>
   </p:clrMapOvr>
-  <mc:AlternateContent xmlns:mc="http://schemas.openxmlformats.org/markup-compatibility/2006">
-    <mc:Choice xmlns:p14="http://schemas.microsoft.com/office/powerpoint/2010/main" Requires="p14">
-      <p:transition xmlns:mc="http://schemas.openxmlformats.org/markup-compatibility/2006" xmlns:p14="http://schemas.microsoft.com/office/powerpoint/2010/main" mc:Ignorable="p14" p14:dur="500"/>
+  <mc:AlternateContent xmlns:mc="http://schemas.openxmlformats.org/markup-compatibility/2006" xmlns:p14="http://schemas.microsoft.com/office/powerpoint/2010/main">
+    <mc:Choice Requires="p14">
+      <p:transition/>
     </mc:Choice>
-    <mc:Fallback>
+    <mc:Fallback xmlns:dsp="http://schemas.microsoft.com/office/drawing/2008/diagram" xmlns:dgm="http://schemas.openxmlformats.org/drawingml/2006/diagram" xmlns:c="http://schemas.openxmlformats.org/drawingml/2006/chart" xmlns="">
       <p:transition/>
     </mc:Fallback>
   </mc:AlternateContent>
@@ -8213,13 +8060,14 @@
 </file>
 
 <file path=ppt/slides/slide2.xml><?xml version="1.0" encoding="utf-8"?>
-<p:sld xmlns:r="http://schemas.openxmlformats.org/officeDocument/2006/relationships" xmlns:c="http://schemas.openxmlformats.org/drawingml/2006/chart" xmlns:a="http://schemas.openxmlformats.org/drawingml/2006/main" xmlns:dgm="http://schemas.openxmlformats.org/drawingml/2006/diagram" xmlns:dsp="http://schemas.microsoft.com/office/drawing/2008/diagram" xmlns:p="http://schemas.openxmlformats.org/presentationml/2006/main">
+<p:sld xmlns:a="http://schemas.openxmlformats.org/drawingml/2006/main" xmlns:r="http://schemas.openxmlformats.org/officeDocument/2006/relationships" xmlns:p="http://schemas.openxmlformats.org/presentationml/2006/main">
   <p:cSld name="Slide 2">
     <p:bg>
-      <p:bgPr shadeToTitle="0">
+      <p:bgPr>
         <a:solidFill>
-          <a:srgbClr val="ffffff"/>
+          <a:srgbClr val="FFFFFF"/>
         </a:solidFill>
+        <a:effectLst/>
       </p:bgPr>
     </p:bg>
     <p:spTree>
@@ -8264,7 +8112,7 @@
             <a:r>
               <a:rPr lang="en-US" sz="1200" b="1" kern="0" spc="200">
                 <a:solidFill>
-                  <a:srgbClr val="c8622e"/>
+                  <a:srgbClr val="C8622E"/>
                 </a:solidFill>
                 <a:latin typeface="맑은 고딕"/>
                 <a:ea typeface="맑은 고딕"/>
@@ -8304,7 +8152,7 @@
             <a:r>
               <a:rPr lang="en-US" sz="2900" b="1">
                 <a:solidFill>
-                  <a:srgbClr val="1f2637"/>
+                  <a:srgbClr val="1F2637"/>
                 </a:solidFill>
                 <a:latin typeface="맑은 고딕"/>
                 <a:ea typeface="맑은 고딕"/>
@@ -8333,7 +8181,7 @@
             </a:avLst>
           </a:prstGeom>
           <a:solidFill>
-            <a:srgbClr val="16223b"/>
+            <a:srgbClr val="16223B"/>
           </a:solidFill>
           <a:ln/>
           <a:effectLst>
@@ -8346,6 +8194,7 @@
         </p:spPr>
         <p:txBody>
           <a:bodyPr anchor="ctr"/>
+          <a:lstStyle/>
           <a:p>
             <a:pPr algn="ctr">
               <a:defRPr/>
@@ -8382,7 +8231,7 @@
             <a:r>
               <a:rPr lang="en-US" sz="2000" b="1">
                 <a:solidFill>
-                  <a:srgbClr val="ffffff"/>
+                  <a:srgbClr val="FFFFFF"/>
                 </a:solidFill>
                 <a:latin typeface="맑은 고딕"/>
                 <a:ea typeface="맑은 고딕"/>
@@ -8422,7 +8271,7 @@
             <a:r>
               <a:rPr lang="en-US" sz="1800" b="1">
                 <a:solidFill>
-                  <a:srgbClr val="1f2637"/>
+                  <a:srgbClr val="1F2637"/>
                 </a:solidFill>
                 <a:latin typeface="맑은 고딕"/>
                 <a:ea typeface="맑은 고딕"/>
@@ -8462,7 +8311,7 @@
             <a:r>
               <a:rPr lang="en-US" sz="1250">
                 <a:solidFill>
-                  <a:srgbClr val="6c7686"/>
+                  <a:srgbClr val="6C7686"/>
                 </a:solidFill>
                 <a:latin typeface="맑은 고딕"/>
                 <a:ea typeface="맑은 고딕"/>
@@ -8491,7 +8340,7 @@
             </a:avLst>
           </a:prstGeom>
           <a:solidFill>
-            <a:srgbClr val="24324f"/>
+            <a:srgbClr val="24324F"/>
           </a:solidFill>
           <a:ln/>
           <a:effectLst>
@@ -8504,6 +8353,7 @@
         </p:spPr>
         <p:txBody>
           <a:bodyPr anchor="ctr"/>
+          <a:lstStyle/>
           <a:p>
             <a:pPr algn="ctr">
               <a:defRPr/>
@@ -8540,7 +8390,7 @@
             <a:r>
               <a:rPr lang="en-US" sz="2000" b="1">
                 <a:solidFill>
-                  <a:srgbClr val="ffffff"/>
+                  <a:srgbClr val="FFFFFF"/>
                 </a:solidFill>
                 <a:latin typeface="맑은 고딕"/>
                 <a:ea typeface="맑은 고딕"/>
@@ -8580,7 +8430,7 @@
             <a:r>
               <a:rPr lang="en-US" sz="1800" b="1">
                 <a:solidFill>
-                  <a:srgbClr val="1f2637"/>
+                  <a:srgbClr val="1F2637"/>
                 </a:solidFill>
                 <a:latin typeface="맑은 고딕"/>
                 <a:ea typeface="맑은 고딕"/>
@@ -8620,7 +8470,7 @@
             <a:r>
               <a:rPr lang="en-US" sz="1250">
                 <a:solidFill>
-                  <a:srgbClr val="6c7686"/>
+                  <a:srgbClr val="6C7686"/>
                 </a:solidFill>
                 <a:latin typeface="맑은 고딕"/>
                 <a:ea typeface="맑은 고딕"/>
@@ -8649,7 +8499,7 @@
             </a:avLst>
           </a:prstGeom>
           <a:solidFill>
-            <a:srgbClr val="16223b"/>
+            <a:srgbClr val="16223B"/>
           </a:solidFill>
           <a:ln/>
           <a:effectLst>
@@ -8662,6 +8512,7 @@
         </p:spPr>
         <p:txBody>
           <a:bodyPr anchor="ctr"/>
+          <a:lstStyle/>
           <a:p>
             <a:pPr algn="ctr">
               <a:defRPr/>
@@ -8698,7 +8549,7 @@
             <a:r>
               <a:rPr lang="en-US" sz="2000" b="1">
                 <a:solidFill>
-                  <a:srgbClr val="ffffff"/>
+                  <a:srgbClr val="FFFFFF"/>
                 </a:solidFill>
                 <a:latin typeface="맑은 고딕"/>
                 <a:ea typeface="맑은 고딕"/>
@@ -8738,7 +8589,7 @@
             <a:r>
               <a:rPr lang="en-US" sz="1800" b="1">
                 <a:solidFill>
-                  <a:srgbClr val="1f2637"/>
+                  <a:srgbClr val="1F2637"/>
                 </a:solidFill>
                 <a:latin typeface="맑은 고딕"/>
                 <a:ea typeface="맑은 고딕"/>
@@ -8778,7 +8629,7 @@
             <a:r>
               <a:rPr lang="ko-KR" altLang="en-US" sz="1250">
                 <a:solidFill>
-                  <a:srgbClr val="6c7686"/>
+                  <a:srgbClr val="6C7686"/>
                 </a:solidFill>
                 <a:latin typeface="맑은 고딕"/>
                 <a:ea typeface="맑은 고딕"/>
@@ -8789,7 +8640,7 @@
             <a:r>
               <a:rPr lang="en-US" sz="1250">
                 <a:solidFill>
-                  <a:srgbClr val="6c7686"/>
+                  <a:srgbClr val="6C7686"/>
                 </a:solidFill>
                 <a:latin typeface="맑은 고딕"/>
                 <a:ea typeface="맑은 고딕"/>
@@ -8800,7 +8651,7 @@
             <a:r>
               <a:rPr lang="ko-KR" altLang="en-US" sz="1250">
                 <a:solidFill>
-                  <a:srgbClr val="6c7686"/>
+                  <a:srgbClr val="6C7686"/>
                 </a:solidFill>
                 <a:latin typeface="맑은 고딕"/>
                 <a:ea typeface="맑은 고딕"/>
@@ -8811,7 +8662,7 @@
             <a:r>
               <a:rPr lang="en-US" sz="1250">
                 <a:solidFill>
-                  <a:srgbClr val="6c7686"/>
+                  <a:srgbClr val="6C7686"/>
                 </a:solidFill>
                 <a:latin typeface="맑은 고딕"/>
                 <a:ea typeface="맑은 고딕"/>
@@ -8819,14 +8670,6 @@
               </a:rPr>
               <a:t> RPG 기획</a:t>
             </a:r>
-            <a:endParaRPr lang="en-US" sz="1250">
-              <a:solidFill>
-                <a:srgbClr val="6c7686"/>
-              </a:solidFill>
-              <a:latin typeface="맑은 고딕"/>
-              <a:ea typeface="맑은 고딕"/>
-              <a:cs typeface="맑은 고딕"/>
-            </a:endParaRPr>
           </a:p>
         </p:txBody>
       </p:sp>
@@ -8858,7 +8701,7 @@
             <a:r>
               <a:rPr lang="en-US" sz="2000" b="1">
                 <a:solidFill>
-                  <a:srgbClr val="ffffff"/>
+                  <a:srgbClr val="FFFFFF"/>
                 </a:solidFill>
                 <a:latin typeface="맑은 고딕"/>
                 <a:ea typeface="맑은 고딕"/>
@@ -8887,7 +8730,7 @@
             </a:avLst>
           </a:prstGeom>
           <a:solidFill>
-            <a:srgbClr val="16223b"/>
+            <a:srgbClr val="16223B"/>
           </a:solidFill>
           <a:ln/>
           <a:effectLst>
@@ -8900,6 +8743,7 @@
         </p:spPr>
         <p:txBody>
           <a:bodyPr anchor="ctr"/>
+          <a:lstStyle/>
           <a:p>
             <a:pPr algn="ctr">
               <a:defRPr/>
@@ -8936,7 +8780,7 @@
             <a:r>
               <a:rPr lang="en-US" sz="2000" b="1">
                 <a:solidFill>
-                  <a:srgbClr val="ffffff"/>
+                  <a:srgbClr val="FFFFFF"/>
                 </a:solidFill>
                 <a:latin typeface="맑은 고딕"/>
                 <a:ea typeface="맑은 고딕"/>
@@ -8947,7 +8791,7 @@
             <a:r>
               <a:rPr lang="en-US" altLang="ko-KR" sz="2000" b="1">
                 <a:solidFill>
-                  <a:srgbClr val="ffffff"/>
+                  <a:srgbClr val="FFFFFF"/>
                 </a:solidFill>
                 <a:latin typeface="맑은 고딕"/>
                 <a:ea typeface="맑은 고딕"/>
@@ -8955,14 +8799,6 @@
               </a:rPr>
               <a:t>4</a:t>
             </a:r>
-            <a:endParaRPr lang="en-US" altLang="ko-KR" sz="2000" b="1">
-              <a:solidFill>
-                <a:srgbClr val="ffffff"/>
-              </a:solidFill>
-              <a:latin typeface="맑은 고딕"/>
-              <a:ea typeface="맑은 고딕"/>
-              <a:cs typeface="맑은 고딕"/>
-            </a:endParaRPr>
           </a:p>
         </p:txBody>
       </p:sp>
@@ -8994,7 +8830,7 @@
             <a:r>
               <a:rPr lang="en-US" sz="1800" b="1">
                 <a:solidFill>
-                  <a:srgbClr val="1f2637"/>
+                  <a:srgbClr val="1F2637"/>
                 </a:solidFill>
                 <a:latin typeface="맑은 고딕"/>
                 <a:ea typeface="맑은 고딕"/>
@@ -9034,7 +8870,7 @@
             <a:r>
               <a:rPr lang="en-US" sz="1250">
                 <a:solidFill>
-                  <a:srgbClr val="6c7686"/>
+                  <a:srgbClr val="6C7686"/>
                 </a:solidFill>
                 <a:latin typeface="맑은 고딕"/>
                 <a:ea typeface="맑은 고딕"/>
@@ -9074,7 +8910,7 @@
             <a:r>
               <a:rPr lang="en-US" sz="900">
                 <a:solidFill>
-                  <a:srgbClr val="6c7686"/>
+                  <a:srgbClr val="6C7686"/>
                 </a:solidFill>
                 <a:latin typeface="맑은 고딕"/>
                 <a:ea typeface="맑은 고딕"/>
@@ -9114,7 +8950,7 @@
             <a:r>
               <a:rPr lang="en-US" sz="900">
                 <a:solidFill>
-                  <a:srgbClr val="6c7686"/>
+                  <a:srgbClr val="6C7686"/>
                 </a:solidFill>
                 <a:latin typeface="맑은 고딕"/>
                 <a:ea typeface="맑은 고딕"/>
@@ -9131,11 +8967,11 @@
   <p:clrMapOvr>
     <a:masterClrMapping/>
   </p:clrMapOvr>
-  <mc:AlternateContent xmlns:mc="http://schemas.openxmlformats.org/markup-compatibility/2006">
-    <mc:Choice xmlns:p14="http://schemas.microsoft.com/office/powerpoint/2010/main" Requires="p14">
-      <p:transition xmlns:mc="http://schemas.openxmlformats.org/markup-compatibility/2006" xmlns:p14="http://schemas.microsoft.com/office/powerpoint/2010/main" mc:Ignorable="p14" p14:dur="500"/>
+  <mc:AlternateContent xmlns:mc="http://schemas.openxmlformats.org/markup-compatibility/2006" xmlns:p14="http://schemas.microsoft.com/office/powerpoint/2010/main">
+    <mc:Choice Requires="p14">
+      <p:transition/>
     </mc:Choice>
-    <mc:Fallback>
+    <mc:Fallback xmlns:dsp="http://schemas.microsoft.com/office/drawing/2008/diagram" xmlns:dgm="http://schemas.openxmlformats.org/drawingml/2006/diagram" xmlns:c="http://schemas.openxmlformats.org/drawingml/2006/chart" xmlns="">
       <p:transition/>
     </mc:Fallback>
   </mc:AlternateContent>
@@ -9143,13 +8979,14 @@
 </file>
 
 <file path=ppt/slides/slide3.xml><?xml version="1.0" encoding="utf-8"?>
-<p:sld xmlns:r="http://schemas.openxmlformats.org/officeDocument/2006/relationships" xmlns:c="http://schemas.openxmlformats.org/drawingml/2006/chart" xmlns:a="http://schemas.openxmlformats.org/drawingml/2006/main" xmlns:dgm="http://schemas.openxmlformats.org/drawingml/2006/diagram" xmlns:dsp="http://schemas.microsoft.com/office/drawing/2008/diagram" xmlns:p="http://schemas.openxmlformats.org/presentationml/2006/main">
+<p:sld xmlns:a="http://schemas.openxmlformats.org/drawingml/2006/main" xmlns:r="http://schemas.openxmlformats.org/officeDocument/2006/relationships" xmlns:p="http://schemas.openxmlformats.org/presentationml/2006/main">
   <p:cSld name="Slide 3">
     <p:bg>
-      <p:bgPr shadeToTitle="0">
+      <p:bgPr>
         <a:solidFill>
-          <a:srgbClr val="ffffff"/>
+          <a:srgbClr val="FFFFFF"/>
         </a:solidFill>
+        <a:effectLst/>
       </p:bgPr>
     </p:bg>
     <p:spTree>
@@ -9194,7 +9031,7 @@
             <a:r>
               <a:rPr lang="en-US" sz="1200" b="1" kern="0" spc="200">
                 <a:solidFill>
-                  <a:srgbClr val="c8622e"/>
+                  <a:srgbClr val="C8622E"/>
                 </a:solidFill>
                 <a:latin typeface="맑은 고딕"/>
                 <a:ea typeface="맑은 고딕"/>
@@ -9234,7 +9071,7 @@
             <a:r>
               <a:rPr lang="en-US" sz="2900" b="1">
                 <a:solidFill>
-                  <a:srgbClr val="1f2637"/>
+                  <a:srgbClr val="1F2637"/>
                 </a:solidFill>
                 <a:latin typeface="맑은 고딕"/>
                 <a:ea typeface="맑은 고딕"/>
@@ -9263,11 +9100,11 @@
             </a:avLst>
           </a:prstGeom>
           <a:solidFill>
-            <a:srgbClr val="16223b"/>
+            <a:srgbClr val="16223B"/>
           </a:solidFill>
           <a:ln w="12700">
             <a:solidFill>
-              <a:srgbClr val="d9dee6"/>
+              <a:srgbClr val="D9DEE6"/>
             </a:solidFill>
             <a:prstDash val="solid"/>
           </a:ln>
@@ -9281,6 +9118,7 @@
         </p:spPr>
         <p:txBody>
           <a:bodyPr anchor="ctr"/>
+          <a:lstStyle/>
           <a:p>
             <a:pPr algn="ctr">
               <a:defRPr/>
@@ -9317,7 +9155,7 @@
             <a:r>
               <a:rPr lang="en-US" sz="2600" b="1">
                 <a:solidFill>
-                  <a:srgbClr val="ffffff"/>
+                  <a:srgbClr val="FFFFFF"/>
                 </a:solidFill>
                 <a:latin typeface="맑은 고딕"/>
                 <a:ea typeface="맑은 고딕"/>
@@ -9357,7 +9195,7 @@
             <a:r>
               <a:rPr lang="en-US" sz="1200">
                 <a:solidFill>
-                  <a:srgbClr val="e0a15a"/>
+                  <a:srgbClr val="E0A15A"/>
                 </a:solidFill>
                 <a:latin typeface="Arial"/>
                 <a:ea typeface="Arial"/>
@@ -9396,7 +9234,7 @@
             </a:pPr>
             <a:endParaRPr lang="en-US" sz="1350" i="1">
               <a:solidFill>
-                <a:srgbClr val="eaf0fa"/>
+                <a:srgbClr val="EAF0FA"/>
               </a:solidFill>
               <a:latin typeface="맑은 고딕"/>
               <a:ea typeface="맑은 고딕"/>
@@ -9436,7 +9274,7 @@
             <a:r>
               <a:rPr lang="en-US" sz="1200" b="1">
                 <a:solidFill>
-                  <a:srgbClr val="e0a15a"/>
+                  <a:srgbClr val="E0A15A"/>
                 </a:solidFill>
                 <a:latin typeface="맑은 고딕"/>
                 <a:ea typeface="맑은 고딕"/>
@@ -9444,14 +9282,6 @@
               </a:rPr>
               <a:t>학력</a:t>
             </a:r>
-            <a:endParaRPr lang="en-US" sz="1200" b="1">
-              <a:solidFill>
-                <a:srgbClr val="e0a15a"/>
-              </a:solidFill>
-              <a:latin typeface="맑은 고딕"/>
-              <a:ea typeface="맑은 고딕"/>
-              <a:cs typeface="맑은 고딕"/>
-            </a:endParaRPr>
           </a:p>
           <a:p>
             <a:pPr marL="0" indent="0">
@@ -9464,7 +9294,7 @@
             <a:r>
               <a:rPr lang="en-US" sz="1200">
                 <a:solidFill>
-                  <a:srgbClr val="ffffff"/>
+                  <a:srgbClr val="FFFFFF"/>
                 </a:solidFill>
                 <a:latin typeface="맑은 고딕"/>
                 <a:ea typeface="맑은 고딕"/>
@@ -9472,14 +9302,6 @@
               </a:rPr>
               <a:t>한국공학대학교 게임공학과</a:t>
             </a:r>
-            <a:endParaRPr lang="en-US" sz="1200">
-              <a:solidFill>
-                <a:srgbClr val="ffffff"/>
-              </a:solidFill>
-              <a:latin typeface="맑은 고딕"/>
-              <a:ea typeface="맑은 고딕"/>
-              <a:cs typeface="맑은 고딕"/>
-            </a:endParaRPr>
           </a:p>
           <a:p>
             <a:pPr marL="0" indent="0">
@@ -9492,7 +9314,7 @@
             <a:r>
               <a:rPr lang="en-US" sz="1100">
                 <a:solidFill>
-                  <a:srgbClr val="eaf0fa"/>
+                  <a:srgbClr val="EAF0FA"/>
                 </a:solidFill>
                 <a:latin typeface="맑은 고딕"/>
                 <a:ea typeface="맑은 고딕"/>
@@ -9500,14 +9322,6 @@
               </a:rPr>
               <a:t>2026.02 졸업예정</a:t>
             </a:r>
-            <a:endParaRPr lang="en-US" sz="1100">
-              <a:solidFill>
-                <a:srgbClr val="eaf0fa"/>
-              </a:solidFill>
-              <a:latin typeface="맑은 고딕"/>
-              <a:ea typeface="맑은 고딕"/>
-              <a:cs typeface="맑은 고딕"/>
-            </a:endParaRPr>
           </a:p>
           <a:p>
             <a:pPr marL="0" indent="0">
@@ -9528,14 +9342,6 @@
               </a:rPr>
               <a:t> </a:t>
             </a:r>
-            <a:endParaRPr lang="en-US" sz="600">
-              <a:solidFill>
-                <a:srgbClr val="000000"/>
-              </a:solidFill>
-              <a:latin typeface="맑은 고딕"/>
-              <a:ea typeface="맑은 고딕"/>
-              <a:cs typeface="맑은 고딕"/>
-            </a:endParaRPr>
           </a:p>
           <a:p>
             <a:pPr marL="0" indent="0">
@@ -9548,7 +9354,7 @@
             <a:r>
               <a:rPr lang="en-US" sz="1200" b="1">
                 <a:solidFill>
-                  <a:srgbClr val="e0a15a"/>
+                  <a:srgbClr val="E0A15A"/>
                 </a:solidFill>
                 <a:latin typeface="맑은 고딕"/>
                 <a:ea typeface="맑은 고딕"/>
@@ -9556,14 +9362,6 @@
               </a:rPr>
               <a:t>연락처</a:t>
             </a:r>
-            <a:endParaRPr lang="en-US" sz="1200" b="1">
-              <a:solidFill>
-                <a:srgbClr val="e0a15a"/>
-              </a:solidFill>
-              <a:latin typeface="맑은 고딕"/>
-              <a:ea typeface="맑은 고딕"/>
-              <a:cs typeface="맑은 고딕"/>
-            </a:endParaRPr>
           </a:p>
           <a:p>
             <a:pPr marL="0" indent="0">
@@ -9576,7 +9374,7 @@
             <a:r>
               <a:rPr lang="en-US" sz="1200">
                 <a:solidFill>
-                  <a:srgbClr val="ffffff"/>
+                  <a:srgbClr val="FFFFFF"/>
                 </a:solidFill>
                 <a:latin typeface="맑은 고딕"/>
                 <a:ea typeface="맑은 고딕"/>
@@ -9584,14 +9382,6 @@
               </a:rPr>
               <a:t>010-7770-2108</a:t>
             </a:r>
-            <a:endParaRPr lang="en-US" sz="1200">
-              <a:solidFill>
-                <a:srgbClr val="ffffff"/>
-              </a:solidFill>
-              <a:latin typeface="맑은 고딕"/>
-              <a:ea typeface="맑은 고딕"/>
-              <a:cs typeface="맑은 고딕"/>
-            </a:endParaRPr>
           </a:p>
           <a:p>
             <a:pPr marL="0" indent="0">
@@ -9604,7 +9394,7 @@
             <a:r>
               <a:rPr lang="en-US" altLang="ko-KR" sz="1150">
                 <a:solidFill>
-                  <a:srgbClr val="ffffff"/>
+                  <a:srgbClr val="FFFFFF"/>
                 </a:solidFill>
                 <a:latin typeface="맑은 고딕"/>
                 <a:ea typeface="맑은 고딕"/>
@@ -9615,7 +9405,7 @@
             <a:r>
               <a:rPr lang="en-US" sz="1150">
                 <a:solidFill>
-                  <a:srgbClr val="ffffff"/>
+                  <a:srgbClr val="FFFFFF"/>
                 </a:solidFill>
                 <a:latin typeface="맑은 고딕"/>
                 <a:ea typeface="맑은 고딕"/>
@@ -9623,14 +9413,6 @@
               </a:rPr>
               <a:t>@naver.com</a:t>
             </a:r>
-            <a:endParaRPr lang="en-US" sz="1150">
-              <a:solidFill>
-                <a:srgbClr val="ffffff"/>
-              </a:solidFill>
-              <a:latin typeface="맑은 고딕"/>
-              <a:ea typeface="맑은 고딕"/>
-              <a:cs typeface="맑은 고딕"/>
-            </a:endParaRPr>
           </a:p>
         </p:txBody>
       </p:sp>
@@ -9662,7 +9444,7 @@
             <a:r>
               <a:rPr lang="en-US" sz="1600" b="1">
                 <a:solidFill>
-                  <a:srgbClr val="1f2637"/>
+                  <a:srgbClr val="1F2637"/>
                 </a:solidFill>
                 <a:latin typeface="맑은 고딕"/>
                 <a:ea typeface="맑은 고딕"/>
@@ -9691,17 +9473,18 @@
             </a:avLst>
           </a:prstGeom>
           <a:solidFill>
-            <a:srgbClr val="f4f6fa"/>
+            <a:srgbClr val="F4F6FA"/>
           </a:solidFill>
           <a:ln w="12700">
             <a:solidFill>
-              <a:srgbClr val="d9dee6"/>
+              <a:srgbClr val="D9DEE6"/>
             </a:solidFill>
             <a:prstDash val="solid"/>
           </a:ln>
         </p:spPr>
         <p:txBody>
           <a:bodyPr anchor="ctr"/>
+          <a:lstStyle/>
           <a:p>
             <a:pPr algn="ctr">
               <a:defRPr/>
@@ -9738,7 +9521,7 @@
             <a:r>
               <a:rPr lang="en-US" sz="1250" b="1">
                 <a:solidFill>
-                  <a:srgbClr val="c8622e"/>
+                  <a:srgbClr val="C8622E"/>
                 </a:solidFill>
                 <a:latin typeface="맑은 고딕"/>
                 <a:ea typeface="맑은 고딕"/>
@@ -9778,7 +9561,7 @@
             <a:r>
               <a:rPr lang="en-US" sz="1250">
                 <a:solidFill>
-                  <a:srgbClr val="1f2637"/>
+                  <a:srgbClr val="1F2637"/>
                 </a:solidFill>
                 <a:latin typeface="맑은 고딕"/>
                 <a:ea typeface="맑은 고딕"/>
@@ -9789,7 +9572,7 @@
             <a:r>
               <a:rPr lang="en-US" altLang="ko-KR" sz="1250">
                 <a:solidFill>
-                  <a:srgbClr val="1f2637"/>
+                  <a:srgbClr val="1F2637"/>
                 </a:solidFill>
                 <a:latin typeface="맑은 고딕"/>
                 <a:ea typeface="맑은 고딕"/>
@@ -9800,7 +9583,7 @@
             <a:r>
               <a:rPr lang="en-US" sz="1250">
                 <a:solidFill>
-                  <a:srgbClr val="1f2637"/>
+                  <a:srgbClr val="1F2637"/>
                 </a:solidFill>
                 <a:latin typeface="맑은 고딕"/>
                 <a:ea typeface="맑은 고딕"/>
@@ -9808,14 +9591,6 @@
               </a:rPr>
               <a:t>플레이어 경험 설계</a:t>
             </a:r>
-            <a:endParaRPr lang="en-US" sz="1250">
-              <a:solidFill>
-                <a:srgbClr val="1f2637"/>
-              </a:solidFill>
-              <a:latin typeface="맑은 고딕"/>
-              <a:ea typeface="맑은 고딕"/>
-              <a:cs typeface="맑은 고딕"/>
-            </a:endParaRPr>
           </a:p>
         </p:txBody>
       </p:sp>
@@ -9836,17 +9611,18 @@
             </a:avLst>
           </a:prstGeom>
           <a:solidFill>
-            <a:srgbClr val="f4f6fa"/>
+            <a:srgbClr val="F4F6FA"/>
           </a:solidFill>
           <a:ln w="12700">
             <a:solidFill>
-              <a:srgbClr val="d9dee6"/>
+              <a:srgbClr val="D9DEE6"/>
             </a:solidFill>
             <a:prstDash val="solid"/>
           </a:ln>
         </p:spPr>
         <p:txBody>
           <a:bodyPr anchor="ctr"/>
+          <a:lstStyle/>
           <a:p>
             <a:pPr algn="ctr">
               <a:defRPr/>
@@ -9883,7 +9659,7 @@
             <a:r>
               <a:rPr lang="en-US" sz="1250" b="1">
                 <a:solidFill>
-                  <a:srgbClr val="c8622e"/>
+                  <a:srgbClr val="C8622E"/>
                 </a:solidFill>
                 <a:latin typeface="맑은 고딕"/>
                 <a:ea typeface="맑은 고딕"/>
@@ -9923,7 +9699,7 @@
             <a:r>
               <a:rPr lang="en-US" sz="1250">
                 <a:solidFill>
-                  <a:srgbClr val="1f2637"/>
+                  <a:srgbClr val="1F2637"/>
                 </a:solidFill>
                 <a:latin typeface="맑은 고딕"/>
                 <a:ea typeface="맑은 고딕"/>
@@ -9952,17 +9728,18 @@
             </a:avLst>
           </a:prstGeom>
           <a:solidFill>
-            <a:srgbClr val="f4f6fa"/>
+            <a:srgbClr val="F4F6FA"/>
           </a:solidFill>
           <a:ln w="12700">
             <a:solidFill>
-              <a:srgbClr val="d9dee6"/>
+              <a:srgbClr val="D9DEE6"/>
             </a:solidFill>
             <a:prstDash val="solid"/>
           </a:ln>
         </p:spPr>
         <p:txBody>
           <a:bodyPr anchor="ctr"/>
+          <a:lstStyle/>
           <a:p>
             <a:pPr algn="ctr">
               <a:defRPr/>
@@ -9999,7 +9776,7 @@
             <a:r>
               <a:rPr lang="en-US" sz="1250" b="1">
                 <a:solidFill>
-                  <a:srgbClr val="c8622e"/>
+                  <a:srgbClr val="C8622E"/>
                 </a:solidFill>
                 <a:latin typeface="맑은 고딕"/>
                 <a:ea typeface="맑은 고딕"/>
@@ -10039,7 +9816,7 @@
             <a:r>
               <a:rPr lang="en-US" sz="1250">
                 <a:solidFill>
-                  <a:srgbClr val="1f2637"/>
+                  <a:srgbClr val="1F2637"/>
                 </a:solidFill>
                 <a:latin typeface="맑은 고딕"/>
                 <a:ea typeface="맑은 고딕"/>
@@ -10047,14 +9824,6 @@
               </a:rPr>
               <a:t>C++ · 게임 서버(Zone 분산·프로토콜 설계)</a:t>
             </a:r>
-            <a:endParaRPr lang="en-US" sz="1250">
-              <a:solidFill>
-                <a:srgbClr val="1f2637"/>
-              </a:solidFill>
-              <a:latin typeface="맑은 고딕"/>
-              <a:ea typeface="맑은 고딕"/>
-              <a:cs typeface="맑은 고딕"/>
-            </a:endParaRPr>
           </a:p>
         </p:txBody>
       </p:sp>
@@ -10075,17 +9844,18 @@
             </a:avLst>
           </a:prstGeom>
           <a:solidFill>
-            <a:srgbClr val="f4f6fa"/>
+            <a:srgbClr val="F4F6FA"/>
           </a:solidFill>
           <a:ln w="12700">
             <a:solidFill>
-              <a:srgbClr val="d9dee6"/>
+              <a:srgbClr val="D9DEE6"/>
             </a:solidFill>
             <a:prstDash val="solid"/>
           </a:ln>
         </p:spPr>
         <p:txBody>
           <a:bodyPr anchor="ctr"/>
+          <a:lstStyle/>
           <a:p>
             <a:pPr algn="ctr">
               <a:defRPr/>
@@ -10122,7 +9892,7 @@
             <a:r>
               <a:rPr lang="en-US" sz="1250" b="1">
                 <a:solidFill>
-                  <a:srgbClr val="c8622e"/>
+                  <a:srgbClr val="C8622E"/>
                 </a:solidFill>
                 <a:latin typeface="맑은 고딕"/>
                 <a:ea typeface="맑은 고딕"/>
@@ -10160,17 +9930,17 @@
               <a:defRPr/>
             </a:pPr>
             <a:r>
-              <a:rPr lang="en-US" sz="1250">
-                <a:solidFill>
-                  <a:srgbClr val="1f2637"/>
-                </a:solidFill>
-                <a:latin typeface="맑은 고딕"/>
-                <a:ea typeface="맑은 고딕"/>
-                <a:cs typeface="맑은 고딕"/>
-              </a:rPr>
-              <a:t>DirectX12 / Git</a:t>
-            </a:r>
-            <a:endParaRPr lang="en-US" sz="1250"/>
+              <a:rPr lang="en-US" sz="1250" dirty="0">
+                <a:solidFill>
+                  <a:srgbClr val="1F2637"/>
+                </a:solidFill>
+                <a:latin typeface="맑은 고딕"/>
+                <a:ea typeface="맑은 고딕"/>
+                <a:cs typeface="맑은 고딕"/>
+              </a:rPr>
+              <a:t>Git</a:t>
+            </a:r>
+            <a:endParaRPr lang="en-US" sz="1250" dirty="0"/>
           </a:p>
         </p:txBody>
       </p:sp>
@@ -10202,7 +9972,7 @@
             <a:r>
               <a:rPr lang="en-US" sz="1600" b="1">
                 <a:solidFill>
-                  <a:srgbClr val="1f2637"/>
+                  <a:srgbClr val="1F2637"/>
                 </a:solidFill>
                 <a:latin typeface="맑은 고딕"/>
                 <a:ea typeface="맑은 고딕"/>
@@ -10245,7 +10015,7 @@
             <a:r>
               <a:rPr lang="en-US" sz="1250" b="1">
                 <a:solidFill>
-                  <a:srgbClr val="1f2637"/>
+                  <a:srgbClr val="1F2637"/>
                 </a:solidFill>
                 <a:latin typeface="맑은 고딕"/>
                 <a:ea typeface="맑은 고딕"/>
@@ -10256,7 +10026,7 @@
             <a:r>
               <a:rPr lang="en-US" sz="1250">
                 <a:solidFill>
-                  <a:srgbClr val="6c7686"/>
+                  <a:srgbClr val="6C7686"/>
                 </a:solidFill>
                 <a:latin typeface="맑은 고딕"/>
                 <a:ea typeface="맑은 고딕"/>
@@ -10264,14 +10034,6 @@
               </a:rPr>
               <a:t>DX12 온라인 RPG · 기획 + 서버 담당 (졸업작품)</a:t>
             </a:r>
-            <a:endParaRPr lang="en-US" sz="1250">
-              <a:solidFill>
-                <a:srgbClr val="6c7686"/>
-              </a:solidFill>
-              <a:latin typeface="맑은 고딕"/>
-              <a:ea typeface="맑은 고딕"/>
-              <a:cs typeface="맑은 고딕"/>
-            </a:endParaRPr>
           </a:p>
           <a:p>
             <a:pPr marL="0" indent="0">
@@ -10284,7 +10046,7 @@
             <a:r>
               <a:rPr lang="en-US" sz="1250" b="1">
                 <a:solidFill>
-                  <a:srgbClr val="1f2637"/>
+                  <a:srgbClr val="1F2637"/>
                 </a:solidFill>
                 <a:latin typeface="맑은 고딕"/>
                 <a:ea typeface="맑은 고딕"/>
@@ -10295,7 +10057,7 @@
             <a:r>
               <a:rPr lang="en-US" sz="1250">
                 <a:solidFill>
-                  <a:srgbClr val="6c7686"/>
+                  <a:srgbClr val="6C7686"/>
                 </a:solidFill>
                 <a:latin typeface="맑은 고딕"/>
                 <a:ea typeface="맑은 고딕"/>
@@ -10303,14 +10065,6 @@
               </a:rPr>
               <a:t>소울라이크×턴제 전투 시스템 기획</a:t>
             </a:r>
-            <a:endParaRPr lang="en-US" sz="1250">
-              <a:solidFill>
-                <a:srgbClr val="6c7686"/>
-              </a:solidFill>
-              <a:latin typeface="맑은 고딕"/>
-              <a:ea typeface="맑은 고딕"/>
-              <a:cs typeface="맑은 고딕"/>
-            </a:endParaRPr>
           </a:p>
           <a:p>
             <a:pPr marL="0" indent="0">
@@ -10323,7 +10077,7 @@
             <a:r>
               <a:rPr lang="en-US" sz="1250" b="1">
                 <a:solidFill>
-                  <a:srgbClr val="1f2637"/>
+                  <a:srgbClr val="1F2637"/>
                 </a:solidFill>
                 <a:latin typeface="맑은 고딕"/>
                 <a:ea typeface="맑은 고딕"/>
@@ -10334,7 +10088,7 @@
             <a:r>
               <a:rPr lang="en-US" sz="1250">
                 <a:solidFill>
-                  <a:srgbClr val="6c7686"/>
+                  <a:srgbClr val="6C7686"/>
                 </a:solidFill>
                 <a:latin typeface="맑은 고딕"/>
                 <a:ea typeface="맑은 고딕"/>
@@ -10374,7 +10128,7 @@
             <a:r>
               <a:rPr lang="en-US" sz="900">
                 <a:solidFill>
-                  <a:srgbClr val="6c7686"/>
+                  <a:srgbClr val="6C7686"/>
                 </a:solidFill>
                 <a:latin typeface="맑은 고딕"/>
                 <a:ea typeface="맑은 고딕"/>
@@ -10414,7 +10168,7 @@
             <a:r>
               <a:rPr lang="en-US" sz="900">
                 <a:solidFill>
-                  <a:srgbClr val="6c7686"/>
+                  <a:srgbClr val="6C7686"/>
                 </a:solidFill>
                 <a:latin typeface="맑은 고딕"/>
                 <a:ea typeface="맑은 고딕"/>
@@ -10431,11 +10185,11 @@
   <p:clrMapOvr>
     <a:masterClrMapping/>
   </p:clrMapOvr>
-  <mc:AlternateContent xmlns:mc="http://schemas.openxmlformats.org/markup-compatibility/2006">
-    <mc:Choice xmlns:p14="http://schemas.microsoft.com/office/powerpoint/2010/main" Requires="p14">
-      <p:transition xmlns:mc="http://schemas.openxmlformats.org/markup-compatibility/2006" xmlns:p14="http://schemas.microsoft.com/office/powerpoint/2010/main" mc:Ignorable="p14" p14:dur="500"/>
+  <mc:AlternateContent xmlns:mc="http://schemas.openxmlformats.org/markup-compatibility/2006" xmlns:p14="http://schemas.microsoft.com/office/powerpoint/2010/main">
+    <mc:Choice Requires="p14">
+      <p:transition/>
     </mc:Choice>
-    <mc:Fallback>
+    <mc:Fallback xmlns:dsp="http://schemas.microsoft.com/office/drawing/2008/diagram" xmlns:dgm="http://schemas.openxmlformats.org/drawingml/2006/diagram" xmlns:c="http://schemas.openxmlformats.org/drawingml/2006/chart" xmlns="">
       <p:transition/>
     </mc:Fallback>
   </mc:AlternateContent>
@@ -10443,13 +10197,14 @@
 </file>
 
 <file path=ppt/slides/slide4.xml><?xml version="1.0" encoding="utf-8"?>
-<p:sld xmlns:r="http://schemas.openxmlformats.org/officeDocument/2006/relationships" xmlns:c="http://schemas.openxmlformats.org/drawingml/2006/chart" xmlns:a="http://schemas.openxmlformats.org/drawingml/2006/main" xmlns:dgm="http://schemas.openxmlformats.org/drawingml/2006/diagram" xmlns:dsp="http://schemas.microsoft.com/office/drawing/2008/diagram" xmlns:p="http://schemas.openxmlformats.org/presentationml/2006/main">
+<p:sld xmlns:a="http://schemas.openxmlformats.org/drawingml/2006/main" xmlns:r="http://schemas.openxmlformats.org/officeDocument/2006/relationships" xmlns:p="http://schemas.openxmlformats.org/presentationml/2006/main">
   <p:cSld name="Slide 4">
     <p:bg>
-      <p:bgPr shadeToTitle="0">
+      <p:bgPr>
         <a:solidFill>
-          <a:srgbClr val="ffffff"/>
+          <a:srgbClr val="FFFFFF"/>
         </a:solidFill>
+        <a:effectLst/>
       </p:bgPr>
     </p:bg>
     <p:spTree>
@@ -10494,7 +10249,7 @@
             <a:r>
               <a:rPr lang="en-US" sz="1200" b="1" kern="0" spc="200">
                 <a:solidFill>
-                  <a:srgbClr val="c8622e"/>
+                  <a:srgbClr val="C8622E"/>
                 </a:solidFill>
                 <a:latin typeface="맑은 고딕"/>
                 <a:ea typeface="맑은 고딕"/>
@@ -10534,7 +10289,7 @@
             <a:r>
               <a:rPr lang="en-US" sz="2900" b="1">
                 <a:solidFill>
-                  <a:srgbClr val="1f2637"/>
+                  <a:srgbClr val="1F2637"/>
                 </a:solidFill>
                 <a:latin typeface="맑은 고딕"/>
                 <a:ea typeface="맑은 고딕"/>
@@ -10545,7 +10300,7 @@
             <a:r>
               <a:rPr lang="ko-KR" altLang="en-US" sz="2900" b="1">
                 <a:solidFill>
-                  <a:srgbClr val="1f2637"/>
+                  <a:srgbClr val="1F2637"/>
                 </a:solidFill>
                 <a:latin typeface="맑은 고딕"/>
                 <a:ea typeface="맑은 고딕"/>
@@ -10556,7 +10311,7 @@
             <a:r>
               <a:rPr lang="en-US" sz="2900" b="1">
                 <a:solidFill>
-                  <a:srgbClr val="1f2637"/>
+                  <a:srgbClr val="1F2637"/>
                 </a:solidFill>
                 <a:latin typeface="맑은 고딕"/>
                 <a:ea typeface="맑은 고딕"/>
@@ -10564,14 +10319,6 @@
               </a:rPr>
               <a:t>紀行)</a:t>
             </a:r>
-            <a:endParaRPr lang="en-US" sz="2900" b="1">
-              <a:solidFill>
-                <a:srgbClr val="1f2637"/>
-              </a:solidFill>
-              <a:latin typeface="맑은 고딕"/>
-              <a:ea typeface="맑은 고딕"/>
-              <a:cs typeface="맑은 고딕"/>
-            </a:endParaRPr>
           </a:p>
         </p:txBody>
       </p:sp>
@@ -10603,7 +10350,7 @@
             <a:r>
               <a:rPr lang="en-US" sz="1350">
                 <a:solidFill>
-                  <a:srgbClr val="24324f"/>
+                  <a:srgbClr val="24324F"/>
                 </a:solidFill>
                 <a:latin typeface="맑은 고딕"/>
                 <a:ea typeface="맑은 고딕"/>
@@ -10630,14 +10377,28 @@
         <a:graphic>
           <a:graphicData uri="http://schemas.openxmlformats.org/drawingml/2006/table">
             <a:tbl>
+              <a:tblPr/>
               <a:tblGrid>
-                <a:gridCol w="1554480"/>
-                <a:gridCol w="4389120"/>
+                <a:gridCol w="1554480">
+                  <a:extLst>
+                    <a:ext uri="{9D8B030D-6E8A-4147-A177-3AD203B41FA5}">
+                      <a16:colId xmlns:a16="http://schemas.microsoft.com/office/drawing/2014/main" val="20000"/>
+                    </a:ext>
+                  </a:extLst>
+                </a:gridCol>
+                <a:gridCol w="4389120">
+                  <a:extLst>
+                    <a:ext uri="{9D8B030D-6E8A-4147-A177-3AD203B41FA5}">
+                      <a16:colId xmlns:a16="http://schemas.microsoft.com/office/drawing/2014/main" val="20001"/>
+                    </a:ext>
+                  </a:extLst>
+                </a:gridCol>
               </a:tblGrid>
               <a:tr h="384048">
                 <a:tc>
                   <a:txBody>
-                    <a:bodyPr vert="horz" lIns="38100" tIns="38100" rIns="38100" bIns="38100" anchor="ctr" anchorCtr="0"/>
+                    <a:bodyPr/>
+                    <a:lstStyle/>
                     <a:p>
                       <a:pPr marL="0" indent="0" algn="l">
                         <a:buNone/>
@@ -10646,7 +10407,7 @@
                       <a:r>
                         <a:rPr lang="en-US" sz="1200" b="1">
                           <a:solidFill>
-                            <a:srgbClr val="ffffff"/>
+                            <a:srgbClr val="FFFFFF"/>
                           </a:solidFill>
                           <a:latin typeface="맑은 고딕"/>
                           <a:ea typeface="맑은 고딕"/>
@@ -10664,7 +10425,7 @@
                   <a:tcPr marL="38100" marR="38100" marT="38100" marB="38100" anchor="ctr">
                     <a:lnL w="12700" cap="flat" cmpd="sng" algn="ctr">
                       <a:solidFill>
-                        <a:srgbClr val="d9dee6"/>
+                        <a:srgbClr val="D9DEE6"/>
                       </a:solidFill>
                       <a:prstDash val="solid"/>
                       <a:round/>
@@ -10673,7 +10434,7 @@
                     </a:lnL>
                     <a:lnR w="12700" cap="flat" cmpd="sng" algn="ctr">
                       <a:solidFill>
-                        <a:srgbClr val="d9dee6"/>
+                        <a:srgbClr val="D9DEE6"/>
                       </a:solidFill>
                       <a:prstDash val="solid"/>
                       <a:round/>
@@ -10682,7 +10443,7 @@
                     </a:lnR>
                     <a:lnT w="12700" cap="flat" cmpd="sng" algn="ctr">
                       <a:solidFill>
-                        <a:srgbClr val="d9dee6"/>
+                        <a:srgbClr val="D9DEE6"/>
                       </a:solidFill>
                       <a:prstDash val="solid"/>
                       <a:round/>
@@ -10691,7 +10452,7 @@
                     </a:lnT>
                     <a:lnB w="12700" cap="flat" cmpd="sng" algn="ctr">
                       <a:solidFill>
-                        <a:srgbClr val="d9dee6"/>
+                        <a:srgbClr val="D9DEE6"/>
                       </a:solidFill>
                       <a:prstDash val="solid"/>
                       <a:round/>
@@ -10699,13 +10460,14 @@
                       <a:tailEnd w="med" len="med"/>
                     </a:lnB>
                     <a:solidFill>
-                      <a:srgbClr val="16223b"/>
+                      <a:srgbClr val="16223B"/>
                     </a:solidFill>
                   </a:tcPr>
                 </a:tc>
                 <a:tc>
                   <a:txBody>
-                    <a:bodyPr vert="horz" lIns="38100" tIns="38100" rIns="38100" bIns="38100" anchor="ctr" anchorCtr="0"/>
+                    <a:bodyPr/>
+                    <a:lstStyle/>
                     <a:p>
                       <a:pPr marL="0" indent="0" algn="l">
                         <a:buNone/>
@@ -10714,7 +10476,7 @@
                       <a:r>
                         <a:rPr lang="en-US" sz="1200">
                           <a:solidFill>
-                            <a:srgbClr val="1f2637"/>
+                            <a:srgbClr val="1F2637"/>
                           </a:solidFill>
                           <a:latin typeface="맑은 고딕"/>
                           <a:ea typeface="맑은 고딕"/>
@@ -10732,7 +10494,7 @@
                   <a:tcPr marL="38100" marR="38100" marT="38100" marB="38100" anchor="ctr">
                     <a:lnL w="12700" cap="flat" cmpd="sng" algn="ctr">
                       <a:solidFill>
-                        <a:srgbClr val="d9dee6"/>
+                        <a:srgbClr val="D9DEE6"/>
                       </a:solidFill>
                       <a:prstDash val="solid"/>
                       <a:round/>
@@ -10741,7 +10503,7 @@
                     </a:lnL>
                     <a:lnR w="12700" cap="flat" cmpd="sng" algn="ctr">
                       <a:solidFill>
-                        <a:srgbClr val="d9dee6"/>
+                        <a:srgbClr val="D9DEE6"/>
                       </a:solidFill>
                       <a:prstDash val="solid"/>
                       <a:round/>
@@ -10750,7 +10512,7 @@
                     </a:lnR>
                     <a:lnT w="12700" cap="flat" cmpd="sng" algn="ctr">
                       <a:solidFill>
-                        <a:srgbClr val="d9dee6"/>
+                        <a:srgbClr val="D9DEE6"/>
                       </a:solidFill>
                       <a:prstDash val="solid"/>
                       <a:round/>
@@ -10759,7 +10521,7 @@
                     </a:lnT>
                     <a:lnB w="12700" cap="flat" cmpd="sng" algn="ctr">
                       <a:solidFill>
-                        <a:srgbClr val="d9dee6"/>
+                        <a:srgbClr val="D9DEE6"/>
                       </a:solidFill>
                       <a:prstDash val="solid"/>
                       <a:round/>
@@ -10767,15 +10529,21 @@
                       <a:tailEnd w="med" len="med"/>
                     </a:lnB>
                     <a:solidFill>
-                      <a:srgbClr val="ffffff"/>
+                      <a:srgbClr val="FFFFFF"/>
                     </a:solidFill>
                   </a:tcPr>
                 </a:tc>
+                <a:extLst>
+                  <a:ext uri="{0D108BD9-81ED-4DB2-BD59-A6C34878D82A}">
+                    <a16:rowId xmlns:a16="http://schemas.microsoft.com/office/drawing/2014/main" val="10000"/>
+                  </a:ext>
+                </a:extLst>
               </a:tr>
               <a:tr h="384048">
                 <a:tc>
                   <a:txBody>
-                    <a:bodyPr vert="horz" lIns="38100" tIns="38100" rIns="38100" bIns="38100" anchor="ctr" anchorCtr="0"/>
+                    <a:bodyPr/>
+                    <a:lstStyle/>
                     <a:p>
                       <a:pPr marL="0" indent="0" algn="l">
                         <a:buNone/>
@@ -10784,7 +10552,7 @@
                       <a:r>
                         <a:rPr lang="en-US" sz="1200" b="1">
                           <a:solidFill>
-                            <a:srgbClr val="ffffff"/>
+                            <a:srgbClr val="FFFFFF"/>
                           </a:solidFill>
                           <a:latin typeface="맑은 고딕"/>
                           <a:ea typeface="맑은 고딕"/>
@@ -10802,7 +10570,7 @@
                   <a:tcPr marL="38100" marR="38100" marT="38100" marB="38100" anchor="ctr">
                     <a:lnL w="12700" cap="flat" cmpd="sng" algn="ctr">
                       <a:solidFill>
-                        <a:srgbClr val="d9dee6"/>
+                        <a:srgbClr val="D9DEE6"/>
                       </a:solidFill>
                       <a:prstDash val="solid"/>
                       <a:round/>
@@ -10811,7 +10579,7 @@
                     </a:lnL>
                     <a:lnR w="12700" cap="flat" cmpd="sng" algn="ctr">
                       <a:solidFill>
-                        <a:srgbClr val="d9dee6"/>
+                        <a:srgbClr val="D9DEE6"/>
                       </a:solidFill>
                       <a:prstDash val="solid"/>
                       <a:round/>
@@ -10820,7 +10588,7 @@
                     </a:lnR>
                     <a:lnT w="12700" cap="flat" cmpd="sng" algn="ctr">
                       <a:solidFill>
-                        <a:srgbClr val="d9dee6"/>
+                        <a:srgbClr val="D9DEE6"/>
                       </a:solidFill>
                       <a:prstDash val="solid"/>
                       <a:round/>
@@ -10829,7 +10597,7 @@
                     </a:lnT>
                     <a:lnB w="12700" cap="flat" cmpd="sng" algn="ctr">
                       <a:solidFill>
-                        <a:srgbClr val="d9dee6"/>
+                        <a:srgbClr val="D9DEE6"/>
                       </a:solidFill>
                       <a:prstDash val="solid"/>
                       <a:round/>
@@ -10837,13 +10605,14 @@
                       <a:tailEnd w="med" len="med"/>
                     </a:lnB>
                     <a:solidFill>
-                      <a:srgbClr val="16223b"/>
+                      <a:srgbClr val="16223B"/>
                     </a:solidFill>
                   </a:tcPr>
                 </a:tc>
                 <a:tc>
                   <a:txBody>
-                    <a:bodyPr vert="horz" lIns="38100" tIns="38100" rIns="38100" bIns="38100" anchor="ctr" anchorCtr="0"/>
+                    <a:bodyPr/>
+                    <a:lstStyle/>
                     <a:p>
                       <a:pPr marL="0" indent="0" algn="l">
                         <a:buNone/>
@@ -10852,7 +10621,7 @@
                       <a:r>
                         <a:rPr lang="en-US" sz="1200">
                           <a:solidFill>
-                            <a:srgbClr val="1f2637"/>
+                            <a:srgbClr val="1F2637"/>
                           </a:solidFill>
                           <a:latin typeface="맑은 고딕"/>
                           <a:ea typeface="맑은 고딕"/>
@@ -10870,7 +10639,7 @@
                   <a:tcPr marL="38100" marR="38100" marT="38100" marB="38100" anchor="ctr">
                     <a:lnL w="12700" cap="flat" cmpd="sng" algn="ctr">
                       <a:solidFill>
-                        <a:srgbClr val="d9dee6"/>
+                        <a:srgbClr val="D9DEE6"/>
                       </a:solidFill>
                       <a:prstDash val="solid"/>
                       <a:round/>
@@ -10879,7 +10648,7 @@
                     </a:lnL>
                     <a:lnR w="12700" cap="flat" cmpd="sng" algn="ctr">
                       <a:solidFill>
-                        <a:srgbClr val="d9dee6"/>
+                        <a:srgbClr val="D9DEE6"/>
                       </a:solidFill>
                       <a:prstDash val="solid"/>
                       <a:round/>
@@ -10888,7 +10657,7 @@
                     </a:lnR>
                     <a:lnT w="12700" cap="flat" cmpd="sng" algn="ctr">
                       <a:solidFill>
-                        <a:srgbClr val="d9dee6"/>
+                        <a:srgbClr val="D9DEE6"/>
                       </a:solidFill>
                       <a:prstDash val="solid"/>
                       <a:round/>
@@ -10897,7 +10666,7 @@
                     </a:lnT>
                     <a:lnB w="12700" cap="flat" cmpd="sng" algn="ctr">
                       <a:solidFill>
-                        <a:srgbClr val="d9dee6"/>
+                        <a:srgbClr val="D9DEE6"/>
                       </a:solidFill>
                       <a:prstDash val="solid"/>
                       <a:round/>
@@ -10905,15 +10674,21 @@
                       <a:tailEnd w="med" len="med"/>
                     </a:lnB>
                     <a:solidFill>
-                      <a:srgbClr val="ffffff"/>
+                      <a:srgbClr val="FFFFFF"/>
                     </a:solidFill>
                   </a:tcPr>
                 </a:tc>
+                <a:extLst>
+                  <a:ext uri="{0D108BD9-81ED-4DB2-BD59-A6C34878D82A}">
+                    <a16:rowId xmlns:a16="http://schemas.microsoft.com/office/drawing/2014/main" val="10001"/>
+                  </a:ext>
+                </a:extLst>
               </a:tr>
               <a:tr h="384048">
                 <a:tc>
                   <a:txBody>
-                    <a:bodyPr vert="horz" lIns="38100" tIns="38100" rIns="38100" bIns="38100" anchor="ctr" anchorCtr="0"/>
+                    <a:bodyPr/>
+                    <a:lstStyle/>
                     <a:p>
                       <a:pPr marL="0" indent="0" algn="l">
                         <a:buNone/>
@@ -10922,7 +10697,7 @@
                       <a:r>
                         <a:rPr lang="en-US" sz="1200" b="1">
                           <a:solidFill>
-                            <a:srgbClr val="ffffff"/>
+                            <a:srgbClr val="FFFFFF"/>
                           </a:solidFill>
                           <a:latin typeface="맑은 고딕"/>
                           <a:ea typeface="맑은 고딕"/>
@@ -10940,7 +10715,7 @@
                   <a:tcPr marL="38100" marR="38100" marT="38100" marB="38100" anchor="ctr">
                     <a:lnL w="12700" cap="flat" cmpd="sng" algn="ctr">
                       <a:solidFill>
-                        <a:srgbClr val="d9dee6"/>
+                        <a:srgbClr val="D9DEE6"/>
                       </a:solidFill>
                       <a:prstDash val="solid"/>
                       <a:round/>
@@ -10949,7 +10724,7 @@
                     </a:lnL>
                     <a:lnR w="12700" cap="flat" cmpd="sng" algn="ctr">
                       <a:solidFill>
-                        <a:srgbClr val="d9dee6"/>
+                        <a:srgbClr val="D9DEE6"/>
                       </a:solidFill>
                       <a:prstDash val="solid"/>
                       <a:round/>
@@ -10958,7 +10733,7 @@
                     </a:lnR>
                     <a:lnT w="12700" cap="flat" cmpd="sng" algn="ctr">
                       <a:solidFill>
-                        <a:srgbClr val="d9dee6"/>
+                        <a:srgbClr val="D9DEE6"/>
                       </a:solidFill>
                       <a:prstDash val="solid"/>
                       <a:round/>
@@ -10967,7 +10742,7 @@
                     </a:lnT>
                     <a:lnB w="12700" cap="flat" cmpd="sng" algn="ctr">
                       <a:solidFill>
-                        <a:srgbClr val="d9dee6"/>
+                        <a:srgbClr val="D9DEE6"/>
                       </a:solidFill>
                       <a:prstDash val="solid"/>
                       <a:round/>
@@ -10975,13 +10750,14 @@
                       <a:tailEnd w="med" len="med"/>
                     </a:lnB>
                     <a:solidFill>
-                      <a:srgbClr val="16223b"/>
+                      <a:srgbClr val="16223B"/>
                     </a:solidFill>
                   </a:tcPr>
                 </a:tc>
                 <a:tc>
                   <a:txBody>
-                    <a:bodyPr vert="horz" lIns="38100" tIns="38100" rIns="38100" bIns="38100" anchor="ctr" anchorCtr="0"/>
+                    <a:bodyPr/>
+                    <a:lstStyle/>
                     <a:p>
                       <a:pPr marL="0" indent="0" algn="l">
                         <a:buNone/>
@@ -10990,7 +10766,7 @@
                       <a:r>
                         <a:rPr lang="en-US" sz="1200">
                           <a:solidFill>
-                            <a:srgbClr val="1f2637"/>
+                            <a:srgbClr val="1F2637"/>
                           </a:solidFill>
                           <a:latin typeface="맑은 고딕"/>
                           <a:ea typeface="맑은 고딕"/>
@@ -11008,7 +10784,7 @@
                   <a:tcPr marL="38100" marR="38100" marT="38100" marB="38100" anchor="ctr">
                     <a:lnL w="12700" cap="flat" cmpd="sng" algn="ctr">
                       <a:solidFill>
-                        <a:srgbClr val="d9dee6"/>
+                        <a:srgbClr val="D9DEE6"/>
                       </a:solidFill>
                       <a:prstDash val="solid"/>
                       <a:round/>
@@ -11017,7 +10793,7 @@
                     </a:lnL>
                     <a:lnR w="12700" cap="flat" cmpd="sng" algn="ctr">
                       <a:solidFill>
-                        <a:srgbClr val="d9dee6"/>
+                        <a:srgbClr val="D9DEE6"/>
                       </a:solidFill>
                       <a:prstDash val="solid"/>
                       <a:round/>
@@ -11026,7 +10802,7 @@
                     </a:lnR>
                     <a:lnT w="12700" cap="flat" cmpd="sng" algn="ctr">
                       <a:solidFill>
-                        <a:srgbClr val="d9dee6"/>
+                        <a:srgbClr val="D9DEE6"/>
                       </a:solidFill>
                       <a:prstDash val="solid"/>
                       <a:round/>
@@ -11035,7 +10811,7 @@
                     </a:lnT>
                     <a:lnB w="12700" cap="flat" cmpd="sng" algn="ctr">
                       <a:solidFill>
-                        <a:srgbClr val="d9dee6"/>
+                        <a:srgbClr val="D9DEE6"/>
                       </a:solidFill>
                       <a:prstDash val="solid"/>
                       <a:round/>
@@ -11043,15 +10819,21 @@
                       <a:tailEnd w="med" len="med"/>
                     </a:lnB>
                     <a:solidFill>
-                      <a:srgbClr val="ffffff"/>
+                      <a:srgbClr val="FFFFFF"/>
                     </a:solidFill>
                   </a:tcPr>
                 </a:tc>
+                <a:extLst>
+                  <a:ext uri="{0D108BD9-81ED-4DB2-BD59-A6C34878D82A}">
+                    <a16:rowId xmlns:a16="http://schemas.microsoft.com/office/drawing/2014/main" val="10002"/>
+                  </a:ext>
+                </a:extLst>
               </a:tr>
               <a:tr h="384048">
                 <a:tc>
                   <a:txBody>
-                    <a:bodyPr vert="horz" lIns="38100" tIns="38100" rIns="38100" bIns="38100" anchor="ctr" anchorCtr="0"/>
+                    <a:bodyPr/>
+                    <a:lstStyle/>
                     <a:p>
                       <a:pPr marL="0" indent="0" algn="l">
                         <a:buNone/>
@@ -11060,7 +10842,7 @@
                       <a:r>
                         <a:rPr lang="en-US" sz="1200" b="1">
                           <a:solidFill>
-                            <a:srgbClr val="ffffff"/>
+                            <a:srgbClr val="FFFFFF"/>
                           </a:solidFill>
                           <a:latin typeface="맑은 고딕"/>
                           <a:ea typeface="맑은 고딕"/>
@@ -11078,7 +10860,7 @@
                   <a:tcPr marL="38100" marR="38100" marT="38100" marB="38100" anchor="ctr">
                     <a:lnL w="12700" cap="flat" cmpd="sng" algn="ctr">
                       <a:solidFill>
-                        <a:srgbClr val="d9dee6"/>
+                        <a:srgbClr val="D9DEE6"/>
                       </a:solidFill>
                       <a:prstDash val="solid"/>
                       <a:round/>
@@ -11087,7 +10869,7 @@
                     </a:lnL>
                     <a:lnR w="12700" cap="flat" cmpd="sng" algn="ctr">
                       <a:solidFill>
-                        <a:srgbClr val="d9dee6"/>
+                        <a:srgbClr val="D9DEE6"/>
                       </a:solidFill>
                       <a:prstDash val="solid"/>
                       <a:round/>
@@ -11096,7 +10878,7 @@
                     </a:lnR>
                     <a:lnT w="12700" cap="flat" cmpd="sng" algn="ctr">
                       <a:solidFill>
-                        <a:srgbClr val="d9dee6"/>
+                        <a:srgbClr val="D9DEE6"/>
                       </a:solidFill>
                       <a:prstDash val="solid"/>
                       <a:round/>
@@ -11105,7 +10887,7 @@
                     </a:lnT>
                     <a:lnB w="12700" cap="flat" cmpd="sng" algn="ctr">
                       <a:solidFill>
-                        <a:srgbClr val="d9dee6"/>
+                        <a:srgbClr val="D9DEE6"/>
                       </a:solidFill>
                       <a:prstDash val="solid"/>
                       <a:round/>
@@ -11113,13 +10895,14 @@
                       <a:tailEnd w="med" len="med"/>
                     </a:lnB>
                     <a:solidFill>
-                      <a:srgbClr val="16223b"/>
+                      <a:srgbClr val="16223B"/>
                     </a:solidFill>
                   </a:tcPr>
                 </a:tc>
                 <a:tc>
                   <a:txBody>
-                    <a:bodyPr vert="horz" lIns="38100" tIns="38100" rIns="38100" bIns="38100" anchor="ctr" anchorCtr="0"/>
+                    <a:bodyPr/>
+                    <a:lstStyle/>
                     <a:p>
                       <a:pPr marL="0" indent="0" algn="l">
                         <a:buNone/>
@@ -11128,7 +10911,7 @@
                       <a:r>
                         <a:rPr lang="en-US" sz="1200">
                           <a:solidFill>
-                            <a:srgbClr val="1f2637"/>
+                            <a:srgbClr val="1F2637"/>
                           </a:solidFill>
                           <a:latin typeface="맑은 고딕"/>
                           <a:ea typeface="맑은 고딕"/>
@@ -11146,7 +10929,7 @@
                   <a:tcPr marL="38100" marR="38100" marT="38100" marB="38100" anchor="ctr">
                     <a:lnL w="12700" cap="flat" cmpd="sng" algn="ctr">
                       <a:solidFill>
-                        <a:srgbClr val="d9dee6"/>
+                        <a:srgbClr val="D9DEE6"/>
                       </a:solidFill>
                       <a:prstDash val="solid"/>
                       <a:round/>
@@ -11155,7 +10938,7 @@
                     </a:lnL>
                     <a:lnR w="12700" cap="flat" cmpd="sng" algn="ctr">
                       <a:solidFill>
-                        <a:srgbClr val="d9dee6"/>
+                        <a:srgbClr val="D9DEE6"/>
                       </a:solidFill>
                       <a:prstDash val="solid"/>
                       <a:round/>
@@ -11164,7 +10947,7 @@
                     </a:lnR>
                     <a:lnT w="12700" cap="flat" cmpd="sng" algn="ctr">
                       <a:solidFill>
-                        <a:srgbClr val="d9dee6"/>
+                        <a:srgbClr val="D9DEE6"/>
                       </a:solidFill>
                       <a:prstDash val="solid"/>
                       <a:round/>
@@ -11173,7 +10956,7 @@
                     </a:lnT>
                     <a:lnB w="12700" cap="flat" cmpd="sng" algn="ctr">
                       <a:solidFill>
-                        <a:srgbClr val="d9dee6"/>
+                        <a:srgbClr val="D9DEE6"/>
                       </a:solidFill>
                       <a:prstDash val="solid"/>
                       <a:round/>
@@ -11181,15 +10964,21 @@
                       <a:tailEnd w="med" len="med"/>
                     </a:lnB>
                     <a:solidFill>
-                      <a:srgbClr val="ffffff"/>
+                      <a:srgbClr val="FFFFFF"/>
                     </a:solidFill>
                   </a:tcPr>
                 </a:tc>
+                <a:extLst>
+                  <a:ext uri="{0D108BD9-81ED-4DB2-BD59-A6C34878D82A}">
+                    <a16:rowId xmlns:a16="http://schemas.microsoft.com/office/drawing/2014/main" val="10003"/>
+                  </a:ext>
+                </a:extLst>
               </a:tr>
               <a:tr h="384048">
                 <a:tc>
                   <a:txBody>
-                    <a:bodyPr vert="horz" lIns="38100" tIns="38100" rIns="38100" bIns="38100" anchor="ctr" anchorCtr="0"/>
+                    <a:bodyPr/>
+                    <a:lstStyle/>
                     <a:p>
                       <a:pPr marL="0" indent="0" algn="l">
                         <a:buNone/>
@@ -11198,7 +10987,7 @@
                       <a:r>
                         <a:rPr lang="en-US" sz="1200" b="1">
                           <a:solidFill>
-                            <a:srgbClr val="ffffff"/>
+                            <a:srgbClr val="FFFFFF"/>
                           </a:solidFill>
                           <a:latin typeface="맑은 고딕"/>
                           <a:ea typeface="맑은 고딕"/>
@@ -11216,7 +11005,7 @@
                   <a:tcPr marL="38100" marR="38100" marT="38100" marB="38100" anchor="ctr">
                     <a:lnL w="12700" cap="flat" cmpd="sng" algn="ctr">
                       <a:solidFill>
-                        <a:srgbClr val="d9dee6"/>
+                        <a:srgbClr val="D9DEE6"/>
                       </a:solidFill>
                       <a:prstDash val="solid"/>
                       <a:round/>
@@ -11225,7 +11014,7 @@
                     </a:lnL>
                     <a:lnR w="12700" cap="flat" cmpd="sng" algn="ctr">
                       <a:solidFill>
-                        <a:srgbClr val="d9dee6"/>
+                        <a:srgbClr val="D9DEE6"/>
                       </a:solidFill>
                       <a:prstDash val="solid"/>
                       <a:round/>
@@ -11234,7 +11023,7 @@
                     </a:lnR>
                     <a:lnT w="12700" cap="flat" cmpd="sng" algn="ctr">
                       <a:solidFill>
-                        <a:srgbClr val="d9dee6"/>
+                        <a:srgbClr val="D9DEE6"/>
                       </a:solidFill>
                       <a:prstDash val="solid"/>
                       <a:round/>
@@ -11243,7 +11032,7 @@
                     </a:lnT>
                     <a:lnB w="12700" cap="flat" cmpd="sng" algn="ctr">
                       <a:solidFill>
-                        <a:srgbClr val="d9dee6"/>
+                        <a:srgbClr val="D9DEE6"/>
                       </a:solidFill>
                       <a:prstDash val="solid"/>
                       <a:round/>
@@ -11251,13 +11040,14 @@
                       <a:tailEnd w="med" len="med"/>
                     </a:lnB>
                     <a:solidFill>
-                      <a:srgbClr val="16223b"/>
+                      <a:srgbClr val="16223B"/>
                     </a:solidFill>
                   </a:tcPr>
                 </a:tc>
                 <a:tc>
                   <a:txBody>
-                    <a:bodyPr vert="horz" lIns="38100" tIns="38100" rIns="38100" bIns="38100" anchor="ctr" anchorCtr="0"/>
+                    <a:bodyPr/>
+                    <a:lstStyle/>
                     <a:p>
                       <a:pPr marL="0" indent="0" algn="l">
                         <a:buNone/>
@@ -11266,7 +11056,7 @@
                       <a:r>
                         <a:rPr lang="en-US" sz="1200">
                           <a:solidFill>
-                            <a:srgbClr val="1f2637"/>
+                            <a:srgbClr val="1F2637"/>
                           </a:solidFill>
                           <a:latin typeface="맑은 고딕"/>
                           <a:ea typeface="맑은 고딕"/>
@@ -11284,7 +11074,7 @@
                   <a:tcPr marL="38100" marR="38100" marT="38100" marB="38100" anchor="ctr">
                     <a:lnL w="12700" cap="flat" cmpd="sng" algn="ctr">
                       <a:solidFill>
-                        <a:srgbClr val="d9dee6"/>
+                        <a:srgbClr val="D9DEE6"/>
                       </a:solidFill>
                       <a:prstDash val="solid"/>
                       <a:round/>
@@ -11293,7 +11083,7 @@
                     </a:lnL>
                     <a:lnR w="12700" cap="flat" cmpd="sng" algn="ctr">
                       <a:solidFill>
-                        <a:srgbClr val="d9dee6"/>
+                        <a:srgbClr val="D9DEE6"/>
                       </a:solidFill>
                       <a:prstDash val="solid"/>
                       <a:round/>
@@ -11302,7 +11092,7 @@
                     </a:lnR>
                     <a:lnT w="12700" cap="flat" cmpd="sng" algn="ctr">
                       <a:solidFill>
-                        <a:srgbClr val="d9dee6"/>
+                        <a:srgbClr val="D9DEE6"/>
                       </a:solidFill>
                       <a:prstDash val="solid"/>
                       <a:round/>
@@ -11311,7 +11101,7 @@
                     </a:lnT>
                     <a:lnB w="12700" cap="flat" cmpd="sng" algn="ctr">
                       <a:solidFill>
-                        <a:srgbClr val="d9dee6"/>
+                        <a:srgbClr val="D9DEE6"/>
                       </a:solidFill>
                       <a:prstDash val="solid"/>
                       <a:round/>
@@ -11319,15 +11109,21 @@
                       <a:tailEnd w="med" len="med"/>
                     </a:lnB>
                     <a:solidFill>
-                      <a:srgbClr val="ffffff"/>
+                      <a:srgbClr val="FFFFFF"/>
                     </a:solidFill>
                   </a:tcPr>
                 </a:tc>
+                <a:extLst>
+                  <a:ext uri="{0D108BD9-81ED-4DB2-BD59-A6C34878D82A}">
+                    <a16:rowId xmlns:a16="http://schemas.microsoft.com/office/drawing/2014/main" val="10004"/>
+                  </a:ext>
+                </a:extLst>
               </a:tr>
               <a:tr h="384048">
                 <a:tc>
                   <a:txBody>
-                    <a:bodyPr vert="horz" lIns="38100" tIns="38100" rIns="38100" bIns="38100" anchor="ctr" anchorCtr="0"/>
+                    <a:bodyPr/>
+                    <a:lstStyle/>
                     <a:p>
                       <a:pPr marL="0" indent="0" algn="l">
                         <a:buNone/>
@@ -11336,7 +11132,7 @@
                       <a:r>
                         <a:rPr lang="en-US" sz="1200" b="1">
                           <a:solidFill>
-                            <a:srgbClr val="ffffff"/>
+                            <a:srgbClr val="FFFFFF"/>
                           </a:solidFill>
                           <a:latin typeface="맑은 고딕"/>
                           <a:ea typeface="맑은 고딕"/>
@@ -11354,7 +11150,7 @@
                   <a:tcPr marL="38100" marR="38100" marT="38100" marB="38100" anchor="ctr">
                     <a:lnL w="12700" cap="flat" cmpd="sng" algn="ctr">
                       <a:solidFill>
-                        <a:srgbClr val="d9dee6"/>
+                        <a:srgbClr val="D9DEE6"/>
                       </a:solidFill>
                       <a:prstDash val="solid"/>
                       <a:round/>
@@ -11363,7 +11159,7 @@
                     </a:lnL>
                     <a:lnR w="12700" cap="flat" cmpd="sng" algn="ctr">
                       <a:solidFill>
-                        <a:srgbClr val="d9dee6"/>
+                        <a:srgbClr val="D9DEE6"/>
                       </a:solidFill>
                       <a:prstDash val="solid"/>
                       <a:round/>
@@ -11372,7 +11168,7 @@
                     </a:lnR>
                     <a:lnT w="12700" cap="flat" cmpd="sng" algn="ctr">
                       <a:solidFill>
-                        <a:srgbClr val="d9dee6"/>
+                        <a:srgbClr val="D9DEE6"/>
                       </a:solidFill>
                       <a:prstDash val="solid"/>
                       <a:round/>
@@ -11381,7 +11177,7 @@
                     </a:lnT>
                     <a:lnB w="12700" cap="flat" cmpd="sng" algn="ctr">
                       <a:solidFill>
-                        <a:srgbClr val="d9dee6"/>
+                        <a:srgbClr val="D9DEE6"/>
                       </a:solidFill>
                       <a:prstDash val="solid"/>
                       <a:round/>
@@ -11389,13 +11185,14 @@
                       <a:tailEnd w="med" len="med"/>
                     </a:lnB>
                     <a:solidFill>
-                      <a:srgbClr val="16223b"/>
+                      <a:srgbClr val="16223B"/>
                     </a:solidFill>
                   </a:tcPr>
                 </a:tc>
                 <a:tc>
                   <a:txBody>
-                    <a:bodyPr vert="horz" lIns="38100" tIns="38100" rIns="38100" bIns="38100" anchor="ctr" anchorCtr="0"/>
+                    <a:bodyPr/>
+                    <a:lstStyle/>
                     <a:p>
                       <a:pPr marL="0" indent="0" algn="l">
                         <a:buNone/>
@@ -11404,7 +11201,7 @@
                       <a:r>
                         <a:rPr lang="en-US" sz="1200">
                           <a:solidFill>
-                            <a:srgbClr val="1f2637"/>
+                            <a:srgbClr val="1F2637"/>
                           </a:solidFill>
                           <a:latin typeface="맑은 고딕"/>
                           <a:ea typeface="맑은 고딕"/>
@@ -11422,7 +11219,7 @@
                   <a:tcPr marL="38100" marR="38100" marT="38100" marB="38100" anchor="ctr">
                     <a:lnL w="12700" cap="flat" cmpd="sng" algn="ctr">
                       <a:solidFill>
-                        <a:srgbClr val="d9dee6"/>
+                        <a:srgbClr val="D9DEE6"/>
                       </a:solidFill>
                       <a:prstDash val="solid"/>
                       <a:round/>
@@ -11431,7 +11228,7 @@
                     </a:lnL>
                     <a:lnR w="12700" cap="flat" cmpd="sng" algn="ctr">
                       <a:solidFill>
-                        <a:srgbClr val="d9dee6"/>
+                        <a:srgbClr val="D9DEE6"/>
                       </a:solidFill>
                       <a:prstDash val="solid"/>
                       <a:round/>
@@ -11440,7 +11237,7 @@
                     </a:lnR>
                     <a:lnT w="12700" cap="flat" cmpd="sng" algn="ctr">
                       <a:solidFill>
-                        <a:srgbClr val="d9dee6"/>
+                        <a:srgbClr val="D9DEE6"/>
                       </a:solidFill>
                       <a:prstDash val="solid"/>
                       <a:round/>
@@ -11449,7 +11246,7 @@
                     </a:lnT>
                     <a:lnB w="12700" cap="flat" cmpd="sng" algn="ctr">
                       <a:solidFill>
-                        <a:srgbClr val="d9dee6"/>
+                        <a:srgbClr val="D9DEE6"/>
                       </a:solidFill>
                       <a:prstDash val="solid"/>
                       <a:round/>
@@ -11457,10 +11254,15 @@
                       <a:tailEnd w="med" len="med"/>
                     </a:lnB>
                     <a:solidFill>
-                      <a:srgbClr val="ffffff"/>
+                      <a:srgbClr val="FFFFFF"/>
                     </a:solidFill>
                   </a:tcPr>
                 </a:tc>
+                <a:extLst>
+                  <a:ext uri="{0D108BD9-81ED-4DB2-BD59-A6C34878D82A}">
+                    <a16:rowId xmlns:a16="http://schemas.microsoft.com/office/drawing/2014/main" val="10005"/>
+                  </a:ext>
+                </a:extLst>
               </a:tr>
             </a:tbl>
           </a:graphicData>
@@ -11483,11 +11285,11 @@
             </a:avLst>
           </a:prstGeom>
           <a:solidFill>
-            <a:srgbClr val="f4f6fa"/>
+            <a:srgbClr val="F4F6FA"/>
           </a:solidFill>
           <a:ln w="12700">
             <a:solidFill>
-              <a:srgbClr val="d9dee6"/>
+              <a:srgbClr val="D9DEE6"/>
             </a:solidFill>
             <a:prstDash val="solid"/>
           </a:ln>
@@ -11501,6 +11303,7 @@
         </p:spPr>
         <p:txBody>
           <a:bodyPr anchor="ctr"/>
+          <a:lstStyle/>
           <a:p>
             <a:pPr algn="ctr">
               <a:defRPr/>
@@ -11561,7 +11364,7 @@
             <a:r>
               <a:rPr lang="en-US" sz="1100" i="1">
                 <a:solidFill>
-                  <a:srgbClr val="6c7686"/>
+                  <a:srgbClr val="6C7686"/>
                 </a:solidFill>
                 <a:latin typeface="맑은 고딕"/>
                 <a:ea typeface="맑은 고딕"/>
@@ -11572,7 +11375,7 @@
             <a:r>
               <a:rPr lang="ko-KR" altLang="en-US" sz="1100" i="1">
                 <a:solidFill>
-                  <a:srgbClr val="6c7686"/>
+                  <a:srgbClr val="6C7686"/>
                 </a:solidFill>
                 <a:latin typeface="맑은 고딕"/>
                 <a:ea typeface="맑은 고딕"/>
@@ -11583,7 +11386,7 @@
             <a:r>
               <a:rPr lang="en-US" altLang="ko-KR" sz="1100" i="1">
                 <a:solidFill>
-                  <a:srgbClr val="6c7686"/>
+                  <a:srgbClr val="6C7686"/>
                 </a:solidFill>
                 <a:latin typeface="맑은 고딕"/>
                 <a:ea typeface="맑은 고딕"/>
@@ -11594,7 +11397,7 @@
             <a:r>
               <a:rPr lang="ko-KR" altLang="en-US" sz="1100" i="1">
                 <a:solidFill>
-                  <a:srgbClr val="6c7686"/>
+                  <a:srgbClr val="6C7686"/>
                 </a:solidFill>
                 <a:latin typeface="맑은 고딕"/>
                 <a:ea typeface="맑은 고딕"/>
@@ -11605,7 +11408,7 @@
             <a:r>
               <a:rPr lang="en-US" sz="1100" i="1">
                 <a:solidFill>
-                  <a:srgbClr val="6c7686"/>
+                  <a:srgbClr val="6C7686"/>
                 </a:solidFill>
                 <a:latin typeface="맑은 고딕"/>
                 <a:ea typeface="맑은 고딕"/>
@@ -11613,14 +11416,6 @@
               </a:rPr>
               <a:t>)</a:t>
             </a:r>
-            <a:endParaRPr lang="en-US" sz="1100" i="1">
-              <a:solidFill>
-                <a:srgbClr val="6c7686"/>
-              </a:solidFill>
-              <a:latin typeface="맑은 고딕"/>
-              <a:ea typeface="맑은 고딕"/>
-              <a:cs typeface="맑은 고딕"/>
-            </a:endParaRPr>
           </a:p>
         </p:txBody>
       </p:sp>
@@ -11652,7 +11447,7 @@
             <a:r>
               <a:rPr lang="en-US" sz="900">
                 <a:solidFill>
-                  <a:srgbClr val="6c7686"/>
+                  <a:srgbClr val="6C7686"/>
                 </a:solidFill>
                 <a:latin typeface="맑은 고딕"/>
                 <a:ea typeface="맑은 고딕"/>
@@ -11692,7 +11487,7 @@
             <a:r>
               <a:rPr lang="en-US" sz="900">
                 <a:solidFill>
-                  <a:srgbClr val="6c7686"/>
+                  <a:srgbClr val="6C7686"/>
                 </a:solidFill>
                 <a:latin typeface="맑은 고딕"/>
                 <a:ea typeface="맑은 고딕"/>
@@ -11709,11 +11504,11 @@
   <p:clrMapOvr>
     <a:masterClrMapping/>
   </p:clrMapOvr>
-  <mc:AlternateContent xmlns:mc="http://schemas.openxmlformats.org/markup-compatibility/2006">
-    <mc:Choice xmlns:p14="http://schemas.microsoft.com/office/powerpoint/2010/main" Requires="p14">
-      <p:transition xmlns:mc="http://schemas.openxmlformats.org/markup-compatibility/2006" xmlns:p14="http://schemas.microsoft.com/office/powerpoint/2010/main" mc:Ignorable="p14" p14:dur="500"/>
+  <mc:AlternateContent xmlns:mc="http://schemas.openxmlformats.org/markup-compatibility/2006" xmlns:p14="http://schemas.microsoft.com/office/powerpoint/2010/main">
+    <mc:Choice Requires="p14">
+      <p:transition/>
     </mc:Choice>
-    <mc:Fallback>
+    <mc:Fallback xmlns:dsp="http://schemas.microsoft.com/office/drawing/2008/diagram" xmlns:dgm="http://schemas.openxmlformats.org/drawingml/2006/diagram" xmlns:c="http://schemas.openxmlformats.org/drawingml/2006/chart" xmlns="">
       <p:transition/>
     </mc:Fallback>
   </mc:AlternateContent>
@@ -11721,13 +11516,14 @@
 </file>
 
 <file path=ppt/slides/slide5.xml><?xml version="1.0" encoding="utf-8"?>
-<p:sld xmlns:r="http://schemas.openxmlformats.org/officeDocument/2006/relationships" xmlns:c="http://schemas.openxmlformats.org/drawingml/2006/chart" xmlns:a="http://schemas.openxmlformats.org/drawingml/2006/main" xmlns:dgm="http://schemas.openxmlformats.org/drawingml/2006/diagram" xmlns:dsp="http://schemas.microsoft.com/office/drawing/2008/diagram" xmlns:p="http://schemas.openxmlformats.org/presentationml/2006/main">
+<p:sld xmlns:a="http://schemas.openxmlformats.org/drawingml/2006/main" xmlns:r="http://schemas.openxmlformats.org/officeDocument/2006/relationships" xmlns:p="http://schemas.openxmlformats.org/presentationml/2006/main">
   <p:cSld name="Slide 5">
     <p:bg>
-      <p:bgPr shadeToTitle="0">
+      <p:bgPr>
         <a:solidFill>
-          <a:srgbClr val="ffffff"/>
+          <a:srgbClr val="FFFFFF"/>
         </a:solidFill>
+        <a:effectLst/>
       </p:bgPr>
     </p:bg>
     <p:spTree>
@@ -11772,7 +11568,7 @@
             <a:r>
               <a:rPr lang="en-US" sz="1200" b="1" kern="0" spc="200">
                 <a:solidFill>
-                  <a:srgbClr val="c8622e"/>
+                  <a:srgbClr val="C8622E"/>
                 </a:solidFill>
                 <a:latin typeface="맑은 고딕"/>
                 <a:ea typeface="맑은 고딕"/>
@@ -11810,17 +11606,94 @@
               <a:defRPr/>
             </a:pPr>
             <a:r>
-              <a:rPr lang="en-US" sz="2900" b="1">
-                <a:solidFill>
-                  <a:srgbClr val="1f2637"/>
-                </a:solidFill>
-                <a:latin typeface="맑은 고딕"/>
-                <a:ea typeface="맑은 고딕"/>
-                <a:cs typeface="맑은 고딕"/>
-              </a:rPr>
-              <a:t>왜 이렇게 설계했는가: 턴을 플레이어에게만</a:t>
-            </a:r>
-            <a:endParaRPr lang="en-US" sz="2900"/>
+              <a:rPr lang="en-US" sz="2900" b="1" dirty="0">
+                <a:solidFill>
+                  <a:srgbClr val="1F2637"/>
+                </a:solidFill>
+                <a:latin typeface="맑은 고딕"/>
+                <a:ea typeface="맑은 고딕"/>
+                <a:cs typeface="맑은 고딕"/>
+              </a:rPr>
+              <a:t>왜 </a:t>
+            </a:r>
+            <a:r>
+              <a:rPr lang="en-US" sz="2900" b="1" dirty="0" err="1">
+                <a:solidFill>
+                  <a:srgbClr val="1F2637"/>
+                </a:solidFill>
+                <a:latin typeface="맑은 고딕"/>
+                <a:ea typeface="맑은 고딕"/>
+                <a:cs typeface="맑은 고딕"/>
+              </a:rPr>
+              <a:t>이렇게</a:t>
+            </a:r>
+            <a:r>
+              <a:rPr lang="en-US" sz="2900" b="1" dirty="0">
+                <a:solidFill>
+                  <a:srgbClr val="1F2637"/>
+                </a:solidFill>
+                <a:latin typeface="맑은 고딕"/>
+                <a:ea typeface="맑은 고딕"/>
+                <a:cs typeface="맑은 고딕"/>
+              </a:rPr>
+              <a:t> </a:t>
+            </a:r>
+            <a:r>
+              <a:rPr lang="en-US" sz="2900" b="1" dirty="0" err="1">
+                <a:solidFill>
+                  <a:srgbClr val="1F2637"/>
+                </a:solidFill>
+                <a:latin typeface="맑은 고딕"/>
+                <a:ea typeface="맑은 고딕"/>
+                <a:cs typeface="맑은 고딕"/>
+              </a:rPr>
+              <a:t>설계했는가</a:t>
+            </a:r>
+            <a:r>
+              <a:rPr lang="en-US" sz="2900" b="1" dirty="0">
+                <a:solidFill>
+                  <a:srgbClr val="1F2637"/>
+                </a:solidFill>
+                <a:latin typeface="맑은 고딕"/>
+                <a:ea typeface="맑은 고딕"/>
+                <a:cs typeface="맑은 고딕"/>
+              </a:rPr>
+              <a:t>: </a:t>
+            </a:r>
+            <a:r>
+              <a:rPr lang="en-US" sz="2900" b="1" dirty="0" err="1">
+                <a:solidFill>
+                  <a:srgbClr val="1F2637"/>
+                </a:solidFill>
+                <a:latin typeface="맑은 고딕"/>
+                <a:ea typeface="맑은 고딕"/>
+                <a:cs typeface="맑은 고딕"/>
+              </a:rPr>
+              <a:t>턴을</a:t>
+            </a:r>
+            <a:r>
+              <a:rPr lang="en-US" sz="2900" b="1" dirty="0">
+                <a:solidFill>
+                  <a:srgbClr val="1F2637"/>
+                </a:solidFill>
+                <a:latin typeface="맑은 고딕"/>
+                <a:ea typeface="맑은 고딕"/>
+                <a:cs typeface="맑은 고딕"/>
+              </a:rPr>
+              <a:t> </a:t>
+            </a:r>
+            <a:r>
+              <a:rPr lang="en-US" sz="2900" b="1" dirty="0" err="1">
+                <a:solidFill>
+                  <a:srgbClr val="1F2637"/>
+                </a:solidFill>
+                <a:latin typeface="맑은 고딕"/>
+                <a:ea typeface="맑은 고딕"/>
+                <a:cs typeface="맑은 고딕"/>
+              </a:rPr>
+              <a:t>플레이어에게만</a:t>
+            </a:r>
+            <a:endParaRPr lang="en-US" sz="2900" dirty="0"/>
           </a:p>
         </p:txBody>
       </p:sp>
@@ -11841,11 +11714,11 @@
             </a:avLst>
           </a:prstGeom>
           <a:solidFill>
-            <a:srgbClr val="f4f6fa"/>
+            <a:srgbClr val="F4F6FA"/>
           </a:solidFill>
           <a:ln w="12700">
             <a:solidFill>
-              <a:srgbClr val="d9dee6"/>
+              <a:srgbClr val="D9DEE6"/>
             </a:solidFill>
             <a:prstDash val="solid"/>
           </a:ln>
@@ -11859,6 +11732,7 @@
         </p:spPr>
         <p:txBody>
           <a:bodyPr anchor="ctr"/>
+          <a:lstStyle/>
           <a:p>
             <a:pPr algn="ctr">
               <a:defRPr/>
@@ -11895,7 +11769,7 @@
             <a:r>
               <a:rPr lang="en-US" sz="1400" b="1">
                 <a:solidFill>
-                  <a:srgbClr val="c8622e"/>
+                  <a:srgbClr val="C8622E"/>
                 </a:solidFill>
                 <a:latin typeface="맑은 고딕"/>
                 <a:ea typeface="맑은 고딕"/>
@@ -11903,14 +11777,6 @@
               </a:rPr>
               <a:t>문제</a:t>
             </a:r>
-            <a:endParaRPr lang="en-US" sz="1400" b="1">
-              <a:solidFill>
-                <a:srgbClr val="c8622e"/>
-              </a:solidFill>
-              <a:latin typeface="맑은 고딕"/>
-              <a:ea typeface="맑은 고딕"/>
-              <a:cs typeface="맑은 고딕"/>
-            </a:endParaRPr>
           </a:p>
         </p:txBody>
       </p:sp>
@@ -11943,24 +11809,115 @@
               <a:defRPr/>
             </a:pPr>
             <a:r>
-              <a:rPr lang="en-US" sz="1300">
-                <a:solidFill>
-                  <a:srgbClr val="1f2637"/>
-                </a:solidFill>
-                <a:latin typeface="맑은 고딕"/>
-                <a:ea typeface="맑은 고딕"/>
-                <a:cs typeface="맑은 고딕"/>
-              </a:rPr>
-              <a:t>소울라이크의 속도감과 턴제의 전략성을 한 번에? </a:t>
-            </a:r>
-            <a:endParaRPr lang="en-US" sz="1300">
-              <a:solidFill>
-                <a:srgbClr val="1f2637"/>
-              </a:solidFill>
-              <a:latin typeface="맑은 고딕"/>
-              <a:ea typeface="맑은 고딕"/>
-              <a:cs typeface="맑은 고딕"/>
-            </a:endParaRPr>
+              <a:rPr lang="en-US" sz="1300" dirty="0" err="1">
+                <a:solidFill>
+                  <a:srgbClr val="1F2637"/>
+                </a:solidFill>
+                <a:latin typeface="맑은 고딕"/>
+                <a:ea typeface="맑은 고딕"/>
+                <a:cs typeface="맑은 고딕"/>
+              </a:rPr>
+              <a:t>소울라이크의</a:t>
+            </a:r>
+            <a:r>
+              <a:rPr lang="en-US" sz="1300" dirty="0">
+                <a:solidFill>
+                  <a:srgbClr val="1F2637"/>
+                </a:solidFill>
+                <a:latin typeface="맑은 고딕"/>
+                <a:ea typeface="맑은 고딕"/>
+                <a:cs typeface="맑은 고딕"/>
+              </a:rPr>
+              <a:t> </a:t>
+            </a:r>
+            <a:r>
+              <a:rPr lang="en-US" sz="1300" dirty="0" err="1">
+                <a:solidFill>
+                  <a:srgbClr val="1F2637"/>
+                </a:solidFill>
+                <a:latin typeface="맑은 고딕"/>
+                <a:ea typeface="맑은 고딕"/>
+                <a:cs typeface="맑은 고딕"/>
+              </a:rPr>
+              <a:t>속도감과</a:t>
+            </a:r>
+            <a:r>
+              <a:rPr lang="en-US" sz="1300" dirty="0">
+                <a:solidFill>
+                  <a:srgbClr val="1F2637"/>
+                </a:solidFill>
+                <a:latin typeface="맑은 고딕"/>
+                <a:ea typeface="맑은 고딕"/>
+                <a:cs typeface="맑은 고딕"/>
+              </a:rPr>
+              <a:t> </a:t>
+            </a:r>
+            <a:r>
+              <a:rPr lang="en-US" sz="1300" dirty="0" err="1">
+                <a:solidFill>
+                  <a:srgbClr val="1F2637"/>
+                </a:solidFill>
+                <a:latin typeface="맑은 고딕"/>
+                <a:ea typeface="맑은 고딕"/>
+                <a:cs typeface="맑은 고딕"/>
+              </a:rPr>
+              <a:t>턴제의</a:t>
+            </a:r>
+            <a:r>
+              <a:rPr lang="en-US" sz="1300" dirty="0">
+                <a:solidFill>
+                  <a:srgbClr val="1F2637"/>
+                </a:solidFill>
+                <a:latin typeface="맑은 고딕"/>
+                <a:ea typeface="맑은 고딕"/>
+                <a:cs typeface="맑은 고딕"/>
+              </a:rPr>
+              <a:t> </a:t>
+            </a:r>
+            <a:r>
+              <a:rPr lang="en-US" sz="1300" dirty="0" err="1">
+                <a:solidFill>
+                  <a:srgbClr val="1F2637"/>
+                </a:solidFill>
+                <a:latin typeface="맑은 고딕"/>
+                <a:ea typeface="맑은 고딕"/>
+                <a:cs typeface="맑은 고딕"/>
+              </a:rPr>
+              <a:t>전략성을</a:t>
+            </a:r>
+            <a:r>
+              <a:rPr lang="en-US" sz="1300" dirty="0">
+                <a:solidFill>
+                  <a:srgbClr val="1F2637"/>
+                </a:solidFill>
+                <a:latin typeface="맑은 고딕"/>
+                <a:ea typeface="맑은 고딕"/>
+                <a:cs typeface="맑은 고딕"/>
+              </a:rPr>
+              <a:t> 한 </a:t>
+            </a:r>
+            <a:r>
+              <a:rPr lang="en-US" sz="1300" dirty="0" err="1">
+                <a:solidFill>
+                  <a:srgbClr val="1F2637"/>
+                </a:solidFill>
+                <a:latin typeface="맑은 고딕"/>
+                <a:ea typeface="맑은 고딕"/>
+                <a:cs typeface="맑은 고딕"/>
+              </a:rPr>
+              <a:t>번에</a:t>
+            </a:r>
+            <a:r>
+              <a:rPr lang="en-US" sz="1300" dirty="0">
+                <a:solidFill>
+                  <a:srgbClr val="1F2637"/>
+                </a:solidFill>
+                <a:latin typeface="맑은 고딕"/>
+                <a:ea typeface="맑은 고딕"/>
+                <a:cs typeface="맑은 고딕"/>
+              </a:rPr>
+              <a:t>? </a:t>
+            </a:r>
           </a:p>
           <a:p>
             <a:pPr marL="0" indent="0">
@@ -11971,17 +11928,182 @@
               <a:defRPr/>
             </a:pPr>
             <a:r>
-              <a:rPr lang="en-US" sz="1300">
-                <a:solidFill>
-                  <a:srgbClr val="1f2637"/>
-                </a:solidFill>
-                <a:latin typeface="맑은 고딕"/>
-                <a:ea typeface="맑은 고딕"/>
-                <a:cs typeface="맑은 고딕"/>
-              </a:rPr>
-              <a:t>전통적 '번갈아 공격' 턴제로는 두 장르를 애매하게 접합할 뿐, 둘 다 놓친다.</a:t>
-            </a:r>
-            <a:endParaRPr lang="en-US" sz="1300"/>
+              <a:rPr lang="en-US" sz="1300" dirty="0" err="1">
+                <a:solidFill>
+                  <a:srgbClr val="1F2637"/>
+                </a:solidFill>
+                <a:latin typeface="맑은 고딕"/>
+                <a:ea typeface="맑은 고딕"/>
+                <a:cs typeface="맑은 고딕"/>
+              </a:rPr>
+              <a:t>전통적</a:t>
+            </a:r>
+            <a:r>
+              <a:rPr lang="en-US" sz="1300" dirty="0">
+                <a:solidFill>
+                  <a:srgbClr val="1F2637"/>
+                </a:solidFill>
+                <a:latin typeface="맑은 고딕"/>
+                <a:ea typeface="맑은 고딕"/>
+                <a:cs typeface="맑은 고딕"/>
+              </a:rPr>
+              <a:t> '</a:t>
+            </a:r>
+            <a:r>
+              <a:rPr lang="en-US" sz="1300" dirty="0" err="1">
+                <a:solidFill>
+                  <a:srgbClr val="1F2637"/>
+                </a:solidFill>
+                <a:latin typeface="맑은 고딕"/>
+                <a:ea typeface="맑은 고딕"/>
+                <a:cs typeface="맑은 고딕"/>
+              </a:rPr>
+              <a:t>번갈아</a:t>
+            </a:r>
+            <a:r>
+              <a:rPr lang="en-US" sz="1300" dirty="0">
+                <a:solidFill>
+                  <a:srgbClr val="1F2637"/>
+                </a:solidFill>
+                <a:latin typeface="맑은 고딕"/>
+                <a:ea typeface="맑은 고딕"/>
+                <a:cs typeface="맑은 고딕"/>
+              </a:rPr>
+              <a:t> </a:t>
+            </a:r>
+            <a:r>
+              <a:rPr lang="en-US" sz="1300" dirty="0" err="1">
+                <a:solidFill>
+                  <a:srgbClr val="1F2637"/>
+                </a:solidFill>
+                <a:latin typeface="맑은 고딕"/>
+                <a:ea typeface="맑은 고딕"/>
+                <a:cs typeface="맑은 고딕"/>
+              </a:rPr>
+              <a:t>공격</a:t>
+            </a:r>
+            <a:r>
+              <a:rPr lang="en-US" sz="1300" dirty="0">
+                <a:solidFill>
+                  <a:srgbClr val="1F2637"/>
+                </a:solidFill>
+                <a:latin typeface="맑은 고딕"/>
+                <a:ea typeface="맑은 고딕"/>
+                <a:cs typeface="맑은 고딕"/>
+              </a:rPr>
+              <a:t>' </a:t>
+            </a:r>
+            <a:r>
+              <a:rPr lang="en-US" sz="1300" dirty="0" err="1">
+                <a:solidFill>
+                  <a:srgbClr val="1F2637"/>
+                </a:solidFill>
+                <a:latin typeface="맑은 고딕"/>
+                <a:ea typeface="맑은 고딕"/>
+                <a:cs typeface="맑은 고딕"/>
+              </a:rPr>
+              <a:t>턴제로는</a:t>
+            </a:r>
+            <a:r>
+              <a:rPr lang="en-US" sz="1300" dirty="0">
+                <a:solidFill>
+                  <a:srgbClr val="1F2637"/>
+                </a:solidFill>
+                <a:latin typeface="맑은 고딕"/>
+                <a:ea typeface="맑은 고딕"/>
+                <a:cs typeface="맑은 고딕"/>
+              </a:rPr>
+              <a:t> 두 </a:t>
+            </a:r>
+            <a:r>
+              <a:rPr lang="en-US" sz="1300" dirty="0" err="1">
+                <a:solidFill>
+                  <a:srgbClr val="1F2637"/>
+                </a:solidFill>
+                <a:latin typeface="맑은 고딕"/>
+                <a:ea typeface="맑은 고딕"/>
+                <a:cs typeface="맑은 고딕"/>
+              </a:rPr>
+              <a:t>장르를</a:t>
+            </a:r>
+            <a:r>
+              <a:rPr lang="en-US" sz="1300" dirty="0">
+                <a:solidFill>
+                  <a:srgbClr val="1F2637"/>
+                </a:solidFill>
+                <a:latin typeface="맑은 고딕"/>
+                <a:ea typeface="맑은 고딕"/>
+                <a:cs typeface="맑은 고딕"/>
+              </a:rPr>
+              <a:t> </a:t>
+            </a:r>
+            <a:r>
+              <a:rPr lang="en-US" sz="1300" dirty="0" err="1">
+                <a:solidFill>
+                  <a:srgbClr val="1F2637"/>
+                </a:solidFill>
+                <a:latin typeface="맑은 고딕"/>
+                <a:ea typeface="맑은 고딕"/>
+                <a:cs typeface="맑은 고딕"/>
+              </a:rPr>
+              <a:t>애매하게</a:t>
+            </a:r>
+            <a:r>
+              <a:rPr lang="en-US" sz="1300" dirty="0">
+                <a:solidFill>
+                  <a:srgbClr val="1F2637"/>
+                </a:solidFill>
+                <a:latin typeface="맑은 고딕"/>
+                <a:ea typeface="맑은 고딕"/>
+                <a:cs typeface="맑은 고딕"/>
+              </a:rPr>
+              <a:t> </a:t>
+            </a:r>
+            <a:r>
+              <a:rPr lang="en-US" sz="1300" dirty="0" err="1">
+                <a:solidFill>
+                  <a:srgbClr val="1F2637"/>
+                </a:solidFill>
+                <a:latin typeface="맑은 고딕"/>
+                <a:ea typeface="맑은 고딕"/>
+                <a:cs typeface="맑은 고딕"/>
+              </a:rPr>
+              <a:t>접합할</a:t>
+            </a:r>
+            <a:r>
+              <a:rPr lang="en-US" sz="1300" dirty="0">
+                <a:solidFill>
+                  <a:srgbClr val="1F2637"/>
+                </a:solidFill>
+                <a:latin typeface="맑은 고딕"/>
+                <a:ea typeface="맑은 고딕"/>
+                <a:cs typeface="맑은 고딕"/>
+              </a:rPr>
+              <a:t> 뿐, 둘 다 </a:t>
+            </a:r>
+            <a:r>
+              <a:rPr lang="en-US" sz="1300" dirty="0" err="1">
+                <a:solidFill>
+                  <a:srgbClr val="1F2637"/>
+                </a:solidFill>
+                <a:latin typeface="맑은 고딕"/>
+                <a:ea typeface="맑은 고딕"/>
+                <a:cs typeface="맑은 고딕"/>
+              </a:rPr>
+              <a:t>놓친다</a:t>
+            </a:r>
+            <a:r>
+              <a:rPr lang="en-US" sz="1300" dirty="0">
+                <a:solidFill>
+                  <a:srgbClr val="1F2637"/>
+                </a:solidFill>
+                <a:latin typeface="맑은 고딕"/>
+                <a:ea typeface="맑은 고딕"/>
+                <a:cs typeface="맑은 고딕"/>
+              </a:rPr>
+              <a:t>.</a:t>
+            </a:r>
+            <a:endParaRPr lang="en-US" sz="1300" dirty="0"/>
           </a:p>
         </p:txBody>
       </p:sp>
@@ -12013,7 +12135,7 @@
             <a:r>
               <a:rPr lang="en-US" sz="3400" b="1">
                 <a:solidFill>
-                  <a:srgbClr val="c8622e"/>
+                  <a:srgbClr val="C8622E"/>
                 </a:solidFill>
                 <a:latin typeface="Arial"/>
                 <a:ea typeface="Arial"/>
@@ -12042,11 +12164,11 @@
             </a:avLst>
           </a:prstGeom>
           <a:solidFill>
-            <a:srgbClr val="16223b"/>
+            <a:srgbClr val="16223B"/>
           </a:solidFill>
           <a:ln w="12700">
             <a:solidFill>
-              <a:srgbClr val="d9dee6"/>
+              <a:srgbClr val="D9DEE6"/>
             </a:solidFill>
             <a:prstDash val="solid"/>
           </a:ln>
@@ -12060,6 +12182,7 @@
         </p:spPr>
         <p:txBody>
           <a:bodyPr anchor="ctr"/>
+          <a:lstStyle/>
           <a:p>
             <a:pPr algn="ctr">
               <a:defRPr/>
@@ -12096,7 +12219,7 @@
             <a:r>
               <a:rPr lang="en-US" sz="1400" b="1">
                 <a:solidFill>
-                  <a:srgbClr val="e0a15a"/>
+                  <a:srgbClr val="E0A15A"/>
                 </a:solidFill>
                 <a:latin typeface="맑은 고딕"/>
                 <a:ea typeface="맑은 고딕"/>
@@ -12104,14 +12227,6 @@
               </a:rPr>
               <a:t>해결</a:t>
             </a:r>
-            <a:endParaRPr lang="en-US" sz="1400" b="1">
-              <a:solidFill>
-                <a:srgbClr val="e0a15a"/>
-              </a:solidFill>
-              <a:latin typeface="맑은 고딕"/>
-              <a:ea typeface="맑은 고딕"/>
-              <a:cs typeface="맑은 고딕"/>
-            </a:endParaRPr>
           </a:p>
         </p:txBody>
       </p:sp>
@@ -12144,24 +12259,126 @@
               <a:defRPr/>
             </a:pPr>
             <a:r>
-              <a:rPr lang="en-US" sz="1300">
-                <a:solidFill>
-                  <a:srgbClr val="ffffff"/>
-                </a:solidFill>
-                <a:latin typeface="맑은 고딕"/>
-                <a:ea typeface="맑은 고딕"/>
-                <a:cs typeface="맑은 고딕"/>
-              </a:rPr>
-              <a:t>'턴' 개념만 차용하고 턴은 플레이어에게만 부여. </a:t>
-            </a:r>
-            <a:endParaRPr lang="en-US" sz="1300">
-              <a:solidFill>
-                <a:srgbClr val="ffffff"/>
-              </a:solidFill>
-              <a:latin typeface="맑은 고딕"/>
-              <a:ea typeface="맑은 고딕"/>
-              <a:cs typeface="맑은 고딕"/>
-            </a:endParaRPr>
+              <a:rPr lang="en-US" sz="1300" dirty="0">
+                <a:solidFill>
+                  <a:srgbClr val="FFFFFF"/>
+                </a:solidFill>
+                <a:latin typeface="맑은 고딕"/>
+                <a:ea typeface="맑은 고딕"/>
+                <a:cs typeface="맑은 고딕"/>
+              </a:rPr>
+              <a:t>'턴' </a:t>
+            </a:r>
+            <a:r>
+              <a:rPr lang="en-US" sz="1300" dirty="0" err="1">
+                <a:solidFill>
+                  <a:srgbClr val="FFFFFF"/>
+                </a:solidFill>
+                <a:latin typeface="맑은 고딕"/>
+                <a:ea typeface="맑은 고딕"/>
+                <a:cs typeface="맑은 고딕"/>
+              </a:rPr>
+              <a:t>개념만</a:t>
+            </a:r>
+            <a:r>
+              <a:rPr lang="en-US" sz="1300" dirty="0">
+                <a:solidFill>
+                  <a:srgbClr val="FFFFFF"/>
+                </a:solidFill>
+                <a:latin typeface="맑은 고딕"/>
+                <a:ea typeface="맑은 고딕"/>
+                <a:cs typeface="맑은 고딕"/>
+              </a:rPr>
+              <a:t> </a:t>
+            </a:r>
+            <a:r>
+              <a:rPr lang="en-US" sz="1300" dirty="0" err="1">
+                <a:solidFill>
+                  <a:srgbClr val="FFFFFF"/>
+                </a:solidFill>
+                <a:latin typeface="맑은 고딕"/>
+                <a:ea typeface="맑은 고딕"/>
+                <a:cs typeface="맑은 고딕"/>
+              </a:rPr>
+              <a:t>차용하고</a:t>
+            </a:r>
+            <a:r>
+              <a:rPr lang="en-US" sz="1300" dirty="0">
+                <a:solidFill>
+                  <a:srgbClr val="FFFFFF"/>
+                </a:solidFill>
+                <a:latin typeface="맑은 고딕"/>
+                <a:ea typeface="맑은 고딕"/>
+                <a:cs typeface="맑은 고딕"/>
+              </a:rPr>
+              <a:t> </a:t>
+            </a:r>
+            <a:r>
+              <a:rPr lang="en-US" sz="1300" dirty="0" err="1">
+                <a:solidFill>
+                  <a:srgbClr val="FFFFFF"/>
+                </a:solidFill>
+                <a:latin typeface="맑은 고딕"/>
+                <a:ea typeface="맑은 고딕"/>
+                <a:cs typeface="맑은 고딕"/>
+              </a:rPr>
+              <a:t>턴은</a:t>
+            </a:r>
+            <a:r>
+              <a:rPr lang="en-US" sz="1300" dirty="0">
+                <a:solidFill>
+                  <a:srgbClr val="FFFFFF"/>
+                </a:solidFill>
+                <a:latin typeface="맑은 고딕"/>
+                <a:ea typeface="맑은 고딕"/>
+                <a:cs typeface="맑은 고딕"/>
+              </a:rPr>
+              <a:t> </a:t>
+            </a:r>
+            <a:r>
+              <a:rPr lang="en-US" sz="1300" dirty="0" err="1">
+                <a:solidFill>
+                  <a:srgbClr val="FFFFFF"/>
+                </a:solidFill>
+                <a:latin typeface="맑은 고딕"/>
+                <a:ea typeface="맑은 고딕"/>
+                <a:cs typeface="맑은 고딕"/>
+              </a:rPr>
+              <a:t>플레이어에게만</a:t>
+            </a:r>
+            <a:r>
+              <a:rPr lang="en-US" sz="1300" dirty="0">
+                <a:solidFill>
+                  <a:srgbClr val="FFFFFF"/>
+                </a:solidFill>
+                <a:latin typeface="맑은 고딕"/>
+                <a:ea typeface="맑은 고딕"/>
+                <a:cs typeface="맑은 고딕"/>
+              </a:rPr>
+              <a:t> </a:t>
+            </a:r>
+            <a:r>
+              <a:rPr lang="en-US" sz="1300" dirty="0" err="1">
+                <a:solidFill>
+                  <a:srgbClr val="FFFFFF"/>
+                </a:solidFill>
+                <a:latin typeface="맑은 고딕"/>
+                <a:ea typeface="맑은 고딕"/>
+                <a:cs typeface="맑은 고딕"/>
+              </a:rPr>
+              <a:t>부여</a:t>
+            </a:r>
+            <a:r>
+              <a:rPr lang="en-US" sz="1300" dirty="0">
+                <a:solidFill>
+                  <a:srgbClr val="FFFFFF"/>
+                </a:solidFill>
+                <a:latin typeface="맑은 고딕"/>
+                <a:ea typeface="맑은 고딕"/>
+                <a:cs typeface="맑은 고딕"/>
+              </a:rPr>
+              <a:t>. </a:t>
+            </a:r>
           </a:p>
           <a:p>
             <a:pPr marL="0" indent="0">
@@ -12172,24 +12389,137 @@
               <a:defRPr/>
             </a:pPr>
             <a:r>
-              <a:rPr lang="en-US" sz="1300">
-                <a:solidFill>
-                  <a:srgbClr val="ffffff"/>
-                </a:solidFill>
-                <a:latin typeface="맑은 고딕"/>
-                <a:ea typeface="맑은 고딕"/>
-                <a:cs typeface="맑은 고딕"/>
-              </a:rPr>
-              <a:t>적은 턴 없이 자기 패턴대로 실시간 행동 → </a:t>
-            </a:r>
-            <a:endParaRPr lang="en-US" sz="1300">
-              <a:solidFill>
-                <a:srgbClr val="ffffff"/>
-              </a:solidFill>
-              <a:latin typeface="맑은 고딕"/>
-              <a:ea typeface="맑은 고딕"/>
-              <a:cs typeface="맑은 고딕"/>
-            </a:endParaRPr>
+              <a:rPr lang="en-US" sz="1300" dirty="0" err="1">
+                <a:solidFill>
+                  <a:srgbClr val="FFFFFF"/>
+                </a:solidFill>
+                <a:latin typeface="맑은 고딕"/>
+                <a:ea typeface="맑은 고딕"/>
+                <a:cs typeface="맑은 고딕"/>
+              </a:rPr>
+              <a:t>적은</a:t>
+            </a:r>
+            <a:r>
+              <a:rPr lang="en-US" sz="1300" dirty="0">
+                <a:solidFill>
+                  <a:srgbClr val="FFFFFF"/>
+                </a:solidFill>
+                <a:latin typeface="맑은 고딕"/>
+                <a:ea typeface="맑은 고딕"/>
+                <a:cs typeface="맑은 고딕"/>
+              </a:rPr>
+              <a:t> 턴 </a:t>
+            </a:r>
+            <a:r>
+              <a:rPr lang="en-US" sz="1300" dirty="0" err="1">
+                <a:solidFill>
+                  <a:srgbClr val="FFFFFF"/>
+                </a:solidFill>
+                <a:latin typeface="맑은 고딕"/>
+                <a:ea typeface="맑은 고딕"/>
+                <a:cs typeface="맑은 고딕"/>
+              </a:rPr>
+              <a:t>없이</a:t>
+            </a:r>
+            <a:r>
+              <a:rPr lang="en-US" sz="1300" dirty="0">
+                <a:solidFill>
+                  <a:srgbClr val="FFFFFF"/>
+                </a:solidFill>
+                <a:latin typeface="맑은 고딕"/>
+                <a:ea typeface="맑은 고딕"/>
+                <a:cs typeface="맑은 고딕"/>
+              </a:rPr>
+              <a:t> </a:t>
+            </a:r>
+            <a:r>
+              <a:rPr lang="en-US" sz="1300" dirty="0" err="1">
+                <a:solidFill>
+                  <a:srgbClr val="FFFFFF"/>
+                </a:solidFill>
+                <a:latin typeface="맑은 고딕"/>
+                <a:ea typeface="맑은 고딕"/>
+                <a:cs typeface="맑은 고딕"/>
+              </a:rPr>
+              <a:t>자기</a:t>
+            </a:r>
+            <a:r>
+              <a:rPr lang="en-US" sz="1300" dirty="0">
+                <a:solidFill>
+                  <a:srgbClr val="FFFFFF"/>
+                </a:solidFill>
+                <a:latin typeface="맑은 고딕"/>
+                <a:ea typeface="맑은 고딕"/>
+                <a:cs typeface="맑은 고딕"/>
+              </a:rPr>
+              <a:t> </a:t>
+            </a:r>
+            <a:r>
+              <a:rPr lang="en-US" sz="1300" dirty="0" err="1">
+                <a:solidFill>
+                  <a:srgbClr val="FFFFFF"/>
+                </a:solidFill>
+                <a:latin typeface="맑은 고딕"/>
+                <a:ea typeface="맑은 고딕"/>
+                <a:cs typeface="맑은 고딕"/>
+              </a:rPr>
+              <a:t>패턴대로</a:t>
+            </a:r>
+            <a:r>
+              <a:rPr lang="en-US" sz="1300" dirty="0">
+                <a:solidFill>
+                  <a:srgbClr val="FFFFFF"/>
+                </a:solidFill>
+                <a:latin typeface="맑은 고딕"/>
+                <a:ea typeface="맑은 고딕"/>
+                <a:cs typeface="맑은 고딕"/>
+              </a:rPr>
+              <a:t> </a:t>
+            </a:r>
+            <a:r>
+              <a:rPr lang="en-US" sz="1300" dirty="0" err="1">
+                <a:solidFill>
+                  <a:srgbClr val="FFFFFF"/>
+                </a:solidFill>
+                <a:latin typeface="맑은 고딕"/>
+                <a:ea typeface="맑은 고딕"/>
+                <a:cs typeface="맑은 고딕"/>
+              </a:rPr>
+              <a:t>실시간</a:t>
+            </a:r>
+            <a:r>
+              <a:rPr lang="en-US" sz="1300" dirty="0">
+                <a:solidFill>
+                  <a:srgbClr val="FFFFFF"/>
+                </a:solidFill>
+                <a:latin typeface="맑은 고딕"/>
+                <a:ea typeface="맑은 고딕"/>
+                <a:cs typeface="맑은 고딕"/>
+              </a:rPr>
+              <a:t> </a:t>
+            </a:r>
+            <a:r>
+              <a:rPr lang="en-US" sz="1300" dirty="0" err="1">
+                <a:solidFill>
+                  <a:srgbClr val="FFFFFF"/>
+                </a:solidFill>
+                <a:latin typeface="맑은 고딕"/>
+                <a:ea typeface="맑은 고딕"/>
+                <a:cs typeface="맑은 고딕"/>
+              </a:rPr>
+              <a:t>행동</a:t>
+            </a:r>
+            <a:r>
+              <a:rPr lang="en-US" sz="1300" dirty="0">
+                <a:solidFill>
+                  <a:srgbClr val="FFFFFF"/>
+                </a:solidFill>
+                <a:latin typeface="맑은 고딕"/>
+                <a:ea typeface="맑은 고딕"/>
+                <a:cs typeface="맑은 고딕"/>
+              </a:rPr>
+              <a:t> → </a:t>
+            </a:r>
           </a:p>
           <a:p>
             <a:pPr marL="0" indent="0">
@@ -12200,17 +12530,182 @@
               <a:defRPr/>
             </a:pPr>
             <a:r>
-              <a:rPr lang="en-US" sz="1300">
-                <a:solidFill>
-                  <a:srgbClr val="ffffff"/>
-                </a:solidFill>
-                <a:latin typeface="맑은 고딕"/>
-                <a:ea typeface="맑은 고딕"/>
-                <a:cs typeface="맑은 고딕"/>
-              </a:rPr>
-              <a:t>적의 위협감 + 플레이어의 계획적 자원 운용을 동시에 확보.</a:t>
-            </a:r>
-            <a:endParaRPr lang="en-US" sz="1300"/>
+              <a:rPr lang="en-US" sz="1300" dirty="0" err="1">
+                <a:solidFill>
+                  <a:srgbClr val="FFFFFF"/>
+                </a:solidFill>
+                <a:latin typeface="맑은 고딕"/>
+                <a:ea typeface="맑은 고딕"/>
+                <a:cs typeface="맑은 고딕"/>
+              </a:rPr>
+              <a:t>적의</a:t>
+            </a:r>
+            <a:r>
+              <a:rPr lang="en-US" sz="1300" dirty="0">
+                <a:solidFill>
+                  <a:srgbClr val="FFFFFF"/>
+                </a:solidFill>
+                <a:latin typeface="맑은 고딕"/>
+                <a:ea typeface="맑은 고딕"/>
+                <a:cs typeface="맑은 고딕"/>
+              </a:rPr>
+              <a:t> </a:t>
+            </a:r>
+            <a:r>
+              <a:rPr lang="en-US" sz="1300" dirty="0" err="1">
+                <a:solidFill>
+                  <a:srgbClr val="FFFFFF"/>
+                </a:solidFill>
+                <a:latin typeface="맑은 고딕"/>
+                <a:ea typeface="맑은 고딕"/>
+                <a:cs typeface="맑은 고딕"/>
+              </a:rPr>
+              <a:t>위협감</a:t>
+            </a:r>
+            <a:r>
+              <a:rPr lang="en-US" sz="1300" dirty="0">
+                <a:solidFill>
+                  <a:srgbClr val="FFFFFF"/>
+                </a:solidFill>
+                <a:latin typeface="맑은 고딕"/>
+                <a:ea typeface="맑은 고딕"/>
+                <a:cs typeface="맑은 고딕"/>
+              </a:rPr>
+              <a:t> + </a:t>
+            </a:r>
+            <a:r>
+              <a:rPr lang="en-US" sz="1300" dirty="0" err="1">
+                <a:solidFill>
+                  <a:srgbClr val="FFFFFF"/>
+                </a:solidFill>
+                <a:latin typeface="맑은 고딕"/>
+                <a:ea typeface="맑은 고딕"/>
+                <a:cs typeface="맑은 고딕"/>
+              </a:rPr>
+              <a:t>플레이어의</a:t>
+            </a:r>
+            <a:r>
+              <a:rPr lang="en-US" sz="1300" dirty="0">
+                <a:solidFill>
+                  <a:srgbClr val="FFFFFF"/>
+                </a:solidFill>
+                <a:latin typeface="맑은 고딕"/>
+                <a:ea typeface="맑은 고딕"/>
+                <a:cs typeface="맑은 고딕"/>
+              </a:rPr>
+              <a:t> </a:t>
+            </a:r>
+            <a:r>
+              <a:rPr lang="en-US" sz="1300" dirty="0" err="1">
+                <a:solidFill>
+                  <a:srgbClr val="FFFFFF"/>
+                </a:solidFill>
+                <a:latin typeface="맑은 고딕"/>
+                <a:ea typeface="맑은 고딕"/>
+                <a:cs typeface="맑은 고딕"/>
+              </a:rPr>
+              <a:t>계획적</a:t>
+            </a:r>
+            <a:r>
+              <a:rPr lang="en-US" sz="1300" dirty="0">
+                <a:solidFill>
+                  <a:srgbClr val="FFFFFF"/>
+                </a:solidFill>
+                <a:latin typeface="맑은 고딕"/>
+                <a:ea typeface="맑은 고딕"/>
+                <a:cs typeface="맑은 고딕"/>
+              </a:rPr>
+              <a:t> </a:t>
+            </a:r>
+            <a:r>
+              <a:rPr lang="en-US" sz="1300" dirty="0" err="1">
+                <a:solidFill>
+                  <a:srgbClr val="FFFFFF"/>
+                </a:solidFill>
+                <a:latin typeface="맑은 고딕"/>
+                <a:ea typeface="맑은 고딕"/>
+                <a:cs typeface="맑은 고딕"/>
+              </a:rPr>
+              <a:t>자원</a:t>
+            </a:r>
+            <a:r>
+              <a:rPr lang="en-US" sz="1300" dirty="0">
+                <a:solidFill>
+                  <a:srgbClr val="FFFFFF"/>
+                </a:solidFill>
+                <a:latin typeface="맑은 고딕"/>
+                <a:ea typeface="맑은 고딕"/>
+                <a:cs typeface="맑은 고딕"/>
+              </a:rPr>
+              <a:t> </a:t>
+            </a:r>
+            <a:r>
+              <a:rPr lang="en-US" sz="1300" dirty="0" err="1">
+                <a:solidFill>
+                  <a:srgbClr val="FFFFFF"/>
+                </a:solidFill>
+                <a:latin typeface="맑은 고딕"/>
+                <a:ea typeface="맑은 고딕"/>
+                <a:cs typeface="맑은 고딕"/>
+              </a:rPr>
+              <a:t>운용을</a:t>
+            </a:r>
+            <a:r>
+              <a:rPr lang="en-US" sz="1300" dirty="0">
+                <a:solidFill>
+                  <a:srgbClr val="FFFFFF"/>
+                </a:solidFill>
+                <a:latin typeface="맑은 고딕"/>
+                <a:ea typeface="맑은 고딕"/>
+                <a:cs typeface="맑은 고딕"/>
+              </a:rPr>
+              <a:t> </a:t>
+            </a:r>
+            <a:r>
+              <a:rPr lang="en-US" sz="1300" dirty="0" err="1">
+                <a:solidFill>
+                  <a:srgbClr val="FFFFFF"/>
+                </a:solidFill>
+                <a:latin typeface="맑은 고딕"/>
+                <a:ea typeface="맑은 고딕"/>
+                <a:cs typeface="맑은 고딕"/>
+              </a:rPr>
+              <a:t>동시에</a:t>
+            </a:r>
+            <a:r>
+              <a:rPr lang="en-US" sz="1300" dirty="0">
+                <a:solidFill>
+                  <a:srgbClr val="FFFFFF"/>
+                </a:solidFill>
+                <a:latin typeface="맑은 고딕"/>
+                <a:ea typeface="맑은 고딕"/>
+                <a:cs typeface="맑은 고딕"/>
+              </a:rPr>
+              <a:t> </a:t>
+            </a:r>
+            <a:r>
+              <a:rPr lang="en-US" sz="1300" dirty="0" err="1">
+                <a:solidFill>
+                  <a:srgbClr val="FFFFFF"/>
+                </a:solidFill>
+                <a:latin typeface="맑은 고딕"/>
+                <a:ea typeface="맑은 고딕"/>
+                <a:cs typeface="맑은 고딕"/>
+              </a:rPr>
+              <a:t>확보</a:t>
+            </a:r>
+            <a:r>
+              <a:rPr lang="en-US" sz="1300" dirty="0">
+                <a:solidFill>
+                  <a:srgbClr val="FFFFFF"/>
+                </a:solidFill>
+                <a:latin typeface="맑은 고딕"/>
+                <a:ea typeface="맑은 고딕"/>
+                <a:cs typeface="맑은 고딕"/>
+              </a:rPr>
+              <a:t>.</a:t>
+            </a:r>
+            <a:endParaRPr lang="en-US" sz="1300" dirty="0"/>
           </a:p>
         </p:txBody>
       </p:sp>
@@ -12231,11 +12726,11 @@
             </a:avLst>
           </a:prstGeom>
           <a:solidFill>
-            <a:srgbClr val="f4f6fa"/>
+            <a:srgbClr val="F4F6FA"/>
           </a:solidFill>
           <a:ln w="12700">
             <a:solidFill>
-              <a:srgbClr val="d9dee6"/>
+              <a:srgbClr val="D9DEE6"/>
             </a:solidFill>
             <a:prstDash val="solid"/>
           </a:ln>
@@ -12249,6 +12744,7 @@
         </p:spPr>
         <p:txBody>
           <a:bodyPr anchor="ctr"/>
+          <a:lstStyle/>
           <a:p>
             <a:pPr algn="ctr">
               <a:defRPr/>
@@ -12285,7 +12781,7 @@
             <a:r>
               <a:rPr lang="en-US" sz="2600" b="1">
                 <a:solidFill>
-                  <a:srgbClr val="c8622e"/>
+                  <a:srgbClr val="C8622E"/>
                 </a:solidFill>
                 <a:latin typeface="Arial"/>
                 <a:ea typeface="Arial"/>
@@ -12325,7 +12821,7 @@
             <a:r>
               <a:rPr lang="en-US" sz="1400" b="1">
                 <a:solidFill>
-                  <a:srgbClr val="1f2637"/>
+                  <a:srgbClr val="1F2637"/>
                 </a:solidFill>
                 <a:latin typeface="맑은 고딕"/>
                 <a:ea typeface="맑은 고딕"/>
@@ -12366,20 +12862,42 @@
               <a:defRPr/>
             </a:pPr>
             <a:r>
-              <a:rPr lang="en-US" sz="1200">
-                <a:solidFill>
-                  <a:srgbClr val="6c7686"/>
-                </a:solidFill>
-                <a:latin typeface="맑은 고딕"/>
-                <a:ea typeface="맑은 고딕"/>
-                <a:cs typeface="맑은 고딕"/>
-              </a:rPr>
-              <a:t>공격턴 / 방어턴</a:t>
-            </a:r>
-            <a:r>
-              <a:rPr lang="ko-KR" altLang="en-US" sz="1200">
-                <a:solidFill>
-                  <a:srgbClr val="6c7686"/>
+              <a:rPr lang="en-US" sz="1200" dirty="0" err="1">
+                <a:solidFill>
+                  <a:srgbClr val="6C7686"/>
+                </a:solidFill>
+                <a:latin typeface="맑은 고딕"/>
+                <a:ea typeface="맑은 고딕"/>
+                <a:cs typeface="맑은 고딕"/>
+              </a:rPr>
+              <a:t>공격턴</a:t>
+            </a:r>
+            <a:r>
+              <a:rPr lang="en-US" sz="1200" dirty="0">
+                <a:solidFill>
+                  <a:srgbClr val="6C7686"/>
+                </a:solidFill>
+                <a:latin typeface="맑은 고딕"/>
+                <a:ea typeface="맑은 고딕"/>
+                <a:cs typeface="맑은 고딕"/>
+              </a:rPr>
+              <a:t> / </a:t>
+            </a:r>
+            <a:r>
+              <a:rPr lang="en-US" sz="1200" dirty="0" err="1">
+                <a:solidFill>
+                  <a:srgbClr val="6C7686"/>
+                </a:solidFill>
+                <a:latin typeface="맑은 고딕"/>
+                <a:ea typeface="맑은 고딕"/>
+                <a:cs typeface="맑은 고딕"/>
+              </a:rPr>
+              <a:t>방어턴</a:t>
+            </a:r>
+            <a:r>
+              <a:rPr lang="ko-KR" altLang="en-US" sz="1200" dirty="0">
+                <a:solidFill>
+                  <a:srgbClr val="6C7686"/>
                 </a:solidFill>
                 <a:latin typeface="맑은 고딕"/>
                 <a:ea typeface="맑은 고딕"/>
@@ -12388,19 +12906,41 @@
               <a:t> </a:t>
             </a:r>
             <a:r>
-              <a:rPr lang="en-US" sz="1200">
-                <a:solidFill>
-                  <a:srgbClr val="6c7686"/>
-                </a:solidFill>
-                <a:latin typeface="맑은 고딕"/>
-                <a:ea typeface="맑은 고딕"/>
-                <a:cs typeface="맑은 고딕"/>
-              </a:rPr>
-              <a:t>으로 분리</a:t>
-            </a:r>
-            <a:endParaRPr lang="en-US" sz="1200">
+              <a:rPr lang="en-US" sz="1200" dirty="0" err="1">
+                <a:solidFill>
+                  <a:srgbClr val="6C7686"/>
+                </a:solidFill>
+                <a:latin typeface="맑은 고딕"/>
+                <a:ea typeface="맑은 고딕"/>
+                <a:cs typeface="맑은 고딕"/>
+              </a:rPr>
+              <a:t>으로</a:t>
+            </a:r>
+            <a:r>
+              <a:rPr lang="en-US" sz="1200" dirty="0">
+                <a:solidFill>
+                  <a:srgbClr val="6C7686"/>
+                </a:solidFill>
+                <a:latin typeface="맑은 고딕"/>
+                <a:ea typeface="맑은 고딕"/>
+                <a:cs typeface="맑은 고딕"/>
+              </a:rPr>
+              <a:t> </a:t>
+            </a:r>
+            <a:r>
+              <a:rPr lang="en-US" sz="1200" dirty="0" err="1">
+                <a:solidFill>
+                  <a:srgbClr val="6C7686"/>
+                </a:solidFill>
+                <a:latin typeface="맑은 고딕"/>
+                <a:ea typeface="맑은 고딕"/>
+                <a:cs typeface="맑은 고딕"/>
+              </a:rPr>
+              <a:t>분리</a:t>
+            </a:r>
+            <a:endParaRPr lang="en-US" sz="1200" dirty="0">
               <a:solidFill>
-                <a:srgbClr val="6c7686"/>
+                <a:srgbClr val="6C7686"/>
               </a:solidFill>
               <a:latin typeface="맑은 고딕"/>
               <a:ea typeface="맑은 고딕"/>
@@ -12426,11 +12966,11 @@
             </a:avLst>
           </a:prstGeom>
           <a:solidFill>
-            <a:srgbClr val="f4f6fa"/>
+            <a:srgbClr val="F4F6FA"/>
           </a:solidFill>
           <a:ln w="12700">
             <a:solidFill>
-              <a:srgbClr val="d9dee6"/>
+              <a:srgbClr val="D9DEE6"/>
             </a:solidFill>
             <a:prstDash val="solid"/>
           </a:ln>
@@ -12444,6 +12984,7 @@
         </p:spPr>
         <p:txBody>
           <a:bodyPr anchor="ctr"/>
+          <a:lstStyle/>
           <a:p>
             <a:pPr algn="ctr">
               <a:defRPr/>
@@ -12480,7 +13021,7 @@
             <a:r>
               <a:rPr lang="en-US" sz="2600" b="1">
                 <a:solidFill>
-                  <a:srgbClr val="c8622e"/>
+                  <a:srgbClr val="C8622E"/>
                 </a:solidFill>
                 <a:latin typeface="Arial"/>
                 <a:ea typeface="Arial"/>
@@ -12520,7 +13061,7 @@
             <a:r>
               <a:rPr lang="en-US" sz="1400" b="1">
                 <a:solidFill>
-                  <a:srgbClr val="1f2637"/>
+                  <a:srgbClr val="1F2637"/>
                 </a:solidFill>
                 <a:latin typeface="맑은 고딕"/>
                 <a:ea typeface="맑은 고딕"/>
@@ -12563,7 +13104,7 @@
             <a:r>
               <a:rPr lang="en-US" sz="1200">
                 <a:solidFill>
-                  <a:srgbClr val="6c7686"/>
+                  <a:srgbClr val="6C7686"/>
                 </a:solidFill>
                 <a:latin typeface="맑은 고딕"/>
                 <a:ea typeface="맑은 고딕"/>
@@ -12574,7 +13115,7 @@
             <a:r>
               <a:rPr lang="ko-KR" altLang="en-US" sz="1200">
                 <a:solidFill>
-                  <a:srgbClr val="6c7686"/>
+                  <a:srgbClr val="6C7686"/>
                 </a:solidFill>
                 <a:latin typeface="맑은 고딕"/>
                 <a:ea typeface="맑은 고딕"/>
@@ -12585,7 +13126,7 @@
             <a:r>
               <a:rPr lang="en-US" sz="1200">
                 <a:solidFill>
-                  <a:srgbClr val="6c7686"/>
+                  <a:srgbClr val="6C7686"/>
                 </a:solidFill>
                 <a:latin typeface="맑은 고딕"/>
                 <a:ea typeface="맑은 고딕"/>
@@ -12593,14 +13134,6 @@
               </a:rPr>
               <a:t> 위협감</a:t>
             </a:r>
-            <a:endParaRPr lang="en-US" sz="1200">
-              <a:solidFill>
-                <a:srgbClr val="6c7686"/>
-              </a:solidFill>
-              <a:latin typeface="맑은 고딕"/>
-              <a:ea typeface="맑은 고딕"/>
-              <a:cs typeface="맑은 고딕"/>
-            </a:endParaRPr>
           </a:p>
         </p:txBody>
       </p:sp>
@@ -12621,11 +13154,11 @@
             </a:avLst>
           </a:prstGeom>
           <a:solidFill>
-            <a:srgbClr val="f4f6fa"/>
+            <a:srgbClr val="F4F6FA"/>
           </a:solidFill>
           <a:ln w="12700">
             <a:solidFill>
-              <a:srgbClr val="d9dee6"/>
+              <a:srgbClr val="D9DEE6"/>
             </a:solidFill>
             <a:prstDash val="solid"/>
           </a:ln>
@@ -12639,6 +13172,7 @@
         </p:spPr>
         <p:txBody>
           <a:bodyPr anchor="ctr"/>
+          <a:lstStyle/>
           <a:p>
             <a:pPr algn="ctr">
               <a:defRPr/>
@@ -12675,7 +13209,7 @@
             <a:r>
               <a:rPr lang="en-US" sz="2600" b="1">
                 <a:solidFill>
-                  <a:srgbClr val="c8622e"/>
+                  <a:srgbClr val="C8622E"/>
                 </a:solidFill>
                 <a:latin typeface="Arial"/>
                 <a:ea typeface="Arial"/>
@@ -12715,7 +13249,7 @@
             <a:r>
               <a:rPr lang="en-US" sz="1400" b="1">
                 <a:solidFill>
-                  <a:srgbClr val="1f2637"/>
+                  <a:srgbClr val="1F2637"/>
                 </a:solidFill>
                 <a:latin typeface="맑은 고딕"/>
                 <a:ea typeface="맑은 고딕"/>
@@ -12758,7 +13292,7 @@
             <a:r>
               <a:rPr lang="en-US" sz="1200">
                 <a:solidFill>
-                  <a:srgbClr val="6c7686"/>
+                  <a:srgbClr val="6C7686"/>
                 </a:solidFill>
                 <a:latin typeface="맑은 고딕"/>
                 <a:ea typeface="맑은 고딕"/>
@@ -12798,7 +13332,7 @@
             <a:r>
               <a:rPr lang="en-US" sz="900">
                 <a:solidFill>
-                  <a:srgbClr val="6c7686"/>
+                  <a:srgbClr val="6C7686"/>
                 </a:solidFill>
                 <a:latin typeface="맑은 고딕"/>
                 <a:ea typeface="맑은 고딕"/>
@@ -12838,7 +13372,7 @@
             <a:r>
               <a:rPr lang="en-US" sz="900">
                 <a:solidFill>
-                  <a:srgbClr val="6c7686"/>
+                  <a:srgbClr val="6C7686"/>
                 </a:solidFill>
                 <a:latin typeface="맑은 고딕"/>
                 <a:ea typeface="맑은 고딕"/>
@@ -12855,11 +13389,11 @@
   <p:clrMapOvr>
     <a:masterClrMapping/>
   </p:clrMapOvr>
-  <mc:AlternateContent xmlns:mc="http://schemas.openxmlformats.org/markup-compatibility/2006">
-    <mc:Choice xmlns:p14="http://schemas.microsoft.com/office/powerpoint/2010/main" Requires="p14">
-      <p:transition xmlns:mc="http://schemas.openxmlformats.org/markup-compatibility/2006" xmlns:p14="http://schemas.microsoft.com/office/powerpoint/2010/main" mc:Ignorable="p14" p14:dur="500"/>
+  <mc:AlternateContent xmlns:mc="http://schemas.openxmlformats.org/markup-compatibility/2006" xmlns:p14="http://schemas.microsoft.com/office/powerpoint/2010/main">
+    <mc:Choice Requires="p14">
+      <p:transition/>
     </mc:Choice>
-    <mc:Fallback>
+    <mc:Fallback xmlns:dsp="http://schemas.microsoft.com/office/drawing/2008/diagram" xmlns:dgm="http://schemas.openxmlformats.org/drawingml/2006/diagram" xmlns:c="http://schemas.openxmlformats.org/drawingml/2006/chart" xmlns="">
       <p:transition/>
     </mc:Fallback>
   </mc:AlternateContent>
@@ -12867,13 +13401,14 @@
 </file>
 
 <file path=ppt/slides/slide6.xml><?xml version="1.0" encoding="utf-8"?>
-<p:sld xmlns:r="http://schemas.openxmlformats.org/officeDocument/2006/relationships" xmlns:c="http://schemas.openxmlformats.org/drawingml/2006/chart" xmlns:a="http://schemas.openxmlformats.org/drawingml/2006/main" xmlns:dgm="http://schemas.openxmlformats.org/drawingml/2006/diagram" xmlns:dsp="http://schemas.microsoft.com/office/drawing/2008/diagram" xmlns:p="http://schemas.openxmlformats.org/presentationml/2006/main">
+<p:sld xmlns:a="http://schemas.openxmlformats.org/drawingml/2006/main" xmlns:r="http://schemas.openxmlformats.org/officeDocument/2006/relationships" xmlns:p="http://schemas.openxmlformats.org/presentationml/2006/main">
   <p:cSld name="Slide 6">
     <p:bg>
-      <p:bgPr shadeToTitle="0">
+      <p:bgPr>
         <a:solidFill>
-          <a:srgbClr val="ffffff"/>
+          <a:srgbClr val="FFFFFF"/>
         </a:solidFill>
+        <a:effectLst/>
       </p:bgPr>
     </p:bg>
     <p:spTree>
@@ -12918,7 +13453,7 @@
             <a:r>
               <a:rPr lang="en-US" sz="1200" b="1" kern="0" spc="200">
                 <a:solidFill>
-                  <a:srgbClr val="c8622e"/>
+                  <a:srgbClr val="C8622E"/>
                 </a:solidFill>
                 <a:latin typeface="맑은 고딕"/>
                 <a:ea typeface="맑은 고딕"/>
@@ -12958,7 +13493,7 @@
             <a:r>
               <a:rPr lang="en-US" sz="2900" b="1">
                 <a:solidFill>
-                  <a:srgbClr val="1f2637"/>
+                  <a:srgbClr val="1F2637"/>
                 </a:solidFill>
                 <a:latin typeface="맑은 고딕"/>
                 <a:ea typeface="맑은 고딕"/>
@@ -12987,11 +13522,11 @@
             </a:avLst>
           </a:prstGeom>
           <a:solidFill>
-            <a:srgbClr val="16223b"/>
+            <a:srgbClr val="16223B"/>
           </a:solidFill>
           <a:ln w="12700">
             <a:solidFill>
-              <a:srgbClr val="d9dee6"/>
+              <a:srgbClr val="D9DEE6"/>
             </a:solidFill>
             <a:prstDash val="solid"/>
           </a:ln>
@@ -13005,6 +13540,7 @@
         </p:spPr>
         <p:txBody>
           <a:bodyPr anchor="ctr"/>
+          <a:lstStyle/>
           <a:p>
             <a:pPr algn="ctr">
               <a:defRPr/>
@@ -13041,7 +13577,7 @@
             <a:r>
               <a:rPr lang="en-US" sz="1600" b="1">
                 <a:solidFill>
-                  <a:srgbClr val="ffffff"/>
+                  <a:srgbClr val="FFFFFF"/>
                 </a:solidFill>
                 <a:latin typeface="맑은 고딕"/>
                 <a:ea typeface="맑은 고딕"/>
@@ -13084,7 +13620,7 @@
             <a:r>
               <a:rPr lang="en-US" sz="1300">
                 <a:solidFill>
-                  <a:srgbClr val="eaf0fa"/>
+                  <a:srgbClr val="EAF0FA"/>
                 </a:solidFill>
                 <a:latin typeface="맑은 고딕"/>
                 <a:ea typeface="맑은 고딕"/>
@@ -13092,14 +13628,6 @@
               </a:rPr>
               <a:t>각 턴은 고유 에너지를 소모. 소진 시 반대 턴으로 자동 스위치. </a:t>
             </a:r>
-            <a:endParaRPr lang="en-US" sz="1300">
-              <a:solidFill>
-                <a:srgbClr val="eaf0fa"/>
-              </a:solidFill>
-              <a:latin typeface="맑은 고딕"/>
-              <a:ea typeface="맑은 고딕"/>
-              <a:cs typeface="맑은 고딕"/>
-            </a:endParaRPr>
           </a:p>
           <a:p>
             <a:pPr marL="0" indent="0">
@@ -13112,7 +13640,7 @@
             <a:r>
               <a:rPr lang="en-US" sz="1300">
                 <a:solidFill>
-                  <a:srgbClr val="eaf0fa"/>
+                  <a:srgbClr val="EAF0FA"/>
                 </a:solidFill>
                 <a:latin typeface="맑은 고딕"/>
                 <a:ea typeface="맑은 고딕"/>
@@ -13141,11 +13669,11 @@
             </a:avLst>
           </a:prstGeom>
           <a:solidFill>
-            <a:srgbClr val="f4f6fa"/>
+            <a:srgbClr val="F4F6FA"/>
           </a:solidFill>
           <a:ln w="12700">
             <a:solidFill>
-              <a:srgbClr val="d9dee6"/>
+              <a:srgbClr val="D9DEE6"/>
             </a:solidFill>
             <a:prstDash val="solid"/>
           </a:ln>
@@ -13159,6 +13687,7 @@
         </p:spPr>
         <p:txBody>
           <a:bodyPr anchor="ctr"/>
+          <a:lstStyle/>
           <a:p>
             <a:pPr algn="ctr">
               <a:defRPr/>
@@ -13195,7 +13724,7 @@
             <a:r>
               <a:rPr lang="en-US" sz="1600" b="1">
                 <a:solidFill>
-                  <a:srgbClr val="c8622e"/>
+                  <a:srgbClr val="C8622E"/>
                 </a:solidFill>
                 <a:latin typeface="맑은 고딕"/>
                 <a:ea typeface="맑은 고딕"/>
@@ -13238,7 +13767,7 @@
             <a:r>
               <a:rPr lang="en-US" sz="1300">
                 <a:solidFill>
-                  <a:srgbClr val="1f2637"/>
+                  <a:srgbClr val="1F2637"/>
                 </a:solidFill>
                 <a:latin typeface="맑은 고딕"/>
                 <a:ea typeface="맑은 고딕"/>
@@ -13249,7 +13778,7 @@
             <a:r>
               <a:rPr lang="ko-KR" altLang="en-US" sz="1300">
                 <a:solidFill>
-                  <a:srgbClr val="1f2637"/>
+                  <a:srgbClr val="1F2637"/>
                 </a:solidFill>
                 <a:latin typeface="맑은 고딕"/>
                 <a:ea typeface="맑은 고딕"/>
@@ -13260,7 +13789,7 @@
             <a:r>
               <a:rPr lang="en-US" sz="1300">
                 <a:solidFill>
-                  <a:srgbClr val="1f2637"/>
+                  <a:srgbClr val="1F2637"/>
                 </a:solidFill>
                 <a:latin typeface="맑은 고딕"/>
                 <a:ea typeface="맑은 고딕"/>
@@ -13270,7 +13799,7 @@
             </a:r>
             <a:endParaRPr lang="ko-KR" altLang="en-US" sz="1300">
               <a:solidFill>
-                <a:srgbClr val="1f2637"/>
+                <a:srgbClr val="1F2637"/>
               </a:solidFill>
               <a:latin typeface="맑은 고딕"/>
               <a:ea typeface="맑은 고딕"/>
@@ -13288,7 +13817,7 @@
             <a:r>
               <a:rPr lang="ko-KR" altLang="en-US" sz="1300">
                 <a:solidFill>
-                  <a:srgbClr val="1f2637"/>
+                  <a:srgbClr val="1F2637"/>
                 </a:solidFill>
                 <a:latin typeface="맑은 고딕"/>
                 <a:ea typeface="맑은 고딕"/>
@@ -13299,7 +13828,7 @@
             <a:r>
               <a:rPr lang="en-US" sz="1300">
                 <a:solidFill>
-                  <a:srgbClr val="1f2637"/>
+                  <a:srgbClr val="1F2637"/>
                 </a:solidFill>
                 <a:latin typeface="맑은 고딕"/>
                 <a:ea typeface="맑은 고딕"/>
@@ -13310,7 +13839,7 @@
             <a:r>
               <a:rPr lang="ko-KR" altLang="en-US" sz="1300">
                 <a:solidFill>
-                  <a:srgbClr val="1f2637"/>
+                  <a:srgbClr val="1F2637"/>
                 </a:solidFill>
                 <a:latin typeface="맑은 고딕"/>
                 <a:ea typeface="맑은 고딕"/>
@@ -13321,7 +13850,7 @@
             <a:r>
               <a:rPr lang="en-US" sz="1300">
                 <a:solidFill>
-                  <a:srgbClr val="1f2637"/>
+                  <a:srgbClr val="1F2637"/>
                 </a:solidFill>
                 <a:latin typeface="맑은 고딕"/>
                 <a:ea typeface="맑은 고딕"/>
@@ -13332,7 +13861,7 @@
             <a:r>
               <a:rPr lang="ko-KR" altLang="en-US" sz="1300">
                 <a:solidFill>
-                  <a:srgbClr val="1f2637"/>
+                  <a:srgbClr val="1F2637"/>
                 </a:solidFill>
                 <a:latin typeface="맑은 고딕"/>
                 <a:ea typeface="맑은 고딕"/>
@@ -13343,7 +13872,7 @@
             <a:r>
               <a:rPr lang="en-US" sz="1300">
                 <a:solidFill>
-                  <a:srgbClr val="1f2637"/>
+                  <a:srgbClr val="1F2637"/>
                 </a:solidFill>
                 <a:latin typeface="맑은 고딕"/>
                 <a:ea typeface="맑은 고딕"/>
@@ -13351,14 +13880,6 @@
               </a:rPr>
               <a:t>회복 + 추가 턴.</a:t>
             </a:r>
-            <a:endParaRPr lang="en-US" sz="1300">
-              <a:solidFill>
-                <a:srgbClr val="1f2637"/>
-              </a:solidFill>
-              <a:latin typeface="맑은 고딕"/>
-              <a:ea typeface="맑은 고딕"/>
-              <a:cs typeface="맑은 고딕"/>
-            </a:endParaRPr>
           </a:p>
         </p:txBody>
       </p:sp>
@@ -13379,11 +13900,11 @@
             </a:avLst>
           </a:prstGeom>
           <a:solidFill>
-            <a:srgbClr val="f4f6fa"/>
+            <a:srgbClr val="F4F6FA"/>
           </a:solidFill>
           <a:ln w="12700">
             <a:solidFill>
-              <a:srgbClr val="d9dee6"/>
+              <a:srgbClr val="D9DEE6"/>
             </a:solidFill>
             <a:prstDash val="solid"/>
           </a:ln>
@@ -13397,6 +13918,7 @@
         </p:spPr>
         <p:txBody>
           <a:bodyPr anchor="ctr"/>
+          <a:lstStyle/>
           <a:p>
             <a:pPr algn="ctr">
               <a:defRPr/>
@@ -13433,7 +13955,7 @@
             <a:r>
               <a:rPr lang="en-US" sz="1600" b="1">
                 <a:solidFill>
-                  <a:srgbClr val="c8622e"/>
+                  <a:srgbClr val="C8622E"/>
                 </a:solidFill>
                 <a:latin typeface="맑은 고딕"/>
                 <a:ea typeface="맑은 고딕"/>
@@ -13476,7 +13998,7 @@
             <a:r>
               <a:rPr lang="en-US" sz="1300">
                 <a:solidFill>
-                  <a:srgbClr val="1f2637"/>
+                  <a:srgbClr val="1F2637"/>
                 </a:solidFill>
                 <a:latin typeface="맑은 고딕"/>
                 <a:ea typeface="맑은 고딕"/>
@@ -13484,9 +14006,37 @@
               </a:rPr>
               <a:t>패링·약점 간파 등 특정 조건 달성 시 동료가 순간 개입해 추가타/버프. </a:t>
             </a:r>
-            <a:endParaRPr lang="en-US" sz="1300">
+          </a:p>
+        </p:txBody>
+      </p:sp>
+      <p:sp>
+        <p:nvSpPr>
+          <p:cNvPr id="13" name="Text 11"/>
+          <p:cNvSpPr/>
+          <p:nvPr/>
+        </p:nvSpPr>
+        <p:spPr>
+          <a:xfrm>
+            <a:off x="566928" y="6190488"/>
+            <a:ext cx="11057839" cy="274320"/>
+          </a:xfrm>
+          <a:prstGeom prst="rect">
+            <a:avLst/>
+          </a:prstGeom>
+          <a:noFill/>
+          <a:ln/>
+        </p:spPr>
+        <p:txBody>
+          <a:bodyPr wrap="square" lIns="0" tIns="0" rIns="0" bIns="0" anchor="ctr"/>
+          <a:lstStyle/>
+          <a:p>
+            <a:pPr marL="0" indent="0">
+              <a:buNone/>
+              <a:defRPr/>
+            </a:pPr>
+            <a:endParaRPr lang="en-US" sz="1050" i="1">
               <a:solidFill>
-                <a:srgbClr val="1f2637"/>
+                <a:srgbClr val="6C7686"/>
               </a:solidFill>
               <a:latin typeface="맑은 고딕"/>
               <a:ea typeface="맑은 고딕"/>
@@ -13497,42 +14047,6 @@
       </p:sp>
       <p:sp>
         <p:nvSpPr>
-          <p:cNvPr id="13" name="Text 11"/>
-          <p:cNvSpPr/>
-          <p:nvPr/>
-        </p:nvSpPr>
-        <p:spPr>
-          <a:xfrm>
-            <a:off x="566928" y="6190488"/>
-            <a:ext cx="11057839" cy="274320"/>
-          </a:xfrm>
-          <a:prstGeom prst="rect">
-            <a:avLst/>
-          </a:prstGeom>
-          <a:noFill/>
-          <a:ln/>
-        </p:spPr>
-        <p:txBody>
-          <a:bodyPr wrap="square" lIns="0" tIns="0" rIns="0" bIns="0" anchor="ctr"/>
-          <a:lstStyle/>
-          <a:p>
-            <a:pPr marL="0" indent="0">
-              <a:buNone/>
-              <a:defRPr/>
-            </a:pPr>
-            <a:endParaRPr lang="en-US" sz="1050" i="1">
-              <a:solidFill>
-                <a:srgbClr val="6c7686"/>
-              </a:solidFill>
-              <a:latin typeface="맑은 고딕"/>
-              <a:ea typeface="맑은 고딕"/>
-              <a:cs typeface="맑은 고딕"/>
-            </a:endParaRPr>
-          </a:p>
-        </p:txBody>
-      </p:sp>
-      <p:sp>
-        <p:nvSpPr>
           <p:cNvPr id="14" name="Text 12"/>
           <p:cNvSpPr/>
           <p:nvPr/>
@@ -13559,7 +14073,7 @@
             <a:r>
               <a:rPr lang="en-US" sz="900">
                 <a:solidFill>
-                  <a:srgbClr val="6c7686"/>
+                  <a:srgbClr val="6C7686"/>
                 </a:solidFill>
                 <a:latin typeface="맑은 고딕"/>
                 <a:ea typeface="맑은 고딕"/>
@@ -13599,7 +14113,7 @@
             <a:r>
               <a:rPr lang="en-US" sz="900">
                 <a:solidFill>
-                  <a:srgbClr val="6c7686"/>
+                  <a:srgbClr val="6C7686"/>
                 </a:solidFill>
                 <a:latin typeface="맑은 고딕"/>
                 <a:ea typeface="맑은 고딕"/>
@@ -13616,11 +14130,11 @@
   <p:clrMapOvr>
     <a:masterClrMapping/>
   </p:clrMapOvr>
-  <mc:AlternateContent xmlns:mc="http://schemas.openxmlformats.org/markup-compatibility/2006">
-    <mc:Choice xmlns:p14="http://schemas.microsoft.com/office/powerpoint/2010/main" Requires="p14">
-      <p:transition xmlns:mc="http://schemas.openxmlformats.org/markup-compatibility/2006" xmlns:p14="http://schemas.microsoft.com/office/powerpoint/2010/main" mc:Ignorable="p14" p14:dur="500"/>
+  <mc:AlternateContent xmlns:mc="http://schemas.openxmlformats.org/markup-compatibility/2006" xmlns:p14="http://schemas.microsoft.com/office/powerpoint/2010/main">
+    <mc:Choice Requires="p14">
+      <p:transition/>
     </mc:Choice>
-    <mc:Fallback>
+    <mc:Fallback xmlns:dsp="http://schemas.microsoft.com/office/drawing/2008/diagram" xmlns:dgm="http://schemas.openxmlformats.org/drawingml/2006/diagram" xmlns:c="http://schemas.openxmlformats.org/drawingml/2006/chart" xmlns="">
       <p:transition/>
     </mc:Fallback>
   </mc:AlternateContent>
@@ -13635,6 +14149,7 @@
         <a:solidFill>
           <a:srgbClr val="FFFFFF"/>
         </a:solidFill>
+        <a:effectLst/>
       </p:bgPr>
     </p:bg>
     <p:spTree>
@@ -13672,11 +14187,11 @@
           <a:bodyPr wrap="square" lIns="0" tIns="0" rIns="0" bIns="0" rtlCol="0" anchor="ctr"/>
           <a:lstStyle/>
           <a:p>
-            <a:pPr indent="0" marL="0">
-              <a:buNone/>
-            </a:pPr>
-            <a:r>
-              <a:rPr lang="en-US" sz="1200" b="1" spc="200" kern="0" dirty="0">
+            <a:pPr marL="0" indent="0">
+              <a:buNone/>
+            </a:pPr>
+            <a:r>
+              <a:rPr lang="en-US" sz="1200" b="1" kern="0" spc="200" dirty="0">
                 <a:solidFill>
                   <a:srgbClr val="C8622E"/>
                 </a:solidFill>
@@ -13711,7 +14226,7 @@
           <a:bodyPr wrap="square" lIns="0" tIns="0" rIns="0" bIns="0" rtlCol="0" anchor="ctr"/>
           <a:lstStyle/>
           <a:p>
-            <a:pPr indent="0" marL="0">
+            <a:pPr marL="0" indent="0">
               <a:buNone/>
             </a:pPr>
             <a:r>
@@ -13750,7 +14265,7 @@
           <a:bodyPr wrap="square" lIns="0" tIns="0" rIns="0" bIns="0" rtlCol="0" anchor="ctr"/>
           <a:lstStyle/>
           <a:p>
-            <a:pPr indent="0" marL="0">
+            <a:pPr marL="0" indent="0">
               <a:buNone/>
             </a:pPr>
             <a:r>
@@ -13794,24 +14309,31 @@
             <a:prstDash val="solid"/>
           </a:ln>
           <a:effectLst>
-            <a:outerShdw sx="100000" sy="100000" kx="0" ky="0" algn="bl" rotWithShape="0" blurRad="88900" dist="25400" dir="5400000">
+            <a:outerShdw blurRad="88900" dist="25400" dir="5400000" algn="bl" rotWithShape="0">
               <a:srgbClr val="000000">
                 <a:alpha val="12000"/>
               </a:srgbClr>
             </a:outerShdw>
           </a:effectLst>
         </p:spPr>
+        <p:txBody>
+          <a:bodyPr/>
+          <a:lstStyle/>
+          <a:p>
+            <a:endParaRPr lang="ko-KR" altLang="en-US"/>
+          </a:p>
+        </p:txBody>
       </p:sp>
       <p:pic>
         <p:nvPicPr>
-          <p:cNvPr id="6" name="Image 0" descr="img/mj_knight_spear.png">    </p:cNvPr>
+          <p:cNvPr id="6" name="Image 0" descr="img/mj_knight_spear.png"/>
           <p:cNvPicPr>
             <a:picLocks noChangeAspect="1"/>
           </p:cNvPicPr>
           <p:nvPr/>
         </p:nvPicPr>
         <p:blipFill>
-          <a:blip r:embed="rId1"/>
+          <a:blip r:embed="rId3"/>
           <a:stretch>
             <a:fillRect/>
           </a:stretch>
@@ -13847,7 +14369,7 @@
           <a:bodyPr wrap="square" lIns="0" tIns="0" rIns="0" bIns="0" rtlCol="0" anchor="ctr"/>
           <a:lstStyle/>
           <a:p>
-            <a:pPr indent="0" marL="0">
+            <a:pPr marL="0" indent="0">
               <a:buNone/>
             </a:pPr>
             <a:r>
@@ -13886,7 +14408,7 @@
           <a:bodyPr wrap="square" lIns="0" tIns="0" rIns="0" bIns="0" rtlCol="0" anchor="ctr"/>
           <a:lstStyle/>
           <a:p>
-            <a:pPr indent="0" marL="0">
+            <a:pPr marL="0" indent="0">
               <a:lnSpc>
                 <a:spcPct val="110000"/>
               </a:lnSpc>
@@ -13933,24 +14455,31 @@
             <a:prstDash val="solid"/>
           </a:ln>
           <a:effectLst>
-            <a:outerShdw sx="100000" sy="100000" kx="0" ky="0" algn="bl" rotWithShape="0" blurRad="88900" dist="25400" dir="5400000">
+            <a:outerShdw blurRad="88900" dist="25400" dir="5400000" algn="bl" rotWithShape="0">
               <a:srgbClr val="000000">
                 <a:alpha val="12000"/>
               </a:srgbClr>
             </a:outerShdw>
           </a:effectLst>
         </p:spPr>
+        <p:txBody>
+          <a:bodyPr/>
+          <a:lstStyle/>
+          <a:p>
+            <a:endParaRPr lang="ko-KR" altLang="en-US"/>
+          </a:p>
+        </p:txBody>
       </p:sp>
       <p:pic>
         <p:nvPicPr>
-          <p:cNvPr id="10" name="Image 1" descr="img/mj_knight_dual.png">    </p:cNvPr>
+          <p:cNvPr id="10" name="Image 1" descr="img/mj_knight_dual.png"/>
           <p:cNvPicPr>
             <a:picLocks noChangeAspect="1"/>
           </p:cNvPicPr>
           <p:nvPr/>
         </p:nvPicPr>
         <p:blipFill>
-          <a:blip r:embed="rId2"/>
+          <a:blip r:embed="rId4"/>
           <a:stretch>
             <a:fillRect/>
           </a:stretch>
@@ -13986,7 +14515,7 @@
           <a:bodyPr wrap="square" lIns="0" tIns="0" rIns="0" bIns="0" rtlCol="0" anchor="ctr"/>
           <a:lstStyle/>
           <a:p>
-            <a:pPr indent="0" marL="0">
+            <a:pPr marL="0" indent="0">
               <a:buNone/>
             </a:pPr>
             <a:r>
@@ -14025,7 +14554,7 @@
           <a:bodyPr wrap="square" lIns="0" tIns="0" rIns="0" bIns="0" rtlCol="0" anchor="ctr"/>
           <a:lstStyle/>
           <a:p>
-            <a:pPr indent="0" marL="0">
+            <a:pPr marL="0" indent="0">
               <a:lnSpc>
                 <a:spcPct val="110000"/>
               </a:lnSpc>
@@ -14072,24 +14601,31 @@
             <a:prstDash val="solid"/>
           </a:ln>
           <a:effectLst>
-            <a:outerShdw sx="100000" sy="100000" kx="0" ky="0" algn="bl" rotWithShape="0" blurRad="88900" dist="25400" dir="5400000">
+            <a:outerShdw blurRad="88900" dist="25400" dir="5400000" algn="bl" rotWithShape="0">
               <a:srgbClr val="000000">
                 <a:alpha val="12000"/>
               </a:srgbClr>
             </a:outerShdw>
           </a:effectLst>
         </p:spPr>
+        <p:txBody>
+          <a:bodyPr/>
+          <a:lstStyle/>
+          <a:p>
+            <a:endParaRPr lang="ko-KR" altLang="en-US"/>
+          </a:p>
+        </p:txBody>
       </p:sp>
       <p:pic>
         <p:nvPicPr>
-          <p:cNvPr id="14" name="Image 2" descr="img/mj_knight_shield.png">    </p:cNvPr>
+          <p:cNvPr id="14" name="Image 2" descr="img/mj_knight_shield.png"/>
           <p:cNvPicPr>
             <a:picLocks noChangeAspect="1"/>
           </p:cNvPicPr>
           <p:nvPr/>
         </p:nvPicPr>
         <p:blipFill>
-          <a:blip r:embed="rId3"/>
+          <a:blip r:embed="rId5"/>
           <a:stretch>
             <a:fillRect/>
           </a:stretch>
@@ -14125,7 +14661,7 @@
           <a:bodyPr wrap="square" lIns="0" tIns="0" rIns="0" bIns="0" rtlCol="0" anchor="ctr"/>
           <a:lstStyle/>
           <a:p>
-            <a:pPr indent="0" marL="0">
+            <a:pPr marL="0" indent="0">
               <a:buNone/>
             </a:pPr>
             <a:r>
@@ -14164,7 +14700,7 @@
           <a:bodyPr wrap="square" lIns="0" tIns="0" rIns="0" bIns="0" rtlCol="0" anchor="ctr"/>
           <a:lstStyle/>
           <a:p>
-            <a:pPr indent="0" marL="0">
+            <a:pPr marL="0" indent="0">
               <a:lnSpc>
                 <a:spcPct val="110000"/>
               </a:lnSpc>
@@ -14211,13 +14747,20 @@
             <a:prstDash val="solid"/>
           </a:ln>
           <a:effectLst>
-            <a:outerShdw sx="100000" sy="100000" kx="0" ky="0" algn="bl" rotWithShape="0" blurRad="88900" dist="25400" dir="5400000">
+            <a:outerShdw blurRad="88900" dist="25400" dir="5400000" algn="bl" rotWithShape="0">
               <a:srgbClr val="000000">
                 <a:alpha val="12000"/>
               </a:srgbClr>
             </a:outerShdw>
           </a:effectLst>
         </p:spPr>
+        <p:txBody>
+          <a:bodyPr/>
+          <a:lstStyle/>
+          <a:p>
+            <a:endParaRPr lang="ko-KR" altLang="en-US"/>
+          </a:p>
+        </p:txBody>
       </p:sp>
       <p:sp>
         <p:nvSpPr>
@@ -14240,7 +14783,7 @@
           <a:bodyPr wrap="square" lIns="0" tIns="0" rIns="0" bIns="0" rtlCol="0" anchor="ctr"/>
           <a:lstStyle/>
           <a:p>
-            <a:pPr indent="0" marL="0">
+            <a:pPr marL="0" indent="0">
               <a:lnSpc>
                 <a:spcPct val="110000"/>
               </a:lnSpc>
@@ -14257,12 +14800,6 @@
               </a:rPr>
               <a:t>설계 의도  </a:t>
             </a:r>
-            <a:pPr indent="0" marL="0">
-              <a:lnSpc>
-                <a:spcPct val="110000"/>
-              </a:lnSpc>
-              <a:buNone/>
-            </a:pPr>
             <a:r>
               <a:rPr lang="en-US" sz="1250" dirty="0">
                 <a:solidFill>
@@ -14299,7 +14836,7 @@
           <a:bodyPr wrap="square" rtlCol="0" anchor="ctr"/>
           <a:lstStyle/>
           <a:p>
-            <a:pPr algn="l" indent="0" marL="0">
+            <a:pPr marL="0" indent="0" algn="l">
               <a:buNone/>
             </a:pPr>
             <a:r>
@@ -14338,7 +14875,7 @@
           <a:bodyPr wrap="square" rtlCol="0" anchor="ctr"/>
           <a:lstStyle/>
           <a:p>
-            <a:pPr algn="r" indent="0" marL="0">
+            <a:pPr marL="0" indent="0" algn="r">
               <a:buNone/>
             </a:pPr>
             <a:r>
@@ -14365,13 +14902,14 @@
 </file>
 
 <file path=ppt/slides/slide8.xml><?xml version="1.0" encoding="utf-8"?>
-<p:sld xmlns:r="http://schemas.openxmlformats.org/officeDocument/2006/relationships" xmlns:c="http://schemas.openxmlformats.org/drawingml/2006/chart" xmlns:a="http://schemas.openxmlformats.org/drawingml/2006/main" xmlns:dgm="http://schemas.openxmlformats.org/drawingml/2006/diagram" xmlns:dsp="http://schemas.microsoft.com/office/drawing/2008/diagram" xmlns:p="http://schemas.openxmlformats.org/presentationml/2006/main">
+<p:sld xmlns:a="http://schemas.openxmlformats.org/drawingml/2006/main" xmlns:r="http://schemas.openxmlformats.org/officeDocument/2006/relationships" xmlns:p="http://schemas.openxmlformats.org/presentationml/2006/main">
   <p:cSld name="Slide 9">
     <p:bg>
-      <p:bgPr shadeToTitle="0">
+      <p:bgPr>
         <a:solidFill>
-          <a:srgbClr val="ffffff"/>
+          <a:srgbClr val="FFFFFF"/>
         </a:solidFill>
+        <a:effectLst/>
       </p:bgPr>
     </p:bg>
     <p:spTree>
@@ -14416,7 +14954,7 @@
             <a:r>
               <a:rPr lang="en-US" sz="1200" b="1" kern="0" spc="200">
                 <a:solidFill>
-                  <a:srgbClr val="c8622e"/>
+                  <a:srgbClr val="C8622E"/>
                 </a:solidFill>
                 <a:latin typeface="맑은 고딕"/>
                 <a:ea typeface="맑은 고딕"/>
@@ -14456,7 +14994,7 @@
             <a:r>
               <a:rPr lang="en-US" sz="2900" b="1">
                 <a:solidFill>
-                  <a:srgbClr val="1f2637"/>
+                  <a:srgbClr val="1F2637"/>
                 </a:solidFill>
                 <a:latin typeface="맑은 고딕"/>
                 <a:ea typeface="맑은 고딕"/>
@@ -14467,7 +15005,7 @@
             <a:r>
               <a:rPr lang="ko-KR" altLang="en-US" sz="2900" b="1">
                 <a:solidFill>
-                  <a:srgbClr val="1f2637"/>
+                  <a:srgbClr val="1F2637"/>
                 </a:solidFill>
                 <a:latin typeface="맑은 고딕"/>
                 <a:ea typeface="맑은 고딕"/>
@@ -14478,7 +15016,7 @@
             <a:r>
               <a:rPr lang="en-US" sz="2900" b="1">
                 <a:solidFill>
-                  <a:srgbClr val="1f2637"/>
+                  <a:srgbClr val="1F2637"/>
                 </a:solidFill>
                 <a:latin typeface="맑은 고딕"/>
                 <a:ea typeface="맑은 고딕"/>
@@ -14486,14 +15024,6 @@
               </a:rPr>
               <a:t>신호</a:t>
             </a:r>
-            <a:endParaRPr lang="en-US" sz="2900" b="1">
-              <a:solidFill>
-                <a:srgbClr val="1f2637"/>
-              </a:solidFill>
-              <a:latin typeface="맑은 고딕"/>
-              <a:ea typeface="맑은 고딕"/>
-              <a:cs typeface="맑은 고딕"/>
-            </a:endParaRPr>
           </a:p>
         </p:txBody>
       </p:sp>
@@ -14514,11 +15044,11 @@
             </a:avLst>
           </a:prstGeom>
           <a:solidFill>
-            <a:srgbClr val="f4f6fa"/>
+            <a:srgbClr val="F4F6FA"/>
           </a:solidFill>
           <a:ln w="12700">
             <a:solidFill>
-              <a:srgbClr val="d9dee6"/>
+              <a:srgbClr val="D9DEE6"/>
             </a:solidFill>
             <a:prstDash val="solid"/>
           </a:ln>
@@ -14532,6 +15062,7 @@
         </p:spPr>
         <p:txBody>
           <a:bodyPr anchor="ctr"/>
+          <a:lstStyle/>
           <a:p>
             <a:pPr algn="ctr">
               <a:defRPr/>
@@ -14592,7 +15123,7 @@
             <a:r>
               <a:rPr lang="en-US" sz="1200" i="1">
                 <a:solidFill>
-                  <a:srgbClr val="6c7686"/>
+                  <a:srgbClr val="6C7686"/>
                 </a:solidFill>
                 <a:latin typeface="맑은 고딕"/>
                 <a:ea typeface="맑은 고딕"/>
@@ -14635,7 +15166,7 @@
             <a:r>
               <a:rPr lang="en-US" sz="1300" b="1">
                 <a:solidFill>
-                  <a:srgbClr val="1f2637"/>
+                  <a:srgbClr val="1F2637"/>
                 </a:solidFill>
                 <a:latin typeface="맑은 고딕"/>
                 <a:ea typeface="맑은 고딕"/>
@@ -14643,14 +15174,6 @@
               </a:rPr>
               <a:t>세 중간보스의 패턴을 모두 구사</a:t>
             </a:r>
-            <a:endParaRPr lang="en-US" sz="1300" b="1">
-              <a:solidFill>
-                <a:srgbClr val="1f2637"/>
-              </a:solidFill>
-              <a:latin typeface="맑은 고딕"/>
-              <a:ea typeface="맑은 고딕"/>
-              <a:cs typeface="맑은 고딕"/>
-            </a:endParaRPr>
           </a:p>
           <a:p>
             <a:pPr marL="0" indent="0">
@@ -14663,7 +15186,7 @@
             <a:r>
               <a:rPr lang="en-US" sz="1300">
                 <a:solidFill>
-                  <a:srgbClr val="6c7686"/>
+                  <a:srgbClr val="6C7686"/>
                 </a:solidFill>
                 <a:latin typeface="맑은 고딕"/>
                 <a:ea typeface="맑은 고딕"/>
@@ -14692,11 +15215,11 @@
             </a:avLst>
           </a:prstGeom>
           <a:solidFill>
-            <a:srgbClr val="16223b"/>
+            <a:srgbClr val="16223B"/>
           </a:solidFill>
           <a:ln w="12700">
             <a:solidFill>
-              <a:srgbClr val="d9dee6"/>
+              <a:srgbClr val="D9DEE6"/>
             </a:solidFill>
             <a:prstDash val="solid"/>
           </a:ln>
@@ -14710,6 +15233,7 @@
         </p:spPr>
         <p:txBody>
           <a:bodyPr anchor="ctr"/>
+          <a:lstStyle/>
           <a:p>
             <a:pPr algn="ctr">
               <a:defRPr/>
@@ -14746,7 +15270,7 @@
             <a:r>
               <a:rPr lang="en-US" sz="1500" b="1">
                 <a:solidFill>
-                  <a:srgbClr val="e0a15a"/>
+                  <a:srgbClr val="E0A15A"/>
                 </a:solidFill>
                 <a:latin typeface="맑은 고딕"/>
                 <a:ea typeface="맑은 고딕"/>
@@ -14789,7 +15313,7 @@
             <a:r>
               <a:rPr lang="en-US" sz="1250">
                 <a:solidFill>
-                  <a:srgbClr val="eaf0fa"/>
+                  <a:srgbClr val="EAF0FA"/>
                 </a:solidFill>
                 <a:latin typeface="맑은 고딕"/>
                 <a:ea typeface="맑은 고딕"/>
@@ -14818,11 +15342,11 @@
             </a:avLst>
           </a:prstGeom>
           <a:solidFill>
-            <a:srgbClr val="f4f6fa"/>
+            <a:srgbClr val="F4F6FA"/>
           </a:solidFill>
           <a:ln w="12700">
             <a:solidFill>
-              <a:srgbClr val="d9dee6"/>
+              <a:srgbClr val="D9DEE6"/>
             </a:solidFill>
             <a:prstDash val="solid"/>
           </a:ln>
@@ -14836,6 +15360,7 @@
         </p:spPr>
         <p:txBody>
           <a:bodyPr anchor="ctr"/>
+          <a:lstStyle/>
           <a:p>
             <a:pPr algn="ctr">
               <a:defRPr/>
@@ -14872,7 +15397,7 @@
             <a:r>
               <a:rPr lang="en-US" sz="1500" b="1">
                 <a:solidFill>
-                  <a:srgbClr val="c8622e"/>
+                  <a:srgbClr val="C8622E"/>
                 </a:solidFill>
                 <a:latin typeface="맑은 고딕"/>
                 <a:ea typeface="맑은 고딕"/>
@@ -14939,7 +15464,7 @@
             <a:r>
               <a:rPr lang="en-US" sz="1150">
                 <a:solidFill>
-                  <a:srgbClr val="1f2637"/>
+                  <a:srgbClr val="1F2637"/>
                 </a:solidFill>
                 <a:latin typeface="맑은 고딕"/>
                 <a:ea typeface="맑은 고딕"/>
@@ -14979,7 +15504,7 @@
             <a:r>
               <a:rPr lang="en-US" sz="900">
                 <a:solidFill>
-                  <a:srgbClr val="6c7686"/>
+                  <a:srgbClr val="6C7686"/>
                 </a:solidFill>
                 <a:latin typeface="맑은 고딕"/>
                 <a:ea typeface="맑은 고딕"/>
@@ -15019,7 +15544,7 @@
             <a:r>
               <a:rPr lang="en-US" sz="900">
                 <a:solidFill>
-                  <a:srgbClr val="6c7686"/>
+                  <a:srgbClr val="6C7686"/>
                 </a:solidFill>
                 <a:latin typeface="맑은 고딕"/>
                 <a:ea typeface="맑은 고딕"/>
@@ -15036,11 +15561,11 @@
   <p:clrMapOvr>
     <a:masterClrMapping/>
   </p:clrMapOvr>
-  <mc:AlternateContent xmlns:mc="http://schemas.openxmlformats.org/markup-compatibility/2006">
-    <mc:Choice xmlns:p14="http://schemas.microsoft.com/office/powerpoint/2010/main" Requires="p14">
-      <p:transition xmlns:mc="http://schemas.openxmlformats.org/markup-compatibility/2006" xmlns:p14="http://schemas.microsoft.com/office/powerpoint/2010/main" mc:Ignorable="p14" p14:dur="500"/>
+  <mc:AlternateContent xmlns:mc="http://schemas.openxmlformats.org/markup-compatibility/2006" xmlns:p14="http://schemas.microsoft.com/office/powerpoint/2010/main">
+    <mc:Choice Requires="p14">
+      <p:transition/>
     </mc:Choice>
-    <mc:Fallback>
+    <mc:Fallback xmlns:dsp="http://schemas.microsoft.com/office/drawing/2008/diagram" xmlns:dgm="http://schemas.openxmlformats.org/drawingml/2006/diagram" xmlns:c="http://schemas.openxmlformats.org/drawingml/2006/chart" xmlns="">
       <p:transition/>
     </mc:Fallback>
   </mc:AlternateContent>
@@ -15048,13 +15573,14 @@
 </file>
 
 <file path=ppt/slides/slide9.xml><?xml version="1.0" encoding="utf-8"?>
-<p:sld xmlns:r="http://schemas.openxmlformats.org/officeDocument/2006/relationships" xmlns:c="http://schemas.openxmlformats.org/drawingml/2006/chart" xmlns:a="http://schemas.openxmlformats.org/drawingml/2006/main" xmlns:dgm="http://schemas.openxmlformats.org/drawingml/2006/diagram" xmlns:dsp="http://schemas.microsoft.com/office/drawing/2008/diagram" xmlns:p="http://schemas.openxmlformats.org/presentationml/2006/main">
+<p:sld xmlns:a="http://schemas.openxmlformats.org/drawingml/2006/main" xmlns:r="http://schemas.openxmlformats.org/officeDocument/2006/relationships" xmlns:p="http://schemas.openxmlformats.org/presentationml/2006/main">
   <p:cSld name="Slide 10">
     <p:bg>
-      <p:bgPr shadeToTitle="0">
+      <p:bgPr>
         <a:solidFill>
-          <a:srgbClr val="16223b"/>
+          <a:srgbClr val="16223B"/>
         </a:solidFill>
+        <a:effectLst/>
       </p:bgPr>
     </p:bg>
     <p:spTree>
@@ -15099,7 +15625,7 @@
             <a:r>
               <a:rPr lang="en-US" sz="1200" b="1" kern="0" spc="200">
                 <a:solidFill>
-                  <a:srgbClr val="e0a15a"/>
+                  <a:srgbClr val="E0A15A"/>
                 </a:solidFill>
                 <a:latin typeface="맑은 고딕"/>
                 <a:ea typeface="맑은 고딕"/>
@@ -15139,7 +15665,7 @@
             <a:r>
               <a:rPr lang="en-US" sz="2600" b="1">
                 <a:solidFill>
-                  <a:srgbClr val="ffffff"/>
+                  <a:srgbClr val="FFFFFF"/>
                 </a:solidFill>
                 <a:latin typeface="맑은 고딕"/>
                 <a:ea typeface="맑은 고딕"/>
@@ -15150,7 +15676,7 @@
             <a:r>
               <a:rPr lang="ko-KR" altLang="en-US" sz="2600" b="1">
                 <a:solidFill>
-                  <a:srgbClr val="ffffff"/>
+                  <a:srgbClr val="FFFFFF"/>
                 </a:solidFill>
                 <a:latin typeface="맑은 고딕"/>
                 <a:ea typeface="맑은 고딕"/>
@@ -15161,7 +15687,7 @@
             <a:r>
               <a:rPr lang="en-US" sz="2600" b="1">
                 <a:solidFill>
-                  <a:srgbClr val="ffffff"/>
+                  <a:srgbClr val="FFFFFF"/>
                 </a:solidFill>
                 <a:latin typeface="맑은 고딕"/>
                 <a:ea typeface="맑은 고딕"/>
@@ -15169,14 +15695,6 @@
               </a:rPr>
               <a:t> 경험'에서</a:t>
             </a:r>
-            <a:endParaRPr lang="en-US" sz="2600" b="1">
-              <a:solidFill>
-                <a:srgbClr val="ffffff"/>
-              </a:solidFill>
-              <a:latin typeface="맑은 고딕"/>
-              <a:ea typeface="맑은 고딕"/>
-              <a:cs typeface="맑은 고딕"/>
-            </a:endParaRPr>
           </a:p>
         </p:txBody>
       </p:sp>
@@ -15197,11 +15715,11 @@
             </a:avLst>
           </a:prstGeom>
           <a:solidFill>
-            <a:srgbClr val="24324f"/>
+            <a:srgbClr val="24324F"/>
           </a:solidFill>
           <a:ln w="12700">
             <a:solidFill>
-              <a:srgbClr val="d9dee6"/>
+              <a:srgbClr val="D9DEE6"/>
             </a:solidFill>
             <a:prstDash val="solid"/>
           </a:ln>
@@ -15215,6 +15733,7 @@
         </p:spPr>
         <p:txBody>
           <a:bodyPr anchor="ctr"/>
+          <a:lstStyle/>
           <a:p>
             <a:pPr algn="ctr">
               <a:defRPr/>
@@ -15251,7 +15770,7 @@
             <a:r>
               <a:rPr lang="en-US" sz="1500" b="1">
                 <a:solidFill>
-                  <a:srgbClr val="e0a15a"/>
+                  <a:srgbClr val="E0A15A"/>
                 </a:solidFill>
                 <a:latin typeface="맑은 고딕"/>
                 <a:ea typeface="맑은 고딕"/>
@@ -15294,7 +15813,7 @@
             <a:r>
               <a:rPr lang="en-US" sz="1250">
                 <a:solidFill>
-                  <a:srgbClr val="eaf0fa"/>
+                  <a:srgbClr val="EAF0FA"/>
                 </a:solidFill>
                 <a:latin typeface="맑은 고딕"/>
                 <a:ea typeface="맑은 고딕"/>
@@ -15323,11 +15842,11 @@
             </a:avLst>
           </a:prstGeom>
           <a:solidFill>
-            <a:srgbClr val="24324f"/>
+            <a:srgbClr val="24324F"/>
           </a:solidFill>
           <a:ln w="12700">
             <a:solidFill>
-              <a:srgbClr val="d9dee6"/>
+              <a:srgbClr val="D9DEE6"/>
             </a:solidFill>
             <a:prstDash val="solid"/>
           </a:ln>
@@ -15341,6 +15860,7 @@
         </p:spPr>
         <p:txBody>
           <a:bodyPr anchor="ctr"/>
+          <a:lstStyle/>
           <a:p>
             <a:pPr algn="ctr">
               <a:defRPr/>
@@ -15377,7 +15897,7 @@
             <a:r>
               <a:rPr lang="en-US" sz="1500" b="1">
                 <a:solidFill>
-                  <a:srgbClr val="e0a15a"/>
+                  <a:srgbClr val="E0A15A"/>
                 </a:solidFill>
                 <a:latin typeface="맑은 고딕"/>
                 <a:ea typeface="맑은 고딕"/>
@@ -15420,7 +15940,7 @@
             <a:r>
               <a:rPr lang="en-US" sz="1250">
                 <a:solidFill>
-                  <a:srgbClr val="eaf0fa"/>
+                  <a:srgbClr val="EAF0FA"/>
                 </a:solidFill>
                 <a:latin typeface="맑은 고딕"/>
                 <a:ea typeface="맑은 고딕"/>
@@ -15449,11 +15969,11 @@
             </a:avLst>
           </a:prstGeom>
           <a:solidFill>
-            <a:srgbClr val="24324f"/>
+            <a:srgbClr val="24324F"/>
           </a:solidFill>
           <a:ln w="12700">
             <a:solidFill>
-              <a:srgbClr val="d9dee6"/>
+              <a:srgbClr val="D9DEE6"/>
             </a:solidFill>
             <a:prstDash val="solid"/>
           </a:ln>
@@ -15467,6 +15987,7 @@
         </p:spPr>
         <p:txBody>
           <a:bodyPr anchor="ctr"/>
+          <a:lstStyle/>
           <a:p>
             <a:pPr algn="ctr">
               <a:defRPr/>
@@ -15503,7 +16024,7 @@
             <a:r>
               <a:rPr lang="en-US" sz="1500" b="1">
                 <a:solidFill>
-                  <a:srgbClr val="e0a15a"/>
+                  <a:srgbClr val="E0A15A"/>
                 </a:solidFill>
                 <a:latin typeface="맑은 고딕"/>
                 <a:ea typeface="맑은 고딕"/>
@@ -15546,7 +16067,7 @@
             <a:r>
               <a:rPr lang="en-US" sz="1250">
                 <a:solidFill>
-                  <a:srgbClr val="eaf0fa"/>
+                  <a:srgbClr val="EAF0FA"/>
                 </a:solidFill>
                 <a:latin typeface="맑은 고딕"/>
                 <a:ea typeface="맑은 고딕"/>
@@ -15575,11 +16096,11 @@
             </a:avLst>
           </a:prstGeom>
           <a:solidFill>
-            <a:srgbClr val="24324f"/>
+            <a:srgbClr val="24324F"/>
           </a:solidFill>
           <a:ln w="12700">
             <a:solidFill>
-              <a:srgbClr val="d9dee6"/>
+              <a:srgbClr val="D9DEE6"/>
             </a:solidFill>
             <a:prstDash val="solid"/>
           </a:ln>
@@ -15593,6 +16114,7 @@
         </p:spPr>
         <p:txBody>
           <a:bodyPr anchor="ctr"/>
+          <a:lstStyle/>
           <a:p>
             <a:pPr algn="ctr">
               <a:defRPr/>
@@ -15629,7 +16151,7 @@
             <a:r>
               <a:rPr lang="en-US" sz="1500" b="1">
                 <a:solidFill>
-                  <a:srgbClr val="e0a15a"/>
+                  <a:srgbClr val="E0A15A"/>
                 </a:solidFill>
                 <a:latin typeface="맑은 고딕"/>
                 <a:ea typeface="맑은 고딕"/>
@@ -15672,7 +16194,7 @@
             <a:r>
               <a:rPr lang="en-US" sz="1250">
                 <a:solidFill>
-                  <a:srgbClr val="eaf0fa"/>
+                  <a:srgbClr val="EAF0FA"/>
                 </a:solidFill>
                 <a:latin typeface="맑은 고딕"/>
                 <a:ea typeface="맑은 고딕"/>
@@ -15701,11 +16223,11 @@
             </a:avLst>
           </a:prstGeom>
           <a:solidFill>
-            <a:srgbClr val="24324f"/>
+            <a:srgbClr val="24324F"/>
           </a:solidFill>
           <a:ln w="12700">
             <a:solidFill>
-              <a:srgbClr val="d9dee6"/>
+              <a:srgbClr val="D9DEE6"/>
             </a:solidFill>
             <a:prstDash val="solid"/>
           </a:ln>
@@ -15719,6 +16241,7 @@
         </p:spPr>
         <p:txBody>
           <a:bodyPr anchor="ctr"/>
+          <a:lstStyle/>
           <a:p>
             <a:pPr algn="ctr">
               <a:defRPr/>
@@ -15755,7 +16278,7 @@
             <a:r>
               <a:rPr lang="en-US" sz="1500" b="1">
                 <a:solidFill>
-                  <a:srgbClr val="e0a15a"/>
+                  <a:srgbClr val="E0A15A"/>
                 </a:solidFill>
                 <a:latin typeface="맑은 고딕"/>
                 <a:ea typeface="맑은 고딕"/>
@@ -15798,7 +16321,7 @@
             <a:r>
               <a:rPr lang="en-US" sz="1250">
                 <a:solidFill>
-                  <a:srgbClr val="eaf0fa"/>
+                  <a:srgbClr val="EAF0FA"/>
                 </a:solidFill>
                 <a:latin typeface="맑은 고딕"/>
                 <a:ea typeface="맑은 고딕"/>
@@ -15827,11 +16350,11 @@
             </a:avLst>
           </a:prstGeom>
           <a:solidFill>
-            <a:srgbClr val="24324f"/>
+            <a:srgbClr val="24324F"/>
           </a:solidFill>
           <a:ln w="12700">
             <a:solidFill>
-              <a:srgbClr val="d9dee6"/>
+              <a:srgbClr val="D9DEE6"/>
             </a:solidFill>
             <a:prstDash val="solid"/>
           </a:ln>
@@ -15845,6 +16368,7 @@
         </p:spPr>
         <p:txBody>
           <a:bodyPr anchor="ctr"/>
+          <a:lstStyle/>
           <a:p>
             <a:pPr algn="ctr">
               <a:defRPr/>
@@ -15881,7 +16405,7 @@
             <a:r>
               <a:rPr lang="en-US" sz="1500" b="1">
                 <a:solidFill>
-                  <a:srgbClr val="e0a15a"/>
+                  <a:srgbClr val="E0A15A"/>
                 </a:solidFill>
                 <a:latin typeface="맑은 고딕"/>
                 <a:ea typeface="맑은 고딕"/>
@@ -15924,7 +16448,7 @@
             <a:r>
               <a:rPr lang="ko-KR" altLang="en-US" sz="1250">
                 <a:solidFill>
-                  <a:srgbClr val="eaf0fa"/>
+                  <a:srgbClr val="EAF0FA"/>
                 </a:solidFill>
                 <a:latin typeface="맑은 고딕"/>
                 <a:ea typeface="맑은 고딕"/>
@@ -15932,14 +16456,6 @@
               </a:rPr>
               <a:t>공격할 기회를 알려수는 수단</a:t>
             </a:r>
-            <a:endParaRPr lang="ko-KR" altLang="en-US" sz="1250">
-              <a:solidFill>
-                <a:srgbClr val="eaf0fa"/>
-              </a:solidFill>
-              <a:latin typeface="맑은 고딕"/>
-              <a:ea typeface="맑은 고딕"/>
-              <a:cs typeface="맑은 고딕"/>
-            </a:endParaRPr>
           </a:p>
         </p:txBody>
       </p:sp>
@@ -15971,7 +16487,7 @@
             <a:r>
               <a:rPr lang="en-US" sz="900">
                 <a:solidFill>
-                  <a:srgbClr val="6c7686"/>
+                  <a:srgbClr val="6C7686"/>
                 </a:solidFill>
                 <a:latin typeface="맑은 고딕"/>
                 <a:ea typeface="맑은 고딕"/>
@@ -16011,7 +16527,7 @@
             <a:r>
               <a:rPr lang="en-US" sz="900">
                 <a:solidFill>
-                  <a:srgbClr val="6c7686"/>
+                  <a:srgbClr val="6C7686"/>
                 </a:solidFill>
                 <a:latin typeface="맑은 고딕"/>
                 <a:ea typeface="맑은 고딕"/>
@@ -16028,11 +16544,11 @@
   <p:clrMapOvr>
     <a:masterClrMapping/>
   </p:clrMapOvr>
-  <mc:AlternateContent xmlns:mc="http://schemas.openxmlformats.org/markup-compatibility/2006">
-    <mc:Choice xmlns:p14="http://schemas.microsoft.com/office/powerpoint/2010/main" Requires="p14">
-      <p:transition xmlns:mc="http://schemas.openxmlformats.org/markup-compatibility/2006" xmlns:p14="http://schemas.microsoft.com/office/powerpoint/2010/main" mc:Ignorable="p14" p14:dur="500"/>
+  <mc:AlternateContent xmlns:mc="http://schemas.openxmlformats.org/markup-compatibility/2006" xmlns:p14="http://schemas.microsoft.com/office/powerpoint/2010/main">
+    <mc:Choice Requires="p14">
+      <p:transition/>
     </mc:Choice>
-    <mc:Fallback>
+    <mc:Fallback xmlns:dsp="http://schemas.microsoft.com/office/drawing/2008/diagram" xmlns:dgm="http://schemas.openxmlformats.org/drawingml/2006/diagram" xmlns:c="http://schemas.openxmlformats.org/drawingml/2006/chart" xmlns="">
       <p:transition/>
     </mc:Fallback>
   </mc:AlternateContent>
@@ -16040,44 +16556,44 @@
 </file>
 
 <file path=ppt/theme/theme1.xml><?xml version="1.0" encoding="utf-8"?>
-<a:theme xmlns:r="http://schemas.openxmlformats.org/officeDocument/2006/relationships" xmlns:c="http://schemas.openxmlformats.org/drawingml/2006/chart" xmlns:dgm="http://schemas.openxmlformats.org/drawingml/2006/diagram" xmlns:dsp="http://schemas.microsoft.com/office/drawing/2008/diagram" xmlns:a="http://schemas.openxmlformats.org/drawingml/2006/main" xmlns:pic="http://schemas.openxmlformats.org/drawingml/2006/picture" xmlns:wp="http://schemas.openxmlformats.org/drawingml/2006/wordprocessingDrawing" xmlns:xdr="http://schemas.openxmlformats.org/drawingml/2006/spreadsheetDrawing" xmlns:lc="http://schemas.openxmlformats.org/drawingml/2006/lockedCanvas" xmlns:p="http://schemas.openxmlformats.org/presentationml/2006/main" name="Office Theme">
+<a:theme xmlns:a="http://schemas.openxmlformats.org/drawingml/2006/main" name="Office Theme">
   <a:themeElements>
     <a:clrScheme name="Office">
       <a:dk1>
         <a:sysClr val="windowText" lastClr="000000"/>
       </a:dk1>
       <a:lt1>
-        <a:sysClr val="window" lastClr="ffffff"/>
+        <a:sysClr val="window" lastClr="FFFFFF"/>
       </a:lt1>
       <a:dk2>
-        <a:srgbClr val="44546a"/>
+        <a:srgbClr val="44546A"/>
       </a:dk2>
       <a:lt2>
-        <a:srgbClr val="e7e6e6"/>
+        <a:srgbClr val="E7E6E6"/>
       </a:lt2>
       <a:accent1>
-        <a:srgbClr val="4472c4"/>
+        <a:srgbClr val="4472C4"/>
       </a:accent1>
       <a:accent2>
-        <a:srgbClr val="ed7d31"/>
+        <a:srgbClr val="ED7D31"/>
       </a:accent2>
       <a:accent3>
-        <a:srgbClr val="a5a5a5"/>
+        <a:srgbClr val="A5A5A5"/>
       </a:accent3>
       <a:accent4>
-        <a:srgbClr val="ffc000"/>
+        <a:srgbClr val="FFC000"/>
       </a:accent4>
       <a:accent5>
-        <a:srgbClr val="5b9bd5"/>
+        <a:srgbClr val="5B9BD5"/>
       </a:accent5>
       <a:accent6>
-        <a:srgbClr val="70ad47"/>
+        <a:srgbClr val="70AD47"/>
       </a:accent6>
       <a:hlink>
-        <a:srgbClr val="0563c1"/>
+        <a:srgbClr val="0563C1"/>
       </a:hlink>
       <a:folHlink>
-        <a:srgbClr val="954f72"/>
+        <a:srgbClr val="954F72"/>
       </a:folHlink>
     </a:clrScheme>
     <a:fontScheme name="Office">
@@ -16324,45 +16840,47 @@
       </a:bgFillStyleLst>
     </a:fmtScheme>
   </a:themeElements>
+  <a:objectDefaults/>
+  <a:extraClrSchemeLst/>
 </a:theme>
 </file>
 
 <file path=ppt/theme/theme2.xml><?xml version="1.0" encoding="utf-8"?>
-<a:theme xmlns:r="http://schemas.openxmlformats.org/officeDocument/2006/relationships" xmlns:c="http://schemas.openxmlformats.org/drawingml/2006/chart" xmlns:dgm="http://schemas.openxmlformats.org/drawingml/2006/diagram" xmlns:dsp="http://schemas.microsoft.com/office/drawing/2008/diagram" xmlns:a="http://schemas.openxmlformats.org/drawingml/2006/main" xmlns:pic="http://schemas.openxmlformats.org/drawingml/2006/picture" xmlns:wp="http://schemas.openxmlformats.org/drawingml/2006/wordprocessingDrawing" xmlns:xdr="http://schemas.openxmlformats.org/drawingml/2006/spreadsheetDrawing" xmlns:lc="http://schemas.openxmlformats.org/drawingml/2006/lockedCanvas" xmlns:p="http://schemas.openxmlformats.org/presentationml/2006/main" name="한컴오피스">
+<a:theme xmlns:a="http://schemas.openxmlformats.org/drawingml/2006/main" name="한컴오피스">
   <a:themeElements>
     <a:clrScheme name="한컴오피스">
       <a:dk1>
         <a:sysClr val="windowText" lastClr="000000"/>
       </a:dk1>
       <a:lt1>
-        <a:sysClr val="window" lastClr="ffffff"/>
+        <a:sysClr val="window" lastClr="FFFFFF"/>
       </a:lt1>
       <a:dk2>
-        <a:srgbClr val="3a3c84"/>
+        <a:srgbClr val="3A3C84"/>
       </a:dk2>
       <a:lt2>
-        <a:srgbClr val="faf3db"/>
+        <a:srgbClr val="FAF3DB"/>
       </a:lt2>
       <a:accent1>
-        <a:srgbClr val="6182d6"/>
+        <a:srgbClr val="6182D6"/>
       </a:accent1>
       <a:accent2>
-        <a:srgbClr val="ff843a"/>
+        <a:srgbClr val="FF843A"/>
       </a:accent2>
       <a:accent3>
-        <a:srgbClr val="b2b2b2"/>
+        <a:srgbClr val="B2B2B2"/>
       </a:accent3>
       <a:accent4>
-        <a:srgbClr val="ffd700"/>
+        <a:srgbClr val="FFD700"/>
       </a:accent4>
       <a:accent5>
-        <a:srgbClr val="289b6e"/>
+        <a:srgbClr val="289B6E"/>
       </a:accent5>
       <a:accent6>
-        <a:srgbClr val="9d5cbb"/>
+        <a:srgbClr val="9D5CBB"/>
       </a:accent6>
       <a:hlink>
-        <a:srgbClr val="0000ff"/>
+        <a:srgbClr val="0000FF"/>
       </a:hlink>
       <a:folHlink>
         <a:srgbClr val="800080"/>
@@ -16587,5 +17105,7 @@
       </a:bgFillStyleLst>
     </a:fmtScheme>
   </a:themeElements>
+  <a:objectDefaults/>
+  <a:extraClrSchemeLst/>
 </a:theme>
 </file>
--- a/포트폴리오/진성준/진성준_기획_포트폴리오.pptx
+++ b/포트폴리오/진성준/진성준_기획_포트폴리오.pptx
@@ -1,29 +1,30 @@
 
 <file path=ppt/presentation.xml><?xml version="1.0" encoding="utf-8"?>
-<p:presentation xmlns:a="http://schemas.openxmlformats.org/drawingml/2006/main" xmlns:r="http://schemas.openxmlformats.org/officeDocument/2006/relationships" xmlns:p="http://schemas.openxmlformats.org/presentationml/2006/main" autoCompressPictures="0">
+<p:presentation xmlns:r="http://schemas.openxmlformats.org/officeDocument/2006/relationships" xmlns:c="http://schemas.openxmlformats.org/drawingml/2006/chart" xmlns:a="http://schemas.openxmlformats.org/drawingml/2006/main" xmlns:dgm="http://schemas.openxmlformats.org/drawingml/2006/diagram" xmlns:dsp="http://schemas.microsoft.com/office/drawing/2008/diagram" xmlns:p="http://schemas.openxmlformats.org/presentationml/2006/main" autoCompressPictures="0">
   <p:sldMasterIdLst>
-    <p:sldMasterId id="2147483654" r:id="rId1"/>
+    <p:sldMasterId id="2147483652" r:id="rId1"/>
   </p:sldMasterIdLst>
   <p:notesMasterIdLst>
-    <p:notesMasterId r:id="rId18"/>
+    <p:notesMasterId r:id="rId2"/>
   </p:notesMasterIdLst>
   <p:sldIdLst>
-    <p:sldId id="256" r:id="rId2"/>
-    <p:sldId id="257" r:id="rId3"/>
-    <p:sldId id="258" r:id="rId4"/>
-    <p:sldId id="259" r:id="rId5"/>
-    <p:sldId id="260" r:id="rId6"/>
-    <p:sldId id="261" r:id="rId7"/>
-    <p:sldId id="262" r:id="rId8"/>
-    <p:sldId id="263" r:id="rId9"/>
-    <p:sldId id="264" r:id="rId10"/>
-    <p:sldId id="265" r:id="rId11"/>
-    <p:sldId id="266" r:id="rId12"/>
-    <p:sldId id="267" r:id="rId13"/>
-    <p:sldId id="268" r:id="rId14"/>
-    <p:sldId id="269" r:id="rId15"/>
-    <p:sldId id="270" r:id="rId16"/>
-    <p:sldId id="271" r:id="rId17"/>
+    <p:sldId id="256" r:id="rId3"/>
+    <p:sldId id="257" r:id="rId4"/>
+    <p:sldId id="258" r:id="rId5"/>
+    <p:sldId id="259" r:id="rId6"/>
+    <p:sldId id="260" r:id="rId7"/>
+    <p:sldId id="261" r:id="rId8"/>
+    <p:sldId id="262" r:id="rId9"/>
+    <p:sldId id="263" r:id="rId10"/>
+    <p:sldId id="264" r:id="rId11"/>
+    <p:sldId id="265" r:id="rId12"/>
+    <p:sldId id="266" r:id="rId13"/>
+    <p:sldId id="267" r:id="rId14"/>
+    <p:sldId id="268" r:id="rId15"/>
+    <p:sldId id="269" r:id="rId16"/>
+    <p:sldId id="270" r:id="rId17"/>
+    <p:sldId id="271" r:id="rId18"/>
+    <p:sldId id="272" r:id="rId19"/>
   </p:sldIdLst>
   <p:sldSz cx="12192000" cy="6858000"/>
   <p:notesSz cx="6858000" cy="12192000"/>
@@ -119,16 +120,11 @@
       </a:defRPr>
     </a:lvl9pPr>
   </p:defaultTextStyle>
-  <p:extLst>
-    <p:ext uri="{EFAFB233-063F-42B5-8137-9DF3F51BA10A}">
-      <p15:sldGuideLst xmlns:p15="http://schemas.microsoft.com/office/powerpoint/2012/main"/>
-    </p:ext>
-  </p:extLst>
 </p:presentation>
 </file>
 
 <file path=ppt/notesMasters/notesMaster1.xml><?xml version="1.0" encoding="utf-8"?>
-<p:notesMaster xmlns:a="http://schemas.openxmlformats.org/drawingml/2006/main" xmlns:r="http://schemas.openxmlformats.org/officeDocument/2006/relationships" xmlns:p="http://schemas.openxmlformats.org/presentationml/2006/main">
+<p:notesMaster xmlns:r="http://schemas.openxmlformats.org/officeDocument/2006/relationships" xmlns:c="http://schemas.openxmlformats.org/drawingml/2006/chart" xmlns:a="http://schemas.openxmlformats.org/drawingml/2006/main" xmlns:dgm="http://schemas.openxmlformats.org/drawingml/2006/diagram" xmlns:dsp="http://schemas.microsoft.com/office/drawing/2008/diagram" xmlns:p="http://schemas.openxmlformats.org/presentationml/2006/main">
   <p:cSld>
     <p:bg>
       <p:bgRef idx="1001">
@@ -156,7 +152,7 @@
             <a:spLocks noGrp="1"/>
           </p:cNvSpPr>
           <p:nvPr>
-            <p:ph type="hdr" sz="quarter"/>
+            <p:ph type="hdr" sz="quarter" idx="0"/>
           </p:nvPr>
         </p:nvSpPr>
         <p:spPr>
@@ -179,6 +175,10 @@
             <a:pPr lvl="0">
               <a:defRPr/>
             </a:pPr>
+            <a:r>
+              <a:rPr lang="ko-KR" altLang="en-US"/>
+              <a:t/>
+            </a:r>
             <a:endParaRPr lang="ko-KR" altLang="en-US"/>
           </a:p>
         </p:txBody>
@@ -218,7 +218,7 @@
               <a:pPr lvl="0">
                 <a:defRPr/>
               </a:pPr>
-              <a:t>7/6/2026</a:t>
+              <a:t>9/21/2026</a:t>
             </a:fld>
             <a:endParaRPr lang="en-US"/>
           </a:p>
@@ -290,6 +290,7 @@
               <a:rPr lang="en-US"/>
               <a:t>Click to edit Master text styles</a:t>
             </a:r>
+            <a:endParaRPr lang="en-US"/>
           </a:p>
           <a:p>
             <a:pPr lvl="1">
@@ -299,6 +300,7 @@
               <a:rPr lang="en-US"/>
               <a:t>Second level</a:t>
             </a:r>
+            <a:endParaRPr lang="en-US"/>
           </a:p>
           <a:p>
             <a:pPr lvl="2">
@@ -308,6 +310,7 @@
               <a:rPr lang="en-US"/>
               <a:t>Third level</a:t>
             </a:r>
+            <a:endParaRPr lang="en-US"/>
           </a:p>
           <a:p>
             <a:pPr lvl="3">
@@ -317,6 +320,7 @@
               <a:rPr lang="en-US"/>
               <a:t>Fourth level</a:t>
             </a:r>
+            <a:endParaRPr lang="en-US"/>
           </a:p>
           <a:p>
             <a:pPr lvl="4">
@@ -326,6 +330,7 @@
               <a:rPr lang="en-US"/>
               <a:t>Fifth level</a:t>
             </a:r>
+            <a:endParaRPr lang="en-US"/>
           </a:p>
         </p:txBody>
       </p:sp>
@@ -359,6 +364,10 @@
             <a:pPr lvl="0">
               <a:defRPr/>
             </a:pPr>
+            <a:r>
+              <a:rPr lang="ko-KR" altLang="en-US"/>
+              <a:t/>
+            </a:r>
             <a:endParaRPr lang="ko-KR" altLang="en-US"/>
           </a:p>
         </p:txBody>
@@ -504,7 +513,7 @@
 </file>
 
 <file path=ppt/notesSlides/notesSlide1.xml><?xml version="1.0" encoding="utf-8"?>
-<p:notes xmlns:a="http://schemas.openxmlformats.org/drawingml/2006/main" xmlns:r="http://schemas.openxmlformats.org/officeDocument/2006/relationships" xmlns:p="http://schemas.openxmlformats.org/presentationml/2006/main">
+<p:notes xmlns:r="http://schemas.openxmlformats.org/officeDocument/2006/relationships" xmlns:c="http://schemas.openxmlformats.org/drawingml/2006/chart" xmlns:a="http://schemas.openxmlformats.org/drawingml/2006/main" xmlns:dgm="http://schemas.openxmlformats.org/drawingml/2006/diagram" xmlns:dsp="http://schemas.microsoft.com/office/drawing/2008/diagram" xmlns:p="http://schemas.openxmlformats.org/presentationml/2006/main">
   <p:cSld>
     <p:spTree>
       <p:nvGrpSpPr>
@@ -527,7 +536,7 @@
             <a:spLocks noGrp="1" noRot="1" noChangeAspect="1" noTextEdit="1"/>
           </p:cNvSpPr>
           <p:nvPr>
-            <p:ph type="sldImg"/>
+            <p:ph type="sldImg" idx="0"/>
           </p:nvPr>
         </p:nvSpPr>
         <p:spPr/>
@@ -550,6 +559,10 @@
             <a:pPr lvl="0">
               <a:defRPr/>
             </a:pPr>
+            <a:r>
+              <a:rPr lang="ko-KR" altLang="en-US"/>
+              <a:t/>
+            </a:r>
             <a:endParaRPr lang="ko-KR" altLang="en-US"/>
           </a:p>
         </p:txBody>
@@ -592,7 +605,7 @@
 </file>
 
 <file path=ppt/notesSlides/notesSlide10.xml><?xml version="1.0" encoding="utf-8"?>
-<p:notes xmlns:a="http://schemas.openxmlformats.org/drawingml/2006/main" xmlns:r="http://schemas.openxmlformats.org/officeDocument/2006/relationships" xmlns:p="http://schemas.openxmlformats.org/presentationml/2006/main">
+<p:notes xmlns:r="http://schemas.openxmlformats.org/officeDocument/2006/relationships" xmlns:c="http://schemas.openxmlformats.org/drawingml/2006/chart" xmlns:a="http://schemas.openxmlformats.org/drawingml/2006/main" xmlns:dgm="http://schemas.openxmlformats.org/drawingml/2006/diagram" xmlns:dsp="http://schemas.microsoft.com/office/drawing/2008/diagram" xmlns:p="http://schemas.openxmlformats.org/presentationml/2006/main">
   <p:cSld>
     <p:spTree>
       <p:nvGrpSpPr>
@@ -615,7 +628,7 @@
             <a:spLocks noGrp="1" noRot="1" noChangeAspect="1" noTextEdit="1"/>
           </p:cNvSpPr>
           <p:nvPr>
-            <p:ph type="sldImg"/>
+            <p:ph type="sldImg" idx="0"/>
           </p:nvPr>
         </p:nvSpPr>
         <p:spPr/>
@@ -638,6 +651,10 @@
             <a:pPr lvl="0">
               <a:defRPr/>
             </a:pPr>
+            <a:r>
+              <a:rPr lang="ko-KR" altLang="en-US"/>
+              <a:t/>
+            </a:r>
             <a:endParaRPr lang="ko-KR" altLang="en-US"/>
           </a:p>
         </p:txBody>
@@ -680,7 +697,7 @@
 </file>
 
 <file path=ppt/notesSlides/notesSlide11.xml><?xml version="1.0" encoding="utf-8"?>
-<p:notes xmlns:a="http://schemas.openxmlformats.org/drawingml/2006/main" xmlns:r="http://schemas.openxmlformats.org/officeDocument/2006/relationships" xmlns:p="http://schemas.openxmlformats.org/presentationml/2006/main">
+<p:notes xmlns:r="http://schemas.openxmlformats.org/officeDocument/2006/relationships" xmlns:c="http://schemas.openxmlformats.org/drawingml/2006/chart" xmlns:a="http://schemas.openxmlformats.org/drawingml/2006/main" xmlns:dgm="http://schemas.openxmlformats.org/drawingml/2006/diagram" xmlns:dsp="http://schemas.microsoft.com/office/drawing/2008/diagram" xmlns:p="http://schemas.openxmlformats.org/presentationml/2006/main">
   <p:cSld>
     <p:spTree>
       <p:nvGrpSpPr>
@@ -703,7 +720,7 @@
             <a:spLocks noGrp="1" noRot="1" noChangeAspect="1" noTextEdit="1"/>
           </p:cNvSpPr>
           <p:nvPr>
-            <p:ph type="sldImg"/>
+            <p:ph type="sldImg" idx="0"/>
           </p:nvPr>
         </p:nvSpPr>
         <p:spPr/>
@@ -726,6 +743,10 @@
             <a:pPr lvl="0">
               <a:defRPr/>
             </a:pPr>
+            <a:r>
+              <a:rPr lang="ko-KR" altLang="en-US"/>
+              <a:t/>
+            </a:r>
             <a:endParaRPr lang="ko-KR" altLang="en-US"/>
           </a:p>
         </p:txBody>
@@ -768,7 +789,7 @@
 </file>
 
 <file path=ppt/notesSlides/notesSlide12.xml><?xml version="1.0" encoding="utf-8"?>
-<p:notes xmlns:a="http://schemas.openxmlformats.org/drawingml/2006/main" xmlns:r="http://schemas.openxmlformats.org/officeDocument/2006/relationships" xmlns:p="http://schemas.openxmlformats.org/presentationml/2006/main">
+<p:notes xmlns:r="http://schemas.openxmlformats.org/officeDocument/2006/relationships" xmlns:c="http://schemas.openxmlformats.org/drawingml/2006/chart" xmlns:a="http://schemas.openxmlformats.org/drawingml/2006/main" xmlns:dgm="http://schemas.openxmlformats.org/drawingml/2006/diagram" xmlns:dsp="http://schemas.microsoft.com/office/drawing/2008/diagram" xmlns:p="http://schemas.openxmlformats.org/presentationml/2006/main">
   <p:cSld>
     <p:spTree>
       <p:nvGrpSpPr>
@@ -791,7 +812,7 @@
             <a:spLocks noGrp="1" noRot="1" noChangeAspect="1" noTextEdit="1"/>
           </p:cNvSpPr>
           <p:nvPr>
-            <p:ph type="sldImg"/>
+            <p:ph type="sldImg" idx="0"/>
           </p:nvPr>
         </p:nvSpPr>
         <p:spPr/>
@@ -814,6 +835,10 @@
             <a:pPr lvl="0">
               <a:defRPr/>
             </a:pPr>
+            <a:r>
+              <a:rPr lang="ko-KR" altLang="en-US"/>
+              <a:t/>
+            </a:r>
             <a:endParaRPr lang="ko-KR" altLang="en-US"/>
           </a:p>
         </p:txBody>
@@ -856,7 +881,7 @@
 </file>
 
 <file path=ppt/notesSlides/notesSlide13.xml><?xml version="1.0" encoding="utf-8"?>
-<p:notes xmlns:a="http://schemas.openxmlformats.org/drawingml/2006/main" xmlns:r="http://schemas.openxmlformats.org/officeDocument/2006/relationships" xmlns:p="http://schemas.openxmlformats.org/presentationml/2006/main">
+<p:notes xmlns:r="http://schemas.openxmlformats.org/officeDocument/2006/relationships" xmlns:c="http://schemas.openxmlformats.org/drawingml/2006/chart" xmlns:a="http://schemas.openxmlformats.org/drawingml/2006/main" xmlns:dgm="http://schemas.openxmlformats.org/drawingml/2006/diagram" xmlns:dsp="http://schemas.microsoft.com/office/drawing/2008/diagram" xmlns:p="http://schemas.openxmlformats.org/presentationml/2006/main">
   <p:cSld>
     <p:spTree>
       <p:nvGrpSpPr>
@@ -879,7 +904,7 @@
             <a:spLocks noGrp="1" noRot="1" noChangeAspect="1" noTextEdit="1"/>
           </p:cNvSpPr>
           <p:nvPr>
-            <p:ph type="sldImg"/>
+            <p:ph type="sldImg" idx="0"/>
           </p:nvPr>
         </p:nvSpPr>
         <p:spPr/>
@@ -902,6 +927,10 @@
             <a:pPr lvl="0">
               <a:defRPr/>
             </a:pPr>
+            <a:r>
+              <a:rPr lang="ko-KR" altLang="en-US"/>
+              <a:t/>
+            </a:r>
             <a:endParaRPr lang="ko-KR" altLang="en-US"/>
           </a:p>
         </p:txBody>
@@ -944,7 +973,7 @@
 </file>
 
 <file path=ppt/notesSlides/notesSlide14.xml><?xml version="1.0" encoding="utf-8"?>
-<p:notes xmlns:a="http://schemas.openxmlformats.org/drawingml/2006/main" xmlns:r="http://schemas.openxmlformats.org/officeDocument/2006/relationships" xmlns:p="http://schemas.openxmlformats.org/presentationml/2006/main">
+<p:notes xmlns:r="http://schemas.openxmlformats.org/officeDocument/2006/relationships" xmlns:c="http://schemas.openxmlformats.org/drawingml/2006/chart" xmlns:a="http://schemas.openxmlformats.org/drawingml/2006/main" xmlns:dgm="http://schemas.openxmlformats.org/drawingml/2006/diagram" xmlns:dsp="http://schemas.microsoft.com/office/drawing/2008/diagram" xmlns:p="http://schemas.openxmlformats.org/presentationml/2006/main">
   <p:cSld>
     <p:spTree>
       <p:nvGrpSpPr>
@@ -967,7 +996,7 @@
             <a:spLocks noGrp="1" noRot="1" noChangeAspect="1" noTextEdit="1"/>
           </p:cNvSpPr>
           <p:nvPr>
-            <p:ph type="sldImg"/>
+            <p:ph type="sldImg" idx="0"/>
           </p:nvPr>
         </p:nvSpPr>
         <p:spPr/>
@@ -990,6 +1019,10 @@
             <a:pPr lvl="0">
               <a:defRPr/>
             </a:pPr>
+            <a:r>
+              <a:rPr lang="ko-KR" altLang="en-US"/>
+              <a:t/>
+            </a:r>
             <a:endParaRPr lang="ko-KR" altLang="en-US"/>
           </a:p>
         </p:txBody>
@@ -1032,7 +1065,7 @@
 </file>
 
 <file path=ppt/notesSlides/notesSlide15.xml><?xml version="1.0" encoding="utf-8"?>
-<p:notes xmlns:a="http://schemas.openxmlformats.org/drawingml/2006/main" xmlns:r="http://schemas.openxmlformats.org/officeDocument/2006/relationships" xmlns:p="http://schemas.openxmlformats.org/presentationml/2006/main">
+<p:notes xmlns:r="http://schemas.openxmlformats.org/officeDocument/2006/relationships" xmlns:c="http://schemas.openxmlformats.org/drawingml/2006/chart" xmlns:a="http://schemas.openxmlformats.org/drawingml/2006/main" xmlns:dgm="http://schemas.openxmlformats.org/drawingml/2006/diagram" xmlns:dsp="http://schemas.microsoft.com/office/drawing/2008/diagram" xmlns:p="http://schemas.openxmlformats.org/presentationml/2006/main">
   <p:cSld>
     <p:spTree>
       <p:nvGrpSpPr>
@@ -1055,7 +1088,7 @@
             <a:spLocks noGrp="1" noRot="1" noChangeAspect="1" noTextEdit="1"/>
           </p:cNvSpPr>
           <p:nvPr>
-            <p:ph type="sldImg"/>
+            <p:ph type="sldImg" idx="0"/>
           </p:nvPr>
         </p:nvSpPr>
         <p:spPr/>
@@ -1078,6 +1111,10 @@
             <a:pPr lvl="0">
               <a:defRPr/>
             </a:pPr>
+            <a:r>
+              <a:rPr lang="ko-KR" altLang="en-US"/>
+              <a:t/>
+            </a:r>
             <a:endParaRPr lang="ko-KR" altLang="en-US"/>
           </a:p>
         </p:txBody>
@@ -1120,7 +1157,7 @@
 </file>
 
 <file path=ppt/notesSlides/notesSlide16.xml><?xml version="1.0" encoding="utf-8"?>
-<p:notes xmlns:a="http://schemas.openxmlformats.org/drawingml/2006/main" xmlns:r="http://schemas.openxmlformats.org/officeDocument/2006/relationships" xmlns:p="http://schemas.openxmlformats.org/presentationml/2006/main">
+<p:notes xmlns:r="http://schemas.openxmlformats.org/officeDocument/2006/relationships" xmlns:c="http://schemas.openxmlformats.org/drawingml/2006/chart" xmlns:a="http://schemas.openxmlformats.org/drawingml/2006/main" xmlns:dgm="http://schemas.openxmlformats.org/drawingml/2006/diagram" xmlns:dsp="http://schemas.microsoft.com/office/drawing/2008/diagram" xmlns:p="http://schemas.openxmlformats.org/presentationml/2006/main">
   <p:cSld>
     <p:spTree>
       <p:nvGrpSpPr>
@@ -1143,7 +1180,7 @@
             <a:spLocks noGrp="1" noRot="1" noChangeAspect="1" noTextEdit="1"/>
           </p:cNvSpPr>
           <p:nvPr>
-            <p:ph type="sldImg"/>
+            <p:ph type="sldImg" idx="0"/>
           </p:nvPr>
         </p:nvSpPr>
         <p:spPr/>
@@ -1166,6 +1203,10 @@
             <a:pPr lvl="0">
               <a:defRPr/>
             </a:pPr>
+            <a:r>
+              <a:rPr lang="ko-KR" altLang="en-US"/>
+              <a:t/>
+            </a:r>
             <a:endParaRPr lang="ko-KR" altLang="en-US"/>
           </a:p>
         </p:txBody>
@@ -1193,7 +1234,7 @@
               <a:pPr lvl="0">
                 <a:defRPr/>
               </a:pPr>
-              <a:t>16</a:t>
+              <a:t>17</a:t>
             </a:fld>
             <a:endParaRPr lang="en-US"/>
           </a:p>
@@ -1208,7 +1249,7 @@
 </file>
 
 <file path=ppt/notesSlides/notesSlide2.xml><?xml version="1.0" encoding="utf-8"?>
-<p:notes xmlns:a="http://schemas.openxmlformats.org/drawingml/2006/main" xmlns:r="http://schemas.openxmlformats.org/officeDocument/2006/relationships" xmlns:p="http://schemas.openxmlformats.org/presentationml/2006/main">
+<p:notes xmlns:r="http://schemas.openxmlformats.org/officeDocument/2006/relationships" xmlns:c="http://schemas.openxmlformats.org/drawingml/2006/chart" xmlns:a="http://schemas.openxmlformats.org/drawingml/2006/main" xmlns:dgm="http://schemas.openxmlformats.org/drawingml/2006/diagram" xmlns:dsp="http://schemas.microsoft.com/office/drawing/2008/diagram" xmlns:p="http://schemas.openxmlformats.org/presentationml/2006/main">
   <p:cSld>
     <p:spTree>
       <p:nvGrpSpPr>
@@ -1231,7 +1272,7 @@
             <a:spLocks noGrp="1" noRot="1" noChangeAspect="1" noTextEdit="1"/>
           </p:cNvSpPr>
           <p:nvPr>
-            <p:ph type="sldImg"/>
+            <p:ph type="sldImg" idx="0"/>
           </p:nvPr>
         </p:nvSpPr>
         <p:spPr/>
@@ -1254,6 +1295,10 @@
             <a:pPr lvl="0">
               <a:defRPr/>
             </a:pPr>
+            <a:r>
+              <a:rPr lang="ko-KR" altLang="en-US"/>
+              <a:t/>
+            </a:r>
             <a:endParaRPr lang="ko-KR" altLang="en-US"/>
           </a:p>
         </p:txBody>
@@ -1296,7 +1341,7 @@
 </file>
 
 <file path=ppt/notesSlides/notesSlide3.xml><?xml version="1.0" encoding="utf-8"?>
-<p:notes xmlns:a="http://schemas.openxmlformats.org/drawingml/2006/main" xmlns:r="http://schemas.openxmlformats.org/officeDocument/2006/relationships" xmlns:p="http://schemas.openxmlformats.org/presentationml/2006/main">
+<p:notes xmlns:r="http://schemas.openxmlformats.org/officeDocument/2006/relationships" xmlns:c="http://schemas.openxmlformats.org/drawingml/2006/chart" xmlns:a="http://schemas.openxmlformats.org/drawingml/2006/main" xmlns:dgm="http://schemas.openxmlformats.org/drawingml/2006/diagram" xmlns:dsp="http://schemas.microsoft.com/office/drawing/2008/diagram" xmlns:p="http://schemas.openxmlformats.org/presentationml/2006/main">
   <p:cSld>
     <p:spTree>
       <p:nvGrpSpPr>
@@ -1319,7 +1364,7 @@
             <a:spLocks noGrp="1" noRot="1" noChangeAspect="1" noTextEdit="1"/>
           </p:cNvSpPr>
           <p:nvPr>
-            <p:ph type="sldImg"/>
+            <p:ph type="sldImg" idx="0"/>
           </p:nvPr>
         </p:nvSpPr>
         <p:spPr/>
@@ -1342,6 +1387,10 @@
             <a:pPr lvl="0">
               <a:defRPr/>
             </a:pPr>
+            <a:r>
+              <a:rPr lang="ko-KR" altLang="en-US"/>
+              <a:t/>
+            </a:r>
             <a:endParaRPr lang="ko-KR" altLang="en-US"/>
           </a:p>
         </p:txBody>
@@ -1384,7 +1433,7 @@
 </file>
 
 <file path=ppt/notesSlides/notesSlide4.xml><?xml version="1.0" encoding="utf-8"?>
-<p:notes xmlns:a="http://schemas.openxmlformats.org/drawingml/2006/main" xmlns:r="http://schemas.openxmlformats.org/officeDocument/2006/relationships" xmlns:p="http://schemas.openxmlformats.org/presentationml/2006/main">
+<p:notes xmlns:r="http://schemas.openxmlformats.org/officeDocument/2006/relationships" xmlns:c="http://schemas.openxmlformats.org/drawingml/2006/chart" xmlns:a="http://schemas.openxmlformats.org/drawingml/2006/main" xmlns:dgm="http://schemas.openxmlformats.org/drawingml/2006/diagram" xmlns:dsp="http://schemas.microsoft.com/office/drawing/2008/diagram" xmlns:p="http://schemas.openxmlformats.org/presentationml/2006/main">
   <p:cSld>
     <p:spTree>
       <p:nvGrpSpPr>
@@ -1407,7 +1456,7 @@
             <a:spLocks noGrp="1" noRot="1" noChangeAspect="1" noTextEdit="1"/>
           </p:cNvSpPr>
           <p:nvPr>
-            <p:ph type="sldImg"/>
+            <p:ph type="sldImg" idx="0"/>
           </p:nvPr>
         </p:nvSpPr>
         <p:spPr/>
@@ -1430,6 +1479,10 @@
             <a:pPr lvl="0">
               <a:defRPr/>
             </a:pPr>
+            <a:r>
+              <a:rPr lang="ko-KR" altLang="en-US"/>
+              <a:t/>
+            </a:r>
             <a:endParaRPr lang="ko-KR" altLang="en-US"/>
           </a:p>
         </p:txBody>
@@ -1472,7 +1525,7 @@
 </file>
 
 <file path=ppt/notesSlides/notesSlide5.xml><?xml version="1.0" encoding="utf-8"?>
-<p:notes xmlns:a="http://schemas.openxmlformats.org/drawingml/2006/main" xmlns:r="http://schemas.openxmlformats.org/officeDocument/2006/relationships" xmlns:p="http://schemas.openxmlformats.org/presentationml/2006/main">
+<p:notes xmlns:r="http://schemas.openxmlformats.org/officeDocument/2006/relationships" xmlns:c="http://schemas.openxmlformats.org/drawingml/2006/chart" xmlns:a="http://schemas.openxmlformats.org/drawingml/2006/main" xmlns:dgm="http://schemas.openxmlformats.org/drawingml/2006/diagram" xmlns:dsp="http://schemas.microsoft.com/office/drawing/2008/diagram" xmlns:p="http://schemas.openxmlformats.org/presentationml/2006/main">
   <p:cSld>
     <p:spTree>
       <p:nvGrpSpPr>
@@ -1495,7 +1548,7 @@
             <a:spLocks noGrp="1" noRot="1" noChangeAspect="1" noTextEdit="1"/>
           </p:cNvSpPr>
           <p:nvPr>
-            <p:ph type="sldImg"/>
+            <p:ph type="sldImg" idx="0"/>
           </p:nvPr>
         </p:nvSpPr>
         <p:spPr/>
@@ -1518,6 +1571,10 @@
             <a:pPr lvl="0">
               <a:defRPr/>
             </a:pPr>
+            <a:r>
+              <a:rPr lang="ko-KR" altLang="en-US"/>
+              <a:t/>
+            </a:r>
             <a:endParaRPr lang="ko-KR" altLang="en-US"/>
           </a:p>
         </p:txBody>
@@ -1560,7 +1617,7 @@
 </file>
 
 <file path=ppt/notesSlides/notesSlide6.xml><?xml version="1.0" encoding="utf-8"?>
-<p:notes xmlns:a="http://schemas.openxmlformats.org/drawingml/2006/main" xmlns:r="http://schemas.openxmlformats.org/officeDocument/2006/relationships" xmlns:p="http://schemas.openxmlformats.org/presentationml/2006/main">
+<p:notes xmlns:r="http://schemas.openxmlformats.org/officeDocument/2006/relationships" xmlns:c="http://schemas.openxmlformats.org/drawingml/2006/chart" xmlns:a="http://schemas.openxmlformats.org/drawingml/2006/main" xmlns:dgm="http://schemas.openxmlformats.org/drawingml/2006/diagram" xmlns:dsp="http://schemas.microsoft.com/office/drawing/2008/diagram" xmlns:p="http://schemas.openxmlformats.org/presentationml/2006/main">
   <p:cSld>
     <p:spTree>
       <p:nvGrpSpPr>
@@ -1583,7 +1640,7 @@
             <a:spLocks noGrp="1" noRot="1" noChangeAspect="1" noTextEdit="1"/>
           </p:cNvSpPr>
           <p:nvPr>
-            <p:ph type="sldImg"/>
+            <p:ph type="sldImg" idx="0"/>
           </p:nvPr>
         </p:nvSpPr>
         <p:spPr/>
@@ -1606,6 +1663,10 @@
             <a:pPr lvl="0">
               <a:defRPr/>
             </a:pPr>
+            <a:r>
+              <a:rPr lang="ko-KR" altLang="en-US"/>
+              <a:t/>
+            </a:r>
             <a:endParaRPr lang="ko-KR" altLang="en-US"/>
           </a:p>
         </p:txBody>
@@ -1648,7 +1709,7 @@
 </file>
 
 <file path=ppt/notesSlides/notesSlide7.xml><?xml version="1.0" encoding="utf-8"?>
-<p:notes xmlns:a="http://schemas.openxmlformats.org/drawingml/2006/main" xmlns:r="http://schemas.openxmlformats.org/officeDocument/2006/relationships" xmlns:p="http://schemas.openxmlformats.org/presentationml/2006/main">
+<p:notes xmlns:r="http://schemas.openxmlformats.org/officeDocument/2006/relationships" xmlns:c="http://schemas.openxmlformats.org/drawingml/2006/chart" xmlns:a="http://schemas.openxmlformats.org/drawingml/2006/main" xmlns:dgm="http://schemas.openxmlformats.org/drawingml/2006/diagram" xmlns:dsp="http://schemas.microsoft.com/office/drawing/2008/diagram" xmlns:p="http://schemas.openxmlformats.org/presentationml/2006/main">
   <p:cSld>
     <p:spTree>
       <p:nvGrpSpPr>
@@ -1671,7 +1732,7 @@
             <a:spLocks noGrp="1" noRot="1" noChangeAspect="1" noTextEdit="1"/>
           </p:cNvSpPr>
           <p:nvPr>
-            <p:ph type="sldImg"/>
+            <p:ph type="sldImg" idx="0"/>
           </p:nvPr>
         </p:nvSpPr>
         <p:spPr/>
@@ -1694,6 +1755,10 @@
             <a:pPr lvl="0">
               <a:defRPr/>
             </a:pPr>
+            <a:r>
+              <a:rPr lang="ko-KR" altLang="en-US"/>
+              <a:t/>
+            </a:r>
             <a:endParaRPr lang="ko-KR" altLang="en-US"/>
           </a:p>
         </p:txBody>
@@ -1736,7 +1801,7 @@
 </file>
 
 <file path=ppt/notesSlides/notesSlide8.xml><?xml version="1.0" encoding="utf-8"?>
-<p:notes xmlns:a="http://schemas.openxmlformats.org/drawingml/2006/main" xmlns:r="http://schemas.openxmlformats.org/officeDocument/2006/relationships" xmlns:p="http://schemas.openxmlformats.org/presentationml/2006/main">
+<p:notes xmlns:r="http://schemas.openxmlformats.org/officeDocument/2006/relationships" xmlns:c="http://schemas.openxmlformats.org/drawingml/2006/chart" xmlns:a="http://schemas.openxmlformats.org/drawingml/2006/main" xmlns:dgm="http://schemas.openxmlformats.org/drawingml/2006/diagram" xmlns:dsp="http://schemas.microsoft.com/office/drawing/2008/diagram" xmlns:p="http://schemas.openxmlformats.org/presentationml/2006/main">
   <p:cSld>
     <p:spTree>
       <p:nvGrpSpPr>
@@ -1759,7 +1824,7 @@
             <a:spLocks noGrp="1" noRot="1" noChangeAspect="1" noTextEdit="1"/>
           </p:cNvSpPr>
           <p:nvPr>
-            <p:ph type="sldImg"/>
+            <p:ph type="sldImg" idx="0"/>
           </p:nvPr>
         </p:nvSpPr>
         <p:spPr/>
@@ -1782,6 +1847,10 @@
             <a:pPr lvl="0">
               <a:defRPr/>
             </a:pPr>
+            <a:r>
+              <a:rPr lang="ko-KR" altLang="en-US"/>
+              <a:t/>
+            </a:r>
             <a:endParaRPr lang="ko-KR" altLang="en-US"/>
           </a:p>
         </p:txBody>
@@ -1824,7 +1893,7 @@
 </file>
 
 <file path=ppt/notesSlides/notesSlide9.xml><?xml version="1.0" encoding="utf-8"?>
-<p:notes xmlns:a="http://schemas.openxmlformats.org/drawingml/2006/main" xmlns:r="http://schemas.openxmlformats.org/officeDocument/2006/relationships" xmlns:p="http://schemas.openxmlformats.org/presentationml/2006/main">
+<p:notes xmlns:r="http://schemas.openxmlformats.org/officeDocument/2006/relationships" xmlns:c="http://schemas.openxmlformats.org/drawingml/2006/chart" xmlns:a="http://schemas.openxmlformats.org/drawingml/2006/main" xmlns:dgm="http://schemas.openxmlformats.org/drawingml/2006/diagram" xmlns:dsp="http://schemas.microsoft.com/office/drawing/2008/diagram" xmlns:p="http://schemas.openxmlformats.org/presentationml/2006/main">
   <p:cSld>
     <p:spTree>
       <p:nvGrpSpPr>
@@ -1847,7 +1916,7 @@
             <a:spLocks noGrp="1" noRot="1" noChangeAspect="1" noTextEdit="1"/>
           </p:cNvSpPr>
           <p:nvPr>
-            <p:ph type="sldImg"/>
+            <p:ph type="sldImg" idx="0"/>
           </p:nvPr>
         </p:nvSpPr>
         <p:spPr/>
@@ -1870,6 +1939,10 @@
             <a:pPr lvl="0">
               <a:defRPr/>
             </a:pPr>
+            <a:r>
+              <a:rPr lang="ko-KR" altLang="en-US"/>
+              <a:t/>
+            </a:r>
             <a:endParaRPr lang="ko-KR" altLang="en-US"/>
           </a:p>
         </p:txBody>
@@ -7845,6 +7918,215 @@
 </file>
 
 <file path=ppt/slides/slide16.xml><?xml version="1.0" encoding="utf-8"?>
+<p:sld xmlns:r="http://schemas.openxmlformats.org/officeDocument/2006/relationships" xmlns:c="http://schemas.openxmlformats.org/drawingml/2006/chart" xmlns:a="http://schemas.openxmlformats.org/drawingml/2006/main" xmlns:dgm="http://schemas.openxmlformats.org/drawingml/2006/diagram" xmlns:dsp="http://schemas.microsoft.com/office/drawing/2008/diagram" xmlns:p="http://schemas.openxmlformats.org/presentationml/2006/main">
+  <p:cSld>
+    <p:spTree>
+      <p:nvGrpSpPr>
+        <p:cNvPr id="1" name=""/>
+        <p:cNvGrpSpPr/>
+        <p:nvPr/>
+      </p:nvGrpSpPr>
+      <p:grpSpPr>
+        <a:xfrm>
+          <a:off x="0" y="0"/>
+          <a:ext cx="0" cy="0"/>
+          <a:chOff x="0" y="0"/>
+          <a:chExt cx="0" cy="0"/>
+        </a:xfrm>
+      </p:grpSpPr>
+      <p:sp>
+        <p:nvSpPr>
+          <p:cNvPr id="2" name="Text 1"/>
+          <p:cNvSpPr/>
+          <p:nvPr/>
+        </p:nvSpPr>
+        <p:spPr>
+          <a:xfrm>
+            <a:off x="566928" y="713232"/>
+            <a:ext cx="10515600" cy="658368"/>
+          </a:xfrm>
+          <a:prstGeom prst="rect">
+            <a:avLst/>
+          </a:prstGeom>
+          <a:noFill/>
+          <a:ln/>
+        </p:spPr>
+        <p:txBody>
+          <a:bodyPr wrap="square" lIns="0" tIns="0" rIns="0" bIns="0" anchor="ctr"/>
+          <a:p>
+            <a:pPr marL="0" indent="0" algn="l" defTabSz="914400" rtl="0" eaLnBrk="1" latinLnBrk="0" hangingPunct="1">
+              <a:lnSpc>
+                <a:spcPct val="100000"/>
+              </a:lnSpc>
+              <a:spcBef>
+                <a:spcPct val="0"/>
+              </a:spcBef>
+              <a:spcAft>
+                <a:spcPts val="0"/>
+              </a:spcAft>
+              <a:buNone/>
+              <a:defRPr/>
+            </a:pPr>
+            <a:r>
+              <a:rPr xmlns:mc="http://schemas.openxmlformats.org/markup-compatibility/2006" xmlns:hp="http://schemas.haansoft.com/office/presentation/8.0" kumimoji="0" lang="en-US" altLang="ko-KR" sz="2900" b="1" i="0" u="none" strike="noStrike" kern="1200" cap="none" spc="0" normalizeH="0" baseline="0" mc:Ignorable="hp" hp:hslEmbossed="0">
+                <a:solidFill>
+                  <a:srgbClr val="1f2637"/>
+                </a:solidFill>
+                <a:latin typeface="맑은 고딕"/>
+                <a:ea typeface="맑은 고딕"/>
+                <a:cs typeface="맑은 고딕"/>
+              </a:rPr>
+              <a:t>PulseCity</a:t>
+            </a:r>
+            <a:endParaRPr xmlns:mc="http://schemas.openxmlformats.org/markup-compatibility/2006" xmlns:hp="http://schemas.haansoft.com/office/presentation/8.0" kumimoji="0" lang="en-US" altLang="ko-KR" sz="2900" b="1" i="0" u="none" strike="noStrike" kern="1200" cap="none" spc="0" normalizeH="0" baseline="0" mc:Ignorable="hp" hp:hslEmbossed="0">
+              <a:solidFill>
+                <a:srgbClr val="1f2637"/>
+              </a:solidFill>
+              <a:latin typeface="맑은 고딕"/>
+              <a:ea typeface="맑은 고딕"/>
+              <a:cs typeface="맑은 고딕"/>
+            </a:endParaRPr>
+          </a:p>
+        </p:txBody>
+      </p:sp>
+      <p:sp>
+        <p:nvSpPr>
+          <p:cNvPr id="3" name="Text 0"/>
+          <p:cNvSpPr/>
+          <p:nvPr/>
+        </p:nvSpPr>
+        <p:spPr>
+          <a:xfrm>
+            <a:off x="566928" y="457200"/>
+            <a:ext cx="7315200" cy="274320"/>
+          </a:xfrm>
+          <a:prstGeom prst="rect">
+            <a:avLst/>
+          </a:prstGeom>
+          <a:noFill/>
+          <a:ln/>
+        </p:spPr>
+        <p:txBody>
+          <a:bodyPr wrap="square" lIns="0" tIns="0" rIns="0" bIns="0" anchor="ctr"/>
+          <a:p>
+            <a:pPr marL="0" indent="0" algn="l" defTabSz="914400" rtl="0" eaLnBrk="1" latinLnBrk="0" hangingPunct="1">
+              <a:lnSpc>
+                <a:spcPct val="100000"/>
+              </a:lnSpc>
+              <a:spcBef>
+                <a:spcPct val="0"/>
+              </a:spcBef>
+              <a:spcAft>
+                <a:spcPts val="0"/>
+              </a:spcAft>
+              <a:buNone/>
+              <a:defRPr/>
+            </a:pPr>
+            <a:r>
+              <a:rPr xmlns:mc="http://schemas.openxmlformats.org/markup-compatibility/2006" xmlns:hp="http://schemas.haansoft.com/office/presentation/8.0" kumimoji="0" lang="en-US" sz="1200" b="1" i="0" u="none" strike="noStrike" kern="0" cap="none" spc="200" normalizeH="0" baseline="0" mc:Ignorable="hp" hp:hslEmbossed="0">
+                <a:solidFill>
+                  <a:srgbClr val="c8622e"/>
+                </a:solidFill>
+                <a:latin typeface="맑은 고딕"/>
+                <a:ea typeface="맑은 고딕"/>
+                <a:cs typeface="맑은 고딕"/>
+              </a:rPr>
+              <a:t>02  PROJECT — </a:t>
+            </a:r>
+            <a:r>
+              <a:rPr xmlns:mc="http://schemas.openxmlformats.org/markup-compatibility/2006" xmlns:hp="http://schemas.haansoft.com/office/presentation/8.0" kumimoji="0" lang="en-US" altLang="ko-KR" sz="1200" b="1" i="0" u="none" strike="noStrike" kern="0" cap="none" spc="200" normalizeH="0" baseline="0" mc:Ignorable="hp" hp:hslEmbossed="0">
+                <a:solidFill>
+                  <a:srgbClr val="c8622e"/>
+                </a:solidFill>
+                <a:latin typeface="맑은 고딕"/>
+                <a:ea typeface="맑은 고딕"/>
+                <a:cs typeface="맑은 고딕"/>
+              </a:rPr>
+              <a:t>pulsecity</a:t>
+            </a:r>
+            <a:endParaRPr xmlns:mc="http://schemas.openxmlformats.org/markup-compatibility/2006" xmlns:hp="http://schemas.haansoft.com/office/presentation/8.0" kumimoji="0" lang="en-US" altLang="ko-KR" sz="1200" b="1" i="0" u="none" strike="noStrike" kern="0" cap="none" spc="200" normalizeH="0" baseline="0" mc:Ignorable="hp" hp:hslEmbossed="0">
+              <a:solidFill>
+                <a:srgbClr val="c8622e"/>
+              </a:solidFill>
+              <a:latin typeface="맑은 고딕"/>
+              <a:ea typeface="맑은 고딕"/>
+              <a:cs typeface="맑은 고딕"/>
+            </a:endParaRPr>
+          </a:p>
+        </p:txBody>
+      </p:sp>
+      <p:sp>
+        <p:nvSpPr>
+          <p:cNvPr id="4" name="Text 2"/>
+          <p:cNvSpPr/>
+          <p:nvPr/>
+        </p:nvSpPr>
+        <p:spPr>
+          <a:xfrm>
+            <a:off x="566928" y="1481328"/>
+            <a:ext cx="11057839" cy="457200"/>
+          </a:xfrm>
+          <a:prstGeom prst="rect">
+            <a:avLst/>
+          </a:prstGeom>
+          <a:noFill/>
+          <a:ln/>
+        </p:spPr>
+        <p:txBody>
+          <a:bodyPr wrap="square" lIns="0" tIns="0" rIns="0" bIns="0" anchor="ctr"/>
+          <a:p>
+            <a:pPr marL="0" indent="0" algn="l" defTabSz="914400" rtl="0" eaLnBrk="1" latinLnBrk="0" hangingPunct="1">
+              <a:lnSpc>
+                <a:spcPct val="100000"/>
+              </a:lnSpc>
+              <a:spcBef>
+                <a:spcPct val="0"/>
+              </a:spcBef>
+              <a:spcAft>
+                <a:spcPts val="0"/>
+              </a:spcAft>
+              <a:buNone/>
+              <a:defRPr/>
+            </a:pPr>
+            <a:r>
+              <a:rPr xmlns:mc="http://schemas.openxmlformats.org/markup-compatibility/2006" xmlns:hp="http://schemas.haansoft.com/office/presentation/8.0" kumimoji="0" lang="ko-KR" altLang="en-US" sz="1350" b="0" i="0" u="none" strike="noStrike" kern="1200" cap="none" spc="0" normalizeH="0" baseline="0" mc:Ignorable="hp" hp:hslEmbossed="0">
+                <a:solidFill>
+                  <a:srgbClr val="24324f"/>
+                </a:solidFill>
+                <a:latin typeface="맑은 고딕"/>
+                <a:ea typeface="맑은 고딕"/>
+                <a:cs typeface="맑은 고딕"/>
+              </a:rPr>
+              <a:t>근미래의 넓은 도시에서 모험하며 의뢰를 해결하고 던전을 클리어하는 게임</a:t>
+            </a:r>
+            <a:endParaRPr xmlns:mc="http://schemas.openxmlformats.org/markup-compatibility/2006" xmlns:hp="http://schemas.haansoft.com/office/presentation/8.0" kumimoji="0" lang="ko-KR" altLang="en-US" sz="1350" b="0" i="0" u="none" strike="noStrike" kern="1200" cap="none" spc="0" normalizeH="0" baseline="0" mc:Ignorable="hp" hp:hslEmbossed="0">
+              <a:solidFill>
+                <a:srgbClr val="24324f"/>
+              </a:solidFill>
+              <a:latin typeface="맑은 고딕"/>
+              <a:ea typeface="맑은 고딕"/>
+              <a:cs typeface="맑은 고딕"/>
+            </a:endParaRPr>
+          </a:p>
+        </p:txBody>
+      </p:sp>
+    </p:spTree>
+  </p:cSld>
+  <p:clrMapOvr>
+    <a:masterClrMapping/>
+  </p:clrMapOvr>
+  <mc:AlternateContent xmlns:mc="http://schemas.openxmlformats.org/markup-compatibility/2006">
+    <mc:Choice xmlns:p14="http://schemas.microsoft.com/office/powerpoint/2010/main" Requires="p14">
+      <p:transition xmlns:mc="http://schemas.openxmlformats.org/markup-compatibility/2006" xmlns:p14="http://schemas.microsoft.com/office/powerpoint/2010/main" mc:Ignorable="p14" p14:dur="500"/>
+    </mc:Choice>
+    <mc:Fallback>
+      <p:transition/>
+    </mc:Fallback>
+  </mc:AlternateContent>
+</p:sld>
+</file>
+
+<file path=ppt/slides/slide17.xml><?xml version="1.0" encoding="utf-8"?>
 <p:sld xmlns:a="http://schemas.openxmlformats.org/drawingml/2006/main" xmlns:r="http://schemas.openxmlformats.org/officeDocument/2006/relationships" xmlns:p="http://schemas.openxmlformats.org/presentationml/2006/main">
   <p:cSld name="Slide 20">
     <p:bg>
@@ -8979,14 +9261,13 @@
 </file>
 
 <file path=ppt/slides/slide3.xml><?xml version="1.0" encoding="utf-8"?>
-<p:sld xmlns:a="http://schemas.openxmlformats.org/drawingml/2006/main" xmlns:r="http://schemas.openxmlformats.org/officeDocument/2006/relationships" xmlns:p="http://schemas.openxmlformats.org/presentationml/2006/main">
+<p:sld xmlns:r="http://schemas.openxmlformats.org/officeDocument/2006/relationships" xmlns:c="http://schemas.openxmlformats.org/drawingml/2006/chart" xmlns:a="http://schemas.openxmlformats.org/drawingml/2006/main" xmlns:dgm="http://schemas.openxmlformats.org/drawingml/2006/diagram" xmlns:dsp="http://schemas.microsoft.com/office/drawing/2008/diagram" xmlns:p="http://schemas.openxmlformats.org/presentationml/2006/main">
   <p:cSld name="Slide 3">
     <p:bg>
-      <p:bgPr>
+      <p:bgPr shadeToTitle="0">
         <a:solidFill>
-          <a:srgbClr val="FFFFFF"/>
+          <a:srgbClr val="ffffff"/>
         </a:solidFill>
-        <a:effectLst/>
       </p:bgPr>
     </p:bg>
     <p:spTree>
@@ -9031,7 +9312,7 @@
             <a:r>
               <a:rPr lang="en-US" sz="1200" b="1" kern="0" spc="200">
                 <a:solidFill>
-                  <a:srgbClr val="C8622E"/>
+                  <a:srgbClr val="c8622e"/>
                 </a:solidFill>
                 <a:latin typeface="맑은 고딕"/>
                 <a:ea typeface="맑은 고딕"/>
@@ -9071,7 +9352,7 @@
             <a:r>
               <a:rPr lang="en-US" sz="2900" b="1">
                 <a:solidFill>
-                  <a:srgbClr val="1F2637"/>
+                  <a:srgbClr val="1f2637"/>
                 </a:solidFill>
                 <a:latin typeface="맑은 고딕"/>
                 <a:ea typeface="맑은 고딕"/>
@@ -9100,11 +9381,11 @@
             </a:avLst>
           </a:prstGeom>
           <a:solidFill>
-            <a:srgbClr val="16223B"/>
+            <a:srgbClr val="16223b"/>
           </a:solidFill>
           <a:ln w="12700">
             <a:solidFill>
-              <a:srgbClr val="D9DEE6"/>
+              <a:srgbClr val="d9dee6"/>
             </a:solidFill>
             <a:prstDash val="solid"/>
           </a:ln>
@@ -9155,7 +9436,7 @@
             <a:r>
               <a:rPr lang="en-US" sz="2600" b="1">
                 <a:solidFill>
-                  <a:srgbClr val="FFFFFF"/>
+                  <a:srgbClr val="ffffff"/>
                 </a:solidFill>
                 <a:latin typeface="맑은 고딕"/>
                 <a:ea typeface="맑은 고딕"/>
@@ -9195,7 +9476,7 @@
             <a:r>
               <a:rPr lang="en-US" sz="1200">
                 <a:solidFill>
-                  <a:srgbClr val="E0A15A"/>
+                  <a:srgbClr val="e0a15a"/>
                 </a:solidFill>
                 <a:latin typeface="Arial"/>
                 <a:ea typeface="Arial"/>
@@ -9234,7 +9515,7 @@
             </a:pPr>
             <a:endParaRPr lang="en-US" sz="1350" i="1">
               <a:solidFill>
-                <a:srgbClr val="EAF0FA"/>
+                <a:srgbClr val="eaf0fa"/>
               </a:solidFill>
               <a:latin typeface="맑은 고딕"/>
               <a:ea typeface="맑은 고딕"/>
@@ -9274,7 +9555,7 @@
             <a:r>
               <a:rPr lang="en-US" sz="1200" b="1">
                 <a:solidFill>
-                  <a:srgbClr val="E0A15A"/>
+                  <a:srgbClr val="e0a15a"/>
                 </a:solidFill>
                 <a:latin typeface="맑은 고딕"/>
                 <a:ea typeface="맑은 고딕"/>
@@ -9282,6 +9563,14 @@
               </a:rPr>
               <a:t>학력</a:t>
             </a:r>
+            <a:endParaRPr lang="en-US" sz="1200" b="1">
+              <a:solidFill>
+                <a:srgbClr val="e0a15a"/>
+              </a:solidFill>
+              <a:latin typeface="맑은 고딕"/>
+              <a:ea typeface="맑은 고딕"/>
+              <a:cs typeface="맑은 고딕"/>
+            </a:endParaRPr>
           </a:p>
           <a:p>
             <a:pPr marL="0" indent="0">
@@ -9294,7 +9583,7 @@
             <a:r>
               <a:rPr lang="en-US" sz="1200">
                 <a:solidFill>
-                  <a:srgbClr val="FFFFFF"/>
+                  <a:srgbClr val="ffffff"/>
                 </a:solidFill>
                 <a:latin typeface="맑은 고딕"/>
                 <a:ea typeface="맑은 고딕"/>
@@ -9302,6 +9591,14 @@
               </a:rPr>
               <a:t>한국공학대학교 게임공학과</a:t>
             </a:r>
+            <a:endParaRPr lang="en-US" sz="1200">
+              <a:solidFill>
+                <a:srgbClr val="ffffff"/>
+              </a:solidFill>
+              <a:latin typeface="맑은 고딕"/>
+              <a:ea typeface="맑은 고딕"/>
+              <a:cs typeface="맑은 고딕"/>
+            </a:endParaRPr>
           </a:p>
           <a:p>
             <a:pPr marL="0" indent="0">
@@ -9314,7 +9611,7 @@
             <a:r>
               <a:rPr lang="en-US" sz="1100">
                 <a:solidFill>
-                  <a:srgbClr val="EAF0FA"/>
+                  <a:srgbClr val="eaf0fa"/>
                 </a:solidFill>
                 <a:latin typeface="맑은 고딕"/>
                 <a:ea typeface="맑은 고딕"/>
@@ -9322,6 +9619,14 @@
               </a:rPr>
               <a:t>2026.02 졸업예정</a:t>
             </a:r>
+            <a:endParaRPr lang="en-US" sz="1100">
+              <a:solidFill>
+                <a:srgbClr val="eaf0fa"/>
+              </a:solidFill>
+              <a:latin typeface="맑은 고딕"/>
+              <a:ea typeface="맑은 고딕"/>
+              <a:cs typeface="맑은 고딕"/>
+            </a:endParaRPr>
           </a:p>
           <a:p>
             <a:pPr marL="0" indent="0">
@@ -9342,6 +9647,14 @@
               </a:rPr>
               <a:t> </a:t>
             </a:r>
+            <a:endParaRPr lang="en-US" sz="600">
+              <a:solidFill>
+                <a:srgbClr val="000000"/>
+              </a:solidFill>
+              <a:latin typeface="맑은 고딕"/>
+              <a:ea typeface="맑은 고딕"/>
+              <a:cs typeface="맑은 고딕"/>
+            </a:endParaRPr>
           </a:p>
           <a:p>
             <a:pPr marL="0" indent="0">
@@ -9354,7 +9667,7 @@
             <a:r>
               <a:rPr lang="en-US" sz="1200" b="1">
                 <a:solidFill>
-                  <a:srgbClr val="E0A15A"/>
+                  <a:srgbClr val="e0a15a"/>
                 </a:solidFill>
                 <a:latin typeface="맑은 고딕"/>
                 <a:ea typeface="맑은 고딕"/>
@@ -9362,6 +9675,14 @@
               </a:rPr>
               <a:t>연락처</a:t>
             </a:r>
+            <a:endParaRPr lang="en-US" sz="1200" b="1">
+              <a:solidFill>
+                <a:srgbClr val="e0a15a"/>
+              </a:solidFill>
+              <a:latin typeface="맑은 고딕"/>
+              <a:ea typeface="맑은 고딕"/>
+              <a:cs typeface="맑은 고딕"/>
+            </a:endParaRPr>
           </a:p>
           <a:p>
             <a:pPr marL="0" indent="0">
@@ -9374,7 +9695,7 @@
             <a:r>
               <a:rPr lang="en-US" sz="1200">
                 <a:solidFill>
-                  <a:srgbClr val="FFFFFF"/>
+                  <a:srgbClr val="ffffff"/>
                 </a:solidFill>
                 <a:latin typeface="맑은 고딕"/>
                 <a:ea typeface="맑은 고딕"/>
@@ -9382,6 +9703,14 @@
               </a:rPr>
               <a:t>010-7770-2108</a:t>
             </a:r>
+            <a:endParaRPr lang="en-US" sz="1200">
+              <a:solidFill>
+                <a:srgbClr val="ffffff"/>
+              </a:solidFill>
+              <a:latin typeface="맑은 고딕"/>
+              <a:ea typeface="맑은 고딕"/>
+              <a:cs typeface="맑은 고딕"/>
+            </a:endParaRPr>
           </a:p>
           <a:p>
             <a:pPr marL="0" indent="0">
@@ -9394,7 +9723,7 @@
             <a:r>
               <a:rPr lang="en-US" altLang="ko-KR" sz="1150">
                 <a:solidFill>
-                  <a:srgbClr val="FFFFFF"/>
+                  <a:srgbClr val="ffffff"/>
                 </a:solidFill>
                 <a:latin typeface="맑은 고딕"/>
                 <a:ea typeface="맑은 고딕"/>
@@ -9405,7 +9734,7 @@
             <a:r>
               <a:rPr lang="en-US" sz="1150">
                 <a:solidFill>
-                  <a:srgbClr val="FFFFFF"/>
+                  <a:srgbClr val="ffffff"/>
                 </a:solidFill>
                 <a:latin typeface="맑은 고딕"/>
                 <a:ea typeface="맑은 고딕"/>
@@ -9413,6 +9742,14 @@
               </a:rPr>
               <a:t>@naver.com</a:t>
             </a:r>
+            <a:endParaRPr lang="en-US" sz="1150">
+              <a:solidFill>
+                <a:srgbClr val="ffffff"/>
+              </a:solidFill>
+              <a:latin typeface="맑은 고딕"/>
+              <a:ea typeface="맑은 고딕"/>
+              <a:cs typeface="맑은 고딕"/>
+            </a:endParaRPr>
           </a:p>
         </p:txBody>
       </p:sp>
@@ -9444,7 +9781,7 @@
             <a:r>
               <a:rPr lang="en-US" sz="1600" b="1">
                 <a:solidFill>
-                  <a:srgbClr val="1F2637"/>
+                  <a:srgbClr val="1f2637"/>
                 </a:solidFill>
                 <a:latin typeface="맑은 고딕"/>
                 <a:ea typeface="맑은 고딕"/>
@@ -9473,11 +9810,11 @@
             </a:avLst>
           </a:prstGeom>
           <a:solidFill>
-            <a:srgbClr val="F4F6FA"/>
+            <a:srgbClr val="f4f6fa"/>
           </a:solidFill>
           <a:ln w="12700">
             <a:solidFill>
-              <a:srgbClr val="D9DEE6"/>
+              <a:srgbClr val="d9dee6"/>
             </a:solidFill>
             <a:prstDash val="solid"/>
           </a:ln>
@@ -9521,7 +9858,7 @@
             <a:r>
               <a:rPr lang="en-US" sz="1250" b="1">
                 <a:solidFill>
-                  <a:srgbClr val="C8622E"/>
+                  <a:srgbClr val="c8622e"/>
                 </a:solidFill>
                 <a:latin typeface="맑은 고딕"/>
                 <a:ea typeface="맑은 고딕"/>
@@ -9561,7 +9898,7 @@
             <a:r>
               <a:rPr lang="en-US" sz="1250">
                 <a:solidFill>
-                  <a:srgbClr val="1F2637"/>
+                  <a:srgbClr val="1f2637"/>
                 </a:solidFill>
                 <a:latin typeface="맑은 고딕"/>
                 <a:ea typeface="맑은 고딕"/>
@@ -9572,7 +9909,7 @@
             <a:r>
               <a:rPr lang="en-US" altLang="ko-KR" sz="1250">
                 <a:solidFill>
-                  <a:srgbClr val="1F2637"/>
+                  <a:srgbClr val="1f2637"/>
                 </a:solidFill>
                 <a:latin typeface="맑은 고딕"/>
                 <a:ea typeface="맑은 고딕"/>
@@ -9583,7 +9920,7 @@
             <a:r>
               <a:rPr lang="en-US" sz="1250">
                 <a:solidFill>
-                  <a:srgbClr val="1F2637"/>
+                  <a:srgbClr val="1f2637"/>
                 </a:solidFill>
                 <a:latin typeface="맑은 고딕"/>
                 <a:ea typeface="맑은 고딕"/>
@@ -9591,6 +9928,14 @@
               </a:rPr>
               <a:t>플레이어 경험 설계</a:t>
             </a:r>
+            <a:endParaRPr lang="en-US" sz="1250">
+              <a:solidFill>
+                <a:srgbClr val="1f2637"/>
+              </a:solidFill>
+              <a:latin typeface="맑은 고딕"/>
+              <a:ea typeface="맑은 고딕"/>
+              <a:cs typeface="맑은 고딕"/>
+            </a:endParaRPr>
           </a:p>
         </p:txBody>
       </p:sp>
@@ -9611,11 +9956,11 @@
             </a:avLst>
           </a:prstGeom>
           <a:solidFill>
-            <a:srgbClr val="F4F6FA"/>
+            <a:srgbClr val="f4f6fa"/>
           </a:solidFill>
           <a:ln w="12700">
             <a:solidFill>
-              <a:srgbClr val="D9DEE6"/>
+              <a:srgbClr val="d9dee6"/>
             </a:solidFill>
             <a:prstDash val="solid"/>
           </a:ln>
@@ -9659,7 +10004,7 @@
             <a:r>
               <a:rPr lang="en-US" sz="1250" b="1">
                 <a:solidFill>
-                  <a:srgbClr val="C8622E"/>
+                  <a:srgbClr val="c8622e"/>
                 </a:solidFill>
                 <a:latin typeface="맑은 고딕"/>
                 <a:ea typeface="맑은 고딕"/>
@@ -9699,7 +10044,7 @@
             <a:r>
               <a:rPr lang="en-US" sz="1250">
                 <a:solidFill>
-                  <a:srgbClr val="1F2637"/>
+                  <a:srgbClr val="1f2637"/>
                 </a:solidFill>
                 <a:latin typeface="맑은 고딕"/>
                 <a:ea typeface="맑은 고딕"/>
@@ -9728,11 +10073,11 @@
             </a:avLst>
           </a:prstGeom>
           <a:solidFill>
-            <a:srgbClr val="F4F6FA"/>
+            <a:srgbClr val="f4f6fa"/>
           </a:solidFill>
           <a:ln w="12700">
             <a:solidFill>
-              <a:srgbClr val="D9DEE6"/>
+              <a:srgbClr val="d9dee6"/>
             </a:solidFill>
             <a:prstDash val="solid"/>
           </a:ln>
@@ -9776,7 +10121,7 @@
             <a:r>
               <a:rPr lang="en-US" sz="1250" b="1">
                 <a:solidFill>
-                  <a:srgbClr val="C8622E"/>
+                  <a:srgbClr val="c8622e"/>
                 </a:solidFill>
                 <a:latin typeface="맑은 고딕"/>
                 <a:ea typeface="맑은 고딕"/>
@@ -9816,7 +10161,7 @@
             <a:r>
               <a:rPr lang="en-US" sz="1250">
                 <a:solidFill>
-                  <a:srgbClr val="1F2637"/>
+                  <a:srgbClr val="1f2637"/>
                 </a:solidFill>
                 <a:latin typeface="맑은 고딕"/>
                 <a:ea typeface="맑은 고딕"/>
@@ -9824,6 +10169,14 @@
               </a:rPr>
               <a:t>C++ · 게임 서버(Zone 분산·프로토콜 설계)</a:t>
             </a:r>
+            <a:endParaRPr lang="en-US" sz="1250">
+              <a:solidFill>
+                <a:srgbClr val="1f2637"/>
+              </a:solidFill>
+              <a:latin typeface="맑은 고딕"/>
+              <a:ea typeface="맑은 고딕"/>
+              <a:cs typeface="맑은 고딕"/>
+            </a:endParaRPr>
           </a:p>
         </p:txBody>
       </p:sp>
@@ -9844,11 +10197,11 @@
             </a:avLst>
           </a:prstGeom>
           <a:solidFill>
-            <a:srgbClr val="F4F6FA"/>
+            <a:srgbClr val="f4f6fa"/>
           </a:solidFill>
           <a:ln w="12700">
             <a:solidFill>
-              <a:srgbClr val="D9DEE6"/>
+              <a:srgbClr val="d9dee6"/>
             </a:solidFill>
             <a:prstDash val="solid"/>
           </a:ln>
@@ -9892,7 +10245,7 @@
             <a:r>
               <a:rPr lang="en-US" sz="1250" b="1">
                 <a:solidFill>
-                  <a:srgbClr val="C8622E"/>
+                  <a:srgbClr val="c8622e"/>
                 </a:solidFill>
                 <a:latin typeface="맑은 고딕"/>
                 <a:ea typeface="맑은 고딕"/>
@@ -9930,9 +10283,9 @@
               <a:defRPr/>
             </a:pPr>
             <a:r>
-              <a:rPr lang="en-US" sz="1250" dirty="0">
-                <a:solidFill>
-                  <a:srgbClr val="1F2637"/>
+              <a:rPr lang="en-US" sz="1250">
+                <a:solidFill>
+                  <a:srgbClr val="1f2637"/>
                 </a:solidFill>
                 <a:latin typeface="맑은 고딕"/>
                 <a:ea typeface="맑은 고딕"/>
@@ -9940,7 +10293,7 @@
               </a:rPr>
               <a:t>Git</a:t>
             </a:r>
-            <a:endParaRPr lang="en-US" sz="1250" dirty="0"/>
+            <a:endParaRPr lang="en-US" sz="1250"/>
           </a:p>
         </p:txBody>
       </p:sp>
@@ -9972,7 +10325,7 @@
             <a:r>
               <a:rPr lang="en-US" sz="1600" b="1">
                 <a:solidFill>
-                  <a:srgbClr val="1F2637"/>
+                  <a:srgbClr val="1f2637"/>
                 </a:solidFill>
                 <a:latin typeface="맑은 고딕"/>
                 <a:ea typeface="맑은 고딕"/>
@@ -10015,7 +10368,7 @@
             <a:r>
               <a:rPr lang="en-US" sz="1250" b="1">
                 <a:solidFill>
-                  <a:srgbClr val="1F2637"/>
+                  <a:srgbClr val="1f2637"/>
                 </a:solidFill>
                 <a:latin typeface="맑은 고딕"/>
                 <a:ea typeface="맑은 고딕"/>
@@ -10026,7 +10379,7 @@
             <a:r>
               <a:rPr lang="en-US" sz="1250">
                 <a:solidFill>
-                  <a:srgbClr val="6C7686"/>
+                  <a:srgbClr val="6c7686"/>
                 </a:solidFill>
                 <a:latin typeface="맑은 고딕"/>
                 <a:ea typeface="맑은 고딕"/>
@@ -10034,6 +10387,14 @@
               </a:rPr>
               <a:t>DX12 온라인 RPG · 기획 + 서버 담당 (졸업작품)</a:t>
             </a:r>
+            <a:endParaRPr lang="en-US" sz="1250">
+              <a:solidFill>
+                <a:srgbClr val="6c7686"/>
+              </a:solidFill>
+              <a:latin typeface="맑은 고딕"/>
+              <a:ea typeface="맑은 고딕"/>
+              <a:cs typeface="맑은 고딕"/>
+            </a:endParaRPr>
           </a:p>
           <a:p>
             <a:pPr marL="0" indent="0">
@@ -10046,7 +10407,7 @@
             <a:r>
               <a:rPr lang="en-US" sz="1250" b="1">
                 <a:solidFill>
-                  <a:srgbClr val="1F2637"/>
+                  <a:srgbClr val="1f2637"/>
                 </a:solidFill>
                 <a:latin typeface="맑은 고딕"/>
                 <a:ea typeface="맑은 고딕"/>
@@ -10057,7 +10418,7 @@
             <a:r>
               <a:rPr lang="en-US" sz="1250">
                 <a:solidFill>
-                  <a:srgbClr val="6C7686"/>
+                  <a:srgbClr val="6c7686"/>
                 </a:solidFill>
                 <a:latin typeface="맑은 고딕"/>
                 <a:ea typeface="맑은 고딕"/>
@@ -10065,6 +10426,14 @@
               </a:rPr>
               <a:t>소울라이크×턴제 전투 시스템 기획</a:t>
             </a:r>
+            <a:endParaRPr lang="en-US" sz="1250">
+              <a:solidFill>
+                <a:srgbClr val="6c7686"/>
+              </a:solidFill>
+              <a:latin typeface="맑은 고딕"/>
+              <a:ea typeface="맑은 고딕"/>
+              <a:cs typeface="맑은 고딕"/>
+            </a:endParaRPr>
           </a:p>
           <a:p>
             <a:pPr marL="0" indent="0">
@@ -10077,7 +10446,7 @@
             <a:r>
               <a:rPr lang="en-US" sz="1250" b="1">
                 <a:solidFill>
-                  <a:srgbClr val="1F2637"/>
+                  <a:srgbClr val="1f2637"/>
                 </a:solidFill>
                 <a:latin typeface="맑은 고딕"/>
                 <a:ea typeface="맑은 고딕"/>
@@ -10088,7 +10457,7 @@
             <a:r>
               <a:rPr lang="en-US" sz="1250">
                 <a:solidFill>
-                  <a:srgbClr val="6C7686"/>
+                  <a:srgbClr val="6c7686"/>
                 </a:solidFill>
                 <a:latin typeface="맑은 고딕"/>
                 <a:ea typeface="맑은 고딕"/>
@@ -10128,7 +10497,7 @@
             <a:r>
               <a:rPr lang="en-US" sz="900">
                 <a:solidFill>
-                  <a:srgbClr val="6C7686"/>
+                  <a:srgbClr val="6c7686"/>
                 </a:solidFill>
                 <a:latin typeface="맑은 고딕"/>
                 <a:ea typeface="맑은 고딕"/>
@@ -10168,7 +10537,7 @@
             <a:r>
               <a:rPr lang="en-US" sz="900">
                 <a:solidFill>
-                  <a:srgbClr val="6C7686"/>
+                  <a:srgbClr val="6c7686"/>
                 </a:solidFill>
                 <a:latin typeface="맑은 고딕"/>
                 <a:ea typeface="맑은 고딕"/>
@@ -10185,11 +10554,11 @@
   <p:clrMapOvr>
     <a:masterClrMapping/>
   </p:clrMapOvr>
-  <mc:AlternateContent xmlns:mc="http://schemas.openxmlformats.org/markup-compatibility/2006" xmlns:p14="http://schemas.microsoft.com/office/powerpoint/2010/main">
-    <mc:Choice Requires="p14">
-      <p:transition/>
+  <mc:AlternateContent xmlns:mc="http://schemas.openxmlformats.org/markup-compatibility/2006">
+    <mc:Choice xmlns:p14="http://schemas.microsoft.com/office/powerpoint/2010/main" Requires="p14">
+      <p:transition xmlns:mc="http://schemas.openxmlformats.org/markup-compatibility/2006" xmlns:p14="http://schemas.microsoft.com/office/powerpoint/2010/main" mc:Ignorable="p14" p14:dur="500"/>
     </mc:Choice>
-    <mc:Fallback xmlns:dsp="http://schemas.microsoft.com/office/drawing/2008/diagram" xmlns:dgm="http://schemas.openxmlformats.org/drawingml/2006/diagram" xmlns:c="http://schemas.openxmlformats.org/drawingml/2006/chart" xmlns="">
+    <mc:Fallback>
       <p:transition/>
     </mc:Fallback>
   </mc:AlternateContent>
@@ -11516,14 +11885,13 @@
 </file>
 
 <file path=ppt/slides/slide5.xml><?xml version="1.0" encoding="utf-8"?>
-<p:sld xmlns:a="http://schemas.openxmlformats.org/drawingml/2006/main" xmlns:r="http://schemas.openxmlformats.org/officeDocument/2006/relationships" xmlns:p="http://schemas.openxmlformats.org/presentationml/2006/main">
+<p:sld xmlns:r="http://schemas.openxmlformats.org/officeDocument/2006/relationships" xmlns:c="http://schemas.openxmlformats.org/drawingml/2006/chart" xmlns:a="http://schemas.openxmlformats.org/drawingml/2006/main" xmlns:dgm="http://schemas.openxmlformats.org/drawingml/2006/diagram" xmlns:dsp="http://schemas.microsoft.com/office/drawing/2008/diagram" xmlns:p="http://schemas.openxmlformats.org/presentationml/2006/main">
   <p:cSld name="Slide 5">
     <p:bg>
-      <p:bgPr>
+      <p:bgPr shadeToTitle="0">
         <a:solidFill>
-          <a:srgbClr val="FFFFFF"/>
+          <a:srgbClr val="ffffff"/>
         </a:solidFill>
-        <a:effectLst/>
       </p:bgPr>
     </p:bg>
     <p:spTree>
@@ -11568,7 +11936,7 @@
             <a:r>
               <a:rPr lang="en-US" sz="1200" b="1" kern="0" spc="200">
                 <a:solidFill>
-                  <a:srgbClr val="C8622E"/>
+                  <a:srgbClr val="c8622e"/>
                 </a:solidFill>
                 <a:latin typeface="맑은 고딕"/>
                 <a:ea typeface="맑은 고딕"/>
@@ -11606,94 +11974,35 @@
               <a:defRPr/>
             </a:pPr>
             <a:r>
-              <a:rPr lang="en-US" sz="2900" b="1" dirty="0">
-                <a:solidFill>
-                  <a:srgbClr val="1F2637"/>
-                </a:solidFill>
-                <a:latin typeface="맑은 고딕"/>
-                <a:ea typeface="맑은 고딕"/>
-                <a:cs typeface="맑은 고딕"/>
-              </a:rPr>
-              <a:t>왜 </a:t>
-            </a:r>
-            <a:r>
-              <a:rPr lang="en-US" sz="2900" b="1" dirty="0" err="1">
-                <a:solidFill>
-                  <a:srgbClr val="1F2637"/>
-                </a:solidFill>
-                <a:latin typeface="맑은 고딕"/>
-                <a:ea typeface="맑은 고딕"/>
-                <a:cs typeface="맑은 고딕"/>
-              </a:rPr>
-              <a:t>이렇게</a:t>
-            </a:r>
-            <a:r>
-              <a:rPr lang="en-US" sz="2900" b="1" dirty="0">
-                <a:solidFill>
-                  <a:srgbClr val="1F2637"/>
-                </a:solidFill>
-                <a:latin typeface="맑은 고딕"/>
-                <a:ea typeface="맑은 고딕"/>
-                <a:cs typeface="맑은 고딕"/>
-              </a:rPr>
-              <a:t> </a:t>
-            </a:r>
-            <a:r>
-              <a:rPr lang="en-US" sz="2900" b="1" dirty="0" err="1">
-                <a:solidFill>
-                  <a:srgbClr val="1F2637"/>
-                </a:solidFill>
-                <a:latin typeface="맑은 고딕"/>
-                <a:ea typeface="맑은 고딕"/>
-                <a:cs typeface="맑은 고딕"/>
-              </a:rPr>
-              <a:t>설계했는가</a:t>
-            </a:r>
-            <a:r>
-              <a:rPr lang="en-US" sz="2900" b="1" dirty="0">
-                <a:solidFill>
-                  <a:srgbClr val="1F2637"/>
-                </a:solidFill>
-                <a:latin typeface="맑은 고딕"/>
-                <a:ea typeface="맑은 고딕"/>
-                <a:cs typeface="맑은 고딕"/>
-              </a:rPr>
-              <a:t>: </a:t>
-            </a:r>
-            <a:r>
-              <a:rPr lang="en-US" sz="2900" b="1" dirty="0" err="1">
-                <a:solidFill>
-                  <a:srgbClr val="1F2637"/>
-                </a:solidFill>
-                <a:latin typeface="맑은 고딕"/>
-                <a:ea typeface="맑은 고딕"/>
-                <a:cs typeface="맑은 고딕"/>
-              </a:rPr>
-              <a:t>턴을</a:t>
-            </a:r>
-            <a:r>
-              <a:rPr lang="en-US" sz="2900" b="1" dirty="0">
-                <a:solidFill>
-                  <a:srgbClr val="1F2637"/>
-                </a:solidFill>
-                <a:latin typeface="맑은 고딕"/>
-                <a:ea typeface="맑은 고딕"/>
-                <a:cs typeface="맑은 고딕"/>
-              </a:rPr>
-              <a:t> </a:t>
-            </a:r>
-            <a:r>
-              <a:rPr lang="en-US" sz="2900" b="1" dirty="0" err="1">
-                <a:solidFill>
-                  <a:srgbClr val="1F2637"/>
-                </a:solidFill>
-                <a:latin typeface="맑은 고딕"/>
-                <a:ea typeface="맑은 고딕"/>
-                <a:cs typeface="맑은 고딕"/>
-              </a:rPr>
-              <a:t>플레이어에게만</a:t>
-            </a:r>
-            <a:endParaRPr lang="en-US" sz="2900" dirty="0"/>
+              <a:rPr lang="en-US" sz="2900" b="1">
+                <a:solidFill>
+                  <a:srgbClr val="1f2637"/>
+                </a:solidFill>
+                <a:latin typeface="맑은 고딕"/>
+                <a:ea typeface="맑은 고딕"/>
+                <a:cs typeface="맑은 고딕"/>
+              </a:rPr>
+              <a:t>왜 이렇게 설계했는가: </a:t>
+            </a:r>
+            <a:r>
+              <a:rPr lang="ko-KR" altLang="en-US" sz="2900" b="1">
+                <a:solidFill>
+                  <a:srgbClr val="1f2637"/>
+                </a:solidFill>
+                <a:latin typeface="맑은 고딕"/>
+                <a:ea typeface="맑은 고딕"/>
+                <a:cs typeface="맑은 고딕"/>
+              </a:rPr>
+              <a:t>플레이어에게 페이즈를 부여한다</a:t>
+            </a:r>
+            <a:endParaRPr lang="ko-KR" altLang="en-US" sz="2900" b="1">
+              <a:solidFill>
+                <a:srgbClr val="1f2637"/>
+              </a:solidFill>
+              <a:latin typeface="맑은 고딕"/>
+              <a:ea typeface="맑은 고딕"/>
+              <a:cs typeface="맑은 고딕"/>
+            </a:endParaRPr>
           </a:p>
         </p:txBody>
       </p:sp>
@@ -11714,11 +12023,11 @@
             </a:avLst>
           </a:prstGeom>
           <a:solidFill>
-            <a:srgbClr val="F4F6FA"/>
+            <a:srgbClr val="f4f6fa"/>
           </a:solidFill>
           <a:ln w="12700">
             <a:solidFill>
-              <a:srgbClr val="D9DEE6"/>
+              <a:srgbClr val="d9dee6"/>
             </a:solidFill>
             <a:prstDash val="solid"/>
           </a:ln>
@@ -11769,7 +12078,7 @@
             <a:r>
               <a:rPr lang="en-US" sz="1400" b="1">
                 <a:solidFill>
-                  <a:srgbClr val="C8622E"/>
+                  <a:srgbClr val="c8622e"/>
                 </a:solidFill>
                 <a:latin typeface="맑은 고딕"/>
                 <a:ea typeface="맑은 고딕"/>
@@ -11777,6 +12086,14 @@
               </a:rPr>
               <a:t>문제</a:t>
             </a:r>
+            <a:endParaRPr lang="en-US" sz="1400" b="1">
+              <a:solidFill>
+                <a:srgbClr val="c8622e"/>
+              </a:solidFill>
+              <a:latin typeface="맑은 고딕"/>
+              <a:ea typeface="맑은 고딕"/>
+              <a:cs typeface="맑은 고딕"/>
+            </a:endParaRPr>
           </a:p>
         </p:txBody>
       </p:sp>
@@ -11809,115 +12126,24 @@
               <a:defRPr/>
             </a:pPr>
             <a:r>
-              <a:rPr lang="en-US" sz="1300" dirty="0" err="1">
-                <a:solidFill>
-                  <a:srgbClr val="1F2637"/>
-                </a:solidFill>
-                <a:latin typeface="맑은 고딕"/>
-                <a:ea typeface="맑은 고딕"/>
-                <a:cs typeface="맑은 고딕"/>
-              </a:rPr>
-              <a:t>소울라이크의</a:t>
-            </a:r>
-            <a:r>
-              <a:rPr lang="en-US" sz="1300" dirty="0">
-                <a:solidFill>
-                  <a:srgbClr val="1F2637"/>
-                </a:solidFill>
-                <a:latin typeface="맑은 고딕"/>
-                <a:ea typeface="맑은 고딕"/>
-                <a:cs typeface="맑은 고딕"/>
-              </a:rPr>
-              <a:t> </a:t>
-            </a:r>
-            <a:r>
-              <a:rPr lang="en-US" sz="1300" dirty="0" err="1">
-                <a:solidFill>
-                  <a:srgbClr val="1F2637"/>
-                </a:solidFill>
-                <a:latin typeface="맑은 고딕"/>
-                <a:ea typeface="맑은 고딕"/>
-                <a:cs typeface="맑은 고딕"/>
-              </a:rPr>
-              <a:t>속도감과</a:t>
-            </a:r>
-            <a:r>
-              <a:rPr lang="en-US" sz="1300" dirty="0">
-                <a:solidFill>
-                  <a:srgbClr val="1F2637"/>
-                </a:solidFill>
-                <a:latin typeface="맑은 고딕"/>
-                <a:ea typeface="맑은 고딕"/>
-                <a:cs typeface="맑은 고딕"/>
-              </a:rPr>
-              <a:t> </a:t>
-            </a:r>
-            <a:r>
-              <a:rPr lang="en-US" sz="1300" dirty="0" err="1">
-                <a:solidFill>
-                  <a:srgbClr val="1F2637"/>
-                </a:solidFill>
-                <a:latin typeface="맑은 고딕"/>
-                <a:ea typeface="맑은 고딕"/>
-                <a:cs typeface="맑은 고딕"/>
-              </a:rPr>
-              <a:t>턴제의</a:t>
-            </a:r>
-            <a:r>
-              <a:rPr lang="en-US" sz="1300" dirty="0">
-                <a:solidFill>
-                  <a:srgbClr val="1F2637"/>
-                </a:solidFill>
-                <a:latin typeface="맑은 고딕"/>
-                <a:ea typeface="맑은 고딕"/>
-                <a:cs typeface="맑은 고딕"/>
-              </a:rPr>
-              <a:t> </a:t>
-            </a:r>
-            <a:r>
-              <a:rPr lang="en-US" sz="1300" dirty="0" err="1">
-                <a:solidFill>
-                  <a:srgbClr val="1F2637"/>
-                </a:solidFill>
-                <a:latin typeface="맑은 고딕"/>
-                <a:ea typeface="맑은 고딕"/>
-                <a:cs typeface="맑은 고딕"/>
-              </a:rPr>
-              <a:t>전략성을</a:t>
-            </a:r>
-            <a:r>
-              <a:rPr lang="en-US" sz="1300" dirty="0">
-                <a:solidFill>
-                  <a:srgbClr val="1F2637"/>
-                </a:solidFill>
-                <a:latin typeface="맑은 고딕"/>
-                <a:ea typeface="맑은 고딕"/>
-                <a:cs typeface="맑은 고딕"/>
-              </a:rPr>
-              <a:t> 한 </a:t>
-            </a:r>
-            <a:r>
-              <a:rPr lang="en-US" sz="1300" dirty="0" err="1">
-                <a:solidFill>
-                  <a:srgbClr val="1F2637"/>
-                </a:solidFill>
-                <a:latin typeface="맑은 고딕"/>
-                <a:ea typeface="맑은 고딕"/>
-                <a:cs typeface="맑은 고딕"/>
-              </a:rPr>
-              <a:t>번에</a:t>
-            </a:r>
-            <a:r>
-              <a:rPr lang="en-US" sz="1300" dirty="0">
-                <a:solidFill>
-                  <a:srgbClr val="1F2637"/>
-                </a:solidFill>
-                <a:latin typeface="맑은 고딕"/>
-                <a:ea typeface="맑은 고딕"/>
-                <a:cs typeface="맑은 고딕"/>
-              </a:rPr>
-              <a:t>? </a:t>
-            </a:r>
+              <a:rPr lang="en-US" sz="1300">
+                <a:solidFill>
+                  <a:srgbClr val="1f2637"/>
+                </a:solidFill>
+                <a:latin typeface="맑은 고딕"/>
+                <a:ea typeface="맑은 고딕"/>
+                <a:cs typeface="맑은 고딕"/>
+              </a:rPr>
+              <a:t>소울라이크의 속도감과 턴제의 전략성을 한 번에? </a:t>
+            </a:r>
+            <a:endParaRPr lang="en-US" sz="1300">
+              <a:solidFill>
+                <a:srgbClr val="1f2637"/>
+              </a:solidFill>
+              <a:latin typeface="맑은 고딕"/>
+              <a:ea typeface="맑은 고딕"/>
+              <a:cs typeface="맑은 고딕"/>
+            </a:endParaRPr>
           </a:p>
           <a:p>
             <a:pPr marL="0" indent="0">
@@ -11928,182 +12154,17 @@
               <a:defRPr/>
             </a:pPr>
             <a:r>
-              <a:rPr lang="en-US" sz="1300" dirty="0" err="1">
-                <a:solidFill>
-                  <a:srgbClr val="1F2637"/>
-                </a:solidFill>
-                <a:latin typeface="맑은 고딕"/>
-                <a:ea typeface="맑은 고딕"/>
-                <a:cs typeface="맑은 고딕"/>
-              </a:rPr>
-              <a:t>전통적</a:t>
-            </a:r>
-            <a:r>
-              <a:rPr lang="en-US" sz="1300" dirty="0">
-                <a:solidFill>
-                  <a:srgbClr val="1F2637"/>
-                </a:solidFill>
-                <a:latin typeface="맑은 고딕"/>
-                <a:ea typeface="맑은 고딕"/>
-                <a:cs typeface="맑은 고딕"/>
-              </a:rPr>
-              <a:t> '</a:t>
-            </a:r>
-            <a:r>
-              <a:rPr lang="en-US" sz="1300" dirty="0" err="1">
-                <a:solidFill>
-                  <a:srgbClr val="1F2637"/>
-                </a:solidFill>
-                <a:latin typeface="맑은 고딕"/>
-                <a:ea typeface="맑은 고딕"/>
-                <a:cs typeface="맑은 고딕"/>
-              </a:rPr>
-              <a:t>번갈아</a:t>
-            </a:r>
-            <a:r>
-              <a:rPr lang="en-US" sz="1300" dirty="0">
-                <a:solidFill>
-                  <a:srgbClr val="1F2637"/>
-                </a:solidFill>
-                <a:latin typeface="맑은 고딕"/>
-                <a:ea typeface="맑은 고딕"/>
-                <a:cs typeface="맑은 고딕"/>
-              </a:rPr>
-              <a:t> </a:t>
-            </a:r>
-            <a:r>
-              <a:rPr lang="en-US" sz="1300" dirty="0" err="1">
-                <a:solidFill>
-                  <a:srgbClr val="1F2637"/>
-                </a:solidFill>
-                <a:latin typeface="맑은 고딕"/>
-                <a:ea typeface="맑은 고딕"/>
-                <a:cs typeface="맑은 고딕"/>
-              </a:rPr>
-              <a:t>공격</a:t>
-            </a:r>
-            <a:r>
-              <a:rPr lang="en-US" sz="1300" dirty="0">
-                <a:solidFill>
-                  <a:srgbClr val="1F2637"/>
-                </a:solidFill>
-                <a:latin typeface="맑은 고딕"/>
-                <a:ea typeface="맑은 고딕"/>
-                <a:cs typeface="맑은 고딕"/>
-              </a:rPr>
-              <a:t>' </a:t>
-            </a:r>
-            <a:r>
-              <a:rPr lang="en-US" sz="1300" dirty="0" err="1">
-                <a:solidFill>
-                  <a:srgbClr val="1F2637"/>
-                </a:solidFill>
-                <a:latin typeface="맑은 고딕"/>
-                <a:ea typeface="맑은 고딕"/>
-                <a:cs typeface="맑은 고딕"/>
-              </a:rPr>
-              <a:t>턴제로는</a:t>
-            </a:r>
-            <a:r>
-              <a:rPr lang="en-US" sz="1300" dirty="0">
-                <a:solidFill>
-                  <a:srgbClr val="1F2637"/>
-                </a:solidFill>
-                <a:latin typeface="맑은 고딕"/>
-                <a:ea typeface="맑은 고딕"/>
-                <a:cs typeface="맑은 고딕"/>
-              </a:rPr>
-              <a:t> 두 </a:t>
-            </a:r>
-            <a:r>
-              <a:rPr lang="en-US" sz="1300" dirty="0" err="1">
-                <a:solidFill>
-                  <a:srgbClr val="1F2637"/>
-                </a:solidFill>
-                <a:latin typeface="맑은 고딕"/>
-                <a:ea typeface="맑은 고딕"/>
-                <a:cs typeface="맑은 고딕"/>
-              </a:rPr>
-              <a:t>장르를</a:t>
-            </a:r>
-            <a:r>
-              <a:rPr lang="en-US" sz="1300" dirty="0">
-                <a:solidFill>
-                  <a:srgbClr val="1F2637"/>
-                </a:solidFill>
-                <a:latin typeface="맑은 고딕"/>
-                <a:ea typeface="맑은 고딕"/>
-                <a:cs typeface="맑은 고딕"/>
-              </a:rPr>
-              <a:t> </a:t>
-            </a:r>
-            <a:r>
-              <a:rPr lang="en-US" sz="1300" dirty="0" err="1">
-                <a:solidFill>
-                  <a:srgbClr val="1F2637"/>
-                </a:solidFill>
-                <a:latin typeface="맑은 고딕"/>
-                <a:ea typeface="맑은 고딕"/>
-                <a:cs typeface="맑은 고딕"/>
-              </a:rPr>
-              <a:t>애매하게</a:t>
-            </a:r>
-            <a:r>
-              <a:rPr lang="en-US" sz="1300" dirty="0">
-                <a:solidFill>
-                  <a:srgbClr val="1F2637"/>
-                </a:solidFill>
-                <a:latin typeface="맑은 고딕"/>
-                <a:ea typeface="맑은 고딕"/>
-                <a:cs typeface="맑은 고딕"/>
-              </a:rPr>
-              <a:t> </a:t>
-            </a:r>
-            <a:r>
-              <a:rPr lang="en-US" sz="1300" dirty="0" err="1">
-                <a:solidFill>
-                  <a:srgbClr val="1F2637"/>
-                </a:solidFill>
-                <a:latin typeface="맑은 고딕"/>
-                <a:ea typeface="맑은 고딕"/>
-                <a:cs typeface="맑은 고딕"/>
-              </a:rPr>
-              <a:t>접합할</a:t>
-            </a:r>
-            <a:r>
-              <a:rPr lang="en-US" sz="1300" dirty="0">
-                <a:solidFill>
-                  <a:srgbClr val="1F2637"/>
-                </a:solidFill>
-                <a:latin typeface="맑은 고딕"/>
-                <a:ea typeface="맑은 고딕"/>
-                <a:cs typeface="맑은 고딕"/>
-              </a:rPr>
-              <a:t> 뿐, 둘 다 </a:t>
-            </a:r>
-            <a:r>
-              <a:rPr lang="en-US" sz="1300" dirty="0" err="1">
-                <a:solidFill>
-                  <a:srgbClr val="1F2637"/>
-                </a:solidFill>
-                <a:latin typeface="맑은 고딕"/>
-                <a:ea typeface="맑은 고딕"/>
-                <a:cs typeface="맑은 고딕"/>
-              </a:rPr>
-              <a:t>놓친다</a:t>
-            </a:r>
-            <a:r>
-              <a:rPr lang="en-US" sz="1300" dirty="0">
-                <a:solidFill>
-                  <a:srgbClr val="1F2637"/>
-                </a:solidFill>
-                <a:latin typeface="맑은 고딕"/>
-                <a:ea typeface="맑은 고딕"/>
-                <a:cs typeface="맑은 고딕"/>
-              </a:rPr>
-              <a:t>.</a:t>
-            </a:r>
-            <a:endParaRPr lang="en-US" sz="1300" dirty="0"/>
+              <a:rPr lang="en-US" sz="1300">
+                <a:solidFill>
+                  <a:srgbClr val="1f2637"/>
+                </a:solidFill>
+                <a:latin typeface="맑은 고딕"/>
+                <a:ea typeface="맑은 고딕"/>
+                <a:cs typeface="맑은 고딕"/>
+              </a:rPr>
+              <a:t>전통적 '번갈아 공격' 턴제로는 두 장르를 애매하게 접합할 뿐, 둘 다 놓친다.</a:t>
+            </a:r>
+            <a:endParaRPr lang="en-US" sz="1300"/>
           </a:p>
         </p:txBody>
       </p:sp>
@@ -12135,7 +12196,7 @@
             <a:r>
               <a:rPr lang="en-US" sz="3400" b="1">
                 <a:solidFill>
-                  <a:srgbClr val="C8622E"/>
+                  <a:srgbClr val="c8622e"/>
                 </a:solidFill>
                 <a:latin typeface="Arial"/>
                 <a:ea typeface="Arial"/>
@@ -12164,11 +12225,11 @@
             </a:avLst>
           </a:prstGeom>
           <a:solidFill>
-            <a:srgbClr val="16223B"/>
+            <a:srgbClr val="16223b"/>
           </a:solidFill>
           <a:ln w="12700">
             <a:solidFill>
-              <a:srgbClr val="D9DEE6"/>
+              <a:srgbClr val="d9dee6"/>
             </a:solidFill>
             <a:prstDash val="solid"/>
           </a:ln>
@@ -12219,7 +12280,7 @@
             <a:r>
               <a:rPr lang="en-US" sz="1400" b="1">
                 <a:solidFill>
-                  <a:srgbClr val="E0A15A"/>
+                  <a:srgbClr val="e0a15a"/>
                 </a:solidFill>
                 <a:latin typeface="맑은 고딕"/>
                 <a:ea typeface="맑은 고딕"/>
@@ -12227,6 +12288,14 @@
               </a:rPr>
               <a:t>해결</a:t>
             </a:r>
+            <a:endParaRPr lang="en-US" sz="1400" b="1">
+              <a:solidFill>
+                <a:srgbClr val="e0a15a"/>
+              </a:solidFill>
+              <a:latin typeface="맑은 고딕"/>
+              <a:ea typeface="맑은 고딕"/>
+              <a:cs typeface="맑은 고딕"/>
+            </a:endParaRPr>
           </a:p>
         </p:txBody>
       </p:sp>
@@ -12259,126 +12328,68 @@
               <a:defRPr/>
             </a:pPr>
             <a:r>
-              <a:rPr lang="en-US" sz="1300" dirty="0">
-                <a:solidFill>
-                  <a:srgbClr val="FFFFFF"/>
-                </a:solidFill>
-                <a:latin typeface="맑은 고딕"/>
-                <a:ea typeface="맑은 고딕"/>
-                <a:cs typeface="맑은 고딕"/>
-              </a:rPr>
-              <a:t>'턴' </a:t>
-            </a:r>
-            <a:r>
-              <a:rPr lang="en-US" sz="1300" dirty="0" err="1">
-                <a:solidFill>
-                  <a:srgbClr val="FFFFFF"/>
-                </a:solidFill>
-                <a:latin typeface="맑은 고딕"/>
-                <a:ea typeface="맑은 고딕"/>
-                <a:cs typeface="맑은 고딕"/>
-              </a:rPr>
-              <a:t>개념만</a:t>
-            </a:r>
-            <a:r>
-              <a:rPr lang="en-US" sz="1300" dirty="0">
-                <a:solidFill>
-                  <a:srgbClr val="FFFFFF"/>
-                </a:solidFill>
-                <a:latin typeface="맑은 고딕"/>
-                <a:ea typeface="맑은 고딕"/>
-                <a:cs typeface="맑은 고딕"/>
-              </a:rPr>
-              <a:t> </a:t>
-            </a:r>
-            <a:r>
-              <a:rPr lang="en-US" sz="1300" dirty="0" err="1">
-                <a:solidFill>
-                  <a:srgbClr val="FFFFFF"/>
-                </a:solidFill>
-                <a:latin typeface="맑은 고딕"/>
-                <a:ea typeface="맑은 고딕"/>
-                <a:cs typeface="맑은 고딕"/>
-              </a:rPr>
-              <a:t>차용하고</a:t>
-            </a:r>
-            <a:r>
-              <a:rPr lang="en-US" sz="1300" dirty="0">
-                <a:solidFill>
-                  <a:srgbClr val="FFFFFF"/>
-                </a:solidFill>
-                <a:latin typeface="맑은 고딕"/>
-                <a:ea typeface="맑은 고딕"/>
-                <a:cs typeface="맑은 고딕"/>
-              </a:rPr>
-              <a:t> </a:t>
-            </a:r>
-            <a:r>
-              <a:rPr lang="en-US" sz="1300" dirty="0" err="1">
-                <a:solidFill>
-                  <a:srgbClr val="FFFFFF"/>
-                </a:solidFill>
-                <a:latin typeface="맑은 고딕"/>
-                <a:ea typeface="맑은 고딕"/>
-                <a:cs typeface="맑은 고딕"/>
-              </a:rPr>
-              <a:t>턴은</a:t>
-            </a:r>
-            <a:r>
-              <a:rPr lang="en-US" sz="1300" dirty="0">
-                <a:solidFill>
-                  <a:srgbClr val="FFFFFF"/>
-                </a:solidFill>
-                <a:latin typeface="맑은 고딕"/>
-                <a:ea typeface="맑은 고딕"/>
-                <a:cs typeface="맑은 고딕"/>
-              </a:rPr>
-              <a:t> </a:t>
-            </a:r>
-            <a:r>
-              <a:rPr lang="en-US" sz="1300" dirty="0" err="1">
-                <a:solidFill>
-                  <a:srgbClr val="FFFFFF"/>
-                </a:solidFill>
-                <a:latin typeface="맑은 고딕"/>
-                <a:ea typeface="맑은 고딕"/>
-                <a:cs typeface="맑은 고딕"/>
-              </a:rPr>
-              <a:t>플레이어에게만</a:t>
-            </a:r>
-            <a:r>
-              <a:rPr lang="en-US" sz="1300" dirty="0">
-                <a:solidFill>
-                  <a:srgbClr val="FFFFFF"/>
-                </a:solidFill>
-                <a:latin typeface="맑은 고딕"/>
-                <a:ea typeface="맑은 고딕"/>
-                <a:cs typeface="맑은 고딕"/>
-              </a:rPr>
-              <a:t> </a:t>
-            </a:r>
-            <a:r>
-              <a:rPr lang="en-US" sz="1300" dirty="0" err="1">
-                <a:solidFill>
-                  <a:srgbClr val="FFFFFF"/>
-                </a:solidFill>
-                <a:latin typeface="맑은 고딕"/>
-                <a:ea typeface="맑은 고딕"/>
-                <a:cs typeface="맑은 고딕"/>
-              </a:rPr>
-              <a:t>부여</a:t>
-            </a:r>
-            <a:r>
-              <a:rPr lang="en-US" sz="1300" dirty="0">
-                <a:solidFill>
-                  <a:srgbClr val="FFFFFF"/>
-                </a:solidFill>
-                <a:latin typeface="맑은 고딕"/>
-                <a:ea typeface="맑은 고딕"/>
-                <a:cs typeface="맑은 고딕"/>
-              </a:rPr>
-              <a:t>. </a:t>
-            </a:r>
+              <a:rPr lang="en-US" sz="1300">
+                <a:solidFill>
+                  <a:srgbClr val="ffffff"/>
+                </a:solidFill>
+                <a:latin typeface="맑은 고딕"/>
+                <a:ea typeface="맑은 고딕"/>
+                <a:cs typeface="맑은 고딕"/>
+              </a:rPr>
+              <a:t>'</a:t>
+            </a:r>
+            <a:r>
+              <a:rPr lang="ko-KR" altLang="en-US" sz="1300">
+                <a:solidFill>
+                  <a:srgbClr val="ffffff"/>
+                </a:solidFill>
+                <a:latin typeface="맑은 고딕"/>
+                <a:ea typeface="맑은 고딕"/>
+                <a:cs typeface="맑은 고딕"/>
+              </a:rPr>
+              <a:t>페이즈</a:t>
+            </a:r>
+            <a:r>
+              <a:rPr lang="en-US" sz="1300">
+                <a:solidFill>
+                  <a:srgbClr val="ffffff"/>
+                </a:solidFill>
+                <a:latin typeface="맑은 고딕"/>
+                <a:ea typeface="맑은 고딕"/>
+                <a:cs typeface="맑은 고딕"/>
+              </a:rPr>
+              <a:t>' 개념만 차용하고 </a:t>
+            </a:r>
+            <a:r>
+              <a:rPr lang="ko-KR" altLang="en-US" sz="1300">
+                <a:solidFill>
+                  <a:srgbClr val="ffffff"/>
+                </a:solidFill>
+                <a:latin typeface="맑은 고딕"/>
+                <a:ea typeface="맑은 고딕"/>
+                <a:cs typeface="맑은 고딕"/>
+              </a:rPr>
+              <a:t>페이즈는</a:t>
+            </a:r>
+            <a:r>
+              <a:rPr lang="en-US" sz="1300">
+                <a:solidFill>
+                  <a:srgbClr val="ffffff"/>
+                </a:solidFill>
+                <a:latin typeface="맑은 고딕"/>
+                <a:ea typeface="맑은 고딕"/>
+                <a:cs typeface="맑은 고딕"/>
+              </a:rPr>
+              <a:t> 플레이어에게만 부여. </a:t>
+            </a:r>
+            <a:endParaRPr lang="en-US" sz="1300">
+              <a:solidFill>
+                <a:srgbClr val="ffffff"/>
+              </a:solidFill>
+              <a:latin typeface="맑은 고딕"/>
+              <a:ea typeface="맑은 고딕"/>
+              <a:cs typeface="맑은 고딕"/>
+            </a:endParaRPr>
           </a:p>
           <a:p>
             <a:pPr marL="0" indent="0">
@@ -12389,137 +12400,46 @@
               <a:defRPr/>
             </a:pPr>
             <a:r>
-              <a:rPr lang="en-US" sz="1300" dirty="0" err="1">
-                <a:solidFill>
-                  <a:srgbClr val="FFFFFF"/>
-                </a:solidFill>
-                <a:latin typeface="맑은 고딕"/>
-                <a:ea typeface="맑은 고딕"/>
-                <a:cs typeface="맑은 고딕"/>
-              </a:rPr>
-              <a:t>적은</a:t>
-            </a:r>
-            <a:r>
-              <a:rPr lang="en-US" sz="1300" dirty="0">
-                <a:solidFill>
-                  <a:srgbClr val="FFFFFF"/>
-                </a:solidFill>
-                <a:latin typeface="맑은 고딕"/>
-                <a:ea typeface="맑은 고딕"/>
-                <a:cs typeface="맑은 고딕"/>
-              </a:rPr>
-              <a:t> 턴 </a:t>
-            </a:r>
-            <a:r>
-              <a:rPr lang="en-US" sz="1300" dirty="0" err="1">
-                <a:solidFill>
-                  <a:srgbClr val="FFFFFF"/>
-                </a:solidFill>
-                <a:latin typeface="맑은 고딕"/>
-                <a:ea typeface="맑은 고딕"/>
-                <a:cs typeface="맑은 고딕"/>
-              </a:rPr>
-              <a:t>없이</a:t>
-            </a:r>
-            <a:r>
-              <a:rPr lang="en-US" sz="1300" dirty="0">
-                <a:solidFill>
-                  <a:srgbClr val="FFFFFF"/>
-                </a:solidFill>
-                <a:latin typeface="맑은 고딕"/>
-                <a:ea typeface="맑은 고딕"/>
-                <a:cs typeface="맑은 고딕"/>
-              </a:rPr>
-              <a:t> </a:t>
-            </a:r>
-            <a:r>
-              <a:rPr lang="en-US" sz="1300" dirty="0" err="1">
-                <a:solidFill>
-                  <a:srgbClr val="FFFFFF"/>
-                </a:solidFill>
-                <a:latin typeface="맑은 고딕"/>
-                <a:ea typeface="맑은 고딕"/>
-                <a:cs typeface="맑은 고딕"/>
-              </a:rPr>
-              <a:t>자기</a:t>
-            </a:r>
-            <a:r>
-              <a:rPr lang="en-US" sz="1300" dirty="0">
-                <a:solidFill>
-                  <a:srgbClr val="FFFFFF"/>
-                </a:solidFill>
-                <a:latin typeface="맑은 고딕"/>
-                <a:ea typeface="맑은 고딕"/>
-                <a:cs typeface="맑은 고딕"/>
-              </a:rPr>
-              <a:t> </a:t>
-            </a:r>
-            <a:r>
-              <a:rPr lang="en-US" sz="1300" dirty="0" err="1">
-                <a:solidFill>
-                  <a:srgbClr val="FFFFFF"/>
-                </a:solidFill>
-                <a:latin typeface="맑은 고딕"/>
-                <a:ea typeface="맑은 고딕"/>
-                <a:cs typeface="맑은 고딕"/>
-              </a:rPr>
-              <a:t>패턴대로</a:t>
-            </a:r>
-            <a:r>
-              <a:rPr lang="en-US" sz="1300" dirty="0">
-                <a:solidFill>
-                  <a:srgbClr val="FFFFFF"/>
-                </a:solidFill>
-                <a:latin typeface="맑은 고딕"/>
-                <a:ea typeface="맑은 고딕"/>
-                <a:cs typeface="맑은 고딕"/>
-              </a:rPr>
-              <a:t> </a:t>
-            </a:r>
-            <a:r>
-              <a:rPr lang="en-US" sz="1300" dirty="0" err="1">
-                <a:solidFill>
-                  <a:srgbClr val="FFFFFF"/>
-                </a:solidFill>
-                <a:latin typeface="맑은 고딕"/>
-                <a:ea typeface="맑은 고딕"/>
-                <a:cs typeface="맑은 고딕"/>
-              </a:rPr>
-              <a:t>실시간</a:t>
-            </a:r>
-            <a:r>
-              <a:rPr lang="en-US" sz="1300" dirty="0">
-                <a:solidFill>
-                  <a:srgbClr val="FFFFFF"/>
-                </a:solidFill>
-                <a:latin typeface="맑은 고딕"/>
-                <a:ea typeface="맑은 고딕"/>
-                <a:cs typeface="맑은 고딕"/>
-              </a:rPr>
-              <a:t> </a:t>
-            </a:r>
-            <a:r>
-              <a:rPr lang="en-US" sz="1300" dirty="0" err="1">
-                <a:solidFill>
-                  <a:srgbClr val="FFFFFF"/>
-                </a:solidFill>
-                <a:latin typeface="맑은 고딕"/>
-                <a:ea typeface="맑은 고딕"/>
-                <a:cs typeface="맑은 고딕"/>
-              </a:rPr>
-              <a:t>행동</a:t>
-            </a:r>
-            <a:r>
-              <a:rPr lang="en-US" sz="1300" dirty="0">
-                <a:solidFill>
-                  <a:srgbClr val="FFFFFF"/>
-                </a:solidFill>
-                <a:latin typeface="맑은 고딕"/>
-                <a:ea typeface="맑은 고딕"/>
-                <a:cs typeface="맑은 고딕"/>
-              </a:rPr>
-              <a:t> → </a:t>
-            </a:r>
+              <a:rPr lang="en-US" sz="1300">
+                <a:solidFill>
+                  <a:srgbClr val="ffffff"/>
+                </a:solidFill>
+                <a:latin typeface="맑은 고딕"/>
+                <a:ea typeface="맑은 고딕"/>
+                <a:cs typeface="맑은 고딕"/>
+              </a:rPr>
+              <a:t>적은 </a:t>
+            </a:r>
+            <a:r>
+              <a:rPr lang="ko-KR" altLang="en-US" sz="1300">
+                <a:solidFill>
+                  <a:srgbClr val="ffffff"/>
+                </a:solidFill>
+                <a:latin typeface="맑은 고딕"/>
+                <a:ea typeface="맑은 고딕"/>
+                <a:cs typeface="맑은 고딕"/>
+              </a:rPr>
+              <a:t>제약</a:t>
+            </a:r>
+            <a:r>
+              <a:rPr lang="en-US" sz="1300">
+                <a:solidFill>
+                  <a:srgbClr val="ffffff"/>
+                </a:solidFill>
+                <a:latin typeface="맑은 고딕"/>
+                <a:ea typeface="맑은 고딕"/>
+                <a:cs typeface="맑은 고딕"/>
+              </a:rPr>
+              <a:t> 없이 자기 패턴대로 실시간 행동 → </a:t>
+            </a:r>
+            <a:endParaRPr lang="en-US" sz="1300">
+              <a:solidFill>
+                <a:srgbClr val="ffffff"/>
+              </a:solidFill>
+              <a:latin typeface="맑은 고딕"/>
+              <a:ea typeface="맑은 고딕"/>
+              <a:cs typeface="맑은 고딕"/>
+            </a:endParaRPr>
           </a:p>
           <a:p>
             <a:pPr marL="0" indent="0">
@@ -12530,182 +12450,17 @@
               <a:defRPr/>
             </a:pPr>
             <a:r>
-              <a:rPr lang="en-US" sz="1300" dirty="0" err="1">
-                <a:solidFill>
-                  <a:srgbClr val="FFFFFF"/>
-                </a:solidFill>
-                <a:latin typeface="맑은 고딕"/>
-                <a:ea typeface="맑은 고딕"/>
-                <a:cs typeface="맑은 고딕"/>
-              </a:rPr>
-              <a:t>적의</a:t>
-            </a:r>
-            <a:r>
-              <a:rPr lang="en-US" sz="1300" dirty="0">
-                <a:solidFill>
-                  <a:srgbClr val="FFFFFF"/>
-                </a:solidFill>
-                <a:latin typeface="맑은 고딕"/>
-                <a:ea typeface="맑은 고딕"/>
-                <a:cs typeface="맑은 고딕"/>
-              </a:rPr>
-              <a:t> </a:t>
-            </a:r>
-            <a:r>
-              <a:rPr lang="en-US" sz="1300" dirty="0" err="1">
-                <a:solidFill>
-                  <a:srgbClr val="FFFFFF"/>
-                </a:solidFill>
-                <a:latin typeface="맑은 고딕"/>
-                <a:ea typeface="맑은 고딕"/>
-                <a:cs typeface="맑은 고딕"/>
-              </a:rPr>
-              <a:t>위협감</a:t>
-            </a:r>
-            <a:r>
-              <a:rPr lang="en-US" sz="1300" dirty="0">
-                <a:solidFill>
-                  <a:srgbClr val="FFFFFF"/>
-                </a:solidFill>
-                <a:latin typeface="맑은 고딕"/>
-                <a:ea typeface="맑은 고딕"/>
-                <a:cs typeface="맑은 고딕"/>
-              </a:rPr>
-              <a:t> + </a:t>
-            </a:r>
-            <a:r>
-              <a:rPr lang="en-US" sz="1300" dirty="0" err="1">
-                <a:solidFill>
-                  <a:srgbClr val="FFFFFF"/>
-                </a:solidFill>
-                <a:latin typeface="맑은 고딕"/>
-                <a:ea typeface="맑은 고딕"/>
-                <a:cs typeface="맑은 고딕"/>
-              </a:rPr>
-              <a:t>플레이어의</a:t>
-            </a:r>
-            <a:r>
-              <a:rPr lang="en-US" sz="1300" dirty="0">
-                <a:solidFill>
-                  <a:srgbClr val="FFFFFF"/>
-                </a:solidFill>
-                <a:latin typeface="맑은 고딕"/>
-                <a:ea typeface="맑은 고딕"/>
-                <a:cs typeface="맑은 고딕"/>
-              </a:rPr>
-              <a:t> </a:t>
-            </a:r>
-            <a:r>
-              <a:rPr lang="en-US" sz="1300" dirty="0" err="1">
-                <a:solidFill>
-                  <a:srgbClr val="FFFFFF"/>
-                </a:solidFill>
-                <a:latin typeface="맑은 고딕"/>
-                <a:ea typeface="맑은 고딕"/>
-                <a:cs typeface="맑은 고딕"/>
-              </a:rPr>
-              <a:t>계획적</a:t>
-            </a:r>
-            <a:r>
-              <a:rPr lang="en-US" sz="1300" dirty="0">
-                <a:solidFill>
-                  <a:srgbClr val="FFFFFF"/>
-                </a:solidFill>
-                <a:latin typeface="맑은 고딕"/>
-                <a:ea typeface="맑은 고딕"/>
-                <a:cs typeface="맑은 고딕"/>
-              </a:rPr>
-              <a:t> </a:t>
-            </a:r>
-            <a:r>
-              <a:rPr lang="en-US" sz="1300" dirty="0" err="1">
-                <a:solidFill>
-                  <a:srgbClr val="FFFFFF"/>
-                </a:solidFill>
-                <a:latin typeface="맑은 고딕"/>
-                <a:ea typeface="맑은 고딕"/>
-                <a:cs typeface="맑은 고딕"/>
-              </a:rPr>
-              <a:t>자원</a:t>
-            </a:r>
-            <a:r>
-              <a:rPr lang="en-US" sz="1300" dirty="0">
-                <a:solidFill>
-                  <a:srgbClr val="FFFFFF"/>
-                </a:solidFill>
-                <a:latin typeface="맑은 고딕"/>
-                <a:ea typeface="맑은 고딕"/>
-                <a:cs typeface="맑은 고딕"/>
-              </a:rPr>
-              <a:t> </a:t>
-            </a:r>
-            <a:r>
-              <a:rPr lang="en-US" sz="1300" dirty="0" err="1">
-                <a:solidFill>
-                  <a:srgbClr val="FFFFFF"/>
-                </a:solidFill>
-                <a:latin typeface="맑은 고딕"/>
-                <a:ea typeface="맑은 고딕"/>
-                <a:cs typeface="맑은 고딕"/>
-              </a:rPr>
-              <a:t>운용을</a:t>
-            </a:r>
-            <a:r>
-              <a:rPr lang="en-US" sz="1300" dirty="0">
-                <a:solidFill>
-                  <a:srgbClr val="FFFFFF"/>
-                </a:solidFill>
-                <a:latin typeface="맑은 고딕"/>
-                <a:ea typeface="맑은 고딕"/>
-                <a:cs typeface="맑은 고딕"/>
-              </a:rPr>
-              <a:t> </a:t>
-            </a:r>
-            <a:r>
-              <a:rPr lang="en-US" sz="1300" dirty="0" err="1">
-                <a:solidFill>
-                  <a:srgbClr val="FFFFFF"/>
-                </a:solidFill>
-                <a:latin typeface="맑은 고딕"/>
-                <a:ea typeface="맑은 고딕"/>
-                <a:cs typeface="맑은 고딕"/>
-              </a:rPr>
-              <a:t>동시에</a:t>
-            </a:r>
-            <a:r>
-              <a:rPr lang="en-US" sz="1300" dirty="0">
-                <a:solidFill>
-                  <a:srgbClr val="FFFFFF"/>
-                </a:solidFill>
-                <a:latin typeface="맑은 고딕"/>
-                <a:ea typeface="맑은 고딕"/>
-                <a:cs typeface="맑은 고딕"/>
-              </a:rPr>
-              <a:t> </a:t>
-            </a:r>
-            <a:r>
-              <a:rPr lang="en-US" sz="1300" dirty="0" err="1">
-                <a:solidFill>
-                  <a:srgbClr val="FFFFFF"/>
-                </a:solidFill>
-                <a:latin typeface="맑은 고딕"/>
-                <a:ea typeface="맑은 고딕"/>
-                <a:cs typeface="맑은 고딕"/>
-              </a:rPr>
-              <a:t>확보</a:t>
-            </a:r>
-            <a:r>
-              <a:rPr lang="en-US" sz="1300" dirty="0">
-                <a:solidFill>
-                  <a:srgbClr val="FFFFFF"/>
-                </a:solidFill>
-                <a:latin typeface="맑은 고딕"/>
-                <a:ea typeface="맑은 고딕"/>
-                <a:cs typeface="맑은 고딕"/>
-              </a:rPr>
-              <a:t>.</a:t>
-            </a:r>
-            <a:endParaRPr lang="en-US" sz="1300" dirty="0"/>
+              <a:rPr lang="en-US" sz="1300">
+                <a:solidFill>
+                  <a:srgbClr val="ffffff"/>
+                </a:solidFill>
+                <a:latin typeface="맑은 고딕"/>
+                <a:ea typeface="맑은 고딕"/>
+                <a:cs typeface="맑은 고딕"/>
+              </a:rPr>
+              <a:t>적의 위협감 + 플레이어의 계획적 자원 운용을 동시에 확보.</a:t>
+            </a:r>
+            <a:endParaRPr lang="en-US" sz="1300"/>
           </a:p>
         </p:txBody>
       </p:sp>
@@ -12726,11 +12481,11 @@
             </a:avLst>
           </a:prstGeom>
           <a:solidFill>
-            <a:srgbClr val="F4F6FA"/>
+            <a:srgbClr val="f4f6fa"/>
           </a:solidFill>
           <a:ln w="12700">
             <a:solidFill>
-              <a:srgbClr val="D9DEE6"/>
+              <a:srgbClr val="d9dee6"/>
             </a:solidFill>
             <a:prstDash val="solid"/>
           </a:ln>
@@ -12781,7 +12536,7 @@
             <a:r>
               <a:rPr lang="en-US" sz="2600" b="1">
                 <a:solidFill>
-                  <a:srgbClr val="C8622E"/>
+                  <a:srgbClr val="c8622e"/>
                 </a:solidFill>
                 <a:latin typeface="Arial"/>
                 <a:ea typeface="Arial"/>
@@ -12819,128 +12574,30 @@
               <a:defRPr/>
             </a:pPr>
             <a:r>
+              <a:rPr lang="ko-KR" altLang="en-US" sz="1400" b="1">
+                <a:solidFill>
+                  <a:srgbClr val="1f2637"/>
+                </a:solidFill>
+                <a:latin typeface="맑은 고딕"/>
+                <a:ea typeface="맑은 고딕"/>
+                <a:cs typeface="맑은 고딕"/>
+              </a:rPr>
+              <a:t>페이즈는</a:t>
+            </a:r>
+            <a:r>
               <a:rPr lang="en-US" sz="1400" b="1">
                 <a:solidFill>
-                  <a:srgbClr val="1F2637"/>
-                </a:solidFill>
-                <a:latin typeface="맑은 고딕"/>
-                <a:ea typeface="맑은 고딕"/>
-                <a:cs typeface="맑은 고딕"/>
-              </a:rPr>
-              <a:t>턴은 플레이어에게만</a:t>
-            </a:r>
-            <a:endParaRPr lang="en-US" sz="1400"/>
-          </a:p>
-        </p:txBody>
-      </p:sp>
-      <p:sp>
-        <p:nvSpPr>
-          <p:cNvPr id="14" name="Text 12"/>
-          <p:cNvSpPr/>
-          <p:nvPr/>
-        </p:nvSpPr>
-        <p:spPr>
-          <a:xfrm>
-            <a:off x="795528" y="4983480"/>
-            <a:ext cx="3063240" cy="548640"/>
-          </a:xfrm>
-          <a:prstGeom prst="rect">
-            <a:avLst/>
-          </a:prstGeom>
-          <a:noFill/>
-          <a:ln/>
-        </p:spPr>
-        <p:txBody>
-          <a:bodyPr wrap="square" lIns="0" tIns="0" rIns="0" bIns="0" anchor="ctr"/>
-          <a:lstStyle/>
-          <a:p>
-            <a:pPr marL="0" indent="0">
-              <a:lnSpc>
-                <a:spcPct val="110000"/>
-              </a:lnSpc>
-              <a:buNone/>
-              <a:defRPr/>
-            </a:pPr>
-            <a:r>
-              <a:rPr lang="en-US" sz="1200" dirty="0" err="1">
-                <a:solidFill>
-                  <a:srgbClr val="6C7686"/>
-                </a:solidFill>
-                <a:latin typeface="맑은 고딕"/>
-                <a:ea typeface="맑은 고딕"/>
-                <a:cs typeface="맑은 고딕"/>
-              </a:rPr>
-              <a:t>공격턴</a:t>
-            </a:r>
-            <a:r>
-              <a:rPr lang="en-US" sz="1200" dirty="0">
-                <a:solidFill>
-                  <a:srgbClr val="6C7686"/>
-                </a:solidFill>
-                <a:latin typeface="맑은 고딕"/>
-                <a:ea typeface="맑은 고딕"/>
-                <a:cs typeface="맑은 고딕"/>
-              </a:rPr>
-              <a:t> / </a:t>
-            </a:r>
-            <a:r>
-              <a:rPr lang="en-US" sz="1200" dirty="0" err="1">
-                <a:solidFill>
-                  <a:srgbClr val="6C7686"/>
-                </a:solidFill>
-                <a:latin typeface="맑은 고딕"/>
-                <a:ea typeface="맑은 고딕"/>
-                <a:cs typeface="맑은 고딕"/>
-              </a:rPr>
-              <a:t>방어턴</a:t>
-            </a:r>
-            <a:r>
-              <a:rPr lang="ko-KR" altLang="en-US" sz="1200" dirty="0">
-                <a:solidFill>
-                  <a:srgbClr val="6C7686"/>
-                </a:solidFill>
-                <a:latin typeface="맑은 고딕"/>
-                <a:ea typeface="맑은 고딕"/>
-                <a:cs typeface="맑은 고딕"/>
-              </a:rPr>
-              <a:t> </a:t>
-            </a:r>
-            <a:r>
-              <a:rPr lang="en-US" sz="1200" dirty="0" err="1">
-                <a:solidFill>
-                  <a:srgbClr val="6C7686"/>
-                </a:solidFill>
-                <a:latin typeface="맑은 고딕"/>
-                <a:ea typeface="맑은 고딕"/>
-                <a:cs typeface="맑은 고딕"/>
-              </a:rPr>
-              <a:t>으로</a:t>
-            </a:r>
-            <a:r>
-              <a:rPr lang="en-US" sz="1200" dirty="0">
-                <a:solidFill>
-                  <a:srgbClr val="6C7686"/>
-                </a:solidFill>
-                <a:latin typeface="맑은 고딕"/>
-                <a:ea typeface="맑은 고딕"/>
-                <a:cs typeface="맑은 고딕"/>
-              </a:rPr>
-              <a:t> </a:t>
-            </a:r>
-            <a:r>
-              <a:rPr lang="en-US" sz="1200" dirty="0" err="1">
-                <a:solidFill>
-                  <a:srgbClr val="6C7686"/>
-                </a:solidFill>
-                <a:latin typeface="맑은 고딕"/>
-                <a:ea typeface="맑은 고딕"/>
-                <a:cs typeface="맑은 고딕"/>
-              </a:rPr>
-              <a:t>분리</a:t>
-            </a:r>
-            <a:endParaRPr lang="en-US" sz="1200" dirty="0">
+                  <a:srgbClr val="1f2637"/>
+                </a:solidFill>
+                <a:latin typeface="맑은 고딕"/>
+                <a:ea typeface="맑은 고딕"/>
+                <a:cs typeface="맑은 고딕"/>
+              </a:rPr>
+              <a:t> 플레이어에게만</a:t>
+            </a:r>
+            <a:endParaRPr lang="en-US" sz="1400" b="1">
               <a:solidFill>
-                <a:srgbClr val="6C7686"/>
+                <a:srgbClr val="1f2637"/>
               </a:solidFill>
               <a:latin typeface="맑은 고딕"/>
               <a:ea typeface="맑은 고딕"/>
@@ -12951,6 +12608,100 @@
       </p:sp>
       <p:sp>
         <p:nvSpPr>
+          <p:cNvPr id="14" name="Text 12"/>
+          <p:cNvSpPr/>
+          <p:nvPr/>
+        </p:nvSpPr>
+        <p:spPr>
+          <a:xfrm>
+            <a:off x="795528" y="4983480"/>
+            <a:ext cx="3063240" cy="548640"/>
+          </a:xfrm>
+          <a:prstGeom prst="rect">
+            <a:avLst/>
+          </a:prstGeom>
+          <a:noFill/>
+          <a:ln/>
+        </p:spPr>
+        <p:txBody>
+          <a:bodyPr wrap="square" lIns="0" tIns="0" rIns="0" bIns="0" anchor="ctr"/>
+          <a:lstStyle/>
+          <a:p>
+            <a:pPr marL="0" indent="0">
+              <a:lnSpc>
+                <a:spcPct val="110000"/>
+              </a:lnSpc>
+              <a:buNone/>
+              <a:defRPr/>
+            </a:pPr>
+            <a:r>
+              <a:rPr lang="en-US" sz="1200">
+                <a:solidFill>
+                  <a:srgbClr val="6c7686"/>
+                </a:solidFill>
+                <a:latin typeface="맑은 고딕"/>
+                <a:ea typeface="맑은 고딕"/>
+                <a:cs typeface="맑은 고딕"/>
+              </a:rPr>
+              <a:t>공격</a:t>
+            </a:r>
+            <a:r>
+              <a:rPr lang="ko-KR" altLang="en-US" sz="1200">
+                <a:solidFill>
+                  <a:srgbClr val="6c7686"/>
+                </a:solidFill>
+                <a:latin typeface="맑은 고딕"/>
+                <a:ea typeface="맑은 고딕"/>
+                <a:cs typeface="맑은 고딕"/>
+              </a:rPr>
+              <a:t> 페이즈</a:t>
+            </a:r>
+            <a:r>
+              <a:rPr lang="en-US" sz="1200">
+                <a:solidFill>
+                  <a:srgbClr val="6c7686"/>
+                </a:solidFill>
+                <a:latin typeface="맑은 고딕"/>
+                <a:ea typeface="맑은 고딕"/>
+                <a:cs typeface="맑은 고딕"/>
+              </a:rPr>
+              <a:t> / 방어</a:t>
+            </a:r>
+            <a:r>
+              <a:rPr lang="ko-KR" altLang="en-US" sz="1200">
+                <a:solidFill>
+                  <a:srgbClr val="6c7686"/>
+                </a:solidFill>
+                <a:latin typeface="맑은 고딕"/>
+                <a:ea typeface="맑은 고딕"/>
+                <a:cs typeface="맑은 고딕"/>
+              </a:rPr>
+              <a:t> 페이즈</a:t>
+            </a:r>
+            <a:r>
+              <a:rPr lang="en-US" sz="1200">
+                <a:solidFill>
+                  <a:srgbClr val="6c7686"/>
+                </a:solidFill>
+                <a:latin typeface="맑은 고딕"/>
+                <a:ea typeface="맑은 고딕"/>
+                <a:cs typeface="맑은 고딕"/>
+              </a:rPr>
+              <a:t>로 분리</a:t>
+            </a:r>
+            <a:endParaRPr lang="en-US" sz="1200">
+              <a:solidFill>
+                <a:srgbClr val="6c7686"/>
+              </a:solidFill>
+              <a:latin typeface="맑은 고딕"/>
+              <a:ea typeface="맑은 고딕"/>
+              <a:cs typeface="맑은 고딕"/>
+            </a:endParaRPr>
+          </a:p>
+        </p:txBody>
+      </p:sp>
+      <p:sp>
+        <p:nvSpPr>
           <p:cNvPr id="15" name="Shape 13"/>
           <p:cNvSpPr/>
           <p:nvPr/>
@@ -12966,11 +12717,11 @@
             </a:avLst>
           </a:prstGeom>
           <a:solidFill>
-            <a:srgbClr val="F4F6FA"/>
+            <a:srgbClr val="f4f6fa"/>
           </a:solidFill>
           <a:ln w="12700">
             <a:solidFill>
-              <a:srgbClr val="D9DEE6"/>
+              <a:srgbClr val="d9dee6"/>
             </a:solidFill>
             <a:prstDash val="solid"/>
           </a:ln>
@@ -13021,7 +12772,7 @@
             <a:r>
               <a:rPr lang="en-US" sz="2600" b="1">
                 <a:solidFill>
-                  <a:srgbClr val="C8622E"/>
+                  <a:srgbClr val="c8622e"/>
                 </a:solidFill>
                 <a:latin typeface="Arial"/>
                 <a:ea typeface="Arial"/>
@@ -13061,7 +12812,7 @@
             <a:r>
               <a:rPr lang="en-US" sz="1400" b="1">
                 <a:solidFill>
-                  <a:srgbClr val="1F2637"/>
+                  <a:srgbClr val="1f2637"/>
                 </a:solidFill>
                 <a:latin typeface="맑은 고딕"/>
                 <a:ea typeface="맑은 고딕"/>
@@ -13102,20 +12853,31 @@
               <a:defRPr/>
             </a:pPr>
             <a:r>
+              <a:rPr lang="ko-KR" altLang="en-US" sz="1200">
+                <a:solidFill>
+                  <a:srgbClr val="6c7686"/>
+                </a:solidFill>
+                <a:latin typeface="맑은 고딕"/>
+                <a:ea typeface="맑은 고딕"/>
+                <a:cs typeface="맑은 고딕"/>
+              </a:rPr>
+              <a:t>제약</a:t>
+            </a:r>
+            <a:r>
               <a:rPr lang="en-US" sz="1200">
                 <a:solidFill>
-                  <a:srgbClr val="6C7686"/>
-                </a:solidFill>
-                <a:latin typeface="맑은 고딕"/>
-                <a:ea typeface="맑은 고딕"/>
-                <a:cs typeface="맑은 고딕"/>
-              </a:rPr>
-              <a:t>턴 없이 자유 행동 → 소울라이크</a:t>
+                  <a:srgbClr val="6c7686"/>
+                </a:solidFill>
+                <a:latin typeface="맑은 고딕"/>
+                <a:ea typeface="맑은 고딕"/>
+                <a:cs typeface="맑은 고딕"/>
+              </a:rPr>
+              <a:t> 없이 자유 행동 → 소울라이크</a:t>
             </a:r>
             <a:r>
               <a:rPr lang="ko-KR" altLang="en-US" sz="1200">
                 <a:solidFill>
-                  <a:srgbClr val="6C7686"/>
+                  <a:srgbClr val="6c7686"/>
                 </a:solidFill>
                 <a:latin typeface="맑은 고딕"/>
                 <a:ea typeface="맑은 고딕"/>
@@ -13126,7 +12888,7 @@
             <a:r>
               <a:rPr lang="en-US" sz="1200">
                 <a:solidFill>
-                  <a:srgbClr val="6C7686"/>
+                  <a:srgbClr val="6c7686"/>
                 </a:solidFill>
                 <a:latin typeface="맑은 고딕"/>
                 <a:ea typeface="맑은 고딕"/>
@@ -13134,6 +12896,14 @@
               </a:rPr>
               <a:t> 위협감</a:t>
             </a:r>
+            <a:endParaRPr lang="en-US" sz="1200">
+              <a:solidFill>
+                <a:srgbClr val="6c7686"/>
+              </a:solidFill>
+              <a:latin typeface="맑은 고딕"/>
+              <a:ea typeface="맑은 고딕"/>
+              <a:cs typeface="맑은 고딕"/>
+            </a:endParaRPr>
           </a:p>
         </p:txBody>
       </p:sp>
@@ -13154,11 +12924,11 @@
             </a:avLst>
           </a:prstGeom>
           <a:solidFill>
-            <a:srgbClr val="F4F6FA"/>
+            <a:srgbClr val="f4f6fa"/>
           </a:solidFill>
           <a:ln w="12700">
             <a:solidFill>
-              <a:srgbClr val="D9DEE6"/>
+              <a:srgbClr val="d9dee6"/>
             </a:solidFill>
             <a:prstDash val="solid"/>
           </a:ln>
@@ -13209,7 +12979,7 @@
             <a:r>
               <a:rPr lang="en-US" sz="2600" b="1">
                 <a:solidFill>
-                  <a:srgbClr val="C8622E"/>
+                  <a:srgbClr val="c8622e"/>
                 </a:solidFill>
                 <a:latin typeface="Arial"/>
                 <a:ea typeface="Arial"/>
@@ -13249,7 +13019,7 @@
             <a:r>
               <a:rPr lang="en-US" sz="1400" b="1">
                 <a:solidFill>
-                  <a:srgbClr val="1F2637"/>
+                  <a:srgbClr val="1f2637"/>
                 </a:solidFill>
                 <a:latin typeface="맑은 고딕"/>
                 <a:ea typeface="맑은 고딕"/>
@@ -13292,7 +13062,7 @@
             <a:r>
               <a:rPr lang="en-US" sz="1200">
                 <a:solidFill>
-                  <a:srgbClr val="6C7686"/>
+                  <a:srgbClr val="6c7686"/>
                 </a:solidFill>
                 <a:latin typeface="맑은 고딕"/>
                 <a:ea typeface="맑은 고딕"/>
@@ -13332,7 +13102,7 @@
             <a:r>
               <a:rPr lang="en-US" sz="900">
                 <a:solidFill>
-                  <a:srgbClr val="6C7686"/>
+                  <a:srgbClr val="6c7686"/>
                 </a:solidFill>
                 <a:latin typeface="맑은 고딕"/>
                 <a:ea typeface="맑은 고딕"/>
@@ -13372,7 +13142,7 @@
             <a:r>
               <a:rPr lang="en-US" sz="900">
                 <a:solidFill>
-                  <a:srgbClr val="6C7686"/>
+                  <a:srgbClr val="6c7686"/>
                 </a:solidFill>
                 <a:latin typeface="맑은 고딕"/>
                 <a:ea typeface="맑은 고딕"/>
@@ -13389,11 +13159,11 @@
   <p:clrMapOvr>
     <a:masterClrMapping/>
   </p:clrMapOvr>
-  <mc:AlternateContent xmlns:mc="http://schemas.openxmlformats.org/markup-compatibility/2006" xmlns:p14="http://schemas.microsoft.com/office/powerpoint/2010/main">
-    <mc:Choice Requires="p14">
-      <p:transition/>
+  <mc:AlternateContent xmlns:mc="http://schemas.openxmlformats.org/markup-compatibility/2006">
+    <mc:Choice xmlns:p14="http://schemas.microsoft.com/office/powerpoint/2010/main" Requires="p14">
+      <p:transition xmlns:mc="http://schemas.openxmlformats.org/markup-compatibility/2006" xmlns:p14="http://schemas.microsoft.com/office/powerpoint/2010/main" mc:Ignorable="p14" p14:dur="500"/>
     </mc:Choice>
-    <mc:Fallback xmlns:dsp="http://schemas.microsoft.com/office/drawing/2008/diagram" xmlns:dgm="http://schemas.openxmlformats.org/drawingml/2006/diagram" xmlns:c="http://schemas.openxmlformats.org/drawingml/2006/chart" xmlns="">
+    <mc:Fallback>
       <p:transition/>
     </mc:Fallback>
   </mc:AlternateContent>
@@ -13401,14 +13171,13 @@
 </file>
 
 <file path=ppt/slides/slide6.xml><?xml version="1.0" encoding="utf-8"?>
-<p:sld xmlns:a="http://schemas.openxmlformats.org/drawingml/2006/main" xmlns:r="http://schemas.openxmlformats.org/officeDocument/2006/relationships" xmlns:p="http://schemas.openxmlformats.org/presentationml/2006/main">
+<p:sld xmlns:r="http://schemas.openxmlformats.org/officeDocument/2006/relationships" xmlns:c="http://schemas.openxmlformats.org/drawingml/2006/chart" xmlns:a="http://schemas.openxmlformats.org/drawingml/2006/main" xmlns:dgm="http://schemas.openxmlformats.org/drawingml/2006/diagram" xmlns:dsp="http://schemas.microsoft.com/office/drawing/2008/diagram" xmlns:p="http://schemas.openxmlformats.org/presentationml/2006/main">
   <p:cSld name="Slide 6">
     <p:bg>
-      <p:bgPr>
+      <p:bgPr shadeToTitle="0">
         <a:solidFill>
-          <a:srgbClr val="FFFFFF"/>
+          <a:srgbClr val="ffffff"/>
         </a:solidFill>
-        <a:effectLst/>
       </p:bgPr>
     </p:bg>
     <p:spTree>
@@ -13453,7 +13222,7 @@
             <a:r>
               <a:rPr lang="en-US" sz="1200" b="1" kern="0" spc="200">
                 <a:solidFill>
-                  <a:srgbClr val="C8622E"/>
+                  <a:srgbClr val="c8622e"/>
                 </a:solidFill>
                 <a:latin typeface="맑은 고딕"/>
                 <a:ea typeface="맑은 고딕"/>
@@ -13493,15 +13262,66 @@
             <a:r>
               <a:rPr lang="en-US" sz="2900" b="1">
                 <a:solidFill>
-                  <a:srgbClr val="1F2637"/>
-                </a:solidFill>
-                <a:latin typeface="맑은 고딕"/>
-                <a:ea typeface="맑은 고딕"/>
-                <a:cs typeface="맑은 고딕"/>
-              </a:rPr>
-              <a:t>공격턴 / 방어턴 · 약점 간파 · 동료 연계</a:t>
-            </a:r>
-            <a:endParaRPr lang="en-US" sz="2900"/>
+                  <a:srgbClr val="1f2637"/>
+                </a:solidFill>
+                <a:latin typeface="맑은 고딕"/>
+                <a:ea typeface="맑은 고딕"/>
+                <a:cs typeface="맑은 고딕"/>
+              </a:rPr>
+              <a:t>공격</a:t>
+            </a:r>
+            <a:r>
+              <a:rPr lang="ko-KR" altLang="en-US" sz="2900" b="1">
+                <a:solidFill>
+                  <a:srgbClr val="1f2637"/>
+                </a:solidFill>
+                <a:latin typeface="맑은 고딕"/>
+                <a:ea typeface="맑은 고딕"/>
+                <a:cs typeface="맑은 고딕"/>
+              </a:rPr>
+              <a:t> 페이즈</a:t>
+            </a:r>
+            <a:r>
+              <a:rPr lang="en-US" sz="2900" b="1">
+                <a:solidFill>
+                  <a:srgbClr val="1f2637"/>
+                </a:solidFill>
+                <a:latin typeface="맑은 고딕"/>
+                <a:ea typeface="맑은 고딕"/>
+                <a:cs typeface="맑은 고딕"/>
+              </a:rPr>
+              <a:t> / 방어</a:t>
+            </a:r>
+            <a:r>
+              <a:rPr lang="ko-KR" altLang="en-US" sz="2900" b="1">
+                <a:solidFill>
+                  <a:srgbClr val="1f2637"/>
+                </a:solidFill>
+                <a:latin typeface="맑은 고딕"/>
+                <a:ea typeface="맑은 고딕"/>
+                <a:cs typeface="맑은 고딕"/>
+              </a:rPr>
+              <a:t> 페이즈</a:t>
+            </a:r>
+            <a:r>
+              <a:rPr lang="en-US" sz="2900" b="1">
+                <a:solidFill>
+                  <a:srgbClr val="1f2637"/>
+                </a:solidFill>
+                <a:latin typeface="맑은 고딕"/>
+                <a:ea typeface="맑은 고딕"/>
+                <a:cs typeface="맑은 고딕"/>
+              </a:rPr>
+              <a:t> · 약점 간파 · 동료 연계</a:t>
+            </a:r>
+            <a:endParaRPr lang="en-US" sz="2900" b="1">
+              <a:solidFill>
+                <a:srgbClr val="1f2637"/>
+              </a:solidFill>
+              <a:latin typeface="맑은 고딕"/>
+              <a:ea typeface="맑은 고딕"/>
+              <a:cs typeface="맑은 고딕"/>
+            </a:endParaRPr>
           </a:p>
         </p:txBody>
       </p:sp>
@@ -13522,11 +13342,11 @@
             </a:avLst>
           </a:prstGeom>
           <a:solidFill>
-            <a:srgbClr val="16223B"/>
+            <a:srgbClr val="16223b"/>
           </a:solidFill>
           <a:ln w="12700">
             <a:solidFill>
-              <a:srgbClr val="D9DEE6"/>
+              <a:srgbClr val="d9dee6"/>
             </a:solidFill>
             <a:prstDash val="solid"/>
           </a:ln>
@@ -13577,15 +13397,55 @@
             <a:r>
               <a:rPr lang="en-US" sz="1600" b="1">
                 <a:solidFill>
-                  <a:srgbClr val="FFFFFF"/>
-                </a:solidFill>
-                <a:latin typeface="맑은 고딕"/>
-                <a:ea typeface="맑은 고딕"/>
-                <a:cs typeface="맑은 고딕"/>
-              </a:rPr>
-              <a:t>공격턴 ↔ 방어턴</a:t>
-            </a:r>
-            <a:endParaRPr lang="en-US" sz="1600"/>
+                  <a:srgbClr val="ffffff"/>
+                </a:solidFill>
+                <a:latin typeface="맑은 고딕"/>
+                <a:ea typeface="맑은 고딕"/>
+                <a:cs typeface="맑은 고딕"/>
+              </a:rPr>
+              <a:t>공격</a:t>
+            </a:r>
+            <a:r>
+              <a:rPr lang="ko-KR" altLang="en-US" sz="1600" b="1">
+                <a:solidFill>
+                  <a:srgbClr val="ffffff"/>
+                </a:solidFill>
+                <a:latin typeface="맑은 고딕"/>
+                <a:ea typeface="맑은 고딕"/>
+                <a:cs typeface="맑은 고딕"/>
+              </a:rPr>
+              <a:t> 페이즈</a:t>
+            </a:r>
+            <a:r>
+              <a:rPr lang="en-US" sz="1600" b="1">
+                <a:solidFill>
+                  <a:srgbClr val="ffffff"/>
+                </a:solidFill>
+                <a:latin typeface="맑은 고딕"/>
+                <a:ea typeface="맑은 고딕"/>
+                <a:cs typeface="맑은 고딕"/>
+              </a:rPr>
+              <a:t> ↔ 방어</a:t>
+            </a:r>
+            <a:r>
+              <a:rPr lang="ko-KR" altLang="en-US" sz="1600" b="1">
+                <a:solidFill>
+                  <a:srgbClr val="ffffff"/>
+                </a:solidFill>
+                <a:latin typeface="맑은 고딕"/>
+                <a:ea typeface="맑은 고딕"/>
+                <a:cs typeface="맑은 고딕"/>
+              </a:rPr>
+              <a:t> 페이즈</a:t>
+            </a:r>
+            <a:endParaRPr lang="ko-KR" altLang="en-US" sz="1600" b="1">
+              <a:solidFill>
+                <a:srgbClr val="ffffff"/>
+              </a:solidFill>
+              <a:latin typeface="맑은 고딕"/>
+              <a:ea typeface="맑은 고딕"/>
+              <a:cs typeface="맑은 고딕"/>
+            </a:endParaRPr>
           </a:p>
         </p:txBody>
       </p:sp>
@@ -13620,14 +13480,44 @@
             <a:r>
               <a:rPr lang="en-US" sz="1300">
                 <a:solidFill>
-                  <a:srgbClr val="EAF0FA"/>
-                </a:solidFill>
-                <a:latin typeface="맑은 고딕"/>
-                <a:ea typeface="맑은 고딕"/>
-                <a:cs typeface="맑은 고딕"/>
-              </a:rPr>
-              <a:t>각 턴은 고유 에너지를 소모. 소진 시 반대 턴으로 자동 스위치. </a:t>
-            </a:r>
+                  <a:srgbClr val="eaf0fa"/>
+                </a:solidFill>
+                <a:latin typeface="맑은 고딕"/>
+                <a:ea typeface="맑은 고딕"/>
+                <a:cs typeface="맑은 고딕"/>
+              </a:rPr>
+              <a:t>각 </a:t>
+            </a:r>
+            <a:r>
+              <a:rPr lang="ko-KR" altLang="en-US" sz="1300">
+                <a:solidFill>
+                  <a:srgbClr val="eaf0fa"/>
+                </a:solidFill>
+                <a:latin typeface="맑은 고딕"/>
+                <a:ea typeface="맑은 고딕"/>
+                <a:cs typeface="맑은 고딕"/>
+              </a:rPr>
+              <a:t>페이즈는</a:t>
+            </a:r>
+            <a:r>
+              <a:rPr lang="en-US" sz="1300">
+                <a:solidFill>
+                  <a:srgbClr val="eaf0fa"/>
+                </a:solidFill>
+                <a:latin typeface="맑은 고딕"/>
+                <a:ea typeface="맑은 고딕"/>
+                <a:cs typeface="맑은 고딕"/>
+              </a:rPr>
+              <a:t> 고유 에너지를 소모. 소진 시 반대 턴으로 자동 스위치. </a:t>
+            </a:r>
+            <a:endParaRPr lang="en-US" sz="1300">
+              <a:solidFill>
+                <a:srgbClr val="eaf0fa"/>
+              </a:solidFill>
+              <a:latin typeface="맑은 고딕"/>
+              <a:ea typeface="맑은 고딕"/>
+              <a:cs typeface="맑은 고딕"/>
+            </a:endParaRPr>
           </a:p>
           <a:p>
             <a:pPr marL="0" indent="0">
@@ -13640,7 +13530,7 @@
             <a:r>
               <a:rPr lang="en-US" sz="1300">
                 <a:solidFill>
-                  <a:srgbClr val="EAF0FA"/>
+                  <a:srgbClr val="eaf0fa"/>
                 </a:solidFill>
                 <a:latin typeface="맑은 고딕"/>
                 <a:ea typeface="맑은 고딕"/>
@@ -13669,11 +13559,11 @@
             </a:avLst>
           </a:prstGeom>
           <a:solidFill>
-            <a:srgbClr val="F4F6FA"/>
+            <a:srgbClr val="f4f6fa"/>
           </a:solidFill>
           <a:ln w="12700">
             <a:solidFill>
-              <a:srgbClr val="D9DEE6"/>
+              <a:srgbClr val="d9dee6"/>
             </a:solidFill>
             <a:prstDash val="solid"/>
           </a:ln>
@@ -13724,7 +13614,7 @@
             <a:r>
               <a:rPr lang="en-US" sz="1600" b="1">
                 <a:solidFill>
-                  <a:srgbClr val="C8622E"/>
+                  <a:srgbClr val="c8622e"/>
                 </a:solidFill>
                 <a:latin typeface="맑은 고딕"/>
                 <a:ea typeface="맑은 고딕"/>
@@ -13767,7 +13657,7 @@
             <a:r>
               <a:rPr lang="en-US" sz="1300">
                 <a:solidFill>
-                  <a:srgbClr val="1F2637"/>
+                  <a:srgbClr val="1f2637"/>
                 </a:solidFill>
                 <a:latin typeface="맑은 고딕"/>
                 <a:ea typeface="맑은 고딕"/>
@@ -13778,7 +13668,7 @@
             <a:r>
               <a:rPr lang="ko-KR" altLang="en-US" sz="1300">
                 <a:solidFill>
-                  <a:srgbClr val="1F2637"/>
+                  <a:srgbClr val="1f2637"/>
                 </a:solidFill>
                 <a:latin typeface="맑은 고딕"/>
                 <a:ea typeface="맑은 고딕"/>
@@ -13789,7 +13679,7 @@
             <a:r>
               <a:rPr lang="en-US" sz="1300">
                 <a:solidFill>
-                  <a:srgbClr val="1F2637"/>
+                  <a:srgbClr val="1f2637"/>
                 </a:solidFill>
                 <a:latin typeface="맑은 고딕"/>
                 <a:ea typeface="맑은 고딕"/>
@@ -13797,9 +13687,9 @@
               </a:rPr>
               <a:t>. </a:t>
             </a:r>
-            <a:endParaRPr lang="ko-KR" altLang="en-US" sz="1300">
+            <a:endParaRPr lang="en-US" sz="1300">
               <a:solidFill>
-                <a:srgbClr val="1F2637"/>
+                <a:srgbClr val="1f2637"/>
               </a:solidFill>
               <a:latin typeface="맑은 고딕"/>
               <a:ea typeface="맑은 고딕"/>
@@ -13817,7 +13707,7 @@
             <a:r>
               <a:rPr lang="ko-KR" altLang="en-US" sz="1300">
                 <a:solidFill>
-                  <a:srgbClr val="1F2637"/>
+                  <a:srgbClr val="1f2637"/>
                 </a:solidFill>
                 <a:latin typeface="맑은 고딕"/>
                 <a:ea typeface="맑은 고딕"/>
@@ -13828,7 +13718,7 @@
             <a:r>
               <a:rPr lang="en-US" sz="1300">
                 <a:solidFill>
-                  <a:srgbClr val="1F2637"/>
+                  <a:srgbClr val="1f2637"/>
                 </a:solidFill>
                 <a:latin typeface="맑은 고딕"/>
                 <a:ea typeface="맑은 고딕"/>
@@ -13839,7 +13729,7 @@
             <a:r>
               <a:rPr lang="ko-KR" altLang="en-US" sz="1300">
                 <a:solidFill>
-                  <a:srgbClr val="1F2637"/>
+                  <a:srgbClr val="1f2637"/>
                 </a:solidFill>
                 <a:latin typeface="맑은 고딕"/>
                 <a:ea typeface="맑은 고딕"/>
@@ -13850,7 +13740,7 @@
             <a:r>
               <a:rPr lang="en-US" sz="1300">
                 <a:solidFill>
-                  <a:srgbClr val="1F2637"/>
+                  <a:srgbClr val="1f2637"/>
                 </a:solidFill>
                 <a:latin typeface="맑은 고딕"/>
                 <a:ea typeface="맑은 고딕"/>
@@ -13861,7 +13751,7 @@
             <a:r>
               <a:rPr lang="ko-KR" altLang="en-US" sz="1300">
                 <a:solidFill>
-                  <a:srgbClr val="1F2637"/>
+                  <a:srgbClr val="1f2637"/>
                 </a:solidFill>
                 <a:latin typeface="맑은 고딕"/>
                 <a:ea typeface="맑은 고딕"/>
@@ -13872,7 +13762,7 @@
             <a:r>
               <a:rPr lang="en-US" sz="1300">
                 <a:solidFill>
-                  <a:srgbClr val="1F2637"/>
+                  <a:srgbClr val="1f2637"/>
                 </a:solidFill>
                 <a:latin typeface="맑은 고딕"/>
                 <a:ea typeface="맑은 고딕"/>
@@ -13880,6 +13770,14 @@
               </a:rPr>
               <a:t>회복 + 추가 턴.</a:t>
             </a:r>
+            <a:endParaRPr lang="en-US" sz="1300">
+              <a:solidFill>
+                <a:srgbClr val="1f2637"/>
+              </a:solidFill>
+              <a:latin typeface="맑은 고딕"/>
+              <a:ea typeface="맑은 고딕"/>
+              <a:cs typeface="맑은 고딕"/>
+            </a:endParaRPr>
           </a:p>
         </p:txBody>
       </p:sp>
@@ -13900,11 +13798,11 @@
             </a:avLst>
           </a:prstGeom>
           <a:solidFill>
-            <a:srgbClr val="F4F6FA"/>
+            <a:srgbClr val="f4f6fa"/>
           </a:solidFill>
           <a:ln w="12700">
             <a:solidFill>
-              <a:srgbClr val="D9DEE6"/>
+              <a:srgbClr val="d9dee6"/>
             </a:solidFill>
             <a:prstDash val="solid"/>
           </a:ln>
@@ -13955,7 +13853,7 @@
             <a:r>
               <a:rPr lang="en-US" sz="1600" b="1">
                 <a:solidFill>
-                  <a:srgbClr val="C8622E"/>
+                  <a:srgbClr val="c8622e"/>
                 </a:solidFill>
                 <a:latin typeface="맑은 고딕"/>
                 <a:ea typeface="맑은 고딕"/>
@@ -13998,7 +13896,7 @@
             <a:r>
               <a:rPr lang="en-US" sz="1300">
                 <a:solidFill>
-                  <a:srgbClr val="1F2637"/>
+                  <a:srgbClr val="1f2637"/>
                 </a:solidFill>
                 <a:latin typeface="맑은 고딕"/>
                 <a:ea typeface="맑은 고딕"/>
@@ -14006,37 +13904,9 @@
               </a:rPr>
               <a:t>패링·약점 간파 등 특정 조건 달성 시 동료가 순간 개입해 추가타/버프. </a:t>
             </a:r>
-          </a:p>
-        </p:txBody>
-      </p:sp>
-      <p:sp>
-        <p:nvSpPr>
-          <p:cNvPr id="13" name="Text 11"/>
-          <p:cNvSpPr/>
-          <p:nvPr/>
-        </p:nvSpPr>
-        <p:spPr>
-          <a:xfrm>
-            <a:off x="566928" y="6190488"/>
-            <a:ext cx="11057839" cy="274320"/>
-          </a:xfrm>
-          <a:prstGeom prst="rect">
-            <a:avLst/>
-          </a:prstGeom>
-          <a:noFill/>
-          <a:ln/>
-        </p:spPr>
-        <p:txBody>
-          <a:bodyPr wrap="square" lIns="0" tIns="0" rIns="0" bIns="0" anchor="ctr"/>
-          <a:lstStyle/>
-          <a:p>
-            <a:pPr marL="0" indent="0">
-              <a:buNone/>
-              <a:defRPr/>
-            </a:pPr>
-            <a:endParaRPr lang="en-US" sz="1050" i="1">
+            <a:endParaRPr lang="en-US" sz="1300">
               <a:solidFill>
-                <a:srgbClr val="6C7686"/>
+                <a:srgbClr val="1f2637"/>
               </a:solidFill>
               <a:latin typeface="맑은 고딕"/>
               <a:ea typeface="맑은 고딕"/>
@@ -14047,6 +13917,42 @@
       </p:sp>
       <p:sp>
         <p:nvSpPr>
+          <p:cNvPr id="13" name="Text 11"/>
+          <p:cNvSpPr/>
+          <p:nvPr/>
+        </p:nvSpPr>
+        <p:spPr>
+          <a:xfrm>
+            <a:off x="566928" y="6190488"/>
+            <a:ext cx="11057839" cy="274320"/>
+          </a:xfrm>
+          <a:prstGeom prst="rect">
+            <a:avLst/>
+          </a:prstGeom>
+          <a:noFill/>
+          <a:ln/>
+        </p:spPr>
+        <p:txBody>
+          <a:bodyPr wrap="square" lIns="0" tIns="0" rIns="0" bIns="0" anchor="ctr"/>
+          <a:lstStyle/>
+          <a:p>
+            <a:pPr marL="0" indent="0">
+              <a:buNone/>
+              <a:defRPr/>
+            </a:pPr>
+            <a:endParaRPr lang="en-US" sz="1050" i="1">
+              <a:solidFill>
+                <a:srgbClr val="6c7686"/>
+              </a:solidFill>
+              <a:latin typeface="맑은 고딕"/>
+              <a:ea typeface="맑은 고딕"/>
+              <a:cs typeface="맑은 고딕"/>
+            </a:endParaRPr>
+          </a:p>
+        </p:txBody>
+      </p:sp>
+      <p:sp>
+        <p:nvSpPr>
           <p:cNvPr id="14" name="Text 12"/>
           <p:cNvSpPr/>
           <p:nvPr/>
@@ -14073,7 +13979,7 @@
             <a:r>
               <a:rPr lang="en-US" sz="900">
                 <a:solidFill>
-                  <a:srgbClr val="6C7686"/>
+                  <a:srgbClr val="6c7686"/>
                 </a:solidFill>
                 <a:latin typeface="맑은 고딕"/>
                 <a:ea typeface="맑은 고딕"/>
@@ -14113,7 +14019,7 @@
             <a:r>
               <a:rPr lang="en-US" sz="900">
                 <a:solidFill>
-                  <a:srgbClr val="6C7686"/>
+                  <a:srgbClr val="6c7686"/>
                 </a:solidFill>
                 <a:latin typeface="맑은 고딕"/>
                 <a:ea typeface="맑은 고딕"/>
@@ -14130,11 +14036,11 @@
   <p:clrMapOvr>
     <a:masterClrMapping/>
   </p:clrMapOvr>
-  <mc:AlternateContent xmlns:mc="http://schemas.openxmlformats.org/markup-compatibility/2006" xmlns:p14="http://schemas.microsoft.com/office/powerpoint/2010/main">
-    <mc:Choice Requires="p14">
-      <p:transition/>
+  <mc:AlternateContent xmlns:mc="http://schemas.openxmlformats.org/markup-compatibility/2006">
+    <mc:Choice xmlns:p14="http://schemas.microsoft.com/office/powerpoint/2010/main" Requires="p14">
+      <p:transition xmlns:mc="http://schemas.openxmlformats.org/markup-compatibility/2006" xmlns:p14="http://schemas.microsoft.com/office/powerpoint/2010/main" mc:Ignorable="p14" p14:dur="500"/>
     </mc:Choice>
-    <mc:Fallback xmlns:dsp="http://schemas.microsoft.com/office/drawing/2008/diagram" xmlns:dgm="http://schemas.openxmlformats.org/drawingml/2006/diagram" xmlns:c="http://schemas.openxmlformats.org/drawingml/2006/chart" xmlns="">
+    <mc:Fallback>
       <p:transition/>
     </mc:Fallback>
   </mc:AlternateContent>
@@ -15573,14 +15479,13 @@
 </file>
 
 <file path=ppt/slides/slide9.xml><?xml version="1.0" encoding="utf-8"?>
-<p:sld xmlns:a="http://schemas.openxmlformats.org/drawingml/2006/main" xmlns:r="http://schemas.openxmlformats.org/officeDocument/2006/relationships" xmlns:p="http://schemas.openxmlformats.org/presentationml/2006/main">
+<p:sld xmlns:r="http://schemas.openxmlformats.org/officeDocument/2006/relationships" xmlns:c="http://schemas.openxmlformats.org/drawingml/2006/chart" xmlns:a="http://schemas.openxmlformats.org/drawingml/2006/main" xmlns:dgm="http://schemas.openxmlformats.org/drawingml/2006/diagram" xmlns:dsp="http://schemas.microsoft.com/office/drawing/2008/diagram" xmlns:p="http://schemas.openxmlformats.org/presentationml/2006/main">
   <p:cSld name="Slide 10">
     <p:bg>
-      <p:bgPr>
+      <p:bgPr shadeToTitle="0">
         <a:solidFill>
-          <a:srgbClr val="16223B"/>
+          <a:srgbClr val="16223b"/>
         </a:solidFill>
-        <a:effectLst/>
       </p:bgPr>
     </p:bg>
     <p:spTree>
@@ -15625,7 +15530,7 @@
             <a:r>
               <a:rPr lang="en-US" sz="1200" b="1" kern="0" spc="200">
                 <a:solidFill>
-                  <a:srgbClr val="E0A15A"/>
+                  <a:srgbClr val="e0a15a"/>
                 </a:solidFill>
                 <a:latin typeface="맑은 고딕"/>
                 <a:ea typeface="맑은 고딕"/>
@@ -15665,7 +15570,7 @@
             <a:r>
               <a:rPr lang="en-US" sz="2600" b="1">
                 <a:solidFill>
-                  <a:srgbClr val="FFFFFF"/>
+                  <a:srgbClr val="ffffff"/>
                 </a:solidFill>
                 <a:latin typeface="맑은 고딕"/>
                 <a:ea typeface="맑은 고딕"/>
@@ -15676,7 +15581,7 @@
             <a:r>
               <a:rPr lang="ko-KR" altLang="en-US" sz="2600" b="1">
                 <a:solidFill>
-                  <a:srgbClr val="FFFFFF"/>
+                  <a:srgbClr val="ffffff"/>
                 </a:solidFill>
                 <a:latin typeface="맑은 고딕"/>
                 <a:ea typeface="맑은 고딕"/>
@@ -15687,7 +15592,7 @@
             <a:r>
               <a:rPr lang="en-US" sz="2600" b="1">
                 <a:solidFill>
-                  <a:srgbClr val="FFFFFF"/>
+                  <a:srgbClr val="ffffff"/>
                 </a:solidFill>
                 <a:latin typeface="맑은 고딕"/>
                 <a:ea typeface="맑은 고딕"/>
@@ -15695,6 +15600,14 @@
               </a:rPr>
               <a:t> 경험'에서</a:t>
             </a:r>
+            <a:endParaRPr lang="en-US" sz="2600" b="1">
+              <a:solidFill>
+                <a:srgbClr val="ffffff"/>
+              </a:solidFill>
+              <a:latin typeface="맑은 고딕"/>
+              <a:ea typeface="맑은 고딕"/>
+              <a:cs typeface="맑은 고딕"/>
+            </a:endParaRPr>
           </a:p>
         </p:txBody>
       </p:sp>
@@ -15715,11 +15628,11 @@
             </a:avLst>
           </a:prstGeom>
           <a:solidFill>
-            <a:srgbClr val="24324F"/>
+            <a:srgbClr val="24324f"/>
           </a:solidFill>
           <a:ln w="12700">
             <a:solidFill>
-              <a:srgbClr val="D9DEE6"/>
+              <a:srgbClr val="d9dee6"/>
             </a:solidFill>
             <a:prstDash val="solid"/>
           </a:ln>
@@ -15770,15 +15683,44 @@
             <a:r>
               <a:rPr lang="en-US" sz="1500" b="1">
                 <a:solidFill>
-                  <a:srgbClr val="E0A15A"/>
-                </a:solidFill>
-                <a:latin typeface="맑은 고딕"/>
-                <a:ea typeface="맑은 고딕"/>
-                <a:cs typeface="맑은 고딕"/>
-              </a:rPr>
-              <a:t>공격/방어턴 자원</a:t>
-            </a:r>
-            <a:endParaRPr lang="en-US" sz="1500"/>
+                  <a:srgbClr val="e0a15a"/>
+                </a:solidFill>
+                <a:latin typeface="맑은 고딕"/>
+                <a:ea typeface="맑은 고딕"/>
+                <a:cs typeface="맑은 고딕"/>
+              </a:rPr>
+              <a:t>공격/방어턴</a:t>
+            </a:r>
+            <a:r>
+              <a:rPr lang="ko-KR" altLang="en-US" sz="1500" b="1">
+                <a:solidFill>
+                  <a:srgbClr val="e0a15a"/>
+                </a:solidFill>
+                <a:latin typeface="맑은 고딕"/>
+                <a:ea typeface="맑은 고딕"/>
+                <a:cs typeface="맑은 고딕"/>
+              </a:rPr>
+              <a:t> 페이즈 </a:t>
+            </a:r>
+            <a:r>
+              <a:rPr lang="en-US" sz="1500" b="1">
+                <a:solidFill>
+                  <a:srgbClr val="e0a15a"/>
+                </a:solidFill>
+                <a:latin typeface="맑은 고딕"/>
+                <a:ea typeface="맑은 고딕"/>
+                <a:cs typeface="맑은 고딕"/>
+              </a:rPr>
+              <a:t>자원</a:t>
+            </a:r>
+            <a:endParaRPr lang="en-US" sz="1500" b="1">
+              <a:solidFill>
+                <a:srgbClr val="e0a15a"/>
+              </a:solidFill>
+              <a:latin typeface="맑은 고딕"/>
+              <a:ea typeface="맑은 고딕"/>
+              <a:cs typeface="맑은 고딕"/>
+            </a:endParaRPr>
           </a:p>
         </p:txBody>
       </p:sp>
@@ -15813,7 +15755,7 @@
             <a:r>
               <a:rPr lang="en-US" sz="1250">
                 <a:solidFill>
-                  <a:srgbClr val="EAF0FA"/>
+                  <a:srgbClr val="eaf0fa"/>
                 </a:solidFill>
                 <a:latin typeface="맑은 고딕"/>
                 <a:ea typeface="맑은 고딕"/>
@@ -15842,11 +15784,11 @@
             </a:avLst>
           </a:prstGeom>
           <a:solidFill>
-            <a:srgbClr val="24324F"/>
+            <a:srgbClr val="24324f"/>
           </a:solidFill>
           <a:ln w="12700">
             <a:solidFill>
-              <a:srgbClr val="D9DEE6"/>
+              <a:srgbClr val="d9dee6"/>
             </a:solidFill>
             <a:prstDash val="solid"/>
           </a:ln>
@@ -15897,7 +15839,7 @@
             <a:r>
               <a:rPr lang="en-US" sz="1500" b="1">
                 <a:solidFill>
-                  <a:srgbClr val="E0A15A"/>
+                  <a:srgbClr val="e0a15a"/>
                 </a:solidFill>
                 <a:latin typeface="맑은 고딕"/>
                 <a:ea typeface="맑은 고딕"/>
@@ -15940,7 +15882,7 @@
             <a:r>
               <a:rPr lang="en-US" sz="1250">
                 <a:solidFill>
-                  <a:srgbClr val="EAF0FA"/>
+                  <a:srgbClr val="eaf0fa"/>
                 </a:solidFill>
                 <a:latin typeface="맑은 고딕"/>
                 <a:ea typeface="맑은 고딕"/>
@@ -15969,11 +15911,11 @@
             </a:avLst>
           </a:prstGeom>
           <a:solidFill>
-            <a:srgbClr val="24324F"/>
+            <a:srgbClr val="24324f"/>
           </a:solidFill>
           <a:ln w="12700">
             <a:solidFill>
-              <a:srgbClr val="D9DEE6"/>
+              <a:srgbClr val="d9dee6"/>
             </a:solidFill>
             <a:prstDash val="solid"/>
           </a:ln>
@@ -16024,7 +15966,7 @@
             <a:r>
               <a:rPr lang="en-US" sz="1500" b="1">
                 <a:solidFill>
-                  <a:srgbClr val="E0A15A"/>
+                  <a:srgbClr val="e0a15a"/>
                 </a:solidFill>
                 <a:latin typeface="맑은 고딕"/>
                 <a:ea typeface="맑은 고딕"/>
@@ -16067,7 +16009,7 @@
             <a:r>
               <a:rPr lang="en-US" sz="1250">
                 <a:solidFill>
-                  <a:srgbClr val="EAF0FA"/>
+                  <a:srgbClr val="eaf0fa"/>
                 </a:solidFill>
                 <a:latin typeface="맑은 고딕"/>
                 <a:ea typeface="맑은 고딕"/>
@@ -16096,11 +16038,11 @@
             </a:avLst>
           </a:prstGeom>
           <a:solidFill>
-            <a:srgbClr val="24324F"/>
+            <a:srgbClr val="24324f"/>
           </a:solidFill>
           <a:ln w="12700">
             <a:solidFill>
-              <a:srgbClr val="D9DEE6"/>
+              <a:srgbClr val="d9dee6"/>
             </a:solidFill>
             <a:prstDash val="solid"/>
           </a:ln>
@@ -16151,7 +16093,7 @@
             <a:r>
               <a:rPr lang="en-US" sz="1500" b="1">
                 <a:solidFill>
-                  <a:srgbClr val="E0A15A"/>
+                  <a:srgbClr val="e0a15a"/>
                 </a:solidFill>
                 <a:latin typeface="맑은 고딕"/>
                 <a:ea typeface="맑은 고딕"/>
@@ -16194,7 +16136,7 @@
             <a:r>
               <a:rPr lang="en-US" sz="1250">
                 <a:solidFill>
-                  <a:srgbClr val="EAF0FA"/>
+                  <a:srgbClr val="eaf0fa"/>
                 </a:solidFill>
                 <a:latin typeface="맑은 고딕"/>
                 <a:ea typeface="맑은 고딕"/>
@@ -16223,11 +16165,11 @@
             </a:avLst>
           </a:prstGeom>
           <a:solidFill>
-            <a:srgbClr val="24324F"/>
+            <a:srgbClr val="24324f"/>
           </a:solidFill>
           <a:ln w="12700">
             <a:solidFill>
-              <a:srgbClr val="D9DEE6"/>
+              <a:srgbClr val="d9dee6"/>
             </a:solidFill>
             <a:prstDash val="solid"/>
           </a:ln>
@@ -16278,7 +16220,7 @@
             <a:r>
               <a:rPr lang="en-US" sz="1500" b="1">
                 <a:solidFill>
-                  <a:srgbClr val="E0A15A"/>
+                  <a:srgbClr val="e0a15a"/>
                 </a:solidFill>
                 <a:latin typeface="맑은 고딕"/>
                 <a:ea typeface="맑은 고딕"/>
@@ -16321,7 +16263,7 @@
             <a:r>
               <a:rPr lang="en-US" sz="1250">
                 <a:solidFill>
-                  <a:srgbClr val="EAF0FA"/>
+                  <a:srgbClr val="eaf0fa"/>
                 </a:solidFill>
                 <a:latin typeface="맑은 고딕"/>
                 <a:ea typeface="맑은 고딕"/>
@@ -16350,11 +16292,11 @@
             </a:avLst>
           </a:prstGeom>
           <a:solidFill>
-            <a:srgbClr val="24324F"/>
+            <a:srgbClr val="24324f"/>
           </a:solidFill>
           <a:ln w="12700">
             <a:solidFill>
-              <a:srgbClr val="D9DEE6"/>
+              <a:srgbClr val="d9dee6"/>
             </a:solidFill>
             <a:prstDash val="solid"/>
           </a:ln>
@@ -16405,7 +16347,7 @@
             <a:r>
               <a:rPr lang="en-US" sz="1500" b="1">
                 <a:solidFill>
-                  <a:srgbClr val="E0A15A"/>
+                  <a:srgbClr val="e0a15a"/>
                 </a:solidFill>
                 <a:latin typeface="맑은 고딕"/>
                 <a:ea typeface="맑은 고딕"/>
@@ -16448,7 +16390,7 @@
             <a:r>
               <a:rPr lang="ko-KR" altLang="en-US" sz="1250">
                 <a:solidFill>
-                  <a:srgbClr val="EAF0FA"/>
+                  <a:srgbClr val="eaf0fa"/>
                 </a:solidFill>
                 <a:latin typeface="맑은 고딕"/>
                 <a:ea typeface="맑은 고딕"/>
@@ -16456,6 +16398,14 @@
               </a:rPr>
               <a:t>공격할 기회를 알려수는 수단</a:t>
             </a:r>
+            <a:endParaRPr lang="ko-KR" altLang="en-US" sz="1250">
+              <a:solidFill>
+                <a:srgbClr val="eaf0fa"/>
+              </a:solidFill>
+              <a:latin typeface="맑은 고딕"/>
+              <a:ea typeface="맑은 고딕"/>
+              <a:cs typeface="맑은 고딕"/>
+            </a:endParaRPr>
           </a:p>
         </p:txBody>
       </p:sp>
@@ -16487,7 +16437,7 @@
             <a:r>
               <a:rPr lang="en-US" sz="900">
                 <a:solidFill>
-                  <a:srgbClr val="6C7686"/>
+                  <a:srgbClr val="6c7686"/>
                 </a:solidFill>
                 <a:latin typeface="맑은 고딕"/>
                 <a:ea typeface="맑은 고딕"/>
@@ -16527,7 +16477,7 @@
             <a:r>
               <a:rPr lang="en-US" sz="900">
                 <a:solidFill>
-                  <a:srgbClr val="6C7686"/>
+                  <a:srgbClr val="6c7686"/>
                 </a:solidFill>
                 <a:latin typeface="맑은 고딕"/>
                 <a:ea typeface="맑은 고딕"/>
@@ -16544,11 +16494,11 @@
   <p:clrMapOvr>
     <a:masterClrMapping/>
   </p:clrMapOvr>
-  <mc:AlternateContent xmlns:mc="http://schemas.openxmlformats.org/markup-compatibility/2006" xmlns:p14="http://schemas.microsoft.com/office/powerpoint/2010/main">
-    <mc:Choice Requires="p14">
-      <p:transition/>
+  <mc:AlternateContent xmlns:mc="http://schemas.openxmlformats.org/markup-compatibility/2006">
+    <mc:Choice xmlns:p14="http://schemas.microsoft.com/office/powerpoint/2010/main" Requires="p14">
+      <p:transition xmlns:mc="http://schemas.openxmlformats.org/markup-compatibility/2006" xmlns:p14="http://schemas.microsoft.com/office/powerpoint/2010/main" mc:Ignorable="p14" p14:dur="500"/>
     </mc:Choice>
-    <mc:Fallback xmlns:dsp="http://schemas.microsoft.com/office/drawing/2008/diagram" xmlns:dgm="http://schemas.openxmlformats.org/drawingml/2006/diagram" xmlns:c="http://schemas.openxmlformats.org/drawingml/2006/chart" xmlns="">
+    <mc:Fallback>
       <p:transition/>
     </mc:Fallback>
   </mc:AlternateContent>
@@ -16556,44 +16506,44 @@
 </file>
 
 <file path=ppt/theme/theme1.xml><?xml version="1.0" encoding="utf-8"?>
-<a:theme xmlns:a="http://schemas.openxmlformats.org/drawingml/2006/main" name="Office Theme">
+<a:theme xmlns:r="http://schemas.openxmlformats.org/officeDocument/2006/relationships" xmlns:c="http://schemas.openxmlformats.org/drawingml/2006/chart" xmlns:dgm="http://schemas.openxmlformats.org/drawingml/2006/diagram" xmlns:dsp="http://schemas.microsoft.com/office/drawing/2008/diagram" xmlns:a="http://schemas.openxmlformats.org/drawingml/2006/main" xmlns:pic="http://schemas.openxmlformats.org/drawingml/2006/picture" xmlns:wp="http://schemas.openxmlformats.org/drawingml/2006/wordprocessingDrawing" xmlns:xdr="http://schemas.openxmlformats.org/drawingml/2006/spreadsheetDrawing" xmlns:lc="http://schemas.openxmlformats.org/drawingml/2006/lockedCanvas" xmlns:p="http://schemas.openxmlformats.org/presentationml/2006/main" name="Office Theme">
   <a:themeElements>
     <a:clrScheme name="Office">
       <a:dk1>
         <a:sysClr val="windowText" lastClr="000000"/>
       </a:dk1>
       <a:lt1>
-        <a:sysClr val="window" lastClr="FFFFFF"/>
+        <a:sysClr val="window" lastClr="ffffff"/>
       </a:lt1>
       <a:dk2>
-        <a:srgbClr val="44546A"/>
+        <a:srgbClr val="44546a"/>
       </a:dk2>
       <a:lt2>
-        <a:srgbClr val="E7E6E6"/>
+        <a:srgbClr val="e7e6e6"/>
       </a:lt2>
       <a:accent1>
-        <a:srgbClr val="4472C4"/>
+        <a:srgbClr val="4472c4"/>
       </a:accent1>
       <a:accent2>
-        <a:srgbClr val="ED7D31"/>
+        <a:srgbClr val="ed7d31"/>
       </a:accent2>
       <a:accent3>
-        <a:srgbClr val="A5A5A5"/>
+        <a:srgbClr val="a5a5a5"/>
       </a:accent3>
       <a:accent4>
-        <a:srgbClr val="FFC000"/>
+        <a:srgbClr val="ffc000"/>
       </a:accent4>
       <a:accent5>
-        <a:srgbClr val="5B9BD5"/>
+        <a:srgbClr val="5b9bd5"/>
       </a:accent5>
       <a:accent6>
-        <a:srgbClr val="70AD47"/>
+        <a:srgbClr val="70ad47"/>
       </a:accent6>
       <a:hlink>
-        <a:srgbClr val="0563C1"/>
+        <a:srgbClr val="0563c1"/>
       </a:hlink>
       <a:folHlink>
-        <a:srgbClr val="954F72"/>
+        <a:srgbClr val="954f72"/>
       </a:folHlink>
     </a:clrScheme>
     <a:fontScheme name="Office">
@@ -16840,47 +16790,45 @@
       </a:bgFillStyleLst>
     </a:fmtScheme>
   </a:themeElements>
-  <a:objectDefaults/>
-  <a:extraClrSchemeLst/>
 </a:theme>
 </file>
 
 <file path=ppt/theme/theme2.xml><?xml version="1.0" encoding="utf-8"?>
-<a:theme xmlns:a="http://schemas.openxmlformats.org/drawingml/2006/main" name="한컴오피스">
+<a:theme xmlns:r="http://schemas.openxmlformats.org/officeDocument/2006/relationships" xmlns:c="http://schemas.openxmlformats.org/drawingml/2006/chart" xmlns:dgm="http://schemas.openxmlformats.org/drawingml/2006/diagram" xmlns:dsp="http://schemas.microsoft.com/office/drawing/2008/diagram" xmlns:a="http://schemas.openxmlformats.org/drawingml/2006/main" xmlns:pic="http://schemas.openxmlformats.org/drawingml/2006/picture" xmlns:wp="http://schemas.openxmlformats.org/drawingml/2006/wordprocessingDrawing" xmlns:xdr="http://schemas.openxmlformats.org/drawingml/2006/spreadsheetDrawing" xmlns:lc="http://schemas.openxmlformats.org/drawingml/2006/lockedCanvas" xmlns:p="http://schemas.openxmlformats.org/presentationml/2006/main" name="한컴오피스">
   <a:themeElements>
     <a:clrScheme name="한컴오피스">
       <a:dk1>
         <a:sysClr val="windowText" lastClr="000000"/>
       </a:dk1>
       <a:lt1>
-        <a:sysClr val="window" lastClr="FFFFFF"/>
+        <a:sysClr val="window" lastClr="ffffff"/>
       </a:lt1>
       <a:dk2>
-        <a:srgbClr val="3A3C84"/>
+        <a:srgbClr val="3a3c84"/>
       </a:dk2>
       <a:lt2>
-        <a:srgbClr val="FAF3DB"/>
+        <a:srgbClr val="faf3db"/>
       </a:lt2>
       <a:accent1>
-        <a:srgbClr val="6182D6"/>
+        <a:srgbClr val="6182d6"/>
       </a:accent1>
       <a:accent2>
-        <a:srgbClr val="FF843A"/>
+        <a:srgbClr val="ff843a"/>
       </a:accent2>
       <a:accent3>
-        <a:srgbClr val="B2B2B2"/>
+        <a:srgbClr val="b2b2b2"/>
       </a:accent3>
       <a:accent4>
-        <a:srgbClr val="FFD700"/>
+        <a:srgbClr val="ffd700"/>
       </a:accent4>
       <a:accent5>
-        <a:srgbClr val="289B6E"/>
+        <a:srgbClr val="289b6e"/>
       </a:accent5>
       <a:accent6>
-        <a:srgbClr val="9D5CBB"/>
+        <a:srgbClr val="9d5cbb"/>
       </a:accent6>
       <a:hlink>
-        <a:srgbClr val="0000FF"/>
+        <a:srgbClr val="0000ff"/>
       </a:hlink>
       <a:folHlink>
         <a:srgbClr val="800080"/>
@@ -17105,7 +17053,5 @@
       </a:bgFillStyleLst>
     </a:fmtScheme>
   </a:themeElements>
-  <a:objectDefaults/>
-  <a:extraClrSchemeLst/>
 </a:theme>
 </file>